--- a/lecons/LSA/Geomorphology/09_LSA_GEOMO_L07_Volcanoes_and_Man.pptx
+++ b/lecons/LSA/Geomorphology/09_LSA_GEOMO_L07_Volcanoes_and_Man.pptx
@@ -61,9 +61,14 @@
     <p:sldId id="309" r:id="rId55"/>
     <p:sldId id="310" r:id="rId56"/>
     <p:sldId id="311" r:id="rId57"/>
+    <p:sldId id="312" r:id="rId58"/>
+    <p:sldId id="313" r:id="rId59"/>
+    <p:sldId id="314" r:id="rId60"/>
+    <p:sldId id="315" r:id="rId61"/>
+    <p:sldId id="316" r:id="rId62"/>
   </p:sldIdLst>
   <p:notesMasterIdLst>
-    <p:notesMasterId r:id="rId58"/>
+    <p:notesMasterId r:id="rId63"/>
   </p:notesMasterIdLst>
   <p:sldSz cx="12192000" cy="6858000"/>
   <p:notesSz cx="6858000" cy="12192000"/>
@@ -645,7 +650,7 @@
           <a:p>
             <a:r>
               <a:rPr lang="en-US" dirty="0"/>
-              <a:t>Listen carefully to this situation from real life. A family wants to buy a farm near Buea because the soil is very fertile. A neighbour warns them that lava from Mount Cameroon destroyed farms in 1999 and 2000. Think about it, because I am going to ask you some questions.</a:t>
+              <a:t>Take your time to copy this part; we will continue together.</a:t>
             </a:r>
             <a:endParaRPr lang="en-US" dirty="0"/>
           </a:p>
@@ -733,7 +738,7 @@
           <a:p>
             <a:r>
               <a:rPr lang="en-US" dirty="0"/>
-              <a:t>Question 1: What is the problem in the situation? Think for a moment, then raise your hand to answer.</a:t>
+              <a:t>Listen carefully to this situation from real life. Your friend's elder sister works for the Cameroon Development Corporation (CDC) on a banana plantation near Tiko, on the slopes of Mount Cameroon. In her photos the soil is very dark and the plants grow extremely well. Yet you know that Mount Cameroon is an active volcano. You ask: "Why do people choose to farm and live so close to a mountain that can erupt, and how can they protect themselves?" Think about it, because I am going to ask you some questions.</a:t>
             </a:r>
             <a:endParaRPr lang="en-US" dirty="0"/>
           </a:p>
@@ -821,7 +826,7 @@
           <a:p>
             <a:r>
               <a:rPr lang="en-US" dirty="0"/>
-              <a:t>Good. The land is fertile but dangerous.</a:t>
+              <a:t>Question 1: What is the problem in the situation? Think for a moment, then raise your hand to answer.</a:t>
             </a:r>
             <a:endParaRPr lang="en-US" dirty="0"/>
           </a:p>
@@ -909,7 +914,7 @@
           <a:p>
             <a:r>
               <a:rPr lang="en-US" dirty="0"/>
-              <a:t>Question 2: What is the advantage? Think for a moment, then raise your hand to answer.</a:t>
+              <a:t>Good. The learner does not understand why volcanoes are both a resource and a hazard.</a:t>
             </a:r>
             <a:endParaRPr lang="en-US" dirty="0"/>
           </a:p>
@@ -997,7 +1002,7 @@
           <a:p>
             <a:r>
               <a:rPr lang="en-US" dirty="0"/>
-              <a:t>Good. Very fertile volcanic soil.</a:t>
+              <a:t>Question 2: Why are CDC plantations on Mount Cameroon? Think for a moment, then raise your hand to answer.</a:t>
             </a:r>
             <a:endParaRPr lang="en-US" dirty="0"/>
           </a:p>
@@ -1085,7 +1090,7 @@
           <a:p>
             <a:r>
               <a:rPr lang="en-US" dirty="0"/>
-              <a:t>Question 3: What should the family do? Think for a moment, then raise your hand to answer.</a:t>
+              <a:t>Good. Volcanic ash weathers into very fertile soils.</a:t>
             </a:r>
             <a:endParaRPr lang="en-US" dirty="0"/>
           </a:p>
@@ -1173,7 +1178,7 @@
           <a:p>
             <a:r>
               <a:rPr lang="en-US" dirty="0"/>
-              <a:t>Good. Follow warnings and have a plan to leave if there is an eruption.</a:t>
+              <a:t>Question 3: What must people living there do? Think for a moment, then raise your hand to answer.</a:t>
             </a:r>
             <a:endParaRPr lang="en-US" dirty="0"/>
           </a:p>
@@ -1261,7 +1266,7 @@
           <a:p>
             <a:r>
               <a:rPr lang="en-US" dirty="0"/>
-              <a:t>From this situation, the action we are working towards in this lesson is the following: live safely near volcanoes by using their resources and preparing for eruptions.</a:t>
+              <a:t>Good. Use monitoring, hazard maps, education and evacuation plans.</a:t>
             </a:r>
             <a:endParaRPr lang="en-US" dirty="0"/>
           </a:p>
@@ -1349,7 +1354,7 @@
           <a:p>
             <a:r>
               <a:rPr lang="en-US" dirty="0"/>
-              <a:t>Why is this lesson important for you? This lesson helps us to live safely near volcanoes and to use their resources.</a:t>
+              <a:t>From this situation, the action we are working towards in this lesson is the following: follow the advice of the authorities in volcanic areas and support monitoring and evacuation plans.</a:t>
             </a:r>
             <a:endParaRPr lang="en-US" dirty="0"/>
           </a:p>
@@ -1437,7 +1442,7 @@
           <a:p>
             <a:r>
               <a:rPr lang="en-US" dirty="0"/>
-              <a:t>Activity 1. Look carefully at this picture: a banana plantation. Observe every detail before I ask the question.</a:t>
+              <a:t>Why is this lesson important for you? This lesson helps us to weigh the advantages and dangers of volcanoes and to reduce disasters such as Lake Nyos.</a:t>
             </a:r>
             <a:endParaRPr lang="en-US" dirty="0"/>
           </a:p>
@@ -1613,7 +1618,7 @@
           <a:p>
             <a:r>
               <a:rPr lang="en-US" dirty="0"/>
-              <a:t>Here is the question for Activity 1: Near Mount Cameroon, farmers grow bananas and tea. Why are the soils so fertile? Take one minute to think and write your answer in your rough notebook.</a:t>
+              <a:t>Activity 1. Look carefully at this picture: a banana plantation. Observe every detail before I ask the question.</a:t>
             </a:r>
             <a:endParaRPr lang="en-US" dirty="0"/>
           </a:p>
@@ -1701,7 +1706,7 @@
           <a:p>
             <a:r>
               <a:rPr lang="en-US" dirty="0"/>
-              <a:t>Let us check the answer together. Volcanic ash and lava weather into soils rich in minerals.</a:t>
+              <a:t>Here is the question for Activity 1: Why are volcanic soils so fertile? Take one minute to think and write your answer in your rough notebook.</a:t>
             </a:r>
             <a:endParaRPr lang="en-US" dirty="0"/>
           </a:p>
@@ -1789,7 +1794,7 @@
           <a:p>
             <a:r>
               <a:rPr lang="en-US" dirty="0"/>
-              <a:t>Activity 2. Look carefully at this picture: a geothermal power station in Kenya. Observe every detail before I ask the question.</a:t>
+              <a:t>Let us check the answer together. Ash and lava weather into soils rich in minerals (andosols).</a:t>
             </a:r>
             <a:endParaRPr lang="en-US" dirty="0"/>
           </a:p>
@@ -1877,7 +1882,7 @@
           <a:p>
             <a:r>
               <a:rPr lang="en-US" dirty="0"/>
-              <a:t>Here is the question for Activity 2: How can volcanic areas produce electricity? Take one minute to think and write your answer in your rough notebook.</a:t>
+              <a:t>Activity 2. Look carefully at this picture: a geothermal power station. Observe every detail before I ask the question.</a:t>
             </a:r>
             <a:endParaRPr lang="en-US" dirty="0"/>
           </a:p>
@@ -1965,7 +1970,7 @@
           <a:p>
             <a:r>
               <a:rPr lang="en-US" dirty="0"/>
-              <a:t>Let us check the answer together. Steam from hot rocks turns turbines (geothermal energy).</a:t>
+              <a:t>Here is the question for Activity 2: How can the heat of magma produce electricity? Take one minute to think and write your answer in your rough notebook.</a:t>
             </a:r>
             <a:endParaRPr lang="en-US" dirty="0"/>
           </a:p>
@@ -2053,7 +2058,7 @@
           <a:p>
             <a:r>
               <a:rPr lang="en-US" dirty="0"/>
-              <a:t>Activity 3. Look carefully at this picture: lava has covered a road. Observe every detail before I ask the question.</a:t>
+              <a:t>Let us check the answer together. It heats underground water into steam that turns turbines.</a:t>
             </a:r>
             <a:endParaRPr lang="en-US" dirty="0"/>
           </a:p>
@@ -2141,7 +2146,7 @@
           <a:p>
             <a:r>
               <a:rPr lang="en-US" dirty="0"/>
-              <a:t>Here is the question for Activity 3: What damage can lava flows cause? Take one minute to think and write your answer in your rough notebook.</a:t>
+              <a:t>Activity 3. Look carefully at this picture: a house destroyed by lava. Observe every detail before I ask the question.</a:t>
             </a:r>
             <a:endParaRPr lang="en-US" dirty="0"/>
           </a:p>
@@ -2229,7 +2234,7 @@
           <a:p>
             <a:r>
               <a:rPr lang="en-US" dirty="0"/>
-              <a:t>Let us check the answer together. They burn and bury farms, roads and houses.</a:t>
+              <a:t>Here is the question for Activity 3: Which volcanic hazard is the most deadly? Take one minute to think and write your answer in your rough notebook.</a:t>
             </a:r>
             <a:endParaRPr lang="en-US" dirty="0"/>
           </a:p>
@@ -2317,7 +2322,7 @@
           <a:p>
             <a:r>
               <a:rPr lang="en-US" dirty="0"/>
-              <a:t>Activity 4. Look carefully at this picture: lake Nyos, North-West Region. Observe every detail before I ask the question.</a:t>
+              <a:t>Let us check the answer together. The pyroclastic flow.</a:t>
             </a:r>
             <a:endParaRPr lang="en-US" dirty="0"/>
           </a:p>
@@ -2405,7 +2410,7 @@
           <a:p>
             <a:r>
               <a:rPr lang="en-US" dirty="0"/>
-              <a:t>Here is the question for Activity 4: What happened at Lake Nyos in 1986? Take one minute to think and write your answer in your rough notebook.</a:t>
+              <a:t>Activity 4. Look carefully at this picture: lake Nyos. Observe every detail before I ask the question.</a:t>
             </a:r>
             <a:endParaRPr lang="en-US" dirty="0"/>
           </a:p>
@@ -2493,7 +2498,7 @@
           <a:p>
             <a:r>
               <a:rPr lang="en-US" dirty="0"/>
-              <a:t>Our topic is Crustal Processes and their Effect on the Land Surface and Man, and the sub-topic is Volcanicity. The key notions we shall use today are: resource, hazard, mitigation, adaptation. At the end, you should be able to do this: learners are able to weigh the benefits and dangers of volcanoes and propose safety measures.</a:t>
+              <a:t>Our topic is Crustal Processes and their Effect on the Land Surface and Man, and the sub-topic is Volcanicity. The key notions we shall use today are: volcanic resource, volcanic hazard, andosol, geothermal energy, pyroclastic flow, lahar, limnic eruption, monitoring, mitigation, adaptation. At the end, you should be able to do this: learners are able to explain why people live near volcanoes and propose measures to reduce volcanic risks in Cameroon.</a:t>
             </a:r>
             <a:endParaRPr lang="en-US" dirty="0"/>
           </a:p>
@@ -2581,7 +2586,7 @@
           <a:p>
             <a:r>
               <a:rPr lang="en-US" dirty="0"/>
-              <a:t>Let us check the answer together. A cloud of carbon dioxide killed about 1,700 people and many animals.</a:t>
+              <a:t>Here is the question for Activity 4: What killed about 1,700 people at Lake Nyos in 1986? Take one minute to think and write your answer in your rough notebook.</a:t>
             </a:r>
             <a:endParaRPr lang="en-US" dirty="0"/>
           </a:p>
@@ -2669,7 +2674,7 @@
           <a:p>
             <a:r>
               <a:rPr lang="en-US" dirty="0"/>
-              <a:t>Activity 5. Look carefully at this picture: the Hawaiian Volcano Observatory, where scientists watch Kilauea. Observe every detail before I ask the question.</a:t>
+              <a:t>Let us check the answer together. A sudden release of carbon dioxide gas from the lake.</a:t>
             </a:r>
             <a:endParaRPr lang="en-US" dirty="0"/>
           </a:p>
@@ -2757,7 +2762,7 @@
           <a:p>
             <a:r>
               <a:rPr lang="en-US" dirty="0"/>
-              <a:t>Here is the question for Activity 5: How can scientists reduce the danger of eruptions? Take one minute to think and write your answer in your rough notebook.</a:t>
+              <a:t>Activity 5. Look carefully at this picture: monitoring a volcano. Observe every detail before I ask the question.</a:t>
             </a:r>
             <a:endParaRPr lang="en-US" dirty="0"/>
           </a:p>
@@ -2845,7 +2850,7 @@
           <a:p>
             <a:r>
               <a:rPr lang="en-US" dirty="0"/>
-              <a:t>Let us check the answer together. They monitor earthquakes, gases and ground swelling and give warnings.</a:t>
+              <a:t>Here is the question for Activity 5: Name one instrument used to monitor a volcano. Take one minute to think and write your answer in your rough notebook.</a:t>
             </a:r>
             <a:endParaRPr lang="en-US" dirty="0"/>
           </a:p>
@@ -2933,7 +2938,7 @@
           <a:p>
             <a:r>
               <a:rPr lang="en-US" dirty="0"/>
-              <a:t>Now we are going to copy the board summary. Write the title and the headings neatly in your notebooks. I will give you enough time for each slide, so do not rush.</a:t>
+              <a:t>Let us check the answer together. A seismometer, a gas sensor or GPS.</a:t>
             </a:r>
             <a:endParaRPr lang="en-US" dirty="0"/>
           </a:p>
@@ -3021,7 +3026,7 @@
           <a:p>
             <a:r>
               <a:rPr lang="en-US" dirty="0"/>
-              <a:t>Let us copy the definitions. The key terms of this lesson are defined as follows. On this slide we have Volcanic hazard and Mitigation. Write each point on a new line, with the key term first, and explain it in your own words when we revise.</a:t>
+              <a:t>Now we are going to copy the board summary. Write the title and the headings neatly in your notebooks. I will give you enough time for each slide, so do not rush.</a:t>
             </a:r>
             <a:endParaRPr lang="en-US" dirty="0"/>
           </a:p>
@@ -3109,7 +3114,7 @@
           <a:p>
             <a:r>
               <a:rPr lang="en-US" dirty="0"/>
-              <a:t>Let us copy Volcanoes as a Resource. Volcanoes are important in the following ways. On this slide we have Fertile soils. Write each point on a new line, with the key term first, and explain it in your own words when we revise. When you finish, we go to the next slide.</a:t>
+              <a:t>Let us copy the definitions. The key terms of this lesson are defined as follows. On this slide we have Volcanic resource and Volcanic hazard. Write each point on a new line, with the key term first, and explain it in your own words when we revise. When you finish, we go to the next slide.</a:t>
             </a:r>
             <a:endParaRPr lang="en-US" dirty="0"/>
           </a:p>
@@ -3197,7 +3202,7 @@
           <a:p>
             <a:r>
               <a:rPr lang="en-US" dirty="0"/>
-              <a:t>We continue with Volcanoes as a Resource. On this slide we have Minerals and building materials. Write each point on a new line, with the key term first, and explain it in your own words when we revise. When you finish, we go to the next slide.</a:t>
+              <a:t>We continue with the definitions. On this slide we have Mitigation. Write each point on a new line, with the key term first, and explain it in your own words when we revise.</a:t>
             </a:r>
             <a:endParaRPr lang="en-US" dirty="0"/>
           </a:p>
@@ -3285,7 +3290,7 @@
           <a:p>
             <a:r>
               <a:rPr lang="en-US" dirty="0"/>
-              <a:t>We continue with Volcanoes as a Resource. On this slide we have Geothermal energy and tourism. Write each point on a new line, with the key term first, and explain it in your own words when we revise.</a:t>
+              <a:t>Let us copy Volcanoes as a Resource. Volcanoes provide the following resources. Copy the point on Fertile soils on the left, then draw the diagram on the right: a banana plantation. Give it a title and label it clearly.</a:t>
             </a:r>
             <a:endParaRPr lang="en-US" dirty="0"/>
           </a:p>
@@ -3373,7 +3378,7 @@
           <a:p>
             <a:r>
               <a:rPr lang="en-US" dirty="0"/>
-              <a:t>Let us copy Volcanoes as a Hazard. Volcanoes can cause the following hazards. On this slide we have Lava flows and pyroclastic flows. Write each point on a new line, with the key term first, and explain it in your own words when we revise. When you finish, we go to the next slide.</a:t>
+              <a:t>We continue with Volcanoes as a Resource. On this slide we have Tourism. Write each point on a new line, with the key term first, and explain it in your own words when we revise.</a:t>
             </a:r>
             <a:endParaRPr lang="en-US" dirty="0"/>
           </a:p>
@@ -3461,7 +3466,7 @@
           <a:p>
             <a:r>
               <a:rPr lang="en-US" dirty="0"/>
-              <a:t>Before we start the new lesson, let us correct the homework I gave you at the end of Lesson 6: Volcanism. The question was: Ask an adult what people grow around Buea and Limbe, and why the soils are good. Take out your exercise books.</a:t>
+              <a:t>Before we start the new lesson, let us correct the homework I gave you at the end of Lesson 6: Volcanism. The question was: Give one benefit of volcanoes to man. Take out your exercise books.</a:t>
             </a:r>
             <a:endParaRPr lang="en-US" dirty="0"/>
           </a:p>
@@ -3549,7 +3554,7 @@
           <a:p>
             <a:r>
               <a:rPr lang="en-US" dirty="0"/>
-              <a:t>We continue with Volcanoes as a Hazard. On this slide we have Ash falls and lahars. Write each point on a new line, with the key term first, and explain it in your own words when we revise. When you finish, we go to the next slide.</a:t>
+              <a:t>Copy the point on Geothermal energy on the left, then draw the diagram on the right: a geothermal power station. Give it a title and label it clearly.</a:t>
             </a:r>
             <a:endParaRPr lang="en-US" dirty="0"/>
           </a:p>
@@ -3637,7 +3642,7 @@
           <a:p>
             <a:r>
               <a:rPr lang="en-US" dirty="0"/>
-              <a:t>We continue with Volcanoes as a Hazard. On this slide we have Toxic gases. Write each point on a new line, with the key term first, and explain it in your own words when we revise.</a:t>
+              <a:t>We continue with Volcanoes as a Resource. On this slide we have Building materials and Minerals. Write each point on a new line, with the key term first, and explain it in your own words when we revise.</a:t>
             </a:r>
             <a:endParaRPr lang="en-US" dirty="0"/>
           </a:p>
@@ -3725,7 +3730,7 @@
           <a:p>
             <a:r>
               <a:rPr lang="en-US" dirty="0"/>
-              <a:t>Let us copy Adaptation and Mitigation Strategies. People reduce volcanic risks through. On this slide we have Monitoring and warning. Write each point on a new line, with the key term first, and explain it in your own words when we revise. When you finish, we go to the next slide.</a:t>
+              <a:t>Let us copy Volcanoes as a Hazard. Volcanoes cause the following hazards. Copy the point on Lava flows on the left, then draw the diagram on the right: a house destroyed by lava. Give it a title and label it clearly.</a:t>
             </a:r>
             <a:endParaRPr lang="en-US" dirty="0"/>
           </a:p>
@@ -3813,7 +3818,7 @@
           <a:p>
             <a:r>
               <a:rPr lang="en-US" dirty="0"/>
-              <a:t>We continue with Adaptation and Mitigation Strategies. On this slide we have Land-use planning and preparedness and Protection works. Write each point on a new line, with the key term first, and explain it in your own words when we revise.</a:t>
+              <a:t>We continue with Volcanoes as a Hazard. On this slide we have Ash fall and Pyroclastic flows. Write each point on a new line, with the key term first, and explain it in your own words when we revise.</a:t>
             </a:r>
             <a:endParaRPr lang="en-US" dirty="0"/>
           </a:p>
@@ -3901,7 +3906,7 @@
           <a:p>
             <a:r>
               <a:rPr lang="en-US" dirty="0"/>
-              <a:t>Now let us check what you have understood. Question 1: Give two benefits of volcanoes. Answer in your exercise book.</a:t>
+              <a:t>Copy the point on Lahars on the left, then draw the diagram on the right: a lahar. Give it a title and label it clearly.</a:t>
             </a:r>
             <a:endParaRPr lang="en-US" dirty="0"/>
           </a:p>
@@ -3989,7 +3994,7 @@
           <a:p>
             <a:r>
               <a:rPr lang="en-US" dirty="0"/>
-              <a:t>The expected answer is: fertile soils and geothermal energy. If you got it right, well done.</a:t>
+              <a:t>Copy the point on Poisonous gases on the left, then draw the diagram on the right: lake Nyos. Give it a title and label it clearly.</a:t>
             </a:r>
             <a:endParaRPr lang="en-US" dirty="0"/>
           </a:p>
@@ -4077,7 +4082,7 @@
           <a:p>
             <a:r>
               <a:rPr lang="en-US" dirty="0"/>
-              <a:t>Now let us check what you have understood. Question 2: Give two measures to reduce volcanic hazards. Answer in your exercise book.</a:t>
+              <a:t>Let us copy Adaptation and Mitigation. People reduce volcanic risks with the following strategies. Copy the point on Monitoring on the left, then draw the diagram on the right: monitoring a volcano. Give it a title and label it clearly.</a:t>
             </a:r>
             <a:endParaRPr lang="en-US" dirty="0"/>
           </a:p>
@@ -4165,7 +4170,7 @@
           <a:p>
             <a:r>
               <a:rPr lang="en-US" dirty="0"/>
-              <a:t>The expected answer is: monitoring and warnings; degassing Lake Nyos. If you got it right, well done.</a:t>
+              <a:t>We continue with Adaptation and Mitigation. On this slide we have Hazard mapping and zoning and Education and evacuation. Write each point on a new line, with the key term first, and explain it in your own words when we revise.</a:t>
             </a:r>
             <a:endParaRPr lang="en-US" dirty="0"/>
           </a:p>
@@ -4253,7 +4258,7 @@
           <a:p>
             <a:r>
               <a:rPr lang="en-US" dirty="0"/>
-              <a:t>Take your time to copy this part; we will continue together.</a:t>
+              <a:t>Copy the point on Engineering on the left, then draw the diagram on the right: volcanoes and man. Give it a title and label it clearly.</a:t>
             </a:r>
             <a:endParaRPr lang="en-US" dirty="0"/>
           </a:p>
@@ -4341,7 +4346,7 @@
           <a:p>
             <a:r>
               <a:rPr lang="en-US" dirty="0"/>
-              <a:t>For those who need more practice, fill in the blanks in your exercise book. The answers are: number 1, geothermal; number 2, Nyos; number 3, mitigation.</a:t>
+              <a:t>Now let us check what you have understood. Question 1: Explain why a volcano is both a resource and a hazard. Answer in your exercise book.</a:t>
             </a:r>
             <a:endParaRPr lang="en-US" dirty="0"/>
           </a:p>
@@ -4429,7 +4434,7 @@
           <a:p>
             <a:r>
               <a:rPr lang="en-US" dirty="0"/>
-              <a:t>Here is a good answer. Around Buea and Limbe people grow bananas, tea, oil palm, cocoa and food crops. The soils are fertile because they come from weathered volcanic rocks rich in minerals. Compare it with your own answer and correct your work in red.</a:t>
+              <a:t>Here is a good answer. Fertile soils, tourism, geothermal energy, building stone or minerals (any one). Compare it with your own answer and correct your work in red.</a:t>
             </a:r>
             <a:endParaRPr lang="en-US" dirty="0"/>
           </a:p>
@@ -4517,7 +4522,7 @@
           <a:p>
             <a:r>
               <a:rPr lang="en-US" dirty="0"/>
-              <a:t>For your homework: Find out if an earthquake has ever been felt in your region. Ask an elder. We shall correct it at the beginning of our next lesson.</a:t>
+              <a:t>The expected answer is: it gives fertile soils, energy and tourism, but its eruptions and gases destroy property and kill people. If you got it right, well done.</a:t>
             </a:r>
             <a:endParaRPr lang="en-US" dirty="0"/>
           </a:p>
@@ -4605,7 +4610,7 @@
           <a:p>
             <a:r>
               <a:rPr lang="en-US" dirty="0"/>
-              <a:t>Our next lesson will be on Lesson 8: Earthquakes and Man. Thank you for your attention, and see you next time.</a:t>
+              <a:t>Now let us check what you have understood. Question 2: Give two measures to reduce volcanic risks. Answer in your exercise book.</a:t>
             </a:r>
             <a:endParaRPr lang="en-US" dirty="0"/>
           </a:p>
@@ -4693,7 +4698,7 @@
           <a:p>
             <a:r>
               <a:rPr lang="en-US" dirty="0"/>
-              <a:t>Let us play the bilingual game. I say a word in English, and you give me the French word. Then we do the reverse.</a:t>
+              <a:t>The expected answer is: monitoring, hazard maps and zoning, education and evacuation plans, engineering works (any two). If you got it right, well done.</a:t>
             </a:r>
             <a:endParaRPr lang="en-US" dirty="0"/>
           </a:p>
@@ -4781,7 +4786,7 @@
           <a:p>
             <a:r>
               <a:rPr lang="en-US" dirty="0"/>
-              <a:t>I record this information in the official logbook of the class after the lesson.</a:t>
+              <a:t>For those who need more practice, fill in the blanks in your exercise book. The answers are: number 1, andosols; number 2, pyroclastic; number 3, carbon dioxide.</a:t>
             </a:r>
             <a:endParaRPr lang="en-US" dirty="0"/>
           </a:p>
@@ -4869,7 +4874,7 @@
           <a:p>
             <a:r>
               <a:rPr lang="en-US" dirty="0"/>
-              <a:t>I complete the second page of the logbook: the matter taught, the evaluation, the homework and the attendance.</a:t>
+              <a:t>For your homework: Define the epicentre of an earthquake. We shall correct it at the beginning of our next lesson.</a:t>
             </a:r>
             <a:endParaRPr lang="en-US" dirty="0"/>
           </a:p>
@@ -4957,7 +4962,7 @@
           <a:p>
             <a:r>
               <a:rPr lang="en-US" dirty="0"/>
-              <a:t>This slide is for me, the teacher: it gives the timing of the lesson and what to do if the projector is not available.</a:t>
+              <a:t>Our next lesson will be on Lesson 8: Earthquakes and Man. Thank you for your attention, and see you next time.</a:t>
             </a:r>
             <a:endParaRPr lang="en-US" dirty="0"/>
           </a:p>
@@ -5045,7 +5050,7 @@
           <a:p>
             <a:r>
               <a:rPr lang="en-US" dirty="0"/>
-              <a:t>These are the references and picture credits used to prepare this lesson.</a:t>
+              <a:t>Let us play the bilingual game. I say a word in English, and you give me the French word. Then we do the reverse.</a:t>
             </a:r>
             <a:endParaRPr lang="en-US" dirty="0"/>
           </a:p>
@@ -5069,6 +5074,270 @@
             <a:fld id="{F7021451-1387-4CA6-816F-3879F97B5CBC}" type="slidenum">
               <a:rPr lang="en-US"/>
               <a:t>56</a:t>
+            </a:fld>
+            <a:endParaRPr lang="en-US"/>
+          </a:p>
+        </p:txBody>
+      </p:sp>
+    </p:spTree>
+    <p:extLst>
+      <p:ext uri="{BB962C8B-B14F-4D97-AF65-F5344CB8AC3E}">
+        <p14:creationId xmlns:p14="http://schemas.microsoft.com/office/powerpoint/2010/main" val="1024086991"/>
+      </p:ext>
+    </p:extLst>
+  </p:cSld>
+  <p:clrMapOvr>
+    <a:masterClrMapping/>
+  </p:clrMapOvr>
+</p:notes>
+</file>
+
+<file path=ppt/notesSlides/notesSlide57.xml><?xml version="1.0" encoding="utf-8"?>
+<p:notes xmlns:a="http://schemas.openxmlformats.org/drawingml/2006/main" xmlns:r="http://schemas.openxmlformats.org/officeDocument/2006/relationships" xmlns:p="http://schemas.openxmlformats.org/presentationml/2006/main">
+  <p:cSld>
+    <p:spTree>
+      <p:nvGrpSpPr>
+        <p:cNvPr id="1" name=""/>
+        <p:cNvGrpSpPr/>
+        <p:nvPr/>
+      </p:nvGrpSpPr>
+      <p:grpSpPr>
+        <a:xfrm>
+          <a:off x="0" y="0"/>
+          <a:ext cx="0" cy="0"/>
+          <a:chOff x="0" y="0"/>
+          <a:chExt cx="0" cy="0"/>
+        </a:xfrm>
+      </p:grpSpPr>
+      <p:sp>
+        <p:nvSpPr>
+          <p:cNvPr id="2" name="Slide Image Placeholder 1"/>
+          <p:cNvSpPr>
+            <a:spLocks noGrp="1" noRot="1" noChangeAspect="1"/>
+          </p:cNvSpPr>
+          <p:nvPr>
+            <p:ph type="sldImg"/>
+          </p:nvPr>
+        </p:nvSpPr>
+        <p:spPr/>
+      </p:sp>
+      <p:sp>
+        <p:nvSpPr>
+          <p:cNvPr id="3" name="Notes Placeholder 2"/>
+          <p:cNvSpPr>
+            <a:spLocks noGrp="1"/>
+          </p:cNvSpPr>
+          <p:nvPr>
+            <p:ph type="body" idx="1"/>
+          </p:nvPr>
+        </p:nvSpPr>
+        <p:spPr/>
+        <p:txBody>
+          <a:bodyPr/>
+          <a:lstStyle/>
+          <a:p>
+            <a:r>
+              <a:rPr lang="en-US" dirty="0"/>
+              <a:t>I record this information in the official logbook of the class after the lesson.</a:t>
+            </a:r>
+            <a:endParaRPr lang="en-US" dirty="0"/>
+          </a:p>
+        </p:txBody>
+      </p:sp>
+      <p:sp>
+        <p:nvSpPr>
+          <p:cNvPr id="4" name="Slide Number Placeholder 3"/>
+          <p:cNvSpPr>
+            <a:spLocks noGrp="1"/>
+          </p:cNvSpPr>
+          <p:nvPr>
+            <p:ph type="sldNum" sz="quarter" idx="10"/>
+          </p:nvPr>
+        </p:nvSpPr>
+        <p:spPr/>
+        <p:txBody>
+          <a:bodyPr/>
+          <a:lstStyle/>
+          <a:p>
+            <a:fld id="{F7021451-1387-4CA6-816F-3879F97B5CBC}" type="slidenum">
+              <a:rPr lang="en-US"/>
+              <a:t>57</a:t>
+            </a:fld>
+            <a:endParaRPr lang="en-US"/>
+          </a:p>
+        </p:txBody>
+      </p:sp>
+    </p:spTree>
+    <p:extLst>
+      <p:ext uri="{BB962C8B-B14F-4D97-AF65-F5344CB8AC3E}">
+        <p14:creationId xmlns:p14="http://schemas.microsoft.com/office/powerpoint/2010/main" val="1024086991"/>
+      </p:ext>
+    </p:extLst>
+  </p:cSld>
+  <p:clrMapOvr>
+    <a:masterClrMapping/>
+  </p:clrMapOvr>
+</p:notes>
+</file>
+
+<file path=ppt/notesSlides/notesSlide58.xml><?xml version="1.0" encoding="utf-8"?>
+<p:notes xmlns:a="http://schemas.openxmlformats.org/drawingml/2006/main" xmlns:r="http://schemas.openxmlformats.org/officeDocument/2006/relationships" xmlns:p="http://schemas.openxmlformats.org/presentationml/2006/main">
+  <p:cSld>
+    <p:spTree>
+      <p:nvGrpSpPr>
+        <p:cNvPr id="1" name=""/>
+        <p:cNvGrpSpPr/>
+        <p:nvPr/>
+      </p:nvGrpSpPr>
+      <p:grpSpPr>
+        <a:xfrm>
+          <a:off x="0" y="0"/>
+          <a:ext cx="0" cy="0"/>
+          <a:chOff x="0" y="0"/>
+          <a:chExt cx="0" cy="0"/>
+        </a:xfrm>
+      </p:grpSpPr>
+      <p:sp>
+        <p:nvSpPr>
+          <p:cNvPr id="2" name="Slide Image Placeholder 1"/>
+          <p:cNvSpPr>
+            <a:spLocks noGrp="1" noRot="1" noChangeAspect="1"/>
+          </p:cNvSpPr>
+          <p:nvPr>
+            <p:ph type="sldImg"/>
+          </p:nvPr>
+        </p:nvSpPr>
+        <p:spPr/>
+      </p:sp>
+      <p:sp>
+        <p:nvSpPr>
+          <p:cNvPr id="3" name="Notes Placeholder 2"/>
+          <p:cNvSpPr>
+            <a:spLocks noGrp="1"/>
+          </p:cNvSpPr>
+          <p:nvPr>
+            <p:ph type="body" idx="1"/>
+          </p:nvPr>
+        </p:nvSpPr>
+        <p:spPr/>
+        <p:txBody>
+          <a:bodyPr/>
+          <a:lstStyle/>
+          <a:p>
+            <a:r>
+              <a:rPr lang="en-US" dirty="0"/>
+              <a:t>I complete the second page of the logbook: the matter taught, the evaluation, the homework and the attendance.</a:t>
+            </a:r>
+            <a:endParaRPr lang="en-US" dirty="0"/>
+          </a:p>
+        </p:txBody>
+      </p:sp>
+      <p:sp>
+        <p:nvSpPr>
+          <p:cNvPr id="4" name="Slide Number Placeholder 3"/>
+          <p:cNvSpPr>
+            <a:spLocks noGrp="1"/>
+          </p:cNvSpPr>
+          <p:nvPr>
+            <p:ph type="sldNum" sz="quarter" idx="10"/>
+          </p:nvPr>
+        </p:nvSpPr>
+        <p:spPr/>
+        <p:txBody>
+          <a:bodyPr/>
+          <a:lstStyle/>
+          <a:p>
+            <a:fld id="{F7021451-1387-4CA6-816F-3879F97B5CBC}" type="slidenum">
+              <a:rPr lang="en-US"/>
+              <a:t>58</a:t>
+            </a:fld>
+            <a:endParaRPr lang="en-US"/>
+          </a:p>
+        </p:txBody>
+      </p:sp>
+    </p:spTree>
+    <p:extLst>
+      <p:ext uri="{BB962C8B-B14F-4D97-AF65-F5344CB8AC3E}">
+        <p14:creationId xmlns:p14="http://schemas.microsoft.com/office/powerpoint/2010/main" val="1024086991"/>
+      </p:ext>
+    </p:extLst>
+  </p:cSld>
+  <p:clrMapOvr>
+    <a:masterClrMapping/>
+  </p:clrMapOvr>
+</p:notes>
+</file>
+
+<file path=ppt/notesSlides/notesSlide59.xml><?xml version="1.0" encoding="utf-8"?>
+<p:notes xmlns:a="http://schemas.openxmlformats.org/drawingml/2006/main" xmlns:r="http://schemas.openxmlformats.org/officeDocument/2006/relationships" xmlns:p="http://schemas.openxmlformats.org/presentationml/2006/main">
+  <p:cSld>
+    <p:spTree>
+      <p:nvGrpSpPr>
+        <p:cNvPr id="1" name=""/>
+        <p:cNvGrpSpPr/>
+        <p:nvPr/>
+      </p:nvGrpSpPr>
+      <p:grpSpPr>
+        <a:xfrm>
+          <a:off x="0" y="0"/>
+          <a:ext cx="0" cy="0"/>
+          <a:chOff x="0" y="0"/>
+          <a:chExt cx="0" cy="0"/>
+        </a:xfrm>
+      </p:grpSpPr>
+      <p:sp>
+        <p:nvSpPr>
+          <p:cNvPr id="2" name="Slide Image Placeholder 1"/>
+          <p:cNvSpPr>
+            <a:spLocks noGrp="1" noRot="1" noChangeAspect="1"/>
+          </p:cNvSpPr>
+          <p:nvPr>
+            <p:ph type="sldImg"/>
+          </p:nvPr>
+        </p:nvSpPr>
+        <p:spPr/>
+      </p:sp>
+      <p:sp>
+        <p:nvSpPr>
+          <p:cNvPr id="3" name="Notes Placeholder 2"/>
+          <p:cNvSpPr>
+            <a:spLocks noGrp="1"/>
+          </p:cNvSpPr>
+          <p:nvPr>
+            <p:ph type="body" idx="1"/>
+          </p:nvPr>
+        </p:nvSpPr>
+        <p:spPr/>
+        <p:txBody>
+          <a:bodyPr/>
+          <a:lstStyle/>
+          <a:p>
+            <a:r>
+              <a:rPr lang="en-US" dirty="0"/>
+              <a:t>This slide is for me, the teacher: it gives the timing of the lesson and what to do if the projector is not available.</a:t>
+            </a:r>
+            <a:endParaRPr lang="en-US" dirty="0"/>
+          </a:p>
+        </p:txBody>
+      </p:sp>
+      <p:sp>
+        <p:nvSpPr>
+          <p:cNvPr id="4" name="Slide Number Placeholder 3"/>
+          <p:cNvSpPr>
+            <a:spLocks noGrp="1"/>
+          </p:cNvSpPr>
+          <p:nvPr>
+            <p:ph type="sldNum" sz="quarter" idx="10"/>
+          </p:nvPr>
+        </p:nvSpPr>
+        <p:spPr/>
+        <p:txBody>
+          <a:bodyPr/>
+          <a:lstStyle/>
+          <a:p>
+            <a:fld id="{F7021451-1387-4CA6-816F-3879F97B5CBC}" type="slidenum">
+              <a:rPr lang="en-US"/>
+              <a:t>59</a:t>
             </a:fld>
             <a:endParaRPr lang="en-US"/>
           </a:p>
@@ -5175,6 +5444,182 @@
 </p:notes>
 </file>
 
+<file path=ppt/notesSlides/notesSlide60.xml><?xml version="1.0" encoding="utf-8"?>
+<p:notes xmlns:a="http://schemas.openxmlformats.org/drawingml/2006/main" xmlns:r="http://schemas.openxmlformats.org/officeDocument/2006/relationships" xmlns:p="http://schemas.openxmlformats.org/presentationml/2006/main">
+  <p:cSld>
+    <p:spTree>
+      <p:nvGrpSpPr>
+        <p:cNvPr id="1" name=""/>
+        <p:cNvGrpSpPr/>
+        <p:nvPr/>
+      </p:nvGrpSpPr>
+      <p:grpSpPr>
+        <a:xfrm>
+          <a:off x="0" y="0"/>
+          <a:ext cx="0" cy="0"/>
+          <a:chOff x="0" y="0"/>
+          <a:chExt cx="0" cy="0"/>
+        </a:xfrm>
+      </p:grpSpPr>
+      <p:sp>
+        <p:nvSpPr>
+          <p:cNvPr id="2" name="Slide Image Placeholder 1"/>
+          <p:cNvSpPr>
+            <a:spLocks noGrp="1" noRot="1" noChangeAspect="1"/>
+          </p:cNvSpPr>
+          <p:nvPr>
+            <p:ph type="sldImg"/>
+          </p:nvPr>
+        </p:nvSpPr>
+        <p:spPr/>
+      </p:sp>
+      <p:sp>
+        <p:nvSpPr>
+          <p:cNvPr id="3" name="Notes Placeholder 2"/>
+          <p:cNvSpPr>
+            <a:spLocks noGrp="1"/>
+          </p:cNvSpPr>
+          <p:nvPr>
+            <p:ph type="body" idx="1"/>
+          </p:nvPr>
+        </p:nvSpPr>
+        <p:spPr/>
+        <p:txBody>
+          <a:bodyPr/>
+          <a:lstStyle/>
+          <a:p>
+            <a:r>
+              <a:rPr lang="en-US" dirty="0"/>
+              <a:t>Take your time to copy this part; we will continue together.</a:t>
+            </a:r>
+            <a:endParaRPr lang="en-US" dirty="0"/>
+          </a:p>
+        </p:txBody>
+      </p:sp>
+      <p:sp>
+        <p:nvSpPr>
+          <p:cNvPr id="4" name="Slide Number Placeholder 3"/>
+          <p:cNvSpPr>
+            <a:spLocks noGrp="1"/>
+          </p:cNvSpPr>
+          <p:nvPr>
+            <p:ph type="sldNum" sz="quarter" idx="10"/>
+          </p:nvPr>
+        </p:nvSpPr>
+        <p:spPr/>
+        <p:txBody>
+          <a:bodyPr/>
+          <a:lstStyle/>
+          <a:p>
+            <a:fld id="{F7021451-1387-4CA6-816F-3879F97B5CBC}" type="slidenum">
+              <a:rPr lang="en-US"/>
+              <a:t>60</a:t>
+            </a:fld>
+            <a:endParaRPr lang="en-US"/>
+          </a:p>
+        </p:txBody>
+      </p:sp>
+    </p:spTree>
+    <p:extLst>
+      <p:ext uri="{BB962C8B-B14F-4D97-AF65-F5344CB8AC3E}">
+        <p14:creationId xmlns:p14="http://schemas.microsoft.com/office/powerpoint/2010/main" val="1024086991"/>
+      </p:ext>
+    </p:extLst>
+  </p:cSld>
+  <p:clrMapOvr>
+    <a:masterClrMapping/>
+  </p:clrMapOvr>
+</p:notes>
+</file>
+
+<file path=ppt/notesSlides/notesSlide61.xml><?xml version="1.0" encoding="utf-8"?>
+<p:notes xmlns:a="http://schemas.openxmlformats.org/drawingml/2006/main" xmlns:r="http://schemas.openxmlformats.org/officeDocument/2006/relationships" xmlns:p="http://schemas.openxmlformats.org/presentationml/2006/main">
+  <p:cSld>
+    <p:spTree>
+      <p:nvGrpSpPr>
+        <p:cNvPr id="1" name=""/>
+        <p:cNvGrpSpPr/>
+        <p:nvPr/>
+      </p:nvGrpSpPr>
+      <p:grpSpPr>
+        <a:xfrm>
+          <a:off x="0" y="0"/>
+          <a:ext cx="0" cy="0"/>
+          <a:chOff x="0" y="0"/>
+          <a:chExt cx="0" cy="0"/>
+        </a:xfrm>
+      </p:grpSpPr>
+      <p:sp>
+        <p:nvSpPr>
+          <p:cNvPr id="2" name="Slide Image Placeholder 1"/>
+          <p:cNvSpPr>
+            <a:spLocks noGrp="1" noRot="1" noChangeAspect="1"/>
+          </p:cNvSpPr>
+          <p:nvPr>
+            <p:ph type="sldImg"/>
+          </p:nvPr>
+        </p:nvSpPr>
+        <p:spPr/>
+      </p:sp>
+      <p:sp>
+        <p:nvSpPr>
+          <p:cNvPr id="3" name="Notes Placeholder 2"/>
+          <p:cNvSpPr>
+            <a:spLocks noGrp="1"/>
+          </p:cNvSpPr>
+          <p:nvPr>
+            <p:ph type="body" idx="1"/>
+          </p:nvPr>
+        </p:nvSpPr>
+        <p:spPr/>
+        <p:txBody>
+          <a:bodyPr/>
+          <a:lstStyle/>
+          <a:p>
+            <a:r>
+              <a:rPr lang="en-US" dirty="0"/>
+              <a:t>These are the references and picture credits used to prepare this lesson.</a:t>
+            </a:r>
+            <a:endParaRPr lang="en-US" dirty="0"/>
+          </a:p>
+        </p:txBody>
+      </p:sp>
+      <p:sp>
+        <p:nvSpPr>
+          <p:cNvPr id="4" name="Slide Number Placeholder 3"/>
+          <p:cNvSpPr>
+            <a:spLocks noGrp="1"/>
+          </p:cNvSpPr>
+          <p:nvPr>
+            <p:ph type="sldNum" sz="quarter" idx="10"/>
+          </p:nvPr>
+        </p:nvSpPr>
+        <p:spPr/>
+        <p:txBody>
+          <a:bodyPr/>
+          <a:lstStyle/>
+          <a:p>
+            <a:fld id="{F7021451-1387-4CA6-816F-3879F97B5CBC}" type="slidenum">
+              <a:rPr lang="en-US"/>
+              <a:t>61</a:t>
+            </a:fld>
+            <a:endParaRPr lang="en-US"/>
+          </a:p>
+        </p:txBody>
+      </p:sp>
+    </p:spTree>
+    <p:extLst>
+      <p:ext uri="{BB962C8B-B14F-4D97-AF65-F5344CB8AC3E}">
+        <p14:creationId xmlns:p14="http://schemas.microsoft.com/office/powerpoint/2010/main" val="1024086991"/>
+      </p:ext>
+    </p:extLst>
+  </p:cSld>
+  <p:clrMapOvr>
+    <a:masterClrMapping/>
+  </p:clrMapOvr>
+</p:notes>
+</file>
+
 <file path=ppt/notesSlides/notesSlide7.xml><?xml version="1.0" encoding="utf-8"?>
 <p:notes xmlns:a="http://schemas.openxmlformats.org/drawingml/2006/main" xmlns:r="http://schemas.openxmlformats.org/officeDocument/2006/relationships" xmlns:p="http://schemas.openxmlformats.org/presentationml/2006/main">
   <p:cSld>
@@ -5309,7 +5754,7 @@
           <a:p>
             <a:r>
               <a:rPr lang="en-US" dirty="0"/>
-              <a:t>By the end of this lesson, you should be able to do three things. Number 1: explain the importance of volcanoes as a resource. Number 2: describe volcanic hazards. Number 3: propose adaptation and mitigation strategies.</a:t>
+              <a:t>By the end of this lesson, you should be able to do four things. Number 1: explain the resources provided by volcanoes. Number 2: explain the hazards of volcanoes. Number 3: describe the Lake Nyos disaster. Number 4: describe adaptation and mitigation strategies.</a:t>
             </a:r>
             <a:endParaRPr lang="en-US" dirty="0"/>
           </a:p>
@@ -5397,7 +5842,7 @@
           <a:p>
             <a:r>
               <a:rPr lang="en-US" dirty="0"/>
-              <a:t>Let us first remember what you already know. Volcanoes give lava, ash and gases. Mount Cameroon is active. Keep this in mind, because we shall build on it today.</a:t>
+              <a:t>Let us first remember what you already know. Mount Cameroon is an active composite cone. Lake Nyos is a crater lake. Eruptions release lava, pyroclasts and gases. Keep this in mind, because we shall build on it today.</a:t>
             </a:r>
             <a:endParaRPr lang="en-US" dirty="0"/>
           </a:p>
@@ -6777,7 +7222,7 @@
         <p:spPr>
           <a:xfrm>
             <a:off x="0" y="658368"/>
-            <a:ext cx="5120640" cy="5833872"/>
+            <a:ext cx="2468880" cy="5833872"/>
           </a:xfrm>
           <a:prstGeom prst="rect">
             <a:avLst/>
@@ -6792,8 +7237,8 @@
         </p:nvSpPr>
         <p:spPr>
           <a:xfrm>
-            <a:off x="5349240" y="1005840"/>
-            <a:ext cx="6522415" cy="731520"/>
+            <a:off x="2697480" y="1005840"/>
+            <a:ext cx="9174175" cy="731520"/>
           </a:xfrm>
           <a:prstGeom prst="rect">
             <a:avLst/>
@@ -6833,8 +7278,8 @@
         </p:nvSpPr>
         <p:spPr>
           <a:xfrm>
-            <a:off x="5349240" y="1783080"/>
-            <a:ext cx="6522415" cy="4663440"/>
+            <a:off x="2697480" y="1783080"/>
+            <a:ext cx="9174175" cy="4663440"/>
           </a:xfrm>
           <a:prstGeom prst="rect">
             <a:avLst/>
@@ -6861,7 +7306,27 @@
                 <a:ea typeface="Times New Roman" pitchFamily="34" charset="-122"/>
                 <a:cs typeface="Times New Roman" pitchFamily="34" charset="-120"/>
               </a:rPr>
-              <a:t>A family wants to buy a farm near Buea because the soil is very fertile. A neighbour warns them that lava from Mount Cameroon destroyed farms in 1999 and 2000.</a:t>
+              <a:t>Your friend's elder sister works for the Cameroon Development Corporation (CDC) on a banana plantation near Tiko, on the slopes of Mount Cameroon.</a:t>
+            </a:r>
+            <a:endParaRPr lang="en-US" sz="4000" dirty="0"/>
+          </a:p>
+          <a:p>
+            <a:pPr algn="l" indent="0" marL="0">
+              <a:spcAft>
+                <a:spcPts val="800"/>
+              </a:spcAft>
+              <a:buNone/>
+            </a:pPr>
+            <a:r>
+              <a:rPr lang="en-US" sz="4000" dirty="0">
+                <a:solidFill>
+                  <a:srgbClr val="111111"/>
+                </a:solidFill>
+                <a:latin typeface="Times New Roman" pitchFamily="34" charset="0"/>
+                <a:ea typeface="Times New Roman" pitchFamily="34" charset="-122"/>
+                <a:cs typeface="Times New Roman" pitchFamily="34" charset="-120"/>
+              </a:rPr>
+              <a:t>In her photos the soil is very dark and the plants grow extremely well.</a:t>
             </a:r>
             <a:endParaRPr lang="en-US" sz="4000" dirty="0"/>
           </a:p>
@@ -6996,7 +7461,7 @@
         <p:spPr>
           <a:xfrm>
             <a:off x="0" y="658368"/>
-            <a:ext cx="5120640" cy="5833872"/>
+            <a:ext cx="3840480" cy="5833872"/>
           </a:xfrm>
           <a:prstGeom prst="rect">
             <a:avLst/>
@@ -7011,8 +7476,8 @@
         </p:nvSpPr>
         <p:spPr>
           <a:xfrm>
-            <a:off x="5349240" y="1005840"/>
-            <a:ext cx="6522415" cy="731520"/>
+            <a:off x="4069080" y="1005840"/>
+            <a:ext cx="7802575" cy="731520"/>
           </a:xfrm>
           <a:prstGeom prst="rect">
             <a:avLst/>
@@ -7038,7 +7503,7 @@
                 <a:ea typeface="Times New Roman" pitchFamily="34" charset="-122"/>
                 <a:cs typeface="Times New Roman" pitchFamily="34" charset="-120"/>
               </a:rPr>
-              <a:t>Situation: Question 1</a:t>
+              <a:t>Situation in Real Life (continued)</a:t>
             </a:r>
             <a:endParaRPr lang="en-US" sz="3600" dirty="0"/>
           </a:p>
@@ -7052,8 +7517,8 @@
         </p:nvSpPr>
         <p:spPr>
           <a:xfrm>
-            <a:off x="5349240" y="1783080"/>
-            <a:ext cx="6522415" cy="4663440"/>
+            <a:off x="4069080" y="1783080"/>
+            <a:ext cx="7802575" cy="4663440"/>
           </a:xfrm>
           <a:prstGeom prst="rect">
             <a:avLst/>
@@ -7080,7 +7545,27 @@
                 <a:ea typeface="Times New Roman" pitchFamily="34" charset="-122"/>
                 <a:cs typeface="Times New Roman" pitchFamily="34" charset="-120"/>
               </a:rPr>
-              <a:t>What is the problem in the situation?</a:t>
+              <a:t>Yet you know that Mount Cameroon is an active volcano.</a:t>
+            </a:r>
+            <a:endParaRPr lang="en-US" sz="4000" dirty="0"/>
+          </a:p>
+          <a:p>
+            <a:pPr algn="l" indent="0" marL="0">
+              <a:spcAft>
+                <a:spcPts val="800"/>
+              </a:spcAft>
+              <a:buNone/>
+            </a:pPr>
+            <a:r>
+              <a:rPr lang="en-US" sz="4000" dirty="0">
+                <a:solidFill>
+                  <a:srgbClr val="111111"/>
+                </a:solidFill>
+                <a:latin typeface="Times New Roman" pitchFamily="34" charset="0"/>
+                <a:ea typeface="Times New Roman" pitchFamily="34" charset="-122"/>
+                <a:cs typeface="Times New Roman" pitchFamily="34" charset="-120"/>
+              </a:rPr>
+              <a:t>You ask: "Why do people choose to farm and live so close to a mountain that can erupt, and how can they protect themselves?"</a:t>
             </a:r>
             <a:endParaRPr lang="en-US" sz="4000" dirty="0"/>
           </a:p>
@@ -7257,7 +7742,7 @@
                 <a:ea typeface="Times New Roman" pitchFamily="34" charset="-122"/>
                 <a:cs typeface="Times New Roman" pitchFamily="34" charset="-120"/>
               </a:rPr>
-              <a:t>Answer</a:t>
+              <a:t>Situation: Question 1</a:t>
             </a:r>
             <a:endParaRPr lang="en-US" sz="3600" dirty="0"/>
           </a:p>
@@ -7299,7 +7784,7 @@
                 <a:ea typeface="Times New Roman" pitchFamily="34" charset="-122"/>
                 <a:cs typeface="Times New Roman" pitchFamily="34" charset="-120"/>
               </a:rPr>
-              <a:t>The land is fertile but dangerous.</a:t>
+              <a:t>What is the problem in the situation?</a:t>
             </a:r>
             <a:endParaRPr lang="en-US" sz="4000" dirty="0"/>
           </a:p>
@@ -7476,7 +7961,7 @@
                 <a:ea typeface="Times New Roman" pitchFamily="34" charset="-122"/>
                 <a:cs typeface="Times New Roman" pitchFamily="34" charset="-120"/>
               </a:rPr>
-              <a:t>Situation: Question 2</a:t>
+              <a:t>Answer</a:t>
             </a:r>
             <a:endParaRPr lang="en-US" sz="3600" dirty="0"/>
           </a:p>
@@ -7518,7 +8003,7 @@
                 <a:ea typeface="Times New Roman" pitchFamily="34" charset="-122"/>
                 <a:cs typeface="Times New Roman" pitchFamily="34" charset="-120"/>
               </a:rPr>
-              <a:t>What is the advantage?</a:t>
+              <a:t>The learner does not understand why volcanoes are both a resource and a hazard.</a:t>
             </a:r>
             <a:endParaRPr lang="en-US" sz="4000" dirty="0"/>
           </a:p>
@@ -7695,7 +8180,7 @@
                 <a:ea typeface="Times New Roman" pitchFamily="34" charset="-122"/>
                 <a:cs typeface="Times New Roman" pitchFamily="34" charset="-120"/>
               </a:rPr>
-              <a:t>Answer</a:t>
+              <a:t>Situation: Question 2</a:t>
             </a:r>
             <a:endParaRPr lang="en-US" sz="3600" dirty="0"/>
           </a:p>
@@ -7737,7 +8222,7 @@
                 <a:ea typeface="Times New Roman" pitchFamily="34" charset="-122"/>
                 <a:cs typeface="Times New Roman" pitchFamily="34" charset="-120"/>
               </a:rPr>
-              <a:t>Very fertile volcanic soil.</a:t>
+              <a:t>Why are CDC plantations on Mount Cameroon?</a:t>
             </a:r>
             <a:endParaRPr lang="en-US" sz="4000" dirty="0"/>
           </a:p>
@@ -7914,7 +8399,7 @@
                 <a:ea typeface="Times New Roman" pitchFamily="34" charset="-122"/>
                 <a:cs typeface="Times New Roman" pitchFamily="34" charset="-120"/>
               </a:rPr>
-              <a:t>Situation: Question 3</a:t>
+              <a:t>Answer</a:t>
             </a:r>
             <a:endParaRPr lang="en-US" sz="3600" dirty="0"/>
           </a:p>
@@ -7956,7 +8441,7 @@
                 <a:ea typeface="Times New Roman" pitchFamily="34" charset="-122"/>
                 <a:cs typeface="Times New Roman" pitchFamily="34" charset="-120"/>
               </a:rPr>
-              <a:t>What should the family do?</a:t>
+              <a:t>Volcanic ash weathers into very fertile soils.</a:t>
             </a:r>
             <a:endParaRPr lang="en-US" sz="4000" dirty="0"/>
           </a:p>
@@ -8133,7 +8618,7 @@
                 <a:ea typeface="Times New Roman" pitchFamily="34" charset="-122"/>
                 <a:cs typeface="Times New Roman" pitchFamily="34" charset="-120"/>
               </a:rPr>
-              <a:t>Possible Answer</a:t>
+              <a:t>Situation: Question 3</a:t>
             </a:r>
             <a:endParaRPr lang="en-US" sz="3600" dirty="0"/>
           </a:p>
@@ -8175,7 +8660,7 @@
                 <a:ea typeface="Times New Roman" pitchFamily="34" charset="-122"/>
                 <a:cs typeface="Times New Roman" pitchFamily="34" charset="-120"/>
               </a:rPr>
-              <a:t>Follow warnings and have a plan to leave if there is an eruption.</a:t>
+              <a:t>What must people living there do?</a:t>
             </a:r>
             <a:endParaRPr lang="en-US" sz="4000" dirty="0"/>
           </a:p>
@@ -8287,7 +8772,7 @@
                 <a:ea typeface="Calibri" pitchFamily="34" charset="-122"/>
                 <a:cs typeface="Calibri" pitchFamily="34" charset="-120"/>
               </a:rPr>
-              <a:t>ACTION TO TAKE</a:t>
+              <a:t>REAL-LIFE SITUATION</a:t>
             </a:r>
             <a:endParaRPr lang="en-US" sz="1400" dirty="0"/>
           </a:p>
@@ -8352,7 +8837,7 @@
                 <a:ea typeface="Times New Roman" pitchFamily="34" charset="-122"/>
                 <a:cs typeface="Times New Roman" pitchFamily="34" charset="-120"/>
               </a:rPr>
-              <a:t>Action to Take</a:t>
+              <a:t>Possible Answer</a:t>
             </a:r>
             <a:endParaRPr lang="en-US" sz="3600" dirty="0"/>
           </a:p>
@@ -8394,7 +8879,7 @@
                 <a:ea typeface="Times New Roman" pitchFamily="34" charset="-122"/>
                 <a:cs typeface="Times New Roman" pitchFamily="34" charset="-120"/>
               </a:rPr>
-              <a:t>Live safely near volcanoes by using their resources and preparing for eruptions.</a:t>
+              <a:t>Use monitoring, hazard maps, education and evacuation plans.</a:t>
             </a:r>
             <a:endParaRPr lang="en-US" sz="4000" dirty="0"/>
           </a:p>
@@ -8506,7 +8991,7 @@
                 <a:ea typeface="Calibri" pitchFamily="34" charset="-122"/>
                 <a:cs typeface="Calibri" pitchFamily="34" charset="-120"/>
               </a:rPr>
-              <a:t>JUSTIFICATION</a:t>
+              <a:t>ACTION TO TAKE</a:t>
             </a:r>
             <a:endParaRPr lang="en-US" sz="1400" dirty="0"/>
           </a:p>
@@ -8571,7 +9056,7 @@
                 <a:ea typeface="Times New Roman" pitchFamily="34" charset="-122"/>
                 <a:cs typeface="Times New Roman" pitchFamily="34" charset="-120"/>
               </a:rPr>
-              <a:t>Justification of the Lesson</a:t>
+              <a:t>Action to Take</a:t>
             </a:r>
             <a:endParaRPr lang="en-US" sz="3600" dirty="0"/>
           </a:p>
@@ -8613,7 +9098,7 @@
                 <a:ea typeface="Times New Roman" pitchFamily="34" charset="-122"/>
                 <a:cs typeface="Times New Roman" pitchFamily="34" charset="-120"/>
               </a:rPr>
-              <a:t>This lesson helps us to live safely near volcanoes and to use their resources.</a:t>
+              <a:t>Follow the advice of the authorities in volcanic areas and support monitoring and evacuation plans.</a:t>
             </a:r>
             <a:endParaRPr lang="en-US" sz="4000" dirty="0"/>
           </a:p>
@@ -8725,54 +9210,15 @@
                 <a:ea typeface="Calibri" pitchFamily="34" charset="-122"/>
                 <a:cs typeface="Calibri" pitchFamily="34" charset="-120"/>
               </a:rPr>
-              <a:t>1. VOLCANOES AS A RESOURCE</a:t>
+              <a:t>JUSTIFICATION</a:t>
             </a:r>
             <a:endParaRPr lang="en-US" sz="1400" dirty="0"/>
-          </a:p>
-        </p:txBody>
-      </p:sp>
-      <p:sp>
-        <p:nvSpPr>
-          <p:cNvPr id="3" name="Text 1"/>
-          <p:cNvSpPr/>
-          <p:nvPr/>
-        </p:nvSpPr>
-        <p:spPr>
-          <a:xfrm>
-            <a:off x="457200" y="1005840"/>
-            <a:ext cx="11277295" cy="731520"/>
-          </a:xfrm>
-          <a:prstGeom prst="rect">
-            <a:avLst/>
-          </a:prstGeom>
-          <a:noFill/>
-          <a:ln/>
-        </p:spPr>
-        <p:txBody>
-          <a:bodyPr wrap="square" lIns="0" tIns="0" rIns="0" bIns="0" rtlCol="0" anchor="ctr"/>
-          <a:lstStyle/>
-          <a:p>
-            <a:pPr algn="ctr" indent="0" marL="0">
-              <a:buNone/>
-            </a:pPr>
-            <a:r>
-              <a:rPr lang="en-US" sz="3600" b="1" dirty="0">
-                <a:solidFill>
-                  <a:srgbClr val="990011"/>
-                </a:solidFill>
-                <a:latin typeface="Times New Roman" pitchFamily="34" charset="0"/>
-                <a:ea typeface="Times New Roman" pitchFamily="34" charset="-122"/>
-                <a:cs typeface="Times New Roman" pitchFamily="34" charset="-120"/>
-              </a:rPr>
-              <a:t>Activity 1</a:t>
-            </a:r>
-            <a:endParaRPr lang="en-US" sz="3600" dirty="0"/>
           </a:p>
         </p:txBody>
       </p:sp>
       <p:pic>
         <p:nvPicPr>
-          <p:cNvPr id="4" name="Image 0" descr="/home/claude/f4/img/v2/f2t_mount_cameroon.jpg">    </p:cNvPr>
+          <p:cNvPr id="3" name="Image 0" descr="/home/claude/f4/img/minesec_sheet.png">    </p:cNvPr>
           <p:cNvPicPr>
             <a:picLocks noChangeAspect="1"/>
           </p:cNvPicPr>
@@ -8786,8 +9232,8 @@
         </p:blipFill>
         <p:spPr>
           <a:xfrm>
-            <a:off x="2246610" y="1783080"/>
-            <a:ext cx="7698475" cy="4270248"/>
+            <a:off x="0" y="658368"/>
+            <a:ext cx="5120640" cy="5833872"/>
           </a:xfrm>
           <a:prstGeom prst="rect">
             <a:avLst/>
@@ -8796,14 +9242,14 @@
       </p:pic>
       <p:sp>
         <p:nvSpPr>
-          <p:cNvPr id="5" name="Text 2"/>
+          <p:cNvPr id="4" name="Text 1"/>
           <p:cNvSpPr/>
           <p:nvPr/>
         </p:nvSpPr>
         <p:spPr>
           <a:xfrm>
-            <a:off x="457200" y="6089904"/>
-            <a:ext cx="11277295" cy="347472"/>
+            <a:off x="5349240" y="1005840"/>
+            <a:ext cx="6522415" cy="731520"/>
           </a:xfrm>
           <a:prstGeom prst="rect">
             <a:avLst/>
@@ -8812,24 +9258,68 @@
           <a:ln/>
         </p:spPr>
         <p:txBody>
-          <a:bodyPr wrap="square" lIns="0" tIns="0" rIns="0" bIns="0" rtlCol="0" anchor="ctr"/>
+          <a:bodyPr wrap="square" lIns="0" tIns="0" rIns="0" bIns="0" rtlCol="0" anchor="ctr">
+            <a:normAutofit/>
+          </a:bodyPr>
           <a:lstStyle/>
           <a:p>
             <a:pPr algn="ctr" indent="0" marL="0">
               <a:buNone/>
             </a:pPr>
             <a:r>
-              <a:rPr lang="en-US" sz="1800" i="1" dirty="0">
-                <a:solidFill>
-                  <a:srgbClr val="555555"/>
+              <a:rPr lang="en-US" sz="3600" b="1" dirty="0">
+                <a:solidFill>
+                  <a:srgbClr val="990011"/>
                 </a:solidFill>
                 <a:latin typeface="Times New Roman" pitchFamily="34" charset="0"/>
                 <a:ea typeface="Times New Roman" pitchFamily="34" charset="-122"/>
                 <a:cs typeface="Times New Roman" pitchFamily="34" charset="-120"/>
               </a:rPr>
-              <a:t>A banana plantation.</a:t>
-            </a:r>
-            <a:endParaRPr lang="en-US" sz="1800" dirty="0"/>
+              <a:t>Justification of the Lesson</a:t>
+            </a:r>
+            <a:endParaRPr lang="en-US" sz="3600" dirty="0"/>
+          </a:p>
+        </p:txBody>
+      </p:sp>
+      <p:sp>
+        <p:nvSpPr>
+          <p:cNvPr id="5" name="Text 2"/>
+          <p:cNvSpPr/>
+          <p:nvPr/>
+        </p:nvSpPr>
+        <p:spPr>
+          <a:xfrm>
+            <a:off x="5349240" y="1783080"/>
+            <a:ext cx="6522415" cy="4663440"/>
+          </a:xfrm>
+          <a:prstGeom prst="rect">
+            <a:avLst/>
+          </a:prstGeom>
+          <a:noFill/>
+          <a:ln/>
+        </p:spPr>
+        <p:txBody>
+          <a:bodyPr wrap="square" lIns="0" tIns="0" rIns="0" bIns="0" rtlCol="0" anchor="t"/>
+          <a:lstStyle/>
+          <a:p>
+            <a:pPr algn="l" indent="0" marL="0">
+              <a:spcAft>
+                <a:spcPts val="800"/>
+              </a:spcAft>
+              <a:buNone/>
+            </a:pPr>
+            <a:r>
+              <a:rPr lang="en-US" sz="4000" dirty="0">
+                <a:solidFill>
+                  <a:srgbClr val="111111"/>
+                </a:solidFill>
+                <a:latin typeface="Times New Roman" pitchFamily="34" charset="0"/>
+                <a:ea typeface="Times New Roman" pitchFamily="34" charset="-122"/>
+                <a:cs typeface="Times New Roman" pitchFamily="34" charset="-120"/>
+              </a:rPr>
+              <a:t>This lesson helps us to weigh the advantages and dangers of volcanoes and to reduce disasters such as Lake Nyos.</a:t>
+            </a:r>
+            <a:endParaRPr lang="en-US" sz="4000" dirty="0"/>
           </a:p>
         </p:txBody>
       </p:sp>
@@ -9534,15 +10024,54 @@
                 <a:ea typeface="Calibri" pitchFamily="34" charset="-122"/>
                 <a:cs typeface="Calibri" pitchFamily="34" charset="-120"/>
               </a:rPr>
-              <a:t>1. VOLCANOES AS A RESOURCE</a:t>
+              <a:t>1. RESOURCES</a:t>
             </a:r>
             <a:endParaRPr lang="en-US" sz="1400" dirty="0"/>
+          </a:p>
+        </p:txBody>
+      </p:sp>
+      <p:sp>
+        <p:nvSpPr>
+          <p:cNvPr id="3" name="Text 1"/>
+          <p:cNvSpPr/>
+          <p:nvPr/>
+        </p:nvSpPr>
+        <p:spPr>
+          <a:xfrm>
+            <a:off x="457200" y="1005840"/>
+            <a:ext cx="11277295" cy="731520"/>
+          </a:xfrm>
+          <a:prstGeom prst="rect">
+            <a:avLst/>
+          </a:prstGeom>
+          <a:noFill/>
+          <a:ln/>
+        </p:spPr>
+        <p:txBody>
+          <a:bodyPr wrap="square" lIns="0" tIns="0" rIns="0" bIns="0" rtlCol="0" anchor="ctr"/>
+          <a:lstStyle/>
+          <a:p>
+            <a:pPr algn="ctr" indent="0" marL="0">
+              <a:buNone/>
+            </a:pPr>
+            <a:r>
+              <a:rPr lang="en-US" sz="3600" b="1" dirty="0">
+                <a:solidFill>
+                  <a:srgbClr val="990011"/>
+                </a:solidFill>
+                <a:latin typeface="Times New Roman" pitchFamily="34" charset="0"/>
+                <a:ea typeface="Times New Roman" pitchFamily="34" charset="-122"/>
+                <a:cs typeface="Times New Roman" pitchFamily="34" charset="-120"/>
+              </a:rPr>
+              <a:t>Activity 1</a:t>
+            </a:r>
+            <a:endParaRPr lang="en-US" sz="3600" dirty="0"/>
           </a:p>
         </p:txBody>
       </p:sp>
       <p:pic>
         <p:nvPicPr>
-          <p:cNvPr id="3" name="Image 0" descr="/home/claude/f4/img/minesec_sheet.png">    </p:cNvPr>
+          <p:cNvPr id="4" name="Image 0" descr="/home/claude/f4/img/v2/usa_banana.jpg">    </p:cNvPr>
           <p:cNvPicPr>
             <a:picLocks noChangeAspect="1"/>
           </p:cNvPicPr>
@@ -9556,8 +10085,8 @@
         </p:blipFill>
         <p:spPr>
           <a:xfrm>
-            <a:off x="0" y="658368"/>
-            <a:ext cx="5120640" cy="5833872"/>
+            <a:off x="2246610" y="1783080"/>
+            <a:ext cx="7698475" cy="4270248"/>
           </a:xfrm>
           <a:prstGeom prst="rect">
             <a:avLst/>
@@ -9566,14 +10095,14 @@
       </p:pic>
       <p:sp>
         <p:nvSpPr>
-          <p:cNvPr id="4" name="Text 1"/>
+          <p:cNvPr id="5" name="Text 2"/>
           <p:cNvSpPr/>
           <p:nvPr/>
         </p:nvSpPr>
         <p:spPr>
           <a:xfrm>
-            <a:off x="5349240" y="1005840"/>
-            <a:ext cx="6522415" cy="731520"/>
+            <a:off x="457200" y="6089904"/>
+            <a:ext cx="11277295" cy="347472"/>
           </a:xfrm>
           <a:prstGeom prst="rect">
             <a:avLst/>
@@ -9582,68 +10111,24 @@
           <a:ln/>
         </p:spPr>
         <p:txBody>
-          <a:bodyPr wrap="square" lIns="0" tIns="0" rIns="0" bIns="0" rtlCol="0" anchor="ctr">
-            <a:normAutofit/>
-          </a:bodyPr>
+          <a:bodyPr wrap="square" lIns="0" tIns="0" rIns="0" bIns="0" rtlCol="0" anchor="ctr"/>
           <a:lstStyle/>
           <a:p>
             <a:pPr algn="ctr" indent="0" marL="0">
               <a:buNone/>
             </a:pPr>
             <a:r>
-              <a:rPr lang="en-US" sz="3600" b="1" dirty="0">
-                <a:solidFill>
-                  <a:srgbClr val="990011"/>
+              <a:rPr lang="en-US" sz="1800" i="1" dirty="0">
+                <a:solidFill>
+                  <a:srgbClr val="555555"/>
                 </a:solidFill>
                 <a:latin typeface="Times New Roman" pitchFamily="34" charset="0"/>
                 <a:ea typeface="Times New Roman" pitchFamily="34" charset="-122"/>
                 <a:cs typeface="Times New Roman" pitchFamily="34" charset="-120"/>
               </a:rPr>
-              <a:t>Activity 1: Question</a:t>
-            </a:r>
-            <a:endParaRPr lang="en-US" sz="3600" dirty="0"/>
-          </a:p>
-        </p:txBody>
-      </p:sp>
-      <p:sp>
-        <p:nvSpPr>
-          <p:cNvPr id="5" name="Text 2"/>
-          <p:cNvSpPr/>
-          <p:nvPr/>
-        </p:nvSpPr>
-        <p:spPr>
-          <a:xfrm>
-            <a:off x="5349240" y="1783080"/>
-            <a:ext cx="6522415" cy="4663440"/>
-          </a:xfrm>
-          <a:prstGeom prst="rect">
-            <a:avLst/>
-          </a:prstGeom>
-          <a:noFill/>
-          <a:ln/>
-        </p:spPr>
-        <p:txBody>
-          <a:bodyPr wrap="square" lIns="0" tIns="0" rIns="0" bIns="0" rtlCol="0" anchor="t"/>
-          <a:lstStyle/>
-          <a:p>
-            <a:pPr algn="l" indent="0" marL="0">
-              <a:spcAft>
-                <a:spcPts val="800"/>
-              </a:spcAft>
-              <a:buNone/>
-            </a:pPr>
-            <a:r>
-              <a:rPr lang="en-US" sz="4000" dirty="0">
-                <a:solidFill>
-                  <a:srgbClr val="111111"/>
-                </a:solidFill>
-                <a:latin typeface="Times New Roman" pitchFamily="34" charset="0"/>
-                <a:ea typeface="Times New Roman" pitchFamily="34" charset="-122"/>
-                <a:cs typeface="Times New Roman" pitchFamily="34" charset="-120"/>
-              </a:rPr>
-              <a:t>Near Mount Cameroon, farmers grow bananas and tea. Why are the soils so fertile?</a:t>
-            </a:r>
-            <a:endParaRPr lang="en-US" sz="4000" dirty="0"/>
+              <a:t>A banana plantation.</a:t>
+            </a:r>
+            <a:endParaRPr lang="en-US" sz="1800" dirty="0"/>
           </a:p>
         </p:txBody>
       </p:sp>
@@ -9753,7 +10238,7 @@
                 <a:ea typeface="Calibri" pitchFamily="34" charset="-122"/>
                 <a:cs typeface="Calibri" pitchFamily="34" charset="-120"/>
               </a:rPr>
-              <a:t>1. VOLCANOES AS A RESOURCE</a:t>
+              <a:t>1. RESOURCES</a:t>
             </a:r>
             <a:endParaRPr lang="en-US" sz="1400" dirty="0"/>
           </a:p>
@@ -9818,7 +10303,7 @@
                 <a:ea typeface="Times New Roman" pitchFamily="34" charset="-122"/>
                 <a:cs typeface="Times New Roman" pitchFamily="34" charset="-120"/>
               </a:rPr>
-              <a:t>Activity 1: Answer</a:t>
+              <a:t>Activity 1: Question</a:t>
             </a:r>
             <a:endParaRPr lang="en-US" sz="3600" dirty="0"/>
           </a:p>
@@ -9860,7 +10345,7 @@
                 <a:ea typeface="Times New Roman" pitchFamily="34" charset="-122"/>
                 <a:cs typeface="Times New Roman" pitchFamily="34" charset="-120"/>
               </a:rPr>
-              <a:t>Volcanic ash and lava weather into soils rich in minerals.</a:t>
+              <a:t>Why are volcanic soils so fertile?</a:t>
             </a:r>
             <a:endParaRPr lang="en-US" sz="4000" dirty="0"/>
           </a:p>
@@ -9972,54 +10457,15 @@
                 <a:ea typeface="Calibri" pitchFamily="34" charset="-122"/>
                 <a:cs typeface="Calibri" pitchFamily="34" charset="-120"/>
               </a:rPr>
-              <a:t>1. VOLCANOES AS A RESOURCE</a:t>
+              <a:t>1. RESOURCES</a:t>
             </a:r>
             <a:endParaRPr lang="en-US" sz="1400" dirty="0"/>
-          </a:p>
-        </p:txBody>
-      </p:sp>
-      <p:sp>
-        <p:nvSpPr>
-          <p:cNvPr id="3" name="Text 1"/>
-          <p:cNvSpPr/>
-          <p:nvPr/>
-        </p:nvSpPr>
-        <p:spPr>
-          <a:xfrm>
-            <a:off x="457200" y="1005840"/>
-            <a:ext cx="11277295" cy="731520"/>
-          </a:xfrm>
-          <a:prstGeom prst="rect">
-            <a:avLst/>
-          </a:prstGeom>
-          <a:noFill/>
-          <a:ln/>
-        </p:spPr>
-        <p:txBody>
-          <a:bodyPr wrap="square" lIns="0" tIns="0" rIns="0" bIns="0" rtlCol="0" anchor="ctr"/>
-          <a:lstStyle/>
-          <a:p>
-            <a:pPr algn="ctr" indent="0" marL="0">
-              <a:buNone/>
-            </a:pPr>
-            <a:r>
-              <a:rPr lang="en-US" sz="3600" b="1" dirty="0">
-                <a:solidFill>
-                  <a:srgbClr val="990011"/>
-                </a:solidFill>
-                <a:latin typeface="Times New Roman" pitchFamily="34" charset="0"/>
-                <a:ea typeface="Times New Roman" pitchFamily="34" charset="-122"/>
-                <a:cs typeface="Times New Roman" pitchFamily="34" charset="-120"/>
-              </a:rPr>
-              <a:t>Activity 2</a:t>
-            </a:r>
-            <a:endParaRPr lang="en-US" sz="3600" dirty="0"/>
           </a:p>
         </p:txBody>
       </p:sp>
       <p:pic>
         <p:nvPicPr>
-          <p:cNvPr id="4" name="Image 0" descr="/home/claude/f4/img/v2/f4_geothermal.jpg">    </p:cNvPr>
+          <p:cNvPr id="3" name="Image 0" descr="/home/claude/f4/img/minesec_sheet.png">    </p:cNvPr>
           <p:cNvPicPr>
             <a:picLocks noChangeAspect="1"/>
           </p:cNvPicPr>
@@ -10033,8 +10479,8 @@
         </p:blipFill>
         <p:spPr>
           <a:xfrm>
-            <a:off x="2894725" y="1783080"/>
-            <a:ext cx="6402246" cy="4270248"/>
+            <a:off x="0" y="658368"/>
+            <a:ext cx="5120640" cy="5833872"/>
           </a:xfrm>
           <a:prstGeom prst="rect">
             <a:avLst/>
@@ -10043,14 +10489,14 @@
       </p:pic>
       <p:sp>
         <p:nvSpPr>
-          <p:cNvPr id="5" name="Text 2"/>
+          <p:cNvPr id="4" name="Text 1"/>
           <p:cNvSpPr/>
           <p:nvPr/>
         </p:nvSpPr>
         <p:spPr>
           <a:xfrm>
-            <a:off x="457200" y="6089904"/>
-            <a:ext cx="11277295" cy="347472"/>
+            <a:off x="5349240" y="1005840"/>
+            <a:ext cx="6522415" cy="731520"/>
           </a:xfrm>
           <a:prstGeom prst="rect">
             <a:avLst/>
@@ -10059,24 +10505,68 @@
           <a:ln/>
         </p:spPr>
         <p:txBody>
-          <a:bodyPr wrap="square" lIns="0" tIns="0" rIns="0" bIns="0" rtlCol="0" anchor="ctr"/>
+          <a:bodyPr wrap="square" lIns="0" tIns="0" rIns="0" bIns="0" rtlCol="0" anchor="ctr">
+            <a:normAutofit/>
+          </a:bodyPr>
           <a:lstStyle/>
           <a:p>
             <a:pPr algn="ctr" indent="0" marL="0">
               <a:buNone/>
             </a:pPr>
             <a:r>
-              <a:rPr lang="en-US" sz="1800" i="1" dirty="0">
-                <a:solidFill>
-                  <a:srgbClr val="555555"/>
+              <a:rPr lang="en-US" sz="3600" b="1" dirty="0">
+                <a:solidFill>
+                  <a:srgbClr val="990011"/>
                 </a:solidFill>
                 <a:latin typeface="Times New Roman" pitchFamily="34" charset="0"/>
                 <a:ea typeface="Times New Roman" pitchFamily="34" charset="-122"/>
                 <a:cs typeface="Times New Roman" pitchFamily="34" charset="-120"/>
               </a:rPr>
-              <a:t>A geothermal power station in Kenya.</a:t>
-            </a:r>
-            <a:endParaRPr lang="en-US" sz="1800" dirty="0"/>
+              <a:t>Activity 1: Answer</a:t>
+            </a:r>
+            <a:endParaRPr lang="en-US" sz="3600" dirty="0"/>
+          </a:p>
+        </p:txBody>
+      </p:sp>
+      <p:sp>
+        <p:nvSpPr>
+          <p:cNvPr id="5" name="Text 2"/>
+          <p:cNvSpPr/>
+          <p:nvPr/>
+        </p:nvSpPr>
+        <p:spPr>
+          <a:xfrm>
+            <a:off x="5349240" y="1783080"/>
+            <a:ext cx="6522415" cy="4663440"/>
+          </a:xfrm>
+          <a:prstGeom prst="rect">
+            <a:avLst/>
+          </a:prstGeom>
+          <a:noFill/>
+          <a:ln/>
+        </p:spPr>
+        <p:txBody>
+          <a:bodyPr wrap="square" lIns="0" tIns="0" rIns="0" bIns="0" rtlCol="0" anchor="t"/>
+          <a:lstStyle/>
+          <a:p>
+            <a:pPr algn="l" indent="0" marL="0">
+              <a:spcAft>
+                <a:spcPts val="800"/>
+              </a:spcAft>
+              <a:buNone/>
+            </a:pPr>
+            <a:r>
+              <a:rPr lang="en-US" sz="4000" dirty="0">
+                <a:solidFill>
+                  <a:srgbClr val="111111"/>
+                </a:solidFill>
+                <a:latin typeface="Times New Roman" pitchFamily="34" charset="0"/>
+                <a:ea typeface="Times New Roman" pitchFamily="34" charset="-122"/>
+                <a:cs typeface="Times New Roman" pitchFamily="34" charset="-120"/>
+              </a:rPr>
+              <a:t>Ash and lava weather into soils rich in minerals (andosols).</a:t>
+            </a:r>
+            <a:endParaRPr lang="en-US" sz="4000" dirty="0"/>
           </a:p>
         </p:txBody>
       </p:sp>
@@ -10186,15 +10676,54 @@
                 <a:ea typeface="Calibri" pitchFamily="34" charset="-122"/>
                 <a:cs typeface="Calibri" pitchFamily="34" charset="-120"/>
               </a:rPr>
-              <a:t>1. VOLCANOES AS A RESOURCE</a:t>
+              <a:t>1. RESOURCES</a:t>
             </a:r>
             <a:endParaRPr lang="en-US" sz="1400" dirty="0"/>
+          </a:p>
+        </p:txBody>
+      </p:sp>
+      <p:sp>
+        <p:nvSpPr>
+          <p:cNvPr id="3" name="Text 1"/>
+          <p:cNvSpPr/>
+          <p:nvPr/>
+        </p:nvSpPr>
+        <p:spPr>
+          <a:xfrm>
+            <a:off x="457200" y="1005840"/>
+            <a:ext cx="11277295" cy="731520"/>
+          </a:xfrm>
+          <a:prstGeom prst="rect">
+            <a:avLst/>
+          </a:prstGeom>
+          <a:noFill/>
+          <a:ln/>
+        </p:spPr>
+        <p:txBody>
+          <a:bodyPr wrap="square" lIns="0" tIns="0" rIns="0" bIns="0" rtlCol="0" anchor="ctr"/>
+          <a:lstStyle/>
+          <a:p>
+            <a:pPr algn="ctr" indent="0" marL="0">
+              <a:buNone/>
+            </a:pPr>
+            <a:r>
+              <a:rPr lang="en-US" sz="3600" b="1" dirty="0">
+                <a:solidFill>
+                  <a:srgbClr val="990011"/>
+                </a:solidFill>
+                <a:latin typeface="Times New Roman" pitchFamily="34" charset="0"/>
+                <a:ea typeface="Times New Roman" pitchFamily="34" charset="-122"/>
+                <a:cs typeface="Times New Roman" pitchFamily="34" charset="-120"/>
+              </a:rPr>
+              <a:t>Activity 2</a:t>
+            </a:r>
+            <a:endParaRPr lang="en-US" sz="3600" dirty="0"/>
           </a:p>
         </p:txBody>
       </p:sp>
       <p:pic>
         <p:nvPicPr>
-          <p:cNvPr id="3" name="Image 0" descr="/home/claude/f4/img/minesec_sheet.png">    </p:cNvPr>
+          <p:cNvPr id="4" name="Image 0" descr="/home/claude/f4/img/v2/f4_geothermal.jpg">    </p:cNvPr>
           <p:cNvPicPr>
             <a:picLocks noChangeAspect="1"/>
           </p:cNvPicPr>
@@ -10208,8 +10737,8 @@
         </p:blipFill>
         <p:spPr>
           <a:xfrm>
-            <a:off x="0" y="658368"/>
-            <a:ext cx="5120640" cy="5833872"/>
+            <a:off x="2894725" y="1783080"/>
+            <a:ext cx="6402246" cy="4270248"/>
           </a:xfrm>
           <a:prstGeom prst="rect">
             <a:avLst/>
@@ -10218,14 +10747,14 @@
       </p:pic>
       <p:sp>
         <p:nvSpPr>
-          <p:cNvPr id="4" name="Text 1"/>
+          <p:cNvPr id="5" name="Text 2"/>
           <p:cNvSpPr/>
           <p:nvPr/>
         </p:nvSpPr>
         <p:spPr>
           <a:xfrm>
-            <a:off x="5349240" y="1005840"/>
-            <a:ext cx="6522415" cy="731520"/>
+            <a:off x="457200" y="6089904"/>
+            <a:ext cx="11277295" cy="347472"/>
           </a:xfrm>
           <a:prstGeom prst="rect">
             <a:avLst/>
@@ -10234,68 +10763,24 @@
           <a:ln/>
         </p:spPr>
         <p:txBody>
-          <a:bodyPr wrap="square" lIns="0" tIns="0" rIns="0" bIns="0" rtlCol="0" anchor="ctr">
-            <a:normAutofit/>
-          </a:bodyPr>
+          <a:bodyPr wrap="square" lIns="0" tIns="0" rIns="0" bIns="0" rtlCol="0" anchor="ctr"/>
           <a:lstStyle/>
           <a:p>
             <a:pPr algn="ctr" indent="0" marL="0">
               <a:buNone/>
             </a:pPr>
             <a:r>
-              <a:rPr lang="en-US" sz="3600" b="1" dirty="0">
-                <a:solidFill>
-                  <a:srgbClr val="990011"/>
+              <a:rPr lang="en-US" sz="1800" i="1" dirty="0">
+                <a:solidFill>
+                  <a:srgbClr val="555555"/>
                 </a:solidFill>
                 <a:latin typeface="Times New Roman" pitchFamily="34" charset="0"/>
                 <a:ea typeface="Times New Roman" pitchFamily="34" charset="-122"/>
                 <a:cs typeface="Times New Roman" pitchFamily="34" charset="-120"/>
               </a:rPr>
-              <a:t>Activity 2: Question</a:t>
-            </a:r>
-            <a:endParaRPr lang="en-US" sz="3600" dirty="0"/>
-          </a:p>
-        </p:txBody>
-      </p:sp>
-      <p:sp>
-        <p:nvSpPr>
-          <p:cNvPr id="5" name="Text 2"/>
-          <p:cNvSpPr/>
-          <p:nvPr/>
-        </p:nvSpPr>
-        <p:spPr>
-          <a:xfrm>
-            <a:off x="5349240" y="1783080"/>
-            <a:ext cx="6522415" cy="4663440"/>
-          </a:xfrm>
-          <a:prstGeom prst="rect">
-            <a:avLst/>
-          </a:prstGeom>
-          <a:noFill/>
-          <a:ln/>
-        </p:spPr>
-        <p:txBody>
-          <a:bodyPr wrap="square" lIns="0" tIns="0" rIns="0" bIns="0" rtlCol="0" anchor="t"/>
-          <a:lstStyle/>
-          <a:p>
-            <a:pPr algn="l" indent="0" marL="0">
-              <a:spcAft>
-                <a:spcPts val="800"/>
-              </a:spcAft>
-              <a:buNone/>
-            </a:pPr>
-            <a:r>
-              <a:rPr lang="en-US" sz="4000" dirty="0">
-                <a:solidFill>
-                  <a:srgbClr val="111111"/>
-                </a:solidFill>
-                <a:latin typeface="Times New Roman" pitchFamily="34" charset="0"/>
-                <a:ea typeface="Times New Roman" pitchFamily="34" charset="-122"/>
-                <a:cs typeface="Times New Roman" pitchFamily="34" charset="-120"/>
-              </a:rPr>
-              <a:t>How can volcanic areas produce electricity?</a:t>
-            </a:r>
-            <a:endParaRPr lang="en-US" sz="4000" dirty="0"/>
+              <a:t>A geothermal power station.</a:t>
+            </a:r>
+            <a:endParaRPr lang="en-US" sz="1800" dirty="0"/>
           </a:p>
         </p:txBody>
       </p:sp>
@@ -10405,7 +10890,7 @@
                 <a:ea typeface="Calibri" pitchFamily="34" charset="-122"/>
                 <a:cs typeface="Calibri" pitchFamily="34" charset="-120"/>
               </a:rPr>
-              <a:t>1. VOLCANOES AS A RESOURCE</a:t>
+              <a:t>1. RESOURCES</a:t>
             </a:r>
             <a:endParaRPr lang="en-US" sz="1400" dirty="0"/>
           </a:p>
@@ -10470,7 +10955,7 @@
                 <a:ea typeface="Times New Roman" pitchFamily="34" charset="-122"/>
                 <a:cs typeface="Times New Roman" pitchFamily="34" charset="-120"/>
               </a:rPr>
-              <a:t>Activity 2: Answer</a:t>
+              <a:t>Activity 2: Question</a:t>
             </a:r>
             <a:endParaRPr lang="en-US" sz="3600" dirty="0"/>
           </a:p>
@@ -10512,7 +10997,7 @@
                 <a:ea typeface="Times New Roman" pitchFamily="34" charset="-122"/>
                 <a:cs typeface="Times New Roman" pitchFamily="34" charset="-120"/>
               </a:rPr>
-              <a:t>Steam from hot rocks turns turbines (geothermal energy).</a:t>
+              <a:t>How can the heat of magma produce electricity?</a:t>
             </a:r>
             <a:endParaRPr lang="en-US" sz="4000" dirty="0"/>
           </a:p>
@@ -10624,54 +11109,15 @@
                 <a:ea typeface="Calibri" pitchFamily="34" charset="-122"/>
                 <a:cs typeface="Calibri" pitchFamily="34" charset="-120"/>
               </a:rPr>
-              <a:t>2. VOLCANOES AS A HAZARD</a:t>
+              <a:t>1. RESOURCES</a:t>
             </a:r>
             <a:endParaRPr lang="en-US" sz="1400" dirty="0"/>
-          </a:p>
-        </p:txBody>
-      </p:sp>
-      <p:sp>
-        <p:nvSpPr>
-          <p:cNvPr id="3" name="Text 1"/>
-          <p:cNvSpPr/>
-          <p:nvPr/>
-        </p:nvSpPr>
-        <p:spPr>
-          <a:xfrm>
-            <a:off x="457200" y="1005840"/>
-            <a:ext cx="11277295" cy="731520"/>
-          </a:xfrm>
-          <a:prstGeom prst="rect">
-            <a:avLst/>
-          </a:prstGeom>
-          <a:noFill/>
-          <a:ln/>
-        </p:spPr>
-        <p:txBody>
-          <a:bodyPr wrap="square" lIns="0" tIns="0" rIns="0" bIns="0" rtlCol="0" anchor="ctr"/>
-          <a:lstStyle/>
-          <a:p>
-            <a:pPr algn="ctr" indent="0" marL="0">
-              <a:buNone/>
-            </a:pPr>
-            <a:r>
-              <a:rPr lang="en-US" sz="3600" b="1" dirty="0">
-                <a:solidFill>
-                  <a:srgbClr val="990011"/>
-                </a:solidFill>
-                <a:latin typeface="Times New Roman" pitchFamily="34" charset="0"/>
-                <a:ea typeface="Times New Roman" pitchFamily="34" charset="-122"/>
-                <a:cs typeface="Times New Roman" pitchFamily="34" charset="-120"/>
-              </a:rPr>
-              <a:t>Activity 3</a:t>
-            </a:r>
-            <a:endParaRPr lang="en-US" sz="3600" dirty="0"/>
           </a:p>
         </p:txBody>
       </p:sp>
       <p:pic>
         <p:nvPicPr>
-          <p:cNvPr id="4" name="Image 0" descr="/home/claude/f4/img/v2/f4_lavahouse.jpg">    </p:cNvPr>
+          <p:cNvPr id="3" name="Image 0" descr="/home/claude/f4/img/minesec_sheet.png">    </p:cNvPr>
           <p:cNvPicPr>
             <a:picLocks noChangeAspect="1"/>
           </p:cNvPicPr>
@@ -10685,8 +11131,8 @@
         </p:blipFill>
         <p:spPr>
           <a:xfrm>
-            <a:off x="2246610" y="1783080"/>
-            <a:ext cx="7698475" cy="4270248"/>
+            <a:off x="0" y="658368"/>
+            <a:ext cx="5120640" cy="5833872"/>
           </a:xfrm>
           <a:prstGeom prst="rect">
             <a:avLst/>
@@ -10695,14 +11141,14 @@
       </p:pic>
       <p:sp>
         <p:nvSpPr>
-          <p:cNvPr id="5" name="Text 2"/>
+          <p:cNvPr id="4" name="Text 1"/>
           <p:cNvSpPr/>
           <p:nvPr/>
         </p:nvSpPr>
         <p:spPr>
           <a:xfrm>
-            <a:off x="457200" y="6089904"/>
-            <a:ext cx="11277295" cy="347472"/>
+            <a:off x="5349240" y="1005840"/>
+            <a:ext cx="6522415" cy="731520"/>
           </a:xfrm>
           <a:prstGeom prst="rect">
             <a:avLst/>
@@ -10711,24 +11157,68 @@
           <a:ln/>
         </p:spPr>
         <p:txBody>
-          <a:bodyPr wrap="square" lIns="0" tIns="0" rIns="0" bIns="0" rtlCol="0" anchor="ctr"/>
+          <a:bodyPr wrap="square" lIns="0" tIns="0" rIns="0" bIns="0" rtlCol="0" anchor="ctr">
+            <a:normAutofit/>
+          </a:bodyPr>
           <a:lstStyle/>
           <a:p>
             <a:pPr algn="ctr" indent="0" marL="0">
               <a:buNone/>
             </a:pPr>
             <a:r>
-              <a:rPr lang="en-US" sz="1800" i="1" dirty="0">
-                <a:solidFill>
-                  <a:srgbClr val="555555"/>
+              <a:rPr lang="en-US" sz="3600" b="1" dirty="0">
+                <a:solidFill>
+                  <a:srgbClr val="990011"/>
                 </a:solidFill>
                 <a:latin typeface="Times New Roman" pitchFamily="34" charset="0"/>
                 <a:ea typeface="Times New Roman" pitchFamily="34" charset="-122"/>
                 <a:cs typeface="Times New Roman" pitchFamily="34" charset="-120"/>
               </a:rPr>
-              <a:t>Lava has covered a road.</a:t>
-            </a:r>
-            <a:endParaRPr lang="en-US" sz="1800" dirty="0"/>
+              <a:t>Activity 2: Answer</a:t>
+            </a:r>
+            <a:endParaRPr lang="en-US" sz="3600" dirty="0"/>
+          </a:p>
+        </p:txBody>
+      </p:sp>
+      <p:sp>
+        <p:nvSpPr>
+          <p:cNvPr id="5" name="Text 2"/>
+          <p:cNvSpPr/>
+          <p:nvPr/>
+        </p:nvSpPr>
+        <p:spPr>
+          <a:xfrm>
+            <a:off x="5349240" y="1783080"/>
+            <a:ext cx="6522415" cy="4663440"/>
+          </a:xfrm>
+          <a:prstGeom prst="rect">
+            <a:avLst/>
+          </a:prstGeom>
+          <a:noFill/>
+          <a:ln/>
+        </p:spPr>
+        <p:txBody>
+          <a:bodyPr wrap="square" lIns="0" tIns="0" rIns="0" bIns="0" rtlCol="0" anchor="t"/>
+          <a:lstStyle/>
+          <a:p>
+            <a:pPr algn="l" indent="0" marL="0">
+              <a:spcAft>
+                <a:spcPts val="800"/>
+              </a:spcAft>
+              <a:buNone/>
+            </a:pPr>
+            <a:r>
+              <a:rPr lang="en-US" sz="4000" dirty="0">
+                <a:solidFill>
+                  <a:srgbClr val="111111"/>
+                </a:solidFill>
+                <a:latin typeface="Times New Roman" pitchFamily="34" charset="0"/>
+                <a:ea typeface="Times New Roman" pitchFamily="34" charset="-122"/>
+                <a:cs typeface="Times New Roman" pitchFamily="34" charset="-120"/>
+              </a:rPr>
+              <a:t>It heats underground water into steam that turns turbines.</a:t>
+            </a:r>
+            <a:endParaRPr lang="en-US" sz="4000" dirty="0"/>
           </a:p>
         </p:txBody>
       </p:sp>
@@ -10838,15 +11328,54 @@
                 <a:ea typeface="Calibri" pitchFamily="34" charset="-122"/>
                 <a:cs typeface="Calibri" pitchFamily="34" charset="-120"/>
               </a:rPr>
-              <a:t>2. VOLCANOES AS A HAZARD</a:t>
+              <a:t>2. HAZARDS</a:t>
             </a:r>
             <a:endParaRPr lang="en-US" sz="1400" dirty="0"/>
+          </a:p>
+        </p:txBody>
+      </p:sp>
+      <p:sp>
+        <p:nvSpPr>
+          <p:cNvPr id="3" name="Text 1"/>
+          <p:cNvSpPr/>
+          <p:nvPr/>
+        </p:nvSpPr>
+        <p:spPr>
+          <a:xfrm>
+            <a:off x="457200" y="1005840"/>
+            <a:ext cx="11277295" cy="731520"/>
+          </a:xfrm>
+          <a:prstGeom prst="rect">
+            <a:avLst/>
+          </a:prstGeom>
+          <a:noFill/>
+          <a:ln/>
+        </p:spPr>
+        <p:txBody>
+          <a:bodyPr wrap="square" lIns="0" tIns="0" rIns="0" bIns="0" rtlCol="0" anchor="ctr"/>
+          <a:lstStyle/>
+          <a:p>
+            <a:pPr algn="ctr" indent="0" marL="0">
+              <a:buNone/>
+            </a:pPr>
+            <a:r>
+              <a:rPr lang="en-US" sz="3600" b="1" dirty="0">
+                <a:solidFill>
+                  <a:srgbClr val="990011"/>
+                </a:solidFill>
+                <a:latin typeface="Times New Roman" pitchFamily="34" charset="0"/>
+                <a:ea typeface="Times New Roman" pitchFamily="34" charset="-122"/>
+                <a:cs typeface="Times New Roman" pitchFamily="34" charset="-120"/>
+              </a:rPr>
+              <a:t>Activity 3</a:t>
+            </a:r>
+            <a:endParaRPr lang="en-US" sz="3600" dirty="0"/>
           </a:p>
         </p:txBody>
       </p:sp>
       <p:pic>
         <p:nvPicPr>
-          <p:cNvPr id="3" name="Image 0" descr="/home/claude/f4/img/minesec_sheet.png">    </p:cNvPr>
+          <p:cNvPr id="4" name="Image 0" descr="/home/claude/f4/img/v2/f4_lavahouse.jpg">    </p:cNvPr>
           <p:cNvPicPr>
             <a:picLocks noChangeAspect="1"/>
           </p:cNvPicPr>
@@ -10860,8 +11389,8 @@
         </p:blipFill>
         <p:spPr>
           <a:xfrm>
-            <a:off x="0" y="658368"/>
-            <a:ext cx="5120640" cy="5833872"/>
+            <a:off x="2246610" y="1783080"/>
+            <a:ext cx="7698475" cy="4270248"/>
           </a:xfrm>
           <a:prstGeom prst="rect">
             <a:avLst/>
@@ -10870,14 +11399,14 @@
       </p:pic>
       <p:sp>
         <p:nvSpPr>
-          <p:cNvPr id="4" name="Text 1"/>
+          <p:cNvPr id="5" name="Text 2"/>
           <p:cNvSpPr/>
           <p:nvPr/>
         </p:nvSpPr>
         <p:spPr>
           <a:xfrm>
-            <a:off x="5349240" y="1005840"/>
-            <a:ext cx="6522415" cy="731520"/>
+            <a:off x="457200" y="6089904"/>
+            <a:ext cx="11277295" cy="347472"/>
           </a:xfrm>
           <a:prstGeom prst="rect">
             <a:avLst/>
@@ -10886,68 +11415,24 @@
           <a:ln/>
         </p:spPr>
         <p:txBody>
-          <a:bodyPr wrap="square" lIns="0" tIns="0" rIns="0" bIns="0" rtlCol="0" anchor="ctr">
-            <a:normAutofit/>
-          </a:bodyPr>
+          <a:bodyPr wrap="square" lIns="0" tIns="0" rIns="0" bIns="0" rtlCol="0" anchor="ctr"/>
           <a:lstStyle/>
           <a:p>
             <a:pPr algn="ctr" indent="0" marL="0">
               <a:buNone/>
             </a:pPr>
             <a:r>
-              <a:rPr lang="en-US" sz="3600" b="1" dirty="0">
-                <a:solidFill>
-                  <a:srgbClr val="990011"/>
+              <a:rPr lang="en-US" sz="1800" i="1" dirty="0">
+                <a:solidFill>
+                  <a:srgbClr val="555555"/>
                 </a:solidFill>
                 <a:latin typeface="Times New Roman" pitchFamily="34" charset="0"/>
                 <a:ea typeface="Times New Roman" pitchFamily="34" charset="-122"/>
                 <a:cs typeface="Times New Roman" pitchFamily="34" charset="-120"/>
               </a:rPr>
-              <a:t>Activity 3: Question</a:t>
-            </a:r>
-            <a:endParaRPr lang="en-US" sz="3600" dirty="0"/>
-          </a:p>
-        </p:txBody>
-      </p:sp>
-      <p:sp>
-        <p:nvSpPr>
-          <p:cNvPr id="5" name="Text 2"/>
-          <p:cNvSpPr/>
-          <p:nvPr/>
-        </p:nvSpPr>
-        <p:spPr>
-          <a:xfrm>
-            <a:off x="5349240" y="1783080"/>
-            <a:ext cx="6522415" cy="4663440"/>
-          </a:xfrm>
-          <a:prstGeom prst="rect">
-            <a:avLst/>
-          </a:prstGeom>
-          <a:noFill/>
-          <a:ln/>
-        </p:spPr>
-        <p:txBody>
-          <a:bodyPr wrap="square" lIns="0" tIns="0" rIns="0" bIns="0" rtlCol="0" anchor="t"/>
-          <a:lstStyle/>
-          <a:p>
-            <a:pPr algn="l" indent="0" marL="0">
-              <a:spcAft>
-                <a:spcPts val="800"/>
-              </a:spcAft>
-              <a:buNone/>
-            </a:pPr>
-            <a:r>
-              <a:rPr lang="en-US" sz="4000" dirty="0">
-                <a:solidFill>
-                  <a:srgbClr val="111111"/>
-                </a:solidFill>
-                <a:latin typeface="Times New Roman" pitchFamily="34" charset="0"/>
-                <a:ea typeface="Times New Roman" pitchFamily="34" charset="-122"/>
-                <a:cs typeface="Times New Roman" pitchFamily="34" charset="-120"/>
-              </a:rPr>
-              <a:t>What damage can lava flows cause?</a:t>
-            </a:r>
-            <a:endParaRPr lang="en-US" sz="4000" dirty="0"/>
+              <a:t>A house destroyed by lava.</a:t>
+            </a:r>
+            <a:endParaRPr lang="en-US" sz="1800" dirty="0"/>
           </a:p>
         </p:txBody>
       </p:sp>
@@ -11057,7 +11542,7 @@
                 <a:ea typeface="Calibri" pitchFamily="34" charset="-122"/>
                 <a:cs typeface="Calibri" pitchFamily="34" charset="-120"/>
               </a:rPr>
-              <a:t>2. VOLCANOES AS A HAZARD</a:t>
+              <a:t>2. HAZARDS</a:t>
             </a:r>
             <a:endParaRPr lang="en-US" sz="1400" dirty="0"/>
           </a:p>
@@ -11122,7 +11607,7 @@
                 <a:ea typeface="Times New Roman" pitchFamily="34" charset="-122"/>
                 <a:cs typeface="Times New Roman" pitchFamily="34" charset="-120"/>
               </a:rPr>
-              <a:t>Activity 3: Answer</a:t>
+              <a:t>Activity 3: Question</a:t>
             </a:r>
             <a:endParaRPr lang="en-US" sz="3600" dirty="0"/>
           </a:p>
@@ -11164,7 +11649,7 @@
                 <a:ea typeface="Times New Roman" pitchFamily="34" charset="-122"/>
                 <a:cs typeface="Times New Roman" pitchFamily="34" charset="-120"/>
               </a:rPr>
-              <a:t>They burn and bury farms, roads and houses.</a:t>
+              <a:t>Which volcanic hazard is the most deadly?</a:t>
             </a:r>
             <a:endParaRPr lang="en-US" sz="4000" dirty="0"/>
           </a:p>
@@ -11276,54 +11761,15 @@
                 <a:ea typeface="Calibri" pitchFamily="34" charset="-122"/>
                 <a:cs typeface="Calibri" pitchFamily="34" charset="-120"/>
               </a:rPr>
-              <a:t>2. VOLCANOES AS A HAZARD</a:t>
+              <a:t>2. HAZARDS</a:t>
             </a:r>
             <a:endParaRPr lang="en-US" sz="1400" dirty="0"/>
-          </a:p>
-        </p:txBody>
-      </p:sp>
-      <p:sp>
-        <p:nvSpPr>
-          <p:cNvPr id="3" name="Text 1"/>
-          <p:cNvSpPr/>
-          <p:nvPr/>
-        </p:nvSpPr>
-        <p:spPr>
-          <a:xfrm>
-            <a:off x="457200" y="1005840"/>
-            <a:ext cx="11277295" cy="731520"/>
-          </a:xfrm>
-          <a:prstGeom prst="rect">
-            <a:avLst/>
-          </a:prstGeom>
-          <a:noFill/>
-          <a:ln/>
-        </p:spPr>
-        <p:txBody>
-          <a:bodyPr wrap="square" lIns="0" tIns="0" rIns="0" bIns="0" rtlCol="0" anchor="ctr"/>
-          <a:lstStyle/>
-          <a:p>
-            <a:pPr algn="ctr" indent="0" marL="0">
-              <a:buNone/>
-            </a:pPr>
-            <a:r>
-              <a:rPr lang="en-US" sz="3600" b="1" dirty="0">
-                <a:solidFill>
-                  <a:srgbClr val="990011"/>
-                </a:solidFill>
-                <a:latin typeface="Times New Roman" pitchFamily="34" charset="0"/>
-                <a:ea typeface="Times New Roman" pitchFamily="34" charset="-122"/>
-                <a:cs typeface="Times New Roman" pitchFamily="34" charset="-120"/>
-              </a:rPr>
-              <a:t>Activity 4</a:t>
-            </a:r>
-            <a:endParaRPr lang="en-US" sz="3600" dirty="0"/>
           </a:p>
         </p:txBody>
       </p:sp>
       <p:pic>
         <p:nvPicPr>
-          <p:cNvPr id="4" name="Image 0" descr="/home/claude/f4/img/v2/f4_nyos.jpg">    </p:cNvPr>
+          <p:cNvPr id="3" name="Image 0" descr="/home/claude/f4/img/minesec_sheet.png">    </p:cNvPr>
           <p:cNvPicPr>
             <a:picLocks noChangeAspect="1"/>
           </p:cNvPicPr>
@@ -11337,8 +11783,8 @@
         </p:blipFill>
         <p:spPr>
           <a:xfrm>
-            <a:off x="2246610" y="1783080"/>
-            <a:ext cx="7698475" cy="4270248"/>
+            <a:off x="0" y="658368"/>
+            <a:ext cx="5120640" cy="5833872"/>
           </a:xfrm>
           <a:prstGeom prst="rect">
             <a:avLst/>
@@ -11347,14 +11793,14 @@
       </p:pic>
       <p:sp>
         <p:nvSpPr>
-          <p:cNvPr id="5" name="Text 2"/>
+          <p:cNvPr id="4" name="Text 1"/>
           <p:cNvSpPr/>
           <p:nvPr/>
         </p:nvSpPr>
         <p:spPr>
           <a:xfrm>
-            <a:off x="457200" y="6089904"/>
-            <a:ext cx="11277295" cy="347472"/>
+            <a:off x="5349240" y="1005840"/>
+            <a:ext cx="6522415" cy="731520"/>
           </a:xfrm>
           <a:prstGeom prst="rect">
             <a:avLst/>
@@ -11363,24 +11809,68 @@
           <a:ln/>
         </p:spPr>
         <p:txBody>
-          <a:bodyPr wrap="square" lIns="0" tIns="0" rIns="0" bIns="0" rtlCol="0" anchor="ctr"/>
+          <a:bodyPr wrap="square" lIns="0" tIns="0" rIns="0" bIns="0" rtlCol="0" anchor="ctr">
+            <a:normAutofit/>
+          </a:bodyPr>
           <a:lstStyle/>
           <a:p>
             <a:pPr algn="ctr" indent="0" marL="0">
               <a:buNone/>
             </a:pPr>
             <a:r>
-              <a:rPr lang="en-US" sz="1800" i="1" dirty="0">
-                <a:solidFill>
-                  <a:srgbClr val="555555"/>
+              <a:rPr lang="en-US" sz="3600" b="1" dirty="0">
+                <a:solidFill>
+                  <a:srgbClr val="990011"/>
                 </a:solidFill>
                 <a:latin typeface="Times New Roman" pitchFamily="34" charset="0"/>
                 <a:ea typeface="Times New Roman" pitchFamily="34" charset="-122"/>
                 <a:cs typeface="Times New Roman" pitchFamily="34" charset="-120"/>
               </a:rPr>
-              <a:t>Lake Nyos, North-West Region.</a:t>
-            </a:r>
-            <a:endParaRPr lang="en-US" sz="1800" dirty="0"/>
+              <a:t>Activity 3: Answer</a:t>
+            </a:r>
+            <a:endParaRPr lang="en-US" sz="3600" dirty="0"/>
+          </a:p>
+        </p:txBody>
+      </p:sp>
+      <p:sp>
+        <p:nvSpPr>
+          <p:cNvPr id="5" name="Text 2"/>
+          <p:cNvSpPr/>
+          <p:nvPr/>
+        </p:nvSpPr>
+        <p:spPr>
+          <a:xfrm>
+            <a:off x="5349240" y="1783080"/>
+            <a:ext cx="6522415" cy="4663440"/>
+          </a:xfrm>
+          <a:prstGeom prst="rect">
+            <a:avLst/>
+          </a:prstGeom>
+          <a:noFill/>
+          <a:ln/>
+        </p:spPr>
+        <p:txBody>
+          <a:bodyPr wrap="square" lIns="0" tIns="0" rIns="0" bIns="0" rtlCol="0" anchor="t"/>
+          <a:lstStyle/>
+          <a:p>
+            <a:pPr algn="l" indent="0" marL="0">
+              <a:spcAft>
+                <a:spcPts val="800"/>
+              </a:spcAft>
+              <a:buNone/>
+            </a:pPr>
+            <a:r>
+              <a:rPr lang="en-US" sz="4000" dirty="0">
+                <a:solidFill>
+                  <a:srgbClr val="111111"/>
+                </a:solidFill>
+                <a:latin typeface="Times New Roman" pitchFamily="34" charset="0"/>
+                <a:ea typeface="Times New Roman" pitchFamily="34" charset="-122"/>
+                <a:cs typeface="Times New Roman" pitchFamily="34" charset="-120"/>
+              </a:rPr>
+              <a:t>The pyroclastic flow.</a:t>
+            </a:r>
+            <a:endParaRPr lang="en-US" sz="4000" dirty="0"/>
           </a:p>
         </p:txBody>
       </p:sp>
@@ -11490,15 +11980,54 @@
                 <a:ea typeface="Calibri" pitchFamily="34" charset="-122"/>
                 <a:cs typeface="Calibri" pitchFamily="34" charset="-120"/>
               </a:rPr>
-              <a:t>2. VOLCANOES AS A HAZARD</a:t>
+              <a:t>2. HAZARDS</a:t>
             </a:r>
             <a:endParaRPr lang="en-US" sz="1400" dirty="0"/>
+          </a:p>
+        </p:txBody>
+      </p:sp>
+      <p:sp>
+        <p:nvSpPr>
+          <p:cNvPr id="3" name="Text 1"/>
+          <p:cNvSpPr/>
+          <p:nvPr/>
+        </p:nvSpPr>
+        <p:spPr>
+          <a:xfrm>
+            <a:off x="457200" y="1005840"/>
+            <a:ext cx="11277295" cy="731520"/>
+          </a:xfrm>
+          <a:prstGeom prst="rect">
+            <a:avLst/>
+          </a:prstGeom>
+          <a:noFill/>
+          <a:ln/>
+        </p:spPr>
+        <p:txBody>
+          <a:bodyPr wrap="square" lIns="0" tIns="0" rIns="0" bIns="0" rtlCol="0" anchor="ctr"/>
+          <a:lstStyle/>
+          <a:p>
+            <a:pPr algn="ctr" indent="0" marL="0">
+              <a:buNone/>
+            </a:pPr>
+            <a:r>
+              <a:rPr lang="en-US" sz="3600" b="1" dirty="0">
+                <a:solidFill>
+                  <a:srgbClr val="990011"/>
+                </a:solidFill>
+                <a:latin typeface="Times New Roman" pitchFamily="34" charset="0"/>
+                <a:ea typeface="Times New Roman" pitchFamily="34" charset="-122"/>
+                <a:cs typeface="Times New Roman" pitchFamily="34" charset="-120"/>
+              </a:rPr>
+              <a:t>Activity 4</a:t>
+            </a:r>
+            <a:endParaRPr lang="en-US" sz="3600" dirty="0"/>
           </a:p>
         </p:txBody>
       </p:sp>
       <p:pic>
         <p:nvPicPr>
-          <p:cNvPr id="3" name="Image 0" descr="/home/claude/f4/img/minesec_sheet.png">    </p:cNvPr>
+          <p:cNvPr id="4" name="Image 0" descr="/home/claude/f4/img/v2/f4_nyos.jpg">    </p:cNvPr>
           <p:cNvPicPr>
             <a:picLocks noChangeAspect="1"/>
           </p:cNvPicPr>
@@ -11512,8 +12041,8 @@
         </p:blipFill>
         <p:spPr>
           <a:xfrm>
-            <a:off x="0" y="658368"/>
-            <a:ext cx="5120640" cy="5833872"/>
+            <a:off x="2246610" y="1783080"/>
+            <a:ext cx="7698475" cy="4270248"/>
           </a:xfrm>
           <a:prstGeom prst="rect">
             <a:avLst/>
@@ -11522,14 +12051,14 @@
       </p:pic>
       <p:sp>
         <p:nvSpPr>
-          <p:cNvPr id="4" name="Text 1"/>
+          <p:cNvPr id="5" name="Text 2"/>
           <p:cNvSpPr/>
           <p:nvPr/>
         </p:nvSpPr>
         <p:spPr>
           <a:xfrm>
-            <a:off x="5349240" y="1005840"/>
-            <a:ext cx="6522415" cy="731520"/>
+            <a:off x="457200" y="6089904"/>
+            <a:ext cx="11277295" cy="347472"/>
           </a:xfrm>
           <a:prstGeom prst="rect">
             <a:avLst/>
@@ -11538,68 +12067,24 @@
           <a:ln/>
         </p:spPr>
         <p:txBody>
-          <a:bodyPr wrap="square" lIns="0" tIns="0" rIns="0" bIns="0" rtlCol="0" anchor="ctr">
-            <a:normAutofit/>
-          </a:bodyPr>
+          <a:bodyPr wrap="square" lIns="0" tIns="0" rIns="0" bIns="0" rtlCol="0" anchor="ctr"/>
           <a:lstStyle/>
           <a:p>
             <a:pPr algn="ctr" indent="0" marL="0">
               <a:buNone/>
             </a:pPr>
             <a:r>
-              <a:rPr lang="en-US" sz="3600" b="1" dirty="0">
-                <a:solidFill>
-                  <a:srgbClr val="990011"/>
+              <a:rPr lang="en-US" sz="1800" i="1" dirty="0">
+                <a:solidFill>
+                  <a:srgbClr val="555555"/>
                 </a:solidFill>
                 <a:latin typeface="Times New Roman" pitchFamily="34" charset="0"/>
                 <a:ea typeface="Times New Roman" pitchFamily="34" charset="-122"/>
                 <a:cs typeface="Times New Roman" pitchFamily="34" charset="-120"/>
               </a:rPr>
-              <a:t>Activity 4: Question</a:t>
-            </a:r>
-            <a:endParaRPr lang="en-US" sz="3600" dirty="0"/>
-          </a:p>
-        </p:txBody>
-      </p:sp>
-      <p:sp>
-        <p:nvSpPr>
-          <p:cNvPr id="5" name="Text 2"/>
-          <p:cNvSpPr/>
-          <p:nvPr/>
-        </p:nvSpPr>
-        <p:spPr>
-          <a:xfrm>
-            <a:off x="5349240" y="1783080"/>
-            <a:ext cx="6522415" cy="4663440"/>
-          </a:xfrm>
-          <a:prstGeom prst="rect">
-            <a:avLst/>
-          </a:prstGeom>
-          <a:noFill/>
-          <a:ln/>
-        </p:spPr>
-        <p:txBody>
-          <a:bodyPr wrap="square" lIns="0" tIns="0" rIns="0" bIns="0" rtlCol="0" anchor="t"/>
-          <a:lstStyle/>
-          <a:p>
-            <a:pPr algn="l" indent="0" marL="0">
-              <a:spcAft>
-                <a:spcPts val="800"/>
-              </a:spcAft>
-              <a:buNone/>
-            </a:pPr>
-            <a:r>
-              <a:rPr lang="en-US" sz="4000" dirty="0">
-                <a:solidFill>
-                  <a:srgbClr val="111111"/>
-                </a:solidFill>
-                <a:latin typeface="Times New Roman" pitchFamily="34" charset="0"/>
-                <a:ea typeface="Times New Roman" pitchFamily="34" charset="-122"/>
-                <a:cs typeface="Times New Roman" pitchFamily="34" charset="-120"/>
-              </a:rPr>
-              <a:t>What happened at Lake Nyos in 1986?</a:t>
-            </a:r>
-            <a:endParaRPr lang="en-US" sz="4000" dirty="0"/>
+              <a:t>Lake Nyos.</a:t>
+            </a:r>
+            <a:endParaRPr lang="en-US" sz="1800" dirty="0"/>
           </a:p>
         </p:txBody>
       </p:sp>
@@ -12280,7 +12765,7 @@
                           <a:ea typeface="Calibri" pitchFamily="34" charset="-122"/>
                           <a:cs typeface="Calibri" pitchFamily="34" charset="-120"/>
                         </a:rPr>
-                        <a:t>Resource, hazard, mitigation, adaptation.</a:t>
+                        <a:t>Volcanic resource, volcanic hazard, andosol, geothermal energy, pyroclastic flow, lahar, limnic eruption, monitoring, mitigation, adaptation.</a:t>
                       </a:r>
                       <a:endParaRPr lang="en-US" sz="1700" dirty="0">
                         <a:latin typeface="Calibri" charset="0"/>
@@ -12418,7 +12903,7 @@
                           <a:ea typeface="Calibri" pitchFamily="34" charset="-122"/>
                           <a:cs typeface="Calibri" pitchFamily="34" charset="-120"/>
                         </a:rPr>
-                        <a:t>Volcanoes as a resource; volcanoes as a hazard; adaptation and mitigation.</a:t>
+                        <a:t>Volcanoes as resources (soils, tourism, energy, materials, minerals); volcanoes as hazards (lava, ash, pyroclastic flows, lahars, gases, Lake Nyos); adaptation and mitigation.</a:t>
                       </a:r>
                       <a:endParaRPr lang="en-US" sz="1700" dirty="0">
                         <a:latin typeface="Calibri" charset="0"/>
@@ -12556,7 +13041,7 @@
                           <a:ea typeface="Calibri" pitchFamily="34" charset="-122"/>
                           <a:cs typeface="Calibri" pitchFamily="34" charset="-120"/>
                         </a:rPr>
-                        <a:t>Learners are able to weigh the benefits and dangers of volcanoes and propose safety measures.</a:t>
+                        <a:t>Learners are able to explain why people live near volcanoes and propose measures to reduce volcanic risks in Cameroon.</a:t>
                       </a:r>
                       <a:endParaRPr lang="en-US" sz="1700" dirty="0">
                         <a:latin typeface="Calibri" charset="0"/>
@@ -12718,7 +13203,7 @@
                 <a:ea typeface="Calibri" pitchFamily="34" charset="-122"/>
                 <a:cs typeface="Calibri" pitchFamily="34" charset="-120"/>
               </a:rPr>
-              <a:t>2. VOLCANOES AS A HAZARD</a:t>
+              <a:t>2. HAZARDS</a:t>
             </a:r>
             <a:endParaRPr lang="en-US" sz="1400" dirty="0"/>
           </a:p>
@@ -12783,7 +13268,7 @@
                 <a:ea typeface="Times New Roman" pitchFamily="34" charset="-122"/>
                 <a:cs typeface="Times New Roman" pitchFamily="34" charset="-120"/>
               </a:rPr>
-              <a:t>Activity 4: Answer</a:t>
+              <a:t>Activity 4: Question</a:t>
             </a:r>
             <a:endParaRPr lang="en-US" sz="3600" dirty="0"/>
           </a:p>
@@ -12825,7 +13310,7 @@
                 <a:ea typeface="Times New Roman" pitchFamily="34" charset="-122"/>
                 <a:cs typeface="Times New Roman" pitchFamily="34" charset="-120"/>
               </a:rPr>
-              <a:t>A cloud of carbon dioxide killed about 1,700 people and many animals.</a:t>
+              <a:t>What killed about 1,700 people at Lake Nyos in 1986?</a:t>
             </a:r>
             <a:endParaRPr lang="en-US" sz="4000" dirty="0"/>
           </a:p>
@@ -12937,54 +13422,15 @@
                 <a:ea typeface="Calibri" pitchFamily="34" charset="-122"/>
                 <a:cs typeface="Calibri" pitchFamily="34" charset="-120"/>
               </a:rPr>
-              <a:t>3. ADAPTATION AND MITIGATION</a:t>
+              <a:t>2. HAZARDS</a:t>
             </a:r>
             <a:endParaRPr lang="en-US" sz="1400" dirty="0"/>
-          </a:p>
-        </p:txBody>
-      </p:sp>
-      <p:sp>
-        <p:nvSpPr>
-          <p:cNvPr id="3" name="Text 1"/>
-          <p:cNvSpPr/>
-          <p:nvPr/>
-        </p:nvSpPr>
-        <p:spPr>
-          <a:xfrm>
-            <a:off x="457200" y="1005840"/>
-            <a:ext cx="11277295" cy="731520"/>
-          </a:xfrm>
-          <a:prstGeom prst="rect">
-            <a:avLst/>
-          </a:prstGeom>
-          <a:noFill/>
-          <a:ln/>
-        </p:spPr>
-        <p:txBody>
-          <a:bodyPr wrap="square" lIns="0" tIns="0" rIns="0" bIns="0" rtlCol="0" anchor="ctr"/>
-          <a:lstStyle/>
-          <a:p>
-            <a:pPr algn="ctr" indent="0" marL="0">
-              <a:buNone/>
-            </a:pPr>
-            <a:r>
-              <a:rPr lang="en-US" sz="3600" b="1" dirty="0">
-                <a:solidFill>
-                  <a:srgbClr val="990011"/>
-                </a:solidFill>
-                <a:latin typeface="Times New Roman" pitchFamily="34" charset="0"/>
-                <a:ea typeface="Times New Roman" pitchFamily="34" charset="-122"/>
-                <a:cs typeface="Times New Roman" pitchFamily="34" charset="-120"/>
-              </a:rPr>
-              <a:t>Activity 5</a:t>
-            </a:r>
-            <a:endParaRPr lang="en-US" sz="3600" dirty="0"/>
           </a:p>
         </p:txBody>
       </p:sp>
       <p:pic>
         <p:nvPicPr>
-          <p:cNvPr id="4" name="Image 0" descr="/home/claude/f4/img/v2/lsa_volcmonitor.jpg">    </p:cNvPr>
+          <p:cNvPr id="3" name="Image 0" descr="/home/claude/f4/img/minesec_sheet.png">    </p:cNvPr>
           <p:cNvPicPr>
             <a:picLocks noChangeAspect="1"/>
           </p:cNvPicPr>
@@ -12998,8 +13444,8 @@
         </p:blipFill>
         <p:spPr>
           <a:xfrm>
-            <a:off x="2246610" y="1783080"/>
-            <a:ext cx="7698475" cy="4270248"/>
+            <a:off x="0" y="658368"/>
+            <a:ext cx="5120640" cy="5833872"/>
           </a:xfrm>
           <a:prstGeom prst="rect">
             <a:avLst/>
@@ -13008,14 +13454,14 @@
       </p:pic>
       <p:sp>
         <p:nvSpPr>
-          <p:cNvPr id="5" name="Text 2"/>
+          <p:cNvPr id="4" name="Text 1"/>
           <p:cNvSpPr/>
           <p:nvPr/>
         </p:nvSpPr>
         <p:spPr>
           <a:xfrm>
-            <a:off x="457200" y="6089904"/>
-            <a:ext cx="11277295" cy="347472"/>
+            <a:off x="5349240" y="1005840"/>
+            <a:ext cx="6522415" cy="731520"/>
           </a:xfrm>
           <a:prstGeom prst="rect">
             <a:avLst/>
@@ -13024,24 +13470,68 @@
           <a:ln/>
         </p:spPr>
         <p:txBody>
-          <a:bodyPr wrap="square" lIns="0" tIns="0" rIns="0" bIns="0" rtlCol="0" anchor="ctr"/>
+          <a:bodyPr wrap="square" lIns="0" tIns="0" rIns="0" bIns="0" rtlCol="0" anchor="ctr">
+            <a:normAutofit/>
+          </a:bodyPr>
           <a:lstStyle/>
           <a:p>
             <a:pPr algn="ctr" indent="0" marL="0">
               <a:buNone/>
             </a:pPr>
             <a:r>
-              <a:rPr lang="en-US" sz="1800" i="1" dirty="0">
-                <a:solidFill>
-                  <a:srgbClr val="555555"/>
+              <a:rPr lang="en-US" sz="3600" b="1" dirty="0">
+                <a:solidFill>
+                  <a:srgbClr val="990011"/>
                 </a:solidFill>
                 <a:latin typeface="Times New Roman" pitchFamily="34" charset="0"/>
                 <a:ea typeface="Times New Roman" pitchFamily="34" charset="-122"/>
                 <a:cs typeface="Times New Roman" pitchFamily="34" charset="-120"/>
               </a:rPr>
-              <a:t>The Hawaiian Volcano Observatory, where scientists watch Kilauea.</a:t>
-            </a:r>
-            <a:endParaRPr lang="en-US" sz="1800" dirty="0"/>
+              <a:t>Activity 4: Answer</a:t>
+            </a:r>
+            <a:endParaRPr lang="en-US" sz="3600" dirty="0"/>
+          </a:p>
+        </p:txBody>
+      </p:sp>
+      <p:sp>
+        <p:nvSpPr>
+          <p:cNvPr id="5" name="Text 2"/>
+          <p:cNvSpPr/>
+          <p:nvPr/>
+        </p:nvSpPr>
+        <p:spPr>
+          <a:xfrm>
+            <a:off x="5349240" y="1783080"/>
+            <a:ext cx="6522415" cy="4663440"/>
+          </a:xfrm>
+          <a:prstGeom prst="rect">
+            <a:avLst/>
+          </a:prstGeom>
+          <a:noFill/>
+          <a:ln/>
+        </p:spPr>
+        <p:txBody>
+          <a:bodyPr wrap="square" lIns="0" tIns="0" rIns="0" bIns="0" rtlCol="0" anchor="t"/>
+          <a:lstStyle/>
+          <a:p>
+            <a:pPr algn="l" indent="0" marL="0">
+              <a:spcAft>
+                <a:spcPts val="800"/>
+              </a:spcAft>
+              <a:buNone/>
+            </a:pPr>
+            <a:r>
+              <a:rPr lang="en-US" sz="4000" dirty="0">
+                <a:solidFill>
+                  <a:srgbClr val="111111"/>
+                </a:solidFill>
+                <a:latin typeface="Times New Roman" pitchFamily="34" charset="0"/>
+                <a:ea typeface="Times New Roman" pitchFamily="34" charset="-122"/>
+                <a:cs typeface="Times New Roman" pitchFamily="34" charset="-120"/>
+              </a:rPr>
+              <a:t>A sudden release of carbon dioxide gas from the lake.</a:t>
+            </a:r>
+            <a:endParaRPr lang="en-US" sz="4000" dirty="0"/>
           </a:p>
         </p:txBody>
       </p:sp>
@@ -13151,15 +13641,54 @@
                 <a:ea typeface="Calibri" pitchFamily="34" charset="-122"/>
                 <a:cs typeface="Calibri" pitchFamily="34" charset="-120"/>
               </a:rPr>
-              <a:t>3. ADAPTATION AND MITIGATION</a:t>
+              <a:t>3. MITIGATION</a:t>
             </a:r>
             <a:endParaRPr lang="en-US" sz="1400" dirty="0"/>
+          </a:p>
+        </p:txBody>
+      </p:sp>
+      <p:sp>
+        <p:nvSpPr>
+          <p:cNvPr id="3" name="Text 1"/>
+          <p:cNvSpPr/>
+          <p:nvPr/>
+        </p:nvSpPr>
+        <p:spPr>
+          <a:xfrm>
+            <a:off x="457200" y="1005840"/>
+            <a:ext cx="11277295" cy="731520"/>
+          </a:xfrm>
+          <a:prstGeom prst="rect">
+            <a:avLst/>
+          </a:prstGeom>
+          <a:noFill/>
+          <a:ln/>
+        </p:spPr>
+        <p:txBody>
+          <a:bodyPr wrap="square" lIns="0" tIns="0" rIns="0" bIns="0" rtlCol="0" anchor="ctr"/>
+          <a:lstStyle/>
+          <a:p>
+            <a:pPr algn="ctr" indent="0" marL="0">
+              <a:buNone/>
+            </a:pPr>
+            <a:r>
+              <a:rPr lang="en-US" sz="3600" b="1" dirty="0">
+                <a:solidFill>
+                  <a:srgbClr val="990011"/>
+                </a:solidFill>
+                <a:latin typeface="Times New Roman" pitchFamily="34" charset="0"/>
+                <a:ea typeface="Times New Roman" pitchFamily="34" charset="-122"/>
+                <a:cs typeface="Times New Roman" pitchFamily="34" charset="-120"/>
+              </a:rPr>
+              <a:t>Activity 5</a:t>
+            </a:r>
+            <a:endParaRPr lang="en-US" sz="3600" dirty="0"/>
           </a:p>
         </p:txBody>
       </p:sp>
       <p:pic>
         <p:nvPicPr>
-          <p:cNvPr id="3" name="Image 0" descr="/home/claude/f4/img/minesec_sheet.png">    </p:cNvPr>
+          <p:cNvPr id="4" name="Image 0" descr="/home/claude/f4/img/v2/lsa_volcmonitor.jpg">    </p:cNvPr>
           <p:cNvPicPr>
             <a:picLocks noChangeAspect="1"/>
           </p:cNvPicPr>
@@ -13173,8 +13702,8 @@
         </p:blipFill>
         <p:spPr>
           <a:xfrm>
-            <a:off x="0" y="658368"/>
-            <a:ext cx="5120640" cy="5833872"/>
+            <a:off x="2246610" y="1783080"/>
+            <a:ext cx="7698475" cy="4270248"/>
           </a:xfrm>
           <a:prstGeom prst="rect">
             <a:avLst/>
@@ -13183,14 +13712,14 @@
       </p:pic>
       <p:sp>
         <p:nvSpPr>
-          <p:cNvPr id="4" name="Text 1"/>
+          <p:cNvPr id="5" name="Text 2"/>
           <p:cNvSpPr/>
           <p:nvPr/>
         </p:nvSpPr>
         <p:spPr>
           <a:xfrm>
-            <a:off x="5349240" y="1005840"/>
-            <a:ext cx="6522415" cy="731520"/>
+            <a:off x="457200" y="6089904"/>
+            <a:ext cx="11277295" cy="347472"/>
           </a:xfrm>
           <a:prstGeom prst="rect">
             <a:avLst/>
@@ -13199,68 +13728,24 @@
           <a:ln/>
         </p:spPr>
         <p:txBody>
-          <a:bodyPr wrap="square" lIns="0" tIns="0" rIns="0" bIns="0" rtlCol="0" anchor="ctr">
-            <a:normAutofit/>
-          </a:bodyPr>
+          <a:bodyPr wrap="square" lIns="0" tIns="0" rIns="0" bIns="0" rtlCol="0" anchor="ctr"/>
           <a:lstStyle/>
           <a:p>
             <a:pPr algn="ctr" indent="0" marL="0">
               <a:buNone/>
             </a:pPr>
             <a:r>
-              <a:rPr lang="en-US" sz="3600" b="1" dirty="0">
-                <a:solidFill>
-                  <a:srgbClr val="990011"/>
+              <a:rPr lang="en-US" sz="1800" i="1" dirty="0">
+                <a:solidFill>
+                  <a:srgbClr val="555555"/>
                 </a:solidFill>
                 <a:latin typeface="Times New Roman" pitchFamily="34" charset="0"/>
                 <a:ea typeface="Times New Roman" pitchFamily="34" charset="-122"/>
                 <a:cs typeface="Times New Roman" pitchFamily="34" charset="-120"/>
               </a:rPr>
-              <a:t>Activity 5: Question</a:t>
-            </a:r>
-            <a:endParaRPr lang="en-US" sz="3600" dirty="0"/>
-          </a:p>
-        </p:txBody>
-      </p:sp>
-      <p:sp>
-        <p:nvSpPr>
-          <p:cNvPr id="5" name="Text 2"/>
-          <p:cNvSpPr/>
-          <p:nvPr/>
-        </p:nvSpPr>
-        <p:spPr>
-          <a:xfrm>
-            <a:off x="5349240" y="1783080"/>
-            <a:ext cx="6522415" cy="4663440"/>
-          </a:xfrm>
-          <a:prstGeom prst="rect">
-            <a:avLst/>
-          </a:prstGeom>
-          <a:noFill/>
-          <a:ln/>
-        </p:spPr>
-        <p:txBody>
-          <a:bodyPr wrap="square" lIns="0" tIns="0" rIns="0" bIns="0" rtlCol="0" anchor="t"/>
-          <a:lstStyle/>
-          <a:p>
-            <a:pPr algn="l" indent="0" marL="0">
-              <a:spcAft>
-                <a:spcPts val="800"/>
-              </a:spcAft>
-              <a:buNone/>
-            </a:pPr>
-            <a:r>
-              <a:rPr lang="en-US" sz="4000" dirty="0">
-                <a:solidFill>
-                  <a:srgbClr val="111111"/>
-                </a:solidFill>
-                <a:latin typeface="Times New Roman" pitchFamily="34" charset="0"/>
-                <a:ea typeface="Times New Roman" pitchFamily="34" charset="-122"/>
-                <a:cs typeface="Times New Roman" pitchFamily="34" charset="-120"/>
-              </a:rPr>
-              <a:t>How can scientists reduce the danger of eruptions?</a:t>
-            </a:r>
-            <a:endParaRPr lang="en-US" sz="4000" dirty="0"/>
+              <a:t>Monitoring a volcano.</a:t>
+            </a:r>
+            <a:endParaRPr lang="en-US" sz="1800" dirty="0"/>
           </a:p>
         </p:txBody>
       </p:sp>
@@ -13370,7 +13855,7 @@
                 <a:ea typeface="Calibri" pitchFamily="34" charset="-122"/>
                 <a:cs typeface="Calibri" pitchFamily="34" charset="-120"/>
               </a:rPr>
-              <a:t>3. ADAPTATION AND MITIGATION</a:t>
+              <a:t>3. MITIGATION</a:t>
             </a:r>
             <a:endParaRPr lang="en-US" sz="1400" dirty="0"/>
           </a:p>
@@ -13435,7 +13920,7 @@
                 <a:ea typeface="Times New Roman" pitchFamily="34" charset="-122"/>
                 <a:cs typeface="Times New Roman" pitchFamily="34" charset="-120"/>
               </a:rPr>
-              <a:t>Activity 5: Answer</a:t>
+              <a:t>Activity 5: Question</a:t>
             </a:r>
             <a:endParaRPr lang="en-US" sz="3600" dirty="0"/>
           </a:p>
@@ -13477,7 +13962,7 @@
                 <a:ea typeface="Times New Roman" pitchFamily="34" charset="-122"/>
                 <a:cs typeface="Times New Roman" pitchFamily="34" charset="-120"/>
               </a:rPr>
-              <a:t>They monitor earthquakes, gases and ground swelling and give warnings.</a:t>
+              <a:t>Name one instrument used to monitor a volcano.</a:t>
             </a:r>
             <a:endParaRPr lang="en-US" sz="4000" dirty="0"/>
           </a:p>
@@ -13589,7 +14074,7 @@
                 <a:ea typeface="Calibri" pitchFamily="34" charset="-122"/>
                 <a:cs typeface="Calibri" pitchFamily="34" charset="-120"/>
               </a:rPr>
-              <a:t>BOARD SUMMARY</a:t>
+              <a:t>3. MITIGATION</a:t>
             </a:r>
             <a:endParaRPr lang="en-US" sz="1400" dirty="0"/>
           </a:p>
@@ -13654,7 +14139,7 @@
                 <a:ea typeface="Times New Roman" pitchFamily="34" charset="-122"/>
                 <a:cs typeface="Times New Roman" pitchFamily="34" charset="-120"/>
               </a:rPr>
-              <a:t>Board Summary</a:t>
+              <a:t>Activity 5: Answer</a:t>
             </a:r>
             <a:endParaRPr lang="en-US" sz="3600" dirty="0"/>
           </a:p>
@@ -13688,7 +14173,7 @@
               <a:buNone/>
             </a:pPr>
             <a:r>
-              <a:rPr lang="en-US" sz="4000" b="1" dirty="0">
+              <a:rPr lang="en-US" sz="4000" dirty="0">
                 <a:solidFill>
                   <a:srgbClr val="111111"/>
                 </a:solidFill>
@@ -13696,47 +14181,7 @@
                 <a:ea typeface="Times New Roman" pitchFamily="34" charset="-122"/>
                 <a:cs typeface="Times New Roman" pitchFamily="34" charset="-120"/>
               </a:rPr>
-              <a:t>Topic: Crustal Processes and their Effect on the Land Surface and Man</a:t>
-            </a:r>
-            <a:endParaRPr lang="en-US" sz="4000" dirty="0"/>
-          </a:p>
-          <a:p>
-            <a:pPr algn="l" indent="0" marL="0">
-              <a:spcAft>
-                <a:spcPts val="800"/>
-              </a:spcAft>
-              <a:buNone/>
-            </a:pPr>
-            <a:r>
-              <a:rPr lang="en-US" sz="4000" b="1" dirty="0">
-                <a:solidFill>
-                  <a:srgbClr val="111111"/>
-                </a:solidFill>
-                <a:latin typeface="Times New Roman" pitchFamily="34" charset="0"/>
-                <a:ea typeface="Times New Roman" pitchFamily="34" charset="-122"/>
-                <a:cs typeface="Times New Roman" pitchFamily="34" charset="-120"/>
-              </a:rPr>
-              <a:t>Sub-topic: Volcanicity</a:t>
-            </a:r>
-            <a:endParaRPr lang="en-US" sz="4000" dirty="0"/>
-          </a:p>
-          <a:p>
-            <a:pPr algn="l" indent="0" marL="0">
-              <a:spcAft>
-                <a:spcPts val="800"/>
-              </a:spcAft>
-              <a:buNone/>
-            </a:pPr>
-            <a:r>
-              <a:rPr lang="en-US" sz="4000" b="1" dirty="0">
-                <a:solidFill>
-                  <a:srgbClr val="990011"/>
-                </a:solidFill>
-                <a:latin typeface="Times New Roman" pitchFamily="34" charset="0"/>
-                <a:ea typeface="Times New Roman" pitchFamily="34" charset="-122"/>
-                <a:cs typeface="Times New Roman" pitchFamily="34" charset="-120"/>
-              </a:rPr>
-              <a:t>Lesson 7: Volcanoes and Man</a:t>
+              <a:t>A seismometer, a gas sensor or GPS.</a:t>
             </a:r>
             <a:endParaRPr lang="en-US" sz="4000" dirty="0"/>
           </a:p>
@@ -13871,7 +14316,7 @@
         <p:spPr>
           <a:xfrm>
             <a:off x="0" y="658368"/>
-            <a:ext cx="3840480" cy="5833872"/>
+            <a:ext cx="5120640" cy="5833872"/>
           </a:xfrm>
           <a:prstGeom prst="rect">
             <a:avLst/>
@@ -13886,8 +14331,8 @@
         </p:nvSpPr>
         <p:spPr>
           <a:xfrm>
-            <a:off x="4069080" y="1005840"/>
-            <a:ext cx="7802575" cy="731520"/>
+            <a:off x="5349240" y="1005840"/>
+            <a:ext cx="6522415" cy="731520"/>
           </a:xfrm>
           <a:prstGeom prst="rect">
             <a:avLst/>
@@ -13913,7 +14358,7 @@
                 <a:ea typeface="Times New Roman" pitchFamily="34" charset="-122"/>
                 <a:cs typeface="Times New Roman" pitchFamily="34" charset="-120"/>
               </a:rPr>
-              <a:t>DEFINITIONS</a:t>
+              <a:t>Board Summary</a:t>
             </a:r>
             <a:endParaRPr lang="en-US" sz="3600" dirty="0"/>
           </a:p>
@@ -13927,8 +14372,8 @@
         </p:nvSpPr>
         <p:spPr>
           <a:xfrm>
-            <a:off x="4069080" y="1783080"/>
-            <a:ext cx="7802575" cy="4663440"/>
+            <a:off x="5349240" y="1783080"/>
+            <a:ext cx="6522415" cy="4663440"/>
           </a:xfrm>
           <a:prstGeom prst="rect">
             <a:avLst/>
@@ -13947,7 +14392,7 @@
               <a:buNone/>
             </a:pPr>
             <a:r>
-              <a:rPr lang="en-US" sz="4000" i="1" dirty="0">
+              <a:rPr lang="en-US" sz="4000" b="1" dirty="0">
                 <a:solidFill>
                   <a:srgbClr val="111111"/>
                 </a:solidFill>
@@ -13955,7 +14400,7 @@
                 <a:ea typeface="Times New Roman" pitchFamily="34" charset="-122"/>
                 <a:cs typeface="Times New Roman" pitchFamily="34" charset="-120"/>
               </a:rPr>
-              <a:t>The key terms of this lesson are defined as follows:</a:t>
+              <a:t>Topic: Crustal Processes and their Effect on the Land Surface and Man</a:t>
             </a:r>
             <a:endParaRPr lang="en-US" sz="4000" dirty="0"/>
           </a:p>
@@ -13975,8 +14420,11 @@
                 <a:ea typeface="Times New Roman" pitchFamily="34" charset="-122"/>
                 <a:cs typeface="Times New Roman" pitchFamily="34" charset="-120"/>
               </a:rPr>
-              <a:t>Volcanic hazard: </a:t>
-            </a:r>
+              <a:t>Sub-topic: Volcanicity</a:t>
+            </a:r>
+            <a:endParaRPr lang="en-US" sz="4000" dirty="0"/>
+          </a:p>
+          <a:p>
             <a:pPr algn="l" indent="0" marL="0">
               <a:spcAft>
                 <a:spcPts val="800"/>
@@ -13984,52 +14432,15 @@
               <a:buNone/>
             </a:pPr>
             <a:r>
-              <a:rPr lang="en-US" sz="4000" dirty="0">
-                <a:solidFill>
-                  <a:srgbClr val="111111"/>
+              <a:rPr lang="en-US" sz="4000" b="1" dirty="0">
+                <a:solidFill>
+                  <a:srgbClr val="990011"/>
                 </a:solidFill>
                 <a:latin typeface="Times New Roman" pitchFamily="34" charset="0"/>
                 <a:ea typeface="Times New Roman" pitchFamily="34" charset="-122"/>
                 <a:cs typeface="Times New Roman" pitchFamily="34" charset="-120"/>
               </a:rPr>
-              <a:t>It is a volcanic event that can cause loss of life and property.</a:t>
-            </a:r>
-            <a:endParaRPr lang="en-US" sz="4000" dirty="0"/>
-          </a:p>
-          <a:p>
-            <a:pPr algn="l" indent="0" marL="0">
-              <a:spcAft>
-                <a:spcPts val="800"/>
-              </a:spcAft>
-              <a:buNone/>
-            </a:pPr>
-            <a:r>
-              <a:rPr lang="en-US" sz="4000" b="1" dirty="0">
-                <a:solidFill>
-                  <a:srgbClr val="111111"/>
-                </a:solidFill>
-                <a:latin typeface="Times New Roman" pitchFamily="34" charset="0"/>
-                <a:ea typeface="Times New Roman" pitchFamily="34" charset="-122"/>
-                <a:cs typeface="Times New Roman" pitchFamily="34" charset="-120"/>
-              </a:rPr>
-              <a:t>Mitigation: </a:t>
-            </a:r>
-            <a:pPr algn="l" indent="0" marL="0">
-              <a:spcAft>
-                <a:spcPts val="800"/>
-              </a:spcAft>
-              <a:buNone/>
-            </a:pPr>
-            <a:r>
-              <a:rPr lang="en-US" sz="4000" dirty="0">
-                <a:solidFill>
-                  <a:srgbClr val="111111"/>
-                </a:solidFill>
-                <a:latin typeface="Times New Roman" pitchFamily="34" charset="0"/>
-                <a:ea typeface="Times New Roman" pitchFamily="34" charset="-122"/>
-                <a:cs typeface="Times New Roman" pitchFamily="34" charset="-120"/>
-              </a:rPr>
-              <a:t>It is the reduction of the effects of a hazard.</a:t>
+              <a:t>Lesson 7: Volcanoes and Man</a:t>
             </a:r>
             <a:endParaRPr lang="en-US" sz="4000" dirty="0"/>
           </a:p>
@@ -14164,7 +14575,7 @@
         <p:spPr>
           <a:xfrm>
             <a:off x="0" y="658368"/>
-            <a:ext cx="3840480" cy="5833872"/>
+            <a:ext cx="2468880" cy="5833872"/>
           </a:xfrm>
           <a:prstGeom prst="rect">
             <a:avLst/>
@@ -14179,8 +14590,8 @@
         </p:nvSpPr>
         <p:spPr>
           <a:xfrm>
-            <a:off x="4069080" y="1005840"/>
-            <a:ext cx="7802575" cy="731520"/>
+            <a:off x="2697480" y="1005840"/>
+            <a:ext cx="9174175" cy="731520"/>
           </a:xfrm>
           <a:prstGeom prst="rect">
             <a:avLst/>
@@ -14206,7 +14617,7 @@
                 <a:ea typeface="Times New Roman" pitchFamily="34" charset="-122"/>
                 <a:cs typeface="Times New Roman" pitchFamily="34" charset="-120"/>
               </a:rPr>
-              <a:t>1. Volcanoes as a Resource</a:t>
+              <a:t>DEFINITIONS</a:t>
             </a:r>
             <a:endParaRPr lang="en-US" sz="3600" dirty="0"/>
           </a:p>
@@ -14220,8 +14631,8 @@
         </p:nvSpPr>
         <p:spPr>
           <a:xfrm>
-            <a:off x="4069080" y="1783080"/>
-            <a:ext cx="7802575" cy="4663440"/>
+            <a:off x="2697480" y="1783080"/>
+            <a:ext cx="9174175" cy="4663440"/>
           </a:xfrm>
           <a:prstGeom prst="rect">
             <a:avLst/>
@@ -14248,7 +14659,7 @@
                 <a:ea typeface="Times New Roman" pitchFamily="34" charset="-122"/>
                 <a:cs typeface="Times New Roman" pitchFamily="34" charset="-120"/>
               </a:rPr>
-              <a:t>Volcanoes are important in the following ways:</a:t>
+              <a:t>The key terms of this lesson are defined as follows:</a:t>
             </a:r>
             <a:endParaRPr lang="en-US" sz="4000" dirty="0"/>
           </a:p>
@@ -14268,7 +14679,7 @@
                 <a:ea typeface="Times New Roman" pitchFamily="34" charset="-122"/>
                 <a:cs typeface="Times New Roman" pitchFamily="34" charset="-120"/>
               </a:rPr>
-              <a:t>Fertile soils: </a:t>
+              <a:t>Volcanic resource: </a:t>
             </a:r>
             <a:pPr algn="l" indent="0" marL="0">
               <a:spcAft>
@@ -14285,7 +14696,44 @@
                 <a:ea typeface="Times New Roman" pitchFamily="34" charset="-122"/>
                 <a:cs typeface="Times New Roman" pitchFamily="34" charset="-120"/>
               </a:rPr>
-              <a:t>Weathered volcanic rocks give rich soils for farming. Plantations of bananas, tea and rubber cover the slopes of Mount Cameroon.</a:t>
+              <a:t>It is a benefit that people obtain from volcanoes, such as fertile soils or energy.</a:t>
+            </a:r>
+            <a:endParaRPr lang="en-US" sz="4000" dirty="0"/>
+          </a:p>
+          <a:p>
+            <a:pPr algn="l" indent="0" marL="0">
+              <a:spcAft>
+                <a:spcPts val="800"/>
+              </a:spcAft>
+              <a:buNone/>
+            </a:pPr>
+            <a:r>
+              <a:rPr lang="en-US" sz="4000" b="1" dirty="0">
+                <a:solidFill>
+                  <a:srgbClr val="111111"/>
+                </a:solidFill>
+                <a:latin typeface="Times New Roman" pitchFamily="34" charset="0"/>
+                <a:ea typeface="Times New Roman" pitchFamily="34" charset="-122"/>
+                <a:cs typeface="Times New Roman" pitchFamily="34" charset="-120"/>
+              </a:rPr>
+              <a:t>Volcanic hazard: </a:t>
+            </a:r>
+            <a:pPr algn="l" indent="0" marL="0">
+              <a:spcAft>
+                <a:spcPts val="800"/>
+              </a:spcAft>
+              <a:buNone/>
+            </a:pPr>
+            <a:r>
+              <a:rPr lang="en-US" sz="4000" dirty="0">
+                <a:solidFill>
+                  <a:srgbClr val="111111"/>
+                </a:solidFill>
+                <a:latin typeface="Times New Roman" pitchFamily="34" charset="0"/>
+                <a:ea typeface="Times New Roman" pitchFamily="34" charset="-122"/>
+                <a:cs typeface="Times New Roman" pitchFamily="34" charset="-120"/>
+              </a:rPr>
+              <a:t>It is a volcanic event that can harm people and property.</a:t>
             </a:r>
             <a:endParaRPr lang="en-US" sz="4000" dirty="0"/>
           </a:p>
@@ -14462,7 +14910,7 @@
                 <a:ea typeface="Times New Roman" pitchFamily="34" charset="-122"/>
                 <a:cs typeface="Times New Roman" pitchFamily="34" charset="-120"/>
               </a:rPr>
-              <a:t>1. Volcanoes as a Resource (continued)</a:t>
+              <a:t>DEFINITIONS (continued)</a:t>
             </a:r>
             <a:endParaRPr lang="en-US" sz="3600" dirty="0"/>
           </a:p>
@@ -14504,7 +14952,7 @@
                 <a:ea typeface="Times New Roman" pitchFamily="34" charset="-122"/>
                 <a:cs typeface="Times New Roman" pitchFamily="34" charset="-120"/>
               </a:rPr>
-              <a:t>Minerals and building materials: </a:t>
+              <a:t>Mitigation: </a:t>
             </a:r>
             <a:pPr algn="l" indent="0" marL="0">
               <a:spcAft>
@@ -14521,7 +14969,7 @@
                 <a:ea typeface="Times New Roman" pitchFamily="34" charset="-122"/>
                 <a:cs typeface="Times New Roman" pitchFamily="34" charset="-120"/>
               </a:rPr>
-              <a:t>Volcanoes provide sulphur, pumice, basalt and gravel. Basalt is used for roads and buildings.</a:t>
+              <a:t>It is the set of actions that reduce the damage of a hazard.</a:t>
             </a:r>
             <a:endParaRPr lang="en-US" sz="4000" dirty="0"/>
           </a:p>
@@ -14639,9 +15087,129 @@
           </a:p>
         </p:txBody>
       </p:sp>
+      <p:sp>
+        <p:nvSpPr>
+          <p:cNvPr id="3" name="Text 1"/>
+          <p:cNvSpPr/>
+          <p:nvPr/>
+        </p:nvSpPr>
+        <p:spPr>
+          <a:xfrm>
+            <a:off x="365760" y="1005840"/>
+            <a:ext cx="11460175" cy="731520"/>
+          </a:xfrm>
+          <a:prstGeom prst="rect">
+            <a:avLst/>
+          </a:prstGeom>
+          <a:noFill/>
+          <a:ln/>
+        </p:spPr>
+        <p:txBody>
+          <a:bodyPr wrap="square" lIns="0" tIns="0" rIns="0" bIns="0" rtlCol="0" anchor="ctr">
+            <a:normAutofit/>
+          </a:bodyPr>
+          <a:lstStyle/>
+          <a:p>
+            <a:pPr algn="ctr" indent="0" marL="0">
+              <a:buNone/>
+            </a:pPr>
+            <a:r>
+              <a:rPr lang="en-US" sz="3600" b="1" dirty="0">
+                <a:solidFill>
+                  <a:srgbClr val="990011"/>
+                </a:solidFill>
+                <a:latin typeface="Times New Roman" pitchFamily="34" charset="0"/>
+                <a:ea typeface="Times New Roman" pitchFamily="34" charset="-122"/>
+                <a:cs typeface="Times New Roman" pitchFamily="34" charset="-120"/>
+              </a:rPr>
+              <a:t>1. Volcanoes as a Resource</a:t>
+            </a:r>
+            <a:endParaRPr lang="en-US" sz="3600" dirty="0"/>
+          </a:p>
+        </p:txBody>
+      </p:sp>
+      <p:sp>
+        <p:nvSpPr>
+          <p:cNvPr id="4" name="Text 2"/>
+          <p:cNvSpPr/>
+          <p:nvPr/>
+        </p:nvSpPr>
+        <p:spPr>
+          <a:xfrm>
+            <a:off x="365760" y="1783080"/>
+            <a:ext cx="4846320" cy="4617720"/>
+          </a:xfrm>
+          <a:prstGeom prst="rect">
+            <a:avLst/>
+          </a:prstGeom>
+          <a:noFill/>
+          <a:ln/>
+        </p:spPr>
+        <p:txBody>
+          <a:bodyPr wrap="square" lIns="0" tIns="0" rIns="0" bIns="0" rtlCol="0" anchor="t"/>
+          <a:lstStyle/>
+          <a:p>
+            <a:pPr algn="l" indent="0" marL="0">
+              <a:spcAft>
+                <a:spcPts val="800"/>
+              </a:spcAft>
+              <a:buNone/>
+            </a:pPr>
+            <a:r>
+              <a:rPr lang="en-US" sz="3600" i="1" dirty="0">
+                <a:solidFill>
+                  <a:srgbClr val="111111"/>
+                </a:solidFill>
+                <a:latin typeface="Times New Roman" pitchFamily="34" charset="0"/>
+                <a:ea typeface="Times New Roman" pitchFamily="34" charset="-122"/>
+                <a:cs typeface="Times New Roman" pitchFamily="34" charset="-120"/>
+              </a:rPr>
+              <a:t>Volcanoes provide the following resources:</a:t>
+            </a:r>
+            <a:endParaRPr lang="en-US" sz="3600" dirty="0"/>
+          </a:p>
+          <a:p>
+            <a:pPr algn="l" indent="0" marL="0">
+              <a:spcAft>
+                <a:spcPts val="800"/>
+              </a:spcAft>
+              <a:buNone/>
+            </a:pPr>
+            <a:r>
+              <a:rPr lang="en-US" sz="3600" b="1" dirty="0">
+                <a:solidFill>
+                  <a:srgbClr val="111111"/>
+                </a:solidFill>
+                <a:latin typeface="Times New Roman" pitchFamily="34" charset="0"/>
+                <a:ea typeface="Times New Roman" pitchFamily="34" charset="-122"/>
+                <a:cs typeface="Times New Roman" pitchFamily="34" charset="-120"/>
+              </a:rPr>
+              <a:t>Fertile soils: </a:t>
+            </a:r>
+            <a:pPr algn="l" indent="0" marL="0">
+              <a:spcAft>
+                <a:spcPts val="800"/>
+              </a:spcAft>
+              <a:buNone/>
+            </a:pPr>
+            <a:r>
+              <a:rPr lang="en-US" sz="3600" dirty="0">
+                <a:solidFill>
+                  <a:srgbClr val="111111"/>
+                </a:solidFill>
+                <a:latin typeface="Times New Roman" pitchFamily="34" charset="0"/>
+                <a:ea typeface="Times New Roman" pitchFamily="34" charset="-122"/>
+                <a:cs typeface="Times New Roman" pitchFamily="34" charset="-120"/>
+              </a:rPr>
+              <a:t>Ash and lava weather into rich andosols, as on the CDC plantations of bananas, rubber, tea and palm oil on Mount Cameroon.</a:t>
+            </a:r>
+            <a:endParaRPr lang="en-US" sz="3600" dirty="0"/>
+          </a:p>
+        </p:txBody>
+      </p:sp>
       <p:pic>
         <p:nvPicPr>
-          <p:cNvPr id="3" name="Image 0" descr="/home/claude/f4/img/minesec_sheet.png">    </p:cNvPr>
+          <p:cNvPr id="5" name="Image 0" descr="/home/claude/f4/img/v2/usa_banana.jpg">    </p:cNvPr>
           <p:cNvPicPr>
             <a:picLocks noChangeAspect="1"/>
           </p:cNvPicPr>
@@ -14655,8 +15223,8 @@
         </p:blipFill>
         <p:spPr>
           <a:xfrm>
-            <a:off x="0" y="658368"/>
-            <a:ext cx="5120640" cy="5833872"/>
+            <a:off x="5349240" y="2071212"/>
+            <a:ext cx="6659575" cy="3693983"/>
           </a:xfrm>
           <a:prstGeom prst="rect">
             <a:avLst/>
@@ -14665,14 +15233,14 @@
       </p:pic>
       <p:sp>
         <p:nvSpPr>
-          <p:cNvPr id="4" name="Text 1"/>
+          <p:cNvPr id="6" name="Text 3"/>
           <p:cNvSpPr/>
           <p:nvPr/>
         </p:nvSpPr>
         <p:spPr>
           <a:xfrm>
-            <a:off x="5349240" y="1005840"/>
-            <a:ext cx="6522415" cy="731520"/>
+            <a:off x="5349240" y="6089904"/>
+            <a:ext cx="6659575" cy="347472"/>
           </a:xfrm>
           <a:prstGeom prst="rect">
             <a:avLst/>
@@ -14681,85 +15249,24 @@
           <a:ln/>
         </p:spPr>
         <p:txBody>
-          <a:bodyPr wrap="square" lIns="0" tIns="0" rIns="0" bIns="0" rtlCol="0" anchor="ctr">
-            <a:normAutofit/>
-          </a:bodyPr>
+          <a:bodyPr wrap="square" lIns="0" tIns="0" rIns="0" bIns="0" rtlCol="0" anchor="ctr"/>
           <a:lstStyle/>
           <a:p>
             <a:pPr algn="ctr" indent="0" marL="0">
               <a:buNone/>
             </a:pPr>
             <a:r>
-              <a:rPr lang="en-US" sz="3600" b="1" dirty="0">
-                <a:solidFill>
-                  <a:srgbClr val="990011"/>
+              <a:rPr lang="en-US" sz="1600" i="1" dirty="0">
+                <a:solidFill>
+                  <a:srgbClr val="555555"/>
                 </a:solidFill>
                 <a:latin typeface="Times New Roman" pitchFamily="34" charset="0"/>
                 <a:ea typeface="Times New Roman" pitchFamily="34" charset="-122"/>
                 <a:cs typeface="Times New Roman" pitchFamily="34" charset="-120"/>
               </a:rPr>
-              <a:t>1. Volcanoes as a Resource (continued)</a:t>
-            </a:r>
-            <a:endParaRPr lang="en-US" sz="3600" dirty="0"/>
-          </a:p>
-        </p:txBody>
-      </p:sp>
-      <p:sp>
-        <p:nvSpPr>
-          <p:cNvPr id="5" name="Text 2"/>
-          <p:cNvSpPr/>
-          <p:nvPr/>
-        </p:nvSpPr>
-        <p:spPr>
-          <a:xfrm>
-            <a:off x="5349240" y="1783080"/>
-            <a:ext cx="6522415" cy="4663440"/>
-          </a:xfrm>
-          <a:prstGeom prst="rect">
-            <a:avLst/>
-          </a:prstGeom>
-          <a:noFill/>
-          <a:ln/>
-        </p:spPr>
-        <p:txBody>
-          <a:bodyPr wrap="square" lIns="0" tIns="0" rIns="0" bIns="0" rtlCol="0" anchor="t"/>
-          <a:lstStyle/>
-          <a:p>
-            <a:pPr algn="l" indent="0" marL="0">
-              <a:spcAft>
-                <a:spcPts val="800"/>
-              </a:spcAft>
-              <a:buNone/>
-            </a:pPr>
-            <a:r>
-              <a:rPr lang="en-US" sz="4000" b="1" dirty="0">
-                <a:solidFill>
-                  <a:srgbClr val="111111"/>
-                </a:solidFill>
-                <a:latin typeface="Times New Roman" pitchFamily="34" charset="0"/>
-                <a:ea typeface="Times New Roman" pitchFamily="34" charset="-122"/>
-                <a:cs typeface="Times New Roman" pitchFamily="34" charset="-120"/>
-              </a:rPr>
-              <a:t>Geothermal energy and tourism: </a:t>
-            </a:r>
-            <a:pPr algn="l" indent="0" marL="0">
-              <a:spcAft>
-                <a:spcPts val="800"/>
-              </a:spcAft>
-              <a:buNone/>
-            </a:pPr>
-            <a:r>
-              <a:rPr lang="en-US" sz="4000" dirty="0">
-                <a:solidFill>
-                  <a:srgbClr val="111111"/>
-                </a:solidFill>
-                <a:latin typeface="Times New Roman" pitchFamily="34" charset="0"/>
-                <a:ea typeface="Times New Roman" pitchFamily="34" charset="-122"/>
-                <a:cs typeface="Times New Roman" pitchFamily="34" charset="-120"/>
-              </a:rPr>
-              <a:t>Hot underground water produces electricity in Iceland and Kenya. Volcanoes and crater lakes attract tourists, like the Mount Cameroon Race of Hope.</a:t>
-            </a:r>
-            <a:endParaRPr lang="en-US" sz="4000" dirty="0"/>
+              <a:t>Illustration: a banana plantation</a:t>
+            </a:r>
+            <a:endParaRPr lang="en-US" sz="1600" dirty="0"/>
           </a:p>
         </p:txBody>
       </p:sp>
@@ -14892,7 +15399,7 @@
         <p:spPr>
           <a:xfrm>
             <a:off x="0" y="658368"/>
-            <a:ext cx="3840480" cy="5833872"/>
+            <a:ext cx="5120640" cy="5833872"/>
           </a:xfrm>
           <a:prstGeom prst="rect">
             <a:avLst/>
@@ -14907,8 +15414,8 @@
         </p:nvSpPr>
         <p:spPr>
           <a:xfrm>
-            <a:off x="4069080" y="1005840"/>
-            <a:ext cx="7802575" cy="731520"/>
+            <a:off x="5349240" y="1005840"/>
+            <a:ext cx="6522415" cy="731520"/>
           </a:xfrm>
           <a:prstGeom prst="rect">
             <a:avLst/>
@@ -14934,7 +15441,7 @@
                 <a:ea typeface="Times New Roman" pitchFamily="34" charset="-122"/>
                 <a:cs typeface="Times New Roman" pitchFamily="34" charset="-120"/>
               </a:rPr>
-              <a:t>2. Volcanoes as a Hazard</a:t>
+              <a:t>1. Volcanoes as a Resource</a:t>
             </a:r>
             <a:endParaRPr lang="en-US" sz="3600" dirty="0"/>
           </a:p>
@@ -14948,8 +15455,8 @@
         </p:nvSpPr>
         <p:spPr>
           <a:xfrm>
-            <a:off x="4069080" y="1783080"/>
-            <a:ext cx="7802575" cy="4663440"/>
+            <a:off x="5349240" y="1783080"/>
+            <a:ext cx="6522415" cy="4663440"/>
           </a:xfrm>
           <a:prstGeom prst="rect">
             <a:avLst/>
@@ -14968,7 +15475,7 @@
               <a:buNone/>
             </a:pPr>
             <a:r>
-              <a:rPr lang="en-US" sz="4000" i="1" dirty="0">
+              <a:rPr lang="en-US" sz="4000" b="1" dirty="0">
                 <a:solidFill>
                   <a:srgbClr val="111111"/>
                 </a:solidFill>
@@ -14976,11 +15483,8 @@
                 <a:ea typeface="Times New Roman" pitchFamily="34" charset="-122"/>
                 <a:cs typeface="Times New Roman" pitchFamily="34" charset="-120"/>
               </a:rPr>
-              <a:t>Volcanoes can cause the following hazards:</a:t>
-            </a:r>
-            <a:endParaRPr lang="en-US" sz="4000" dirty="0"/>
-          </a:p>
-          <a:p>
+              <a:t>Tourism: </a:t>
+            </a:r>
             <a:pPr algn="l" indent="0" marL="0">
               <a:spcAft>
                 <a:spcPts val="800"/>
@@ -14988,7 +15492,7 @@
               <a:buNone/>
             </a:pPr>
             <a:r>
-              <a:rPr lang="en-US" sz="4000" b="1" dirty="0">
+              <a:rPr lang="en-US" sz="4000" dirty="0">
                 <a:solidFill>
                   <a:srgbClr val="111111"/>
                 </a:solidFill>
@@ -14996,24 +15500,7 @@
                 <a:ea typeface="Times New Roman" pitchFamily="34" charset="-122"/>
                 <a:cs typeface="Times New Roman" pitchFamily="34" charset="-120"/>
               </a:rPr>
-              <a:t>Lava flows and pyroclastic flows: </a:t>
-            </a:r>
-            <a:pPr algn="l" indent="0" marL="0">
-              <a:spcAft>
-                <a:spcPts val="800"/>
-              </a:spcAft>
-              <a:buNone/>
-            </a:pPr>
-            <a:r>
-              <a:rPr lang="en-US" sz="4000" dirty="0">
-                <a:solidFill>
-                  <a:srgbClr val="111111"/>
-                </a:solidFill>
-                <a:latin typeface="Times New Roman" pitchFamily="34" charset="0"/>
-                <a:ea typeface="Times New Roman" pitchFamily="34" charset="-122"/>
-                <a:cs typeface="Times New Roman" pitchFamily="34" charset="-120"/>
-              </a:rPr>
-              <a:t>Lava destroys houses, roads and farms, as in 1999 near Bakingili. Pyroclastic flows of hot gas and ash move fast and kill everything.</a:t>
+              <a:t>Volcanoes attract visitors, like the Mount Cameroon Race of Hope and the crater lakes.</a:t>
             </a:r>
             <a:endParaRPr lang="en-US" sz="4000" dirty="0"/>
           </a:p>
@@ -15252,7 +15739,7 @@
                 <a:ea typeface="Times New Roman" pitchFamily="34" charset="-122"/>
                 <a:cs typeface="Times New Roman" pitchFamily="34" charset="-120"/>
               </a:rPr>
-              <a:t>Ask an adult what people grow around Buea and Limbe, and why the soils are good.</a:t>
+              <a:t>Give one benefit of volcanoes to man.</a:t>
             </a:r>
             <a:endParaRPr lang="en-US" sz="4000" dirty="0"/>
           </a:p>
@@ -15370,9 +15857,109 @@
           </a:p>
         </p:txBody>
       </p:sp>
+      <p:sp>
+        <p:nvSpPr>
+          <p:cNvPr id="3" name="Text 1"/>
+          <p:cNvSpPr/>
+          <p:nvPr/>
+        </p:nvSpPr>
+        <p:spPr>
+          <a:xfrm>
+            <a:off x="365760" y="1005840"/>
+            <a:ext cx="11460175" cy="731520"/>
+          </a:xfrm>
+          <a:prstGeom prst="rect">
+            <a:avLst/>
+          </a:prstGeom>
+          <a:noFill/>
+          <a:ln/>
+        </p:spPr>
+        <p:txBody>
+          <a:bodyPr wrap="square" lIns="0" tIns="0" rIns="0" bIns="0" rtlCol="0" anchor="ctr">
+            <a:normAutofit/>
+          </a:bodyPr>
+          <a:lstStyle/>
+          <a:p>
+            <a:pPr algn="ctr" indent="0" marL="0">
+              <a:buNone/>
+            </a:pPr>
+            <a:r>
+              <a:rPr lang="en-US" sz="3600" b="1" dirty="0">
+                <a:solidFill>
+                  <a:srgbClr val="990011"/>
+                </a:solidFill>
+                <a:latin typeface="Times New Roman" pitchFamily="34" charset="0"/>
+                <a:ea typeface="Times New Roman" pitchFamily="34" charset="-122"/>
+                <a:cs typeface="Times New Roman" pitchFamily="34" charset="-120"/>
+              </a:rPr>
+              <a:t>1. Volcanoes as a Resource</a:t>
+            </a:r>
+            <a:endParaRPr lang="en-US" sz="3600" dirty="0"/>
+          </a:p>
+        </p:txBody>
+      </p:sp>
+      <p:sp>
+        <p:nvSpPr>
+          <p:cNvPr id="4" name="Text 2"/>
+          <p:cNvSpPr/>
+          <p:nvPr/>
+        </p:nvSpPr>
+        <p:spPr>
+          <a:xfrm>
+            <a:off x="365760" y="1783080"/>
+            <a:ext cx="4846320" cy="4617720"/>
+          </a:xfrm>
+          <a:prstGeom prst="rect">
+            <a:avLst/>
+          </a:prstGeom>
+          <a:noFill/>
+          <a:ln/>
+        </p:spPr>
+        <p:txBody>
+          <a:bodyPr wrap="square" lIns="0" tIns="0" rIns="0" bIns="0" rtlCol="0" anchor="t"/>
+          <a:lstStyle/>
+          <a:p>
+            <a:pPr algn="l" indent="0" marL="0">
+              <a:spcAft>
+                <a:spcPts val="800"/>
+              </a:spcAft>
+              <a:buNone/>
+            </a:pPr>
+            <a:r>
+              <a:rPr lang="en-US" sz="3600" b="1" dirty="0">
+                <a:solidFill>
+                  <a:srgbClr val="111111"/>
+                </a:solidFill>
+                <a:latin typeface="Times New Roman" pitchFamily="34" charset="0"/>
+                <a:ea typeface="Times New Roman" pitchFamily="34" charset="-122"/>
+                <a:cs typeface="Times New Roman" pitchFamily="34" charset="-120"/>
+              </a:rPr>
+              <a:t>Geothermal energy: </a:t>
+            </a:r>
+            <a:pPr algn="l" indent="0" marL="0">
+              <a:spcAft>
+                <a:spcPts val="800"/>
+              </a:spcAft>
+              <a:buNone/>
+            </a:pPr>
+            <a:r>
+              <a:rPr lang="en-US" sz="3600" dirty="0">
+                <a:solidFill>
+                  <a:srgbClr val="111111"/>
+                </a:solidFill>
+                <a:latin typeface="Times New Roman" pitchFamily="34" charset="0"/>
+                <a:ea typeface="Times New Roman" pitchFamily="34" charset="-122"/>
+                <a:cs typeface="Times New Roman" pitchFamily="34" charset="-120"/>
+              </a:rPr>
+              <a:t>Underground heat produces steam and electricity, as in Iceland and Kenya.</a:t>
+            </a:r>
+            <a:endParaRPr lang="en-US" sz="3600" dirty="0"/>
+          </a:p>
+        </p:txBody>
+      </p:sp>
       <p:pic>
         <p:nvPicPr>
-          <p:cNvPr id="3" name="Image 0" descr="/home/claude/f4/img/minesec_sheet.png">    </p:cNvPr>
+          <p:cNvPr id="5" name="Image 0" descr="/home/claude/f4/img/v2/f4_geothermal.jpg">    </p:cNvPr>
           <p:cNvPicPr>
             <a:picLocks noChangeAspect="1"/>
           </p:cNvPicPr>
@@ -15386,8 +15973,8 @@
         </p:blipFill>
         <p:spPr>
           <a:xfrm>
-            <a:off x="0" y="658368"/>
-            <a:ext cx="5120640" cy="5833872"/>
+            <a:off x="5477905" y="1783080"/>
+            <a:ext cx="6402246" cy="4270248"/>
           </a:xfrm>
           <a:prstGeom prst="rect">
             <a:avLst/>
@@ -15396,14 +15983,14 @@
       </p:pic>
       <p:sp>
         <p:nvSpPr>
-          <p:cNvPr id="4" name="Text 1"/>
+          <p:cNvPr id="6" name="Text 3"/>
           <p:cNvSpPr/>
           <p:nvPr/>
         </p:nvSpPr>
         <p:spPr>
           <a:xfrm>
-            <a:off x="5349240" y="1005840"/>
-            <a:ext cx="6522415" cy="731520"/>
+            <a:off x="5349240" y="6089904"/>
+            <a:ext cx="6659575" cy="347472"/>
           </a:xfrm>
           <a:prstGeom prst="rect">
             <a:avLst/>
@@ -15412,85 +15999,24 @@
           <a:ln/>
         </p:spPr>
         <p:txBody>
-          <a:bodyPr wrap="square" lIns="0" tIns="0" rIns="0" bIns="0" rtlCol="0" anchor="ctr">
-            <a:normAutofit/>
-          </a:bodyPr>
+          <a:bodyPr wrap="square" lIns="0" tIns="0" rIns="0" bIns="0" rtlCol="0" anchor="ctr"/>
           <a:lstStyle/>
           <a:p>
             <a:pPr algn="ctr" indent="0" marL="0">
               <a:buNone/>
             </a:pPr>
             <a:r>
-              <a:rPr lang="en-US" sz="3600" b="1" dirty="0">
-                <a:solidFill>
-                  <a:srgbClr val="990011"/>
+              <a:rPr lang="en-US" sz="1600" i="1" dirty="0">
+                <a:solidFill>
+                  <a:srgbClr val="555555"/>
                 </a:solidFill>
                 <a:latin typeface="Times New Roman" pitchFamily="34" charset="0"/>
                 <a:ea typeface="Times New Roman" pitchFamily="34" charset="-122"/>
                 <a:cs typeface="Times New Roman" pitchFamily="34" charset="-120"/>
               </a:rPr>
-              <a:t>2. Volcanoes as a Hazard (continued)</a:t>
-            </a:r>
-            <a:endParaRPr lang="en-US" sz="3600" dirty="0"/>
-          </a:p>
-        </p:txBody>
-      </p:sp>
-      <p:sp>
-        <p:nvSpPr>
-          <p:cNvPr id="5" name="Text 2"/>
-          <p:cNvSpPr/>
-          <p:nvPr/>
-        </p:nvSpPr>
-        <p:spPr>
-          <a:xfrm>
-            <a:off x="5349240" y="1783080"/>
-            <a:ext cx="6522415" cy="4663440"/>
-          </a:xfrm>
-          <a:prstGeom prst="rect">
-            <a:avLst/>
-          </a:prstGeom>
-          <a:noFill/>
-          <a:ln/>
-        </p:spPr>
-        <p:txBody>
-          <a:bodyPr wrap="square" lIns="0" tIns="0" rIns="0" bIns="0" rtlCol="0" anchor="t"/>
-          <a:lstStyle/>
-          <a:p>
-            <a:pPr algn="l" indent="0" marL="0">
-              <a:spcAft>
-                <a:spcPts val="800"/>
-              </a:spcAft>
-              <a:buNone/>
-            </a:pPr>
-            <a:r>
-              <a:rPr lang="en-US" sz="4000" b="1" dirty="0">
-                <a:solidFill>
-                  <a:srgbClr val="111111"/>
-                </a:solidFill>
-                <a:latin typeface="Times New Roman" pitchFamily="34" charset="0"/>
-                <a:ea typeface="Times New Roman" pitchFamily="34" charset="-122"/>
-                <a:cs typeface="Times New Roman" pitchFamily="34" charset="-120"/>
-              </a:rPr>
-              <a:t>Ash falls and lahars: </a:t>
-            </a:r>
-            <a:pPr algn="l" indent="0" marL="0">
-              <a:spcAft>
-                <a:spcPts val="800"/>
-              </a:spcAft>
-              <a:buNone/>
-            </a:pPr>
-            <a:r>
-              <a:rPr lang="en-US" sz="4000" dirty="0">
-                <a:solidFill>
-                  <a:srgbClr val="111111"/>
-                </a:solidFill>
-                <a:latin typeface="Times New Roman" pitchFamily="34" charset="0"/>
-                <a:ea typeface="Times New Roman" pitchFamily="34" charset="-122"/>
-                <a:cs typeface="Times New Roman" pitchFamily="34" charset="-120"/>
-              </a:rPr>
-              <a:t>Ash destroys crops and roofs and harms breathing. Lahars are mudflows of ash and water that bury villages.</a:t>
-            </a:r>
-            <a:endParaRPr lang="en-US" sz="4000" dirty="0"/>
+              <a:t>Illustration: a geothermal power station</a:t>
+            </a:r>
+            <a:endParaRPr lang="en-US" sz="1600" dirty="0"/>
           </a:p>
         </p:txBody>
       </p:sp>
@@ -15665,7 +16191,7 @@
                 <a:ea typeface="Times New Roman" pitchFamily="34" charset="-122"/>
                 <a:cs typeface="Times New Roman" pitchFamily="34" charset="-120"/>
               </a:rPr>
-              <a:t>2. Volcanoes as a Hazard (continued)</a:t>
+              <a:t>1. Volcanoes as a Resource</a:t>
             </a:r>
             <a:endParaRPr lang="en-US" sz="3600" dirty="0"/>
           </a:p>
@@ -15707,7 +16233,7 @@
                 <a:ea typeface="Times New Roman" pitchFamily="34" charset="-122"/>
                 <a:cs typeface="Times New Roman" pitchFamily="34" charset="-120"/>
               </a:rPr>
-              <a:t>Toxic gases: </a:t>
+              <a:t>Building materials: </a:t>
             </a:r>
             <a:pPr algn="l" indent="0" marL="0">
               <a:spcAft>
@@ -15724,7 +16250,44 @@
                 <a:ea typeface="Times New Roman" pitchFamily="34" charset="-122"/>
                 <a:cs typeface="Times New Roman" pitchFamily="34" charset="-120"/>
               </a:rPr>
-              <a:t>Carbon dioxide released from Lake Nyos in 1986 killed about 1,700 people and many animals. Lake Monoun killed 37 people in 1984.</a:t>
+              <a:t>Basalt and scoria are quarried for roads and houses.</a:t>
+            </a:r>
+            <a:endParaRPr lang="en-US" sz="4000" dirty="0"/>
+          </a:p>
+          <a:p>
+            <a:pPr algn="l" indent="0" marL="0">
+              <a:spcAft>
+                <a:spcPts val="800"/>
+              </a:spcAft>
+              <a:buNone/>
+            </a:pPr>
+            <a:r>
+              <a:rPr lang="en-US" sz="4000" b="1" dirty="0">
+                <a:solidFill>
+                  <a:srgbClr val="111111"/>
+                </a:solidFill>
+                <a:latin typeface="Times New Roman" pitchFamily="34" charset="0"/>
+                <a:ea typeface="Times New Roman" pitchFamily="34" charset="-122"/>
+                <a:cs typeface="Times New Roman" pitchFamily="34" charset="-120"/>
+              </a:rPr>
+              <a:t>Minerals: </a:t>
+            </a:r>
+            <a:pPr algn="l" indent="0" marL="0">
+              <a:spcAft>
+                <a:spcPts val="800"/>
+              </a:spcAft>
+              <a:buNone/>
+            </a:pPr>
+            <a:r>
+              <a:rPr lang="en-US" sz="4000" dirty="0">
+                <a:solidFill>
+                  <a:srgbClr val="111111"/>
+                </a:solidFill>
+                <a:latin typeface="Times New Roman" pitchFamily="34" charset="0"/>
+                <a:ea typeface="Times New Roman" pitchFamily="34" charset="-122"/>
+                <a:cs typeface="Times New Roman" pitchFamily="34" charset="-120"/>
+              </a:rPr>
+              <a:t>Sulphur, diamonds and copper are found in volcanic areas.</a:t>
             </a:r>
             <a:endParaRPr lang="en-US" sz="4000" dirty="0"/>
           </a:p>
@@ -15842,9 +16405,129 @@
           </a:p>
         </p:txBody>
       </p:sp>
+      <p:sp>
+        <p:nvSpPr>
+          <p:cNvPr id="3" name="Text 1"/>
+          <p:cNvSpPr/>
+          <p:nvPr/>
+        </p:nvSpPr>
+        <p:spPr>
+          <a:xfrm>
+            <a:off x="365760" y="1005840"/>
+            <a:ext cx="11460175" cy="731520"/>
+          </a:xfrm>
+          <a:prstGeom prst="rect">
+            <a:avLst/>
+          </a:prstGeom>
+          <a:noFill/>
+          <a:ln/>
+        </p:spPr>
+        <p:txBody>
+          <a:bodyPr wrap="square" lIns="0" tIns="0" rIns="0" bIns="0" rtlCol="0" anchor="ctr">
+            <a:normAutofit/>
+          </a:bodyPr>
+          <a:lstStyle/>
+          <a:p>
+            <a:pPr algn="ctr" indent="0" marL="0">
+              <a:buNone/>
+            </a:pPr>
+            <a:r>
+              <a:rPr lang="en-US" sz="3600" b="1" dirty="0">
+                <a:solidFill>
+                  <a:srgbClr val="990011"/>
+                </a:solidFill>
+                <a:latin typeface="Times New Roman" pitchFamily="34" charset="0"/>
+                <a:ea typeface="Times New Roman" pitchFamily="34" charset="-122"/>
+                <a:cs typeface="Times New Roman" pitchFamily="34" charset="-120"/>
+              </a:rPr>
+              <a:t>2. Volcanoes as a Hazard</a:t>
+            </a:r>
+            <a:endParaRPr lang="en-US" sz="3600" dirty="0"/>
+          </a:p>
+        </p:txBody>
+      </p:sp>
+      <p:sp>
+        <p:nvSpPr>
+          <p:cNvPr id="4" name="Text 2"/>
+          <p:cNvSpPr/>
+          <p:nvPr/>
+        </p:nvSpPr>
+        <p:spPr>
+          <a:xfrm>
+            <a:off x="365760" y="1783080"/>
+            <a:ext cx="4846320" cy="4617720"/>
+          </a:xfrm>
+          <a:prstGeom prst="rect">
+            <a:avLst/>
+          </a:prstGeom>
+          <a:noFill/>
+          <a:ln/>
+        </p:spPr>
+        <p:txBody>
+          <a:bodyPr wrap="square" lIns="0" tIns="0" rIns="0" bIns="0" rtlCol="0" anchor="t"/>
+          <a:lstStyle/>
+          <a:p>
+            <a:pPr algn="l" indent="0" marL="0">
+              <a:spcAft>
+                <a:spcPts val="800"/>
+              </a:spcAft>
+              <a:buNone/>
+            </a:pPr>
+            <a:r>
+              <a:rPr lang="en-US" sz="3200" i="1" dirty="0">
+                <a:solidFill>
+                  <a:srgbClr val="111111"/>
+                </a:solidFill>
+                <a:latin typeface="Times New Roman" pitchFamily="34" charset="0"/>
+                <a:ea typeface="Times New Roman" pitchFamily="34" charset="-122"/>
+                <a:cs typeface="Times New Roman" pitchFamily="34" charset="-120"/>
+              </a:rPr>
+              <a:t>Volcanoes cause the following hazards:</a:t>
+            </a:r>
+            <a:endParaRPr lang="en-US" sz="3200" dirty="0"/>
+          </a:p>
+          <a:p>
+            <a:pPr algn="l" indent="0" marL="0">
+              <a:spcAft>
+                <a:spcPts val="800"/>
+              </a:spcAft>
+              <a:buNone/>
+            </a:pPr>
+            <a:r>
+              <a:rPr lang="en-US" sz="3200" b="1" dirty="0">
+                <a:solidFill>
+                  <a:srgbClr val="111111"/>
+                </a:solidFill>
+                <a:latin typeface="Times New Roman" pitchFamily="34" charset="0"/>
+                <a:ea typeface="Times New Roman" pitchFamily="34" charset="-122"/>
+                <a:cs typeface="Times New Roman" pitchFamily="34" charset="-120"/>
+              </a:rPr>
+              <a:t>Lava flows: </a:t>
+            </a:r>
+            <a:pPr algn="l" indent="0" marL="0">
+              <a:spcAft>
+                <a:spcPts val="800"/>
+              </a:spcAft>
+              <a:buNone/>
+            </a:pPr>
+            <a:r>
+              <a:rPr lang="en-US" sz="3200" dirty="0">
+                <a:solidFill>
+                  <a:srgbClr val="111111"/>
+                </a:solidFill>
+                <a:latin typeface="Times New Roman" pitchFamily="34" charset="0"/>
+                <a:ea typeface="Times New Roman" pitchFamily="34" charset="-122"/>
+                <a:cs typeface="Times New Roman" pitchFamily="34" charset="-120"/>
+              </a:rPr>
+              <a:t>Rivers of molten rock destroy houses, roads and farms, as in the 1999 eruption of Mount Cameroon, though people can usually escape.</a:t>
+            </a:r>
+            <a:endParaRPr lang="en-US" sz="3200" dirty="0"/>
+          </a:p>
+        </p:txBody>
+      </p:sp>
       <p:pic>
         <p:nvPicPr>
-          <p:cNvPr id="3" name="Image 0" descr="/home/claude/f4/img/minesec_sheet.png">    </p:cNvPr>
+          <p:cNvPr id="5" name="Image 0" descr="/home/claude/f4/img/v2/f4_lavahouse.jpg">    </p:cNvPr>
           <p:cNvPicPr>
             <a:picLocks noChangeAspect="1"/>
           </p:cNvPicPr>
@@ -15858,8 +16541,8 @@
         </p:blipFill>
         <p:spPr>
           <a:xfrm>
-            <a:off x="0" y="658368"/>
-            <a:ext cx="5120640" cy="5833872"/>
+            <a:off x="5349240" y="2071212"/>
+            <a:ext cx="6659575" cy="3693983"/>
           </a:xfrm>
           <a:prstGeom prst="rect">
             <a:avLst/>
@@ -15868,14 +16551,14 @@
       </p:pic>
       <p:sp>
         <p:nvSpPr>
-          <p:cNvPr id="4" name="Text 1"/>
+          <p:cNvPr id="6" name="Text 3"/>
           <p:cNvSpPr/>
           <p:nvPr/>
         </p:nvSpPr>
         <p:spPr>
           <a:xfrm>
-            <a:off x="5349240" y="1005840"/>
-            <a:ext cx="6522415" cy="731520"/>
+            <a:off x="5349240" y="6089904"/>
+            <a:ext cx="6659575" cy="347472"/>
           </a:xfrm>
           <a:prstGeom prst="rect">
             <a:avLst/>
@@ -15884,105 +16567,24 @@
           <a:ln/>
         </p:spPr>
         <p:txBody>
-          <a:bodyPr wrap="square" lIns="0" tIns="0" rIns="0" bIns="0" rtlCol="0" anchor="ctr">
-            <a:normAutofit/>
-          </a:bodyPr>
+          <a:bodyPr wrap="square" lIns="0" tIns="0" rIns="0" bIns="0" rtlCol="0" anchor="ctr"/>
           <a:lstStyle/>
           <a:p>
             <a:pPr algn="ctr" indent="0" marL="0">
               <a:buNone/>
             </a:pPr>
             <a:r>
-              <a:rPr lang="en-US" sz="3600" b="1" dirty="0">
-                <a:solidFill>
-                  <a:srgbClr val="990011"/>
+              <a:rPr lang="en-US" sz="1600" i="1" dirty="0">
+                <a:solidFill>
+                  <a:srgbClr val="555555"/>
                 </a:solidFill>
                 <a:latin typeface="Times New Roman" pitchFamily="34" charset="0"/>
                 <a:ea typeface="Times New Roman" pitchFamily="34" charset="-122"/>
                 <a:cs typeface="Times New Roman" pitchFamily="34" charset="-120"/>
               </a:rPr>
-              <a:t>3. Adaptation and Mitigation Strategies</a:t>
-            </a:r>
-            <a:endParaRPr lang="en-US" sz="3600" dirty="0"/>
-          </a:p>
-        </p:txBody>
-      </p:sp>
-      <p:sp>
-        <p:nvSpPr>
-          <p:cNvPr id="5" name="Text 2"/>
-          <p:cNvSpPr/>
-          <p:nvPr/>
-        </p:nvSpPr>
-        <p:spPr>
-          <a:xfrm>
-            <a:off x="5349240" y="1783080"/>
-            <a:ext cx="6522415" cy="4663440"/>
-          </a:xfrm>
-          <a:prstGeom prst="rect">
-            <a:avLst/>
-          </a:prstGeom>
-          <a:noFill/>
-          <a:ln/>
-        </p:spPr>
-        <p:txBody>
-          <a:bodyPr wrap="square" lIns="0" tIns="0" rIns="0" bIns="0" rtlCol="0" anchor="t"/>
-          <a:lstStyle/>
-          <a:p>
-            <a:pPr algn="l" indent="0" marL="0">
-              <a:spcAft>
-                <a:spcPts val="800"/>
-              </a:spcAft>
-              <a:buNone/>
-            </a:pPr>
-            <a:r>
-              <a:rPr lang="en-US" sz="4000" i="1" dirty="0">
-                <a:solidFill>
-                  <a:srgbClr val="111111"/>
-                </a:solidFill>
-                <a:latin typeface="Times New Roman" pitchFamily="34" charset="0"/>
-                <a:ea typeface="Times New Roman" pitchFamily="34" charset="-122"/>
-                <a:cs typeface="Times New Roman" pitchFamily="34" charset="-120"/>
-              </a:rPr>
-              <a:t>People reduce volcanic risks through:</a:t>
-            </a:r>
-            <a:endParaRPr lang="en-US" sz="4000" dirty="0"/>
-          </a:p>
-          <a:p>
-            <a:pPr algn="l" indent="0" marL="0">
-              <a:spcAft>
-                <a:spcPts val="800"/>
-              </a:spcAft>
-              <a:buNone/>
-            </a:pPr>
-            <a:r>
-              <a:rPr lang="en-US" sz="4000" b="1" dirty="0">
-                <a:solidFill>
-                  <a:srgbClr val="111111"/>
-                </a:solidFill>
-                <a:latin typeface="Times New Roman" pitchFamily="34" charset="0"/>
-                <a:ea typeface="Times New Roman" pitchFamily="34" charset="-122"/>
-                <a:cs typeface="Times New Roman" pitchFamily="34" charset="-120"/>
-              </a:rPr>
-              <a:t>Monitoring and warning: </a:t>
-            </a:r>
-            <a:pPr algn="l" indent="0" marL="0">
-              <a:spcAft>
-                <a:spcPts val="800"/>
-              </a:spcAft>
-              <a:buNone/>
-            </a:pPr>
-            <a:r>
-              <a:rPr lang="en-US" sz="4000" dirty="0">
-                <a:solidFill>
-                  <a:srgbClr val="111111"/>
-                </a:solidFill>
-                <a:latin typeface="Times New Roman" pitchFamily="34" charset="0"/>
-                <a:ea typeface="Times New Roman" pitchFamily="34" charset="-122"/>
-                <a:cs typeface="Times New Roman" pitchFamily="34" charset="-120"/>
-              </a:rPr>
-              <a:t>Seismographs, tiltmeters and gas sensors detect signs of eruptions. Early warnings allow people to evacuate.</a:t>
-            </a:r>
-            <a:endParaRPr lang="en-US" sz="4000" dirty="0"/>
+              <a:t>Illustration: a house destroyed by lava</a:t>
+            </a:r>
+            <a:endParaRPr lang="en-US" sz="1600" dirty="0"/>
           </a:p>
         </p:txBody>
       </p:sp>
@@ -16115,7 +16717,7 @@
         <p:spPr>
           <a:xfrm>
             <a:off x="0" y="658368"/>
-            <a:ext cx="1463040" cy="5833872"/>
+            <a:ext cx="3840480" cy="5833872"/>
           </a:xfrm>
           <a:prstGeom prst="rect">
             <a:avLst/>
@@ -16130,8 +16732,8 @@
         </p:nvSpPr>
         <p:spPr>
           <a:xfrm>
-            <a:off x="1691640" y="1005840"/>
-            <a:ext cx="10180015" cy="731520"/>
+            <a:off x="4069080" y="1005840"/>
+            <a:ext cx="7802575" cy="731520"/>
           </a:xfrm>
           <a:prstGeom prst="rect">
             <a:avLst/>
@@ -16157,7 +16759,7 @@
                 <a:ea typeface="Times New Roman" pitchFamily="34" charset="-122"/>
                 <a:cs typeface="Times New Roman" pitchFamily="34" charset="-120"/>
               </a:rPr>
-              <a:t>3. Adaptation and Mitigation Strategies (continued)</a:t>
+              <a:t>2. Volcanoes as a Hazard</a:t>
             </a:r>
             <a:endParaRPr lang="en-US" sz="3600" dirty="0"/>
           </a:p>
@@ -16171,8 +16773,8 @@
         </p:nvSpPr>
         <p:spPr>
           <a:xfrm>
-            <a:off x="1691640" y="1783080"/>
-            <a:ext cx="10180015" cy="4663440"/>
+            <a:off x="4069080" y="1783080"/>
+            <a:ext cx="7802575" cy="4663440"/>
           </a:xfrm>
           <a:prstGeom prst="rect">
             <a:avLst/>
@@ -16199,7 +16801,7 @@
                 <a:ea typeface="Times New Roman" pitchFamily="34" charset="-122"/>
                 <a:cs typeface="Times New Roman" pitchFamily="34" charset="-120"/>
               </a:rPr>
-              <a:t>Land-use planning and preparedness: </a:t>
+              <a:t>Ash fall: </a:t>
             </a:r>
             <a:pPr algn="l" indent="0" marL="0">
               <a:spcAft>
@@ -16216,7 +16818,7 @@
                 <a:ea typeface="Times New Roman" pitchFamily="34" charset="-122"/>
                 <a:cs typeface="Times New Roman" pitchFamily="34" charset="-120"/>
               </a:rPr>
-              <a:t>Hazard maps show where not to build, and evacuation plans are prepared. Degassing pipes now remove carbon dioxide from Lake Nyos.</a:t>
+              <a:t>Ash collapses roofs, ruins crops and damages engines and aircraft.</a:t>
             </a:r>
             <a:endParaRPr lang="en-US" sz="4000" dirty="0"/>
           </a:p>
@@ -16236,7 +16838,7 @@
                 <a:ea typeface="Times New Roman" pitchFamily="34" charset="-122"/>
                 <a:cs typeface="Times New Roman" pitchFamily="34" charset="-120"/>
               </a:rPr>
-              <a:t>Protection works: </a:t>
+              <a:t>Pyroclastic flows: </a:t>
             </a:r>
             <a:pPr algn="l" indent="0" marL="0">
               <a:spcAft>
@@ -16253,7 +16855,7 @@
                 <a:ea typeface="Times New Roman" pitchFamily="34" charset="-122"/>
                 <a:cs typeface="Times New Roman" pitchFamily="34" charset="-120"/>
               </a:rPr>
-              <a:t>Barriers and channels can divert lava flows. Strong roofs resist ash falls.</a:t>
+              <a:t>Clouds of hot ash, rock and gas (over 500 °C, over 100 km/h) destroy everything; they are the deadliest hazard.</a:t>
             </a:r>
             <a:endParaRPr lang="en-US" sz="4000" dirty="0"/>
           </a:p>
@@ -16365,15 +16967,115 @@
                 <a:ea typeface="Calibri" pitchFamily="34" charset="-122"/>
                 <a:cs typeface="Calibri" pitchFamily="34" charset="-120"/>
               </a:rPr>
-              <a:t>FORMATIVE EVALUATION</a:t>
+              <a:t>BOARD SUMMARY</a:t>
             </a:r>
             <a:endParaRPr lang="en-US" sz="1400" dirty="0"/>
+          </a:p>
+        </p:txBody>
+      </p:sp>
+      <p:sp>
+        <p:nvSpPr>
+          <p:cNvPr id="3" name="Text 1"/>
+          <p:cNvSpPr/>
+          <p:nvPr/>
+        </p:nvSpPr>
+        <p:spPr>
+          <a:xfrm>
+            <a:off x="365760" y="1005840"/>
+            <a:ext cx="11460175" cy="731520"/>
+          </a:xfrm>
+          <a:prstGeom prst="rect">
+            <a:avLst/>
+          </a:prstGeom>
+          <a:noFill/>
+          <a:ln/>
+        </p:spPr>
+        <p:txBody>
+          <a:bodyPr wrap="square" lIns="0" tIns="0" rIns="0" bIns="0" rtlCol="0" anchor="ctr">
+            <a:normAutofit/>
+          </a:bodyPr>
+          <a:lstStyle/>
+          <a:p>
+            <a:pPr algn="ctr" indent="0" marL="0">
+              <a:buNone/>
+            </a:pPr>
+            <a:r>
+              <a:rPr lang="en-US" sz="3600" b="1" dirty="0">
+                <a:solidFill>
+                  <a:srgbClr val="990011"/>
+                </a:solidFill>
+                <a:latin typeface="Times New Roman" pitchFamily="34" charset="0"/>
+                <a:ea typeface="Times New Roman" pitchFamily="34" charset="-122"/>
+                <a:cs typeface="Times New Roman" pitchFamily="34" charset="-120"/>
+              </a:rPr>
+              <a:t>2. Volcanoes as a Hazard</a:t>
+            </a:r>
+            <a:endParaRPr lang="en-US" sz="3600" dirty="0"/>
+          </a:p>
+        </p:txBody>
+      </p:sp>
+      <p:sp>
+        <p:nvSpPr>
+          <p:cNvPr id="4" name="Text 2"/>
+          <p:cNvSpPr/>
+          <p:nvPr/>
+        </p:nvSpPr>
+        <p:spPr>
+          <a:xfrm>
+            <a:off x="365760" y="1783080"/>
+            <a:ext cx="4846320" cy="4617720"/>
+          </a:xfrm>
+          <a:prstGeom prst="rect">
+            <a:avLst/>
+          </a:prstGeom>
+          <a:noFill/>
+          <a:ln/>
+        </p:spPr>
+        <p:txBody>
+          <a:bodyPr wrap="square" lIns="0" tIns="0" rIns="0" bIns="0" rtlCol="0" anchor="t"/>
+          <a:lstStyle/>
+          <a:p>
+            <a:pPr algn="l" indent="0" marL="0">
+              <a:spcAft>
+                <a:spcPts val="800"/>
+              </a:spcAft>
+              <a:buNone/>
+            </a:pPr>
+            <a:r>
+              <a:rPr lang="en-US" sz="3600" b="1" dirty="0">
+                <a:solidFill>
+                  <a:srgbClr val="111111"/>
+                </a:solidFill>
+                <a:latin typeface="Times New Roman" pitchFamily="34" charset="0"/>
+                <a:ea typeface="Times New Roman" pitchFamily="34" charset="-122"/>
+                <a:cs typeface="Times New Roman" pitchFamily="34" charset="-120"/>
+              </a:rPr>
+              <a:t>Lahars: </a:t>
+            </a:r>
+            <a:pPr algn="l" indent="0" marL="0">
+              <a:spcAft>
+                <a:spcPts val="800"/>
+              </a:spcAft>
+              <a:buNone/>
+            </a:pPr>
+            <a:r>
+              <a:rPr lang="en-US" sz="3600" dirty="0">
+                <a:solidFill>
+                  <a:srgbClr val="111111"/>
+                </a:solidFill>
+                <a:latin typeface="Times New Roman" pitchFamily="34" charset="0"/>
+                <a:ea typeface="Times New Roman" pitchFamily="34" charset="-122"/>
+                <a:cs typeface="Times New Roman" pitchFamily="34" charset="-120"/>
+              </a:rPr>
+              <a:t>Ash mixed with rain or melted snow forms fast mudflows in valleys.</a:t>
+            </a:r>
+            <a:endParaRPr lang="en-US" sz="3600" dirty="0"/>
           </a:p>
         </p:txBody>
       </p:sp>
       <p:pic>
         <p:nvPicPr>
-          <p:cNvPr id="3" name="Image 0" descr="/home/claude/f4/img/minesec_sheet.png">    </p:cNvPr>
+          <p:cNvPr id="5" name="Image 0" descr="/home/claude/f4/img/v2/lsa_lahar.jpg">    </p:cNvPr>
           <p:cNvPicPr>
             <a:picLocks noChangeAspect="1"/>
           </p:cNvPicPr>
@@ -16387,8 +17089,8 @@
         </p:blipFill>
         <p:spPr>
           <a:xfrm>
-            <a:off x="0" y="658368"/>
-            <a:ext cx="5120640" cy="5833872"/>
+            <a:off x="5349240" y="2071212"/>
+            <a:ext cx="6659575" cy="3693983"/>
           </a:xfrm>
           <a:prstGeom prst="rect">
             <a:avLst/>
@@ -16397,14 +17099,14 @@
       </p:pic>
       <p:sp>
         <p:nvSpPr>
-          <p:cNvPr id="4" name="Text 1"/>
+          <p:cNvPr id="6" name="Text 3"/>
           <p:cNvSpPr/>
           <p:nvPr/>
         </p:nvSpPr>
         <p:spPr>
           <a:xfrm>
-            <a:off x="5349240" y="1005840"/>
-            <a:ext cx="6522415" cy="731520"/>
+            <a:off x="5349240" y="6089904"/>
+            <a:ext cx="6659575" cy="347472"/>
           </a:xfrm>
           <a:prstGeom prst="rect">
             <a:avLst/>
@@ -16413,68 +17115,24 @@
           <a:ln/>
         </p:spPr>
         <p:txBody>
-          <a:bodyPr wrap="square" lIns="0" tIns="0" rIns="0" bIns="0" rtlCol="0" anchor="ctr">
-            <a:normAutofit/>
-          </a:bodyPr>
+          <a:bodyPr wrap="square" lIns="0" tIns="0" rIns="0" bIns="0" rtlCol="0" anchor="ctr"/>
           <a:lstStyle/>
           <a:p>
             <a:pPr algn="ctr" indent="0" marL="0">
               <a:buNone/>
             </a:pPr>
             <a:r>
-              <a:rPr lang="en-US" sz="3600" b="1" dirty="0">
-                <a:solidFill>
-                  <a:srgbClr val="990011"/>
+              <a:rPr lang="en-US" sz="1600" i="1" dirty="0">
+                <a:solidFill>
+                  <a:srgbClr val="555555"/>
                 </a:solidFill>
                 <a:latin typeface="Times New Roman" pitchFamily="34" charset="0"/>
                 <a:ea typeface="Times New Roman" pitchFamily="34" charset="-122"/>
                 <a:cs typeface="Times New Roman" pitchFamily="34" charset="-120"/>
               </a:rPr>
-              <a:t>Evaluation 1</a:t>
-            </a:r>
-            <a:endParaRPr lang="en-US" sz="3600" dirty="0"/>
-          </a:p>
-        </p:txBody>
-      </p:sp>
-      <p:sp>
-        <p:nvSpPr>
-          <p:cNvPr id="5" name="Text 2"/>
-          <p:cNvSpPr/>
-          <p:nvPr/>
-        </p:nvSpPr>
-        <p:spPr>
-          <a:xfrm>
-            <a:off x="5349240" y="1783080"/>
-            <a:ext cx="6522415" cy="4663440"/>
-          </a:xfrm>
-          <a:prstGeom prst="rect">
-            <a:avLst/>
-          </a:prstGeom>
-          <a:noFill/>
-          <a:ln/>
-        </p:spPr>
-        <p:txBody>
-          <a:bodyPr wrap="square" lIns="0" tIns="0" rIns="0" bIns="0" rtlCol="0" anchor="t"/>
-          <a:lstStyle/>
-          <a:p>
-            <a:pPr algn="l" indent="0" marL="0">
-              <a:spcAft>
-                <a:spcPts val="800"/>
-              </a:spcAft>
-              <a:buNone/>
-            </a:pPr>
-            <a:r>
-              <a:rPr lang="en-US" sz="4000" dirty="0">
-                <a:solidFill>
-                  <a:srgbClr val="111111"/>
-                </a:solidFill>
-                <a:latin typeface="Times New Roman" pitchFamily="34" charset="0"/>
-                <a:ea typeface="Times New Roman" pitchFamily="34" charset="-122"/>
-                <a:cs typeface="Times New Roman" pitchFamily="34" charset="-120"/>
-              </a:rPr>
-              <a:t>Give two benefits of volcanoes.</a:t>
-            </a:r>
-            <a:endParaRPr lang="en-US" sz="4000" dirty="0"/>
+              <a:t>Illustration: a lahar</a:t>
+            </a:r>
+            <a:endParaRPr lang="en-US" sz="1600" dirty="0"/>
           </a:p>
         </p:txBody>
       </p:sp>
@@ -16584,15 +17242,115 @@
                 <a:ea typeface="Calibri" pitchFamily="34" charset="-122"/>
                 <a:cs typeface="Calibri" pitchFamily="34" charset="-120"/>
               </a:rPr>
-              <a:t>FORMATIVE EVALUATION</a:t>
+              <a:t>BOARD SUMMARY</a:t>
             </a:r>
             <a:endParaRPr lang="en-US" sz="1400" dirty="0"/>
+          </a:p>
+        </p:txBody>
+      </p:sp>
+      <p:sp>
+        <p:nvSpPr>
+          <p:cNvPr id="3" name="Text 1"/>
+          <p:cNvSpPr/>
+          <p:nvPr/>
+        </p:nvSpPr>
+        <p:spPr>
+          <a:xfrm>
+            <a:off x="365760" y="1005840"/>
+            <a:ext cx="11460175" cy="731520"/>
+          </a:xfrm>
+          <a:prstGeom prst="rect">
+            <a:avLst/>
+          </a:prstGeom>
+          <a:noFill/>
+          <a:ln/>
+        </p:spPr>
+        <p:txBody>
+          <a:bodyPr wrap="square" lIns="0" tIns="0" rIns="0" bIns="0" rtlCol="0" anchor="ctr">
+            <a:normAutofit/>
+          </a:bodyPr>
+          <a:lstStyle/>
+          <a:p>
+            <a:pPr algn="ctr" indent="0" marL="0">
+              <a:buNone/>
+            </a:pPr>
+            <a:r>
+              <a:rPr lang="en-US" sz="3600" b="1" dirty="0">
+                <a:solidFill>
+                  <a:srgbClr val="990011"/>
+                </a:solidFill>
+                <a:latin typeface="Times New Roman" pitchFamily="34" charset="0"/>
+                <a:ea typeface="Times New Roman" pitchFamily="34" charset="-122"/>
+                <a:cs typeface="Times New Roman" pitchFamily="34" charset="-120"/>
+              </a:rPr>
+              <a:t>2. Volcanoes as a Hazard</a:t>
+            </a:r>
+            <a:endParaRPr lang="en-US" sz="3600" dirty="0"/>
+          </a:p>
+        </p:txBody>
+      </p:sp>
+      <p:sp>
+        <p:nvSpPr>
+          <p:cNvPr id="4" name="Text 2"/>
+          <p:cNvSpPr/>
+          <p:nvPr/>
+        </p:nvSpPr>
+        <p:spPr>
+          <a:xfrm>
+            <a:off x="365760" y="1783080"/>
+            <a:ext cx="4846320" cy="4617720"/>
+          </a:xfrm>
+          <a:prstGeom prst="rect">
+            <a:avLst/>
+          </a:prstGeom>
+          <a:noFill/>
+          <a:ln/>
+        </p:spPr>
+        <p:txBody>
+          <a:bodyPr wrap="square" lIns="0" tIns="0" rIns="0" bIns="0" rtlCol="0" anchor="t"/>
+          <a:lstStyle/>
+          <a:p>
+            <a:pPr algn="l" indent="0" marL="0">
+              <a:spcAft>
+                <a:spcPts val="800"/>
+              </a:spcAft>
+              <a:buNone/>
+            </a:pPr>
+            <a:r>
+              <a:rPr lang="en-US" sz="3600" b="1" dirty="0">
+                <a:solidFill>
+                  <a:srgbClr val="111111"/>
+                </a:solidFill>
+                <a:latin typeface="Times New Roman" pitchFamily="34" charset="0"/>
+                <a:ea typeface="Times New Roman" pitchFamily="34" charset="-122"/>
+                <a:cs typeface="Times New Roman" pitchFamily="34" charset="-120"/>
+              </a:rPr>
+              <a:t>Poisonous gases: </a:t>
+            </a:r>
+            <a:pPr algn="l" indent="0" marL="0">
+              <a:spcAft>
+                <a:spcPts val="800"/>
+              </a:spcAft>
+              <a:buNone/>
+            </a:pPr>
+            <a:r>
+              <a:rPr lang="en-US" sz="3600" dirty="0">
+                <a:solidFill>
+                  <a:srgbClr val="111111"/>
+                </a:solidFill>
+                <a:latin typeface="Times New Roman" pitchFamily="34" charset="0"/>
+                <a:ea typeface="Times New Roman" pitchFamily="34" charset="-122"/>
+                <a:cs typeface="Times New Roman" pitchFamily="34" charset="-120"/>
+              </a:rPr>
+              <a:t>In 1986, Lake Nyos suddenly released carbon dioxide that killed about 1,700 people and thousands of cattle.</a:t>
+            </a:r>
+            <a:endParaRPr lang="en-US" sz="3600" dirty="0"/>
           </a:p>
         </p:txBody>
       </p:sp>
       <p:pic>
         <p:nvPicPr>
-          <p:cNvPr id="3" name="Image 0" descr="/home/claude/f4/img/minesec_sheet.png">    </p:cNvPr>
+          <p:cNvPr id="5" name="Image 0" descr="/home/claude/f4/img/v2/f4_nyos.jpg">    </p:cNvPr>
           <p:cNvPicPr>
             <a:picLocks noChangeAspect="1"/>
           </p:cNvPicPr>
@@ -16606,8 +17364,8 @@
         </p:blipFill>
         <p:spPr>
           <a:xfrm>
-            <a:off x="0" y="658368"/>
-            <a:ext cx="5120640" cy="5833872"/>
+            <a:off x="5349240" y="2071212"/>
+            <a:ext cx="6659575" cy="3693983"/>
           </a:xfrm>
           <a:prstGeom prst="rect">
             <a:avLst/>
@@ -16616,14 +17374,14 @@
       </p:pic>
       <p:sp>
         <p:nvSpPr>
-          <p:cNvPr id="4" name="Text 1"/>
+          <p:cNvPr id="6" name="Text 3"/>
           <p:cNvSpPr/>
           <p:nvPr/>
         </p:nvSpPr>
         <p:spPr>
           <a:xfrm>
-            <a:off x="5349240" y="1005840"/>
-            <a:ext cx="6522415" cy="731520"/>
+            <a:off x="5349240" y="6089904"/>
+            <a:ext cx="6659575" cy="347472"/>
           </a:xfrm>
           <a:prstGeom prst="rect">
             <a:avLst/>
@@ -16632,68 +17390,24 @@
           <a:ln/>
         </p:spPr>
         <p:txBody>
-          <a:bodyPr wrap="square" lIns="0" tIns="0" rIns="0" bIns="0" rtlCol="0" anchor="ctr">
-            <a:normAutofit/>
-          </a:bodyPr>
+          <a:bodyPr wrap="square" lIns="0" tIns="0" rIns="0" bIns="0" rtlCol="0" anchor="ctr"/>
           <a:lstStyle/>
           <a:p>
             <a:pPr algn="ctr" indent="0" marL="0">
               <a:buNone/>
             </a:pPr>
             <a:r>
-              <a:rPr lang="en-US" sz="3600" b="1" dirty="0">
-                <a:solidFill>
-                  <a:srgbClr val="990011"/>
+              <a:rPr lang="en-US" sz="1600" i="1" dirty="0">
+                <a:solidFill>
+                  <a:srgbClr val="555555"/>
                 </a:solidFill>
                 <a:latin typeface="Times New Roman" pitchFamily="34" charset="0"/>
                 <a:ea typeface="Times New Roman" pitchFamily="34" charset="-122"/>
                 <a:cs typeface="Times New Roman" pitchFamily="34" charset="-120"/>
               </a:rPr>
-              <a:t>Expected Answer</a:t>
-            </a:r>
-            <a:endParaRPr lang="en-US" sz="3600" dirty="0"/>
-          </a:p>
-        </p:txBody>
-      </p:sp>
-      <p:sp>
-        <p:nvSpPr>
-          <p:cNvPr id="5" name="Text 2"/>
-          <p:cNvSpPr/>
-          <p:nvPr/>
-        </p:nvSpPr>
-        <p:spPr>
-          <a:xfrm>
-            <a:off x="5349240" y="1783080"/>
-            <a:ext cx="6522415" cy="4663440"/>
-          </a:xfrm>
-          <a:prstGeom prst="rect">
-            <a:avLst/>
-          </a:prstGeom>
-          <a:noFill/>
-          <a:ln/>
-        </p:spPr>
-        <p:txBody>
-          <a:bodyPr wrap="square" lIns="0" tIns="0" rIns="0" bIns="0" rtlCol="0" anchor="t"/>
-          <a:lstStyle/>
-          <a:p>
-            <a:pPr algn="l" indent="0" marL="0">
-              <a:spcAft>
-                <a:spcPts val="800"/>
-              </a:spcAft>
-              <a:buNone/>
-            </a:pPr>
-            <a:r>
-              <a:rPr lang="en-US" sz="4000" dirty="0">
-                <a:solidFill>
-                  <a:srgbClr val="111111"/>
-                </a:solidFill>
-                <a:latin typeface="Times New Roman" pitchFamily="34" charset="0"/>
-                <a:ea typeface="Times New Roman" pitchFamily="34" charset="-122"/>
-                <a:cs typeface="Times New Roman" pitchFamily="34" charset="-120"/>
-              </a:rPr>
-              <a:t>Fertile soils and geothermal energy.</a:t>
-            </a:r>
-            <a:endParaRPr lang="en-US" sz="4000" dirty="0"/>
+              <a:t>Illustration: Lake Nyos</a:t>
+            </a:r>
+            <a:endParaRPr lang="en-US" sz="1600" dirty="0"/>
           </a:p>
         </p:txBody>
       </p:sp>
@@ -16803,15 +17517,135 @@
                 <a:ea typeface="Calibri" pitchFamily="34" charset="-122"/>
                 <a:cs typeface="Calibri" pitchFamily="34" charset="-120"/>
               </a:rPr>
-              <a:t>FORMATIVE EVALUATION</a:t>
+              <a:t>BOARD SUMMARY</a:t>
             </a:r>
             <a:endParaRPr lang="en-US" sz="1400" dirty="0"/>
+          </a:p>
+        </p:txBody>
+      </p:sp>
+      <p:sp>
+        <p:nvSpPr>
+          <p:cNvPr id="3" name="Text 1"/>
+          <p:cNvSpPr/>
+          <p:nvPr/>
+        </p:nvSpPr>
+        <p:spPr>
+          <a:xfrm>
+            <a:off x="365760" y="1005840"/>
+            <a:ext cx="11460175" cy="731520"/>
+          </a:xfrm>
+          <a:prstGeom prst="rect">
+            <a:avLst/>
+          </a:prstGeom>
+          <a:noFill/>
+          <a:ln/>
+        </p:spPr>
+        <p:txBody>
+          <a:bodyPr wrap="square" lIns="0" tIns="0" rIns="0" bIns="0" rtlCol="0" anchor="ctr">
+            <a:normAutofit/>
+          </a:bodyPr>
+          <a:lstStyle/>
+          <a:p>
+            <a:pPr algn="ctr" indent="0" marL="0">
+              <a:buNone/>
+            </a:pPr>
+            <a:r>
+              <a:rPr lang="en-US" sz="3600" b="1" dirty="0">
+                <a:solidFill>
+                  <a:srgbClr val="990011"/>
+                </a:solidFill>
+                <a:latin typeface="Times New Roman" pitchFamily="34" charset="0"/>
+                <a:ea typeface="Times New Roman" pitchFamily="34" charset="-122"/>
+                <a:cs typeface="Times New Roman" pitchFamily="34" charset="-120"/>
+              </a:rPr>
+              <a:t>3. Adaptation and Mitigation</a:t>
+            </a:r>
+            <a:endParaRPr lang="en-US" sz="3600" dirty="0"/>
+          </a:p>
+        </p:txBody>
+      </p:sp>
+      <p:sp>
+        <p:nvSpPr>
+          <p:cNvPr id="4" name="Text 2"/>
+          <p:cNvSpPr/>
+          <p:nvPr/>
+        </p:nvSpPr>
+        <p:spPr>
+          <a:xfrm>
+            <a:off x="365760" y="1783080"/>
+            <a:ext cx="4846320" cy="4617720"/>
+          </a:xfrm>
+          <a:prstGeom prst="rect">
+            <a:avLst/>
+          </a:prstGeom>
+          <a:noFill/>
+          <a:ln/>
+        </p:spPr>
+        <p:txBody>
+          <a:bodyPr wrap="square" lIns="0" tIns="0" rIns="0" bIns="0" rtlCol="0" anchor="t"/>
+          <a:lstStyle/>
+          <a:p>
+            <a:pPr algn="l" indent="0" marL="0">
+              <a:spcAft>
+                <a:spcPts val="800"/>
+              </a:spcAft>
+              <a:buNone/>
+            </a:pPr>
+            <a:r>
+              <a:rPr lang="en-US" sz="3200" i="1" dirty="0">
+                <a:solidFill>
+                  <a:srgbClr val="111111"/>
+                </a:solidFill>
+                <a:latin typeface="Times New Roman" pitchFamily="34" charset="0"/>
+                <a:ea typeface="Times New Roman" pitchFamily="34" charset="-122"/>
+                <a:cs typeface="Times New Roman" pitchFamily="34" charset="-120"/>
+              </a:rPr>
+              <a:t>People reduce volcanic risks with the following strategies:</a:t>
+            </a:r>
+            <a:endParaRPr lang="en-US" sz="3200" dirty="0"/>
+          </a:p>
+          <a:p>
+            <a:pPr algn="l" indent="0" marL="0">
+              <a:spcAft>
+                <a:spcPts val="800"/>
+              </a:spcAft>
+              <a:buNone/>
+            </a:pPr>
+            <a:r>
+              <a:rPr lang="en-US" sz="3200" b="1" dirty="0">
+                <a:solidFill>
+                  <a:srgbClr val="111111"/>
+                </a:solidFill>
+                <a:latin typeface="Times New Roman" pitchFamily="34" charset="0"/>
+                <a:ea typeface="Times New Roman" pitchFamily="34" charset="-122"/>
+                <a:cs typeface="Times New Roman" pitchFamily="34" charset="-120"/>
+              </a:rPr>
+              <a:t>Monitoring: </a:t>
+            </a:r>
+            <a:pPr algn="l" indent="0" marL="0">
+              <a:spcAft>
+                <a:spcPts val="800"/>
+              </a:spcAft>
+              <a:buNone/>
+            </a:pPr>
+            <a:r>
+              <a:rPr lang="en-US" sz="3200" dirty="0">
+                <a:solidFill>
+                  <a:srgbClr val="111111"/>
+                </a:solidFill>
+                <a:latin typeface="Times New Roman" pitchFamily="34" charset="0"/>
+                <a:ea typeface="Times New Roman" pitchFamily="34" charset="-122"/>
+                <a:cs typeface="Times New Roman" pitchFamily="34" charset="-120"/>
+              </a:rPr>
+              <a:t>Seismometers detect small earthquakes, gas sensors measure emissions and GPS detects swelling of the volcano.</a:t>
+            </a:r>
+            <a:endParaRPr lang="en-US" sz="3200" dirty="0"/>
           </a:p>
         </p:txBody>
       </p:sp>
       <p:pic>
         <p:nvPicPr>
-          <p:cNvPr id="3" name="Image 0" descr="/home/claude/f4/img/minesec_sheet.png">    </p:cNvPr>
+          <p:cNvPr id="5" name="Image 0" descr="/home/claude/f4/img/v2/lsa_volcmonitor.jpg">    </p:cNvPr>
           <p:cNvPicPr>
             <a:picLocks noChangeAspect="1"/>
           </p:cNvPicPr>
@@ -16825,8 +17659,8 @@
         </p:blipFill>
         <p:spPr>
           <a:xfrm>
-            <a:off x="0" y="658368"/>
-            <a:ext cx="5120640" cy="5833872"/>
+            <a:off x="5349240" y="2071212"/>
+            <a:ext cx="6659575" cy="3693983"/>
           </a:xfrm>
           <a:prstGeom prst="rect">
             <a:avLst/>
@@ -16835,14 +17669,14 @@
       </p:pic>
       <p:sp>
         <p:nvSpPr>
-          <p:cNvPr id="4" name="Text 1"/>
+          <p:cNvPr id="6" name="Text 3"/>
           <p:cNvSpPr/>
           <p:nvPr/>
         </p:nvSpPr>
         <p:spPr>
           <a:xfrm>
-            <a:off x="5349240" y="1005840"/>
-            <a:ext cx="6522415" cy="731520"/>
+            <a:off x="5349240" y="6089904"/>
+            <a:ext cx="6659575" cy="347472"/>
           </a:xfrm>
           <a:prstGeom prst="rect">
             <a:avLst/>
@@ -16851,68 +17685,24 @@
           <a:ln/>
         </p:spPr>
         <p:txBody>
-          <a:bodyPr wrap="square" lIns="0" tIns="0" rIns="0" bIns="0" rtlCol="0" anchor="ctr">
-            <a:normAutofit/>
-          </a:bodyPr>
+          <a:bodyPr wrap="square" lIns="0" tIns="0" rIns="0" bIns="0" rtlCol="0" anchor="ctr"/>
           <a:lstStyle/>
           <a:p>
             <a:pPr algn="ctr" indent="0" marL="0">
               <a:buNone/>
             </a:pPr>
             <a:r>
-              <a:rPr lang="en-US" sz="3600" b="1" dirty="0">
-                <a:solidFill>
-                  <a:srgbClr val="990011"/>
+              <a:rPr lang="en-US" sz="1600" i="1" dirty="0">
+                <a:solidFill>
+                  <a:srgbClr val="555555"/>
                 </a:solidFill>
                 <a:latin typeface="Times New Roman" pitchFamily="34" charset="0"/>
                 <a:ea typeface="Times New Roman" pitchFamily="34" charset="-122"/>
                 <a:cs typeface="Times New Roman" pitchFamily="34" charset="-120"/>
               </a:rPr>
-              <a:t>Evaluation 2</a:t>
-            </a:r>
-            <a:endParaRPr lang="en-US" sz="3600" dirty="0"/>
-          </a:p>
-        </p:txBody>
-      </p:sp>
-      <p:sp>
-        <p:nvSpPr>
-          <p:cNvPr id="5" name="Text 2"/>
-          <p:cNvSpPr/>
-          <p:nvPr/>
-        </p:nvSpPr>
-        <p:spPr>
-          <a:xfrm>
-            <a:off x="5349240" y="1783080"/>
-            <a:ext cx="6522415" cy="4663440"/>
-          </a:xfrm>
-          <a:prstGeom prst="rect">
-            <a:avLst/>
-          </a:prstGeom>
-          <a:noFill/>
-          <a:ln/>
-        </p:spPr>
-        <p:txBody>
-          <a:bodyPr wrap="square" lIns="0" tIns="0" rIns="0" bIns="0" rtlCol="0" anchor="t"/>
-          <a:lstStyle/>
-          <a:p>
-            <a:pPr algn="l" indent="0" marL="0">
-              <a:spcAft>
-                <a:spcPts val="800"/>
-              </a:spcAft>
-              <a:buNone/>
-            </a:pPr>
-            <a:r>
-              <a:rPr lang="en-US" sz="4000" dirty="0">
-                <a:solidFill>
-                  <a:srgbClr val="111111"/>
-                </a:solidFill>
-                <a:latin typeface="Times New Roman" pitchFamily="34" charset="0"/>
-                <a:ea typeface="Times New Roman" pitchFamily="34" charset="-122"/>
-                <a:cs typeface="Times New Roman" pitchFamily="34" charset="-120"/>
-              </a:rPr>
-              <a:t>Give two measures to reduce volcanic hazards.</a:t>
-            </a:r>
-            <a:endParaRPr lang="en-US" sz="4000" dirty="0"/>
+              <a:t>Illustration: monitoring a volcano</a:t>
+            </a:r>
+            <a:endParaRPr lang="en-US" sz="1600" dirty="0"/>
           </a:p>
         </p:txBody>
       </p:sp>
@@ -17022,7 +17812,7 @@
                 <a:ea typeface="Calibri" pitchFamily="34" charset="-122"/>
                 <a:cs typeface="Calibri" pitchFamily="34" charset="-120"/>
               </a:rPr>
-              <a:t>FORMATIVE EVALUATION</a:t>
+              <a:t>BOARD SUMMARY</a:t>
             </a:r>
             <a:endParaRPr lang="en-US" sz="1400" dirty="0"/>
           </a:p>
@@ -17045,7 +17835,7 @@
         <p:spPr>
           <a:xfrm>
             <a:off x="0" y="658368"/>
-            <a:ext cx="5120640" cy="5833872"/>
+            <a:ext cx="3840480" cy="5833872"/>
           </a:xfrm>
           <a:prstGeom prst="rect">
             <a:avLst/>
@@ -17060,8 +17850,8 @@
         </p:nvSpPr>
         <p:spPr>
           <a:xfrm>
-            <a:off x="5349240" y="1005840"/>
-            <a:ext cx="6522415" cy="731520"/>
+            <a:off x="4069080" y="1005840"/>
+            <a:ext cx="7802575" cy="731520"/>
           </a:xfrm>
           <a:prstGeom prst="rect">
             <a:avLst/>
@@ -17087,7 +17877,7 @@
                 <a:ea typeface="Times New Roman" pitchFamily="34" charset="-122"/>
                 <a:cs typeface="Times New Roman" pitchFamily="34" charset="-120"/>
               </a:rPr>
-              <a:t>Expected Answer</a:t>
+              <a:t>3. Adaptation and Mitigation</a:t>
             </a:r>
             <a:endParaRPr lang="en-US" sz="3600" dirty="0"/>
           </a:p>
@@ -17101,8 +17891,8 @@
         </p:nvSpPr>
         <p:spPr>
           <a:xfrm>
-            <a:off x="5349240" y="1783080"/>
-            <a:ext cx="6522415" cy="4663440"/>
+            <a:off x="4069080" y="1783080"/>
+            <a:ext cx="7802575" cy="4663440"/>
           </a:xfrm>
           <a:prstGeom prst="rect">
             <a:avLst/>
@@ -17121,7 +17911,7 @@
               <a:buNone/>
             </a:pPr>
             <a:r>
-              <a:rPr lang="en-US" sz="4000" dirty="0">
+              <a:rPr lang="en-US" sz="4000" b="1" dirty="0">
                 <a:solidFill>
                   <a:srgbClr val="111111"/>
                 </a:solidFill>
@@ -17129,7 +17919,61 @@
                 <a:ea typeface="Times New Roman" pitchFamily="34" charset="-122"/>
                 <a:cs typeface="Times New Roman" pitchFamily="34" charset="-120"/>
               </a:rPr>
-              <a:t>Monitoring and warnings; degassing Lake Nyos.</a:t>
+              <a:t>Hazard mapping and zoning: </a:t>
+            </a:r>
+            <a:pPr algn="l" indent="0" marL="0">
+              <a:spcAft>
+                <a:spcPts val="800"/>
+              </a:spcAft>
+              <a:buNone/>
+            </a:pPr>
+            <a:r>
+              <a:rPr lang="en-US" sz="4000" dirty="0">
+                <a:solidFill>
+                  <a:srgbClr val="111111"/>
+                </a:solidFill>
+                <a:latin typeface="Times New Roman" pitchFamily="34" charset="0"/>
+                <a:ea typeface="Times New Roman" pitchFamily="34" charset="-122"/>
+                <a:cs typeface="Times New Roman" pitchFamily="34" charset="-120"/>
+              </a:rPr>
+              <a:t>Maps show danger zones where houses, schools and hospitals should not be built.</a:t>
+            </a:r>
+            <a:endParaRPr lang="en-US" sz="4000" dirty="0"/>
+          </a:p>
+          <a:p>
+            <a:pPr algn="l" indent="0" marL="0">
+              <a:spcAft>
+                <a:spcPts val="800"/>
+              </a:spcAft>
+              <a:buNone/>
+            </a:pPr>
+            <a:r>
+              <a:rPr lang="en-US" sz="4000" b="1" dirty="0">
+                <a:solidFill>
+                  <a:srgbClr val="111111"/>
+                </a:solidFill>
+                <a:latin typeface="Times New Roman" pitchFamily="34" charset="0"/>
+                <a:ea typeface="Times New Roman" pitchFamily="34" charset="-122"/>
+                <a:cs typeface="Times New Roman" pitchFamily="34" charset="-120"/>
+              </a:rPr>
+              <a:t>Education and evacuation: </a:t>
+            </a:r>
+            <a:pPr algn="l" indent="0" marL="0">
+              <a:spcAft>
+                <a:spcPts val="800"/>
+              </a:spcAft>
+              <a:buNone/>
+            </a:pPr>
+            <a:r>
+              <a:rPr lang="en-US" sz="4000" dirty="0">
+                <a:solidFill>
+                  <a:srgbClr val="111111"/>
+                </a:solidFill>
+                <a:latin typeface="Times New Roman" pitchFamily="34" charset="0"/>
+                <a:ea typeface="Times New Roman" pitchFamily="34" charset="-122"/>
+                <a:cs typeface="Times New Roman" pitchFamily="34" charset="-120"/>
+              </a:rPr>
+              <a:t>People learn what to do, and evacuation routes and shelters are prepared.</a:t>
             </a:r>
             <a:endParaRPr lang="en-US" sz="4000" dirty="0"/>
           </a:p>
@@ -17241,15 +18085,115 @@
                 <a:ea typeface="Calibri" pitchFamily="34" charset="-122"/>
                 <a:cs typeface="Calibri" pitchFamily="34" charset="-120"/>
               </a:rPr>
-              <a:t>REMEDIATION</a:t>
+              <a:t>BOARD SUMMARY</a:t>
             </a:r>
             <a:endParaRPr lang="en-US" sz="1400" dirty="0"/>
+          </a:p>
+        </p:txBody>
+      </p:sp>
+      <p:sp>
+        <p:nvSpPr>
+          <p:cNvPr id="3" name="Text 1"/>
+          <p:cNvSpPr/>
+          <p:nvPr/>
+        </p:nvSpPr>
+        <p:spPr>
+          <a:xfrm>
+            <a:off x="365760" y="1005840"/>
+            <a:ext cx="11460175" cy="731520"/>
+          </a:xfrm>
+          <a:prstGeom prst="rect">
+            <a:avLst/>
+          </a:prstGeom>
+          <a:noFill/>
+          <a:ln/>
+        </p:spPr>
+        <p:txBody>
+          <a:bodyPr wrap="square" lIns="0" tIns="0" rIns="0" bIns="0" rtlCol="0" anchor="ctr">
+            <a:normAutofit/>
+          </a:bodyPr>
+          <a:lstStyle/>
+          <a:p>
+            <a:pPr algn="ctr" indent="0" marL="0">
+              <a:buNone/>
+            </a:pPr>
+            <a:r>
+              <a:rPr lang="en-US" sz="3600" b="1" dirty="0">
+                <a:solidFill>
+                  <a:srgbClr val="990011"/>
+                </a:solidFill>
+                <a:latin typeface="Times New Roman" pitchFamily="34" charset="0"/>
+                <a:ea typeface="Times New Roman" pitchFamily="34" charset="-122"/>
+                <a:cs typeface="Times New Roman" pitchFamily="34" charset="-120"/>
+              </a:rPr>
+              <a:t>3. Adaptation and Mitigation</a:t>
+            </a:r>
+            <a:endParaRPr lang="en-US" sz="3600" dirty="0"/>
+          </a:p>
+        </p:txBody>
+      </p:sp>
+      <p:sp>
+        <p:nvSpPr>
+          <p:cNvPr id="4" name="Text 2"/>
+          <p:cNvSpPr/>
+          <p:nvPr/>
+        </p:nvSpPr>
+        <p:spPr>
+          <a:xfrm>
+            <a:off x="365760" y="1783080"/>
+            <a:ext cx="4846320" cy="4617720"/>
+          </a:xfrm>
+          <a:prstGeom prst="rect">
+            <a:avLst/>
+          </a:prstGeom>
+          <a:noFill/>
+          <a:ln/>
+        </p:spPr>
+        <p:txBody>
+          <a:bodyPr wrap="square" lIns="0" tIns="0" rIns="0" bIns="0" rtlCol="0" anchor="t"/>
+          <a:lstStyle/>
+          <a:p>
+            <a:pPr algn="l" indent="0" marL="0">
+              <a:spcAft>
+                <a:spcPts val="800"/>
+              </a:spcAft>
+              <a:buNone/>
+            </a:pPr>
+            <a:r>
+              <a:rPr lang="en-US" sz="3600" b="1" dirty="0">
+                <a:solidFill>
+                  <a:srgbClr val="111111"/>
+                </a:solidFill>
+                <a:latin typeface="Times New Roman" pitchFamily="34" charset="0"/>
+                <a:ea typeface="Times New Roman" pitchFamily="34" charset="-122"/>
+                <a:cs typeface="Times New Roman" pitchFamily="34" charset="-120"/>
+              </a:rPr>
+              <a:t>Engineering: </a:t>
+            </a:r>
+            <a:pPr algn="l" indent="0" marL="0">
+              <a:spcAft>
+                <a:spcPts val="800"/>
+              </a:spcAft>
+              <a:buNone/>
+            </a:pPr>
+            <a:r>
+              <a:rPr lang="en-US" sz="3600" dirty="0">
+                <a:solidFill>
+                  <a:srgbClr val="111111"/>
+                </a:solidFill>
+                <a:latin typeface="Times New Roman" pitchFamily="34" charset="0"/>
+                <a:ea typeface="Times New Roman" pitchFamily="34" charset="-122"/>
+                <a:cs typeface="Times New Roman" pitchFamily="34" charset="-120"/>
+              </a:rPr>
+              <a:t>Strong steep roofs resist ash, barriers divert lava, and pipes now degas Lake Nyos.</a:t>
+            </a:r>
+            <a:endParaRPr lang="en-US" sz="3600" dirty="0"/>
           </a:p>
         </p:txBody>
       </p:sp>
       <p:pic>
         <p:nvPicPr>
-          <p:cNvPr id="3" name="Image 0" descr="/home/claude/f4/img/minesec_sheet.png">    </p:cNvPr>
+          <p:cNvPr id="5" name="Image 0" descr="/home/claude/f4/img/v2/geo2_volc_man.png">    </p:cNvPr>
           <p:cNvPicPr>
             <a:picLocks noChangeAspect="1"/>
           </p:cNvPicPr>
@@ -17263,8 +18207,8 @@
         </p:blipFill>
         <p:spPr>
           <a:xfrm>
-            <a:off x="0" y="658368"/>
-            <a:ext cx="5120640" cy="5833872"/>
+            <a:off x="5349240" y="2617506"/>
+            <a:ext cx="6659575" cy="2601397"/>
           </a:xfrm>
           <a:prstGeom prst="rect">
             <a:avLst/>
@@ -17273,14 +18217,14 @@
       </p:pic>
       <p:sp>
         <p:nvSpPr>
-          <p:cNvPr id="4" name="Text 1"/>
+          <p:cNvPr id="6" name="Text 3"/>
           <p:cNvSpPr/>
           <p:nvPr/>
         </p:nvSpPr>
         <p:spPr>
           <a:xfrm>
-            <a:off x="5349240" y="1005840"/>
-            <a:ext cx="6522415" cy="731520"/>
+            <a:off x="5349240" y="6089904"/>
+            <a:ext cx="6659575" cy="347472"/>
           </a:xfrm>
           <a:prstGeom prst="rect">
             <a:avLst/>
@@ -17289,112 +18233,24 @@
           <a:ln/>
         </p:spPr>
         <p:txBody>
-          <a:bodyPr wrap="square" lIns="0" tIns="0" rIns="0" bIns="0" rtlCol="0" anchor="ctr">
-            <a:normAutofit/>
-          </a:bodyPr>
+          <a:bodyPr wrap="square" lIns="0" tIns="0" rIns="0" bIns="0" rtlCol="0" anchor="ctr"/>
           <a:lstStyle/>
           <a:p>
             <a:pPr algn="ctr" indent="0" marL="0">
               <a:buNone/>
             </a:pPr>
             <a:r>
-              <a:rPr lang="en-US" sz="3600" b="1" dirty="0">
-                <a:solidFill>
-                  <a:srgbClr val="990011"/>
+              <a:rPr lang="en-US" sz="1600" i="1" dirty="0">
+                <a:solidFill>
+                  <a:srgbClr val="555555"/>
                 </a:solidFill>
                 <a:latin typeface="Times New Roman" pitchFamily="34" charset="0"/>
                 <a:ea typeface="Times New Roman" pitchFamily="34" charset="-122"/>
                 <a:cs typeface="Times New Roman" pitchFamily="34" charset="-120"/>
               </a:rPr>
-              <a:t>Remediation</a:t>
-            </a:r>
-            <a:endParaRPr lang="en-US" sz="3600" dirty="0"/>
-          </a:p>
-        </p:txBody>
-      </p:sp>
-      <p:sp>
-        <p:nvSpPr>
-          <p:cNvPr id="5" name="Text 2"/>
-          <p:cNvSpPr/>
-          <p:nvPr/>
-        </p:nvSpPr>
-        <p:spPr>
-          <a:xfrm>
-            <a:off x="5349240" y="1783080"/>
-            <a:ext cx="6522415" cy="4663440"/>
-          </a:xfrm>
-          <a:prstGeom prst="rect">
-            <a:avLst/>
-          </a:prstGeom>
-          <a:noFill/>
-          <a:ln/>
-        </p:spPr>
-        <p:txBody>
-          <a:bodyPr wrap="square" lIns="0" tIns="0" rIns="0" bIns="0" rtlCol="0" anchor="t"/>
-          <a:lstStyle/>
-          <a:p>
-            <a:pPr algn="l" indent="0" marL="0">
-              <a:spcAft>
-                <a:spcPts val="800"/>
-              </a:spcAft>
-              <a:buNone/>
-            </a:pPr>
-            <a:r>
-              <a:rPr lang="en-US" sz="4000" b="1" dirty="0">
-                <a:solidFill>
-                  <a:srgbClr val="111111"/>
-                </a:solidFill>
-                <a:latin typeface="Times New Roman" pitchFamily="34" charset="0"/>
-                <a:ea typeface="Times New Roman" pitchFamily="34" charset="-122"/>
-                <a:cs typeface="Times New Roman" pitchFamily="34" charset="-120"/>
-              </a:rPr>
-              <a:t>Fill in the blanks:</a:t>
-            </a:r>
-            <a:endParaRPr lang="en-US" sz="4000" dirty="0"/>
-          </a:p>
-          <a:p>
-            <a:pPr algn="l" marL="342900" indent="-342900">
-              <a:spcAft>
-                <a:spcPts val="800"/>
-              </a:spcAft>
-              <a:buSzPct val="100000"/>
-              <a:buFont typeface="+mj-lt"/>
-              <a:buAutoNum type="arabicPeriod" startAt="1"/>
-            </a:pPr>
-            <a:r>
-              <a:rPr lang="en-US" sz="4000" dirty="0">
-                <a:solidFill>
-                  <a:srgbClr val="111111"/>
-                </a:solidFill>
-                <a:latin typeface="Times New Roman" pitchFamily="34" charset="0"/>
-                <a:ea typeface="Times New Roman" pitchFamily="34" charset="-122"/>
-                <a:cs typeface="Times New Roman" pitchFamily="34" charset="-120"/>
-              </a:rPr>
-              <a:t>Energy from the heat of the Earth is ______ energy.</a:t>
-            </a:r>
-            <a:endParaRPr lang="en-US" sz="4000" dirty="0"/>
-          </a:p>
-          <a:p>
-            <a:pPr algn="l" marL="342900" indent="-342900">
-              <a:spcAft>
-                <a:spcPts val="800"/>
-              </a:spcAft>
-              <a:buSzPct val="100000"/>
-              <a:buFont typeface="+mj-lt"/>
-              <a:buAutoNum type="arabicPeriod" startAt="1"/>
-            </a:pPr>
-            <a:r>
-              <a:rPr lang="en-US" sz="4000" dirty="0">
-                <a:solidFill>
-                  <a:srgbClr val="111111"/>
-                </a:solidFill>
-                <a:latin typeface="Times New Roman" pitchFamily="34" charset="0"/>
-                <a:ea typeface="Times New Roman" pitchFamily="34" charset="-122"/>
-                <a:cs typeface="Times New Roman" pitchFamily="34" charset="-120"/>
-              </a:rPr>
-              <a:t>The gas disaster of 1986 was at Lake ______.</a:t>
-            </a:r>
-            <a:endParaRPr lang="en-US" sz="4000" dirty="0"/>
+              <a:t>Illustration: volcanoes and man</a:t>
+            </a:r>
+            <a:endParaRPr lang="en-US" sz="1600" dirty="0"/>
           </a:p>
         </p:txBody>
       </p:sp>
@@ -17504,7 +18360,7 @@
                 <a:ea typeface="Calibri" pitchFamily="34" charset="-122"/>
                 <a:cs typeface="Calibri" pitchFamily="34" charset="-120"/>
               </a:rPr>
-              <a:t>REMEDIATION</a:t>
+              <a:t>FORMATIVE EVALUATION</a:t>
             </a:r>
             <a:endParaRPr lang="en-US" sz="1400" dirty="0"/>
           </a:p>
@@ -17569,7 +18425,7 @@
                 <a:ea typeface="Times New Roman" pitchFamily="34" charset="-122"/>
                 <a:cs typeface="Times New Roman" pitchFamily="34" charset="-120"/>
               </a:rPr>
-              <a:t>Remediation (continued)</a:t>
+              <a:t>Evaluation 1</a:t>
             </a:r>
             <a:endParaRPr lang="en-US" sz="3600" dirty="0"/>
           </a:p>
@@ -17596,13 +18452,11 @@
           <a:bodyPr wrap="square" lIns="0" tIns="0" rIns="0" bIns="0" rtlCol="0" anchor="t"/>
           <a:lstStyle/>
           <a:p>
-            <a:pPr algn="l" marL="342900" indent="-342900">
+            <a:pPr algn="l" indent="0" marL="0">
               <a:spcAft>
                 <a:spcPts val="800"/>
               </a:spcAft>
-              <a:buSzPct val="100000"/>
-              <a:buFont typeface="+mj-lt"/>
-              <a:buAutoNum type="arabicPeriod" startAt="1"/>
+              <a:buNone/>
             </a:pPr>
             <a:r>
               <a:rPr lang="en-US" sz="4000" dirty="0">
@@ -17613,7 +18467,7 @@
                 <a:ea typeface="Times New Roman" pitchFamily="34" charset="-122"/>
                 <a:cs typeface="Times New Roman" pitchFamily="34" charset="-120"/>
               </a:rPr>
-              <a:t>Reducing the effects of a hazard is ______.</a:t>
+              <a:t>Explain why a volcano is both a resource and a hazard.</a:t>
             </a:r>
             <a:endParaRPr lang="en-US" sz="4000" dirty="0"/>
           </a:p>
@@ -17832,7 +18686,7 @@
                 <a:ea typeface="Times New Roman" pitchFamily="34" charset="-122"/>
                 <a:cs typeface="Times New Roman" pitchFamily="34" charset="-120"/>
               </a:rPr>
-              <a:t>Around Buea and Limbe people grow bananas, tea, oil palm, cocoa and food crops. The soils are fertile because they come from weathered volcanic rocks rich in minerals.</a:t>
+              <a:t>Fertile soils, tourism, geothermal energy, building stone or minerals (any one).</a:t>
             </a:r>
             <a:endParaRPr lang="en-US" sz="4000" dirty="0"/>
           </a:p>
@@ -17944,7 +18798,7 @@
                 <a:ea typeface="Calibri" pitchFamily="34" charset="-122"/>
                 <a:cs typeface="Calibri" pitchFamily="34" charset="-120"/>
               </a:rPr>
-              <a:t>HOMEWORK</a:t>
+              <a:t>FORMATIVE EVALUATION</a:t>
             </a:r>
             <a:endParaRPr lang="en-US" sz="1400" dirty="0"/>
           </a:p>
@@ -18009,7 +18863,7 @@
                 <a:ea typeface="Times New Roman" pitchFamily="34" charset="-122"/>
                 <a:cs typeface="Times New Roman" pitchFamily="34" charset="-120"/>
               </a:rPr>
-              <a:t>Homework</a:t>
+              <a:t>Expected Answer</a:t>
             </a:r>
             <a:endParaRPr lang="en-US" sz="3600" dirty="0"/>
           </a:p>
@@ -18051,7 +18905,7 @@
                 <a:ea typeface="Times New Roman" pitchFamily="34" charset="-122"/>
                 <a:cs typeface="Times New Roman" pitchFamily="34" charset="-120"/>
               </a:rPr>
-              <a:t>Find out if an earthquake has ever been felt in your region. Ask an elder.</a:t>
+              <a:t>It gives fertile soils, energy and tourism, but its eruptions and gases destroy property and kill people.</a:t>
             </a:r>
             <a:endParaRPr lang="en-US" sz="4000" dirty="0"/>
           </a:p>
@@ -18163,7 +19017,7 @@
                 <a:ea typeface="Calibri" pitchFamily="34" charset="-122"/>
                 <a:cs typeface="Calibri" pitchFamily="34" charset="-120"/>
               </a:rPr>
-              <a:t>NEXT LESSON</a:t>
+              <a:t>FORMATIVE EVALUATION</a:t>
             </a:r>
             <a:endParaRPr lang="en-US" sz="1400" dirty="0"/>
           </a:p>
@@ -18228,7 +19082,7 @@
                 <a:ea typeface="Times New Roman" pitchFamily="34" charset="-122"/>
                 <a:cs typeface="Times New Roman" pitchFamily="34" charset="-120"/>
               </a:rPr>
-              <a:t>Next Lesson</a:t>
+              <a:t>Evaluation 2</a:t>
             </a:r>
             <a:endParaRPr lang="en-US" sz="3600" dirty="0"/>
           </a:p>
@@ -18252,17 +19106,17 @@
           <a:ln/>
         </p:spPr>
         <p:txBody>
-          <a:bodyPr wrap="square" lIns="0" tIns="0" rIns="0" bIns="0" rtlCol="0" anchor="ctr"/>
-          <a:lstStyle/>
-          <a:p>
-            <a:pPr algn="ctr" indent="0" marL="0">
+          <a:bodyPr wrap="square" lIns="0" tIns="0" rIns="0" bIns="0" rtlCol="0" anchor="t"/>
+          <a:lstStyle/>
+          <a:p>
+            <a:pPr algn="l" indent="0" marL="0">
               <a:spcAft>
                 <a:spcPts val="800"/>
               </a:spcAft>
               <a:buNone/>
             </a:pPr>
             <a:r>
-              <a:rPr lang="en-US" sz="4000" b="1" dirty="0">
+              <a:rPr lang="en-US" sz="4000" dirty="0">
                 <a:solidFill>
                   <a:srgbClr val="111111"/>
                 </a:solidFill>
@@ -18270,27 +19124,7 @@
                 <a:ea typeface="Times New Roman" pitchFamily="34" charset="-122"/>
                 <a:cs typeface="Times New Roman" pitchFamily="34" charset="-120"/>
               </a:rPr>
-              <a:t>Our next lesson will be on:</a:t>
-            </a:r>
-            <a:endParaRPr lang="en-US" sz="4000" dirty="0"/>
-          </a:p>
-          <a:p>
-            <a:pPr algn="ctr" indent="0" marL="0">
-              <a:spcAft>
-                <a:spcPts val="800"/>
-              </a:spcAft>
-              <a:buNone/>
-            </a:pPr>
-            <a:r>
-              <a:rPr lang="en-US" sz="4000" b="1" dirty="0">
-                <a:solidFill>
-                  <a:srgbClr val="990011"/>
-                </a:solidFill>
-                <a:latin typeface="Times New Roman" pitchFamily="34" charset="0"/>
-                <a:ea typeface="Times New Roman" pitchFamily="34" charset="-122"/>
-                <a:cs typeface="Times New Roman" pitchFamily="34" charset="-120"/>
-              </a:rPr>
-              <a:t>Lesson 8: Earthquakes and Man</a:t>
+              <a:t>Give two measures to reduce volcanic risks.</a:t>
             </a:r>
             <a:endParaRPr lang="en-US" sz="4000" dirty="0"/>
           </a:p>
@@ -18402,22 +19236,46 @@
                 <a:ea typeface="Calibri" pitchFamily="34" charset="-122"/>
                 <a:cs typeface="Calibri" pitchFamily="34" charset="-120"/>
               </a:rPr>
-              <a:t>BILINGUAL GAME</a:t>
+              <a:t>FORMATIVE EVALUATION</a:t>
             </a:r>
             <a:endParaRPr lang="en-US" sz="1400" dirty="0"/>
           </a:p>
         </p:txBody>
       </p:sp>
-      <p:sp>
-        <p:nvSpPr>
-          <p:cNvPr id="3" name="Text 1"/>
+      <p:pic>
+        <p:nvPicPr>
+          <p:cNvPr id="3" name="Image 0" descr="/home/claude/f4/img/minesec_sheet.png">    </p:cNvPr>
+          <p:cNvPicPr>
+            <a:picLocks noChangeAspect="1"/>
+          </p:cNvPicPr>
+          <p:nvPr/>
+        </p:nvPicPr>
+        <p:blipFill>
+          <a:blip r:embed="rId1"/>
+          <a:stretch>
+            <a:fillRect/>
+          </a:stretch>
+        </p:blipFill>
+        <p:spPr>
+          <a:xfrm>
+            <a:off x="0" y="658368"/>
+            <a:ext cx="5120640" cy="5833872"/>
+          </a:xfrm>
+          <a:prstGeom prst="rect">
+            <a:avLst/>
+          </a:prstGeom>
+        </p:spPr>
+      </p:pic>
+      <p:sp>
+        <p:nvSpPr>
+          <p:cNvPr id="4" name="Text 1"/>
           <p:cNvSpPr/>
           <p:nvPr/>
         </p:nvSpPr>
         <p:spPr>
           <a:xfrm>
-            <a:off x="457200" y="1005840"/>
-            <a:ext cx="11277295" cy="731520"/>
+            <a:off x="5349240" y="1005840"/>
+            <a:ext cx="6522415" cy="731520"/>
           </a:xfrm>
           <a:prstGeom prst="rect">
             <a:avLst/>
@@ -18426,7 +19284,9 @@
           <a:ln/>
         </p:spPr>
         <p:txBody>
-          <a:bodyPr wrap="square" lIns="0" tIns="0" rIns="0" bIns="0" rtlCol="0" anchor="ctr"/>
+          <a:bodyPr wrap="square" lIns="0" tIns="0" rIns="0" bIns="0" rtlCol="0" anchor="ctr">
+            <a:normAutofit/>
+          </a:bodyPr>
           <a:lstStyle/>
           <a:p>
             <a:pPr algn="ctr" indent="0" marL="0">
@@ -18441,6 +19301,942 @@
                 <a:ea typeface="Times New Roman" pitchFamily="34" charset="-122"/>
                 <a:cs typeface="Times New Roman" pitchFamily="34" charset="-120"/>
               </a:rPr>
+              <a:t>Expected Answer</a:t>
+            </a:r>
+            <a:endParaRPr lang="en-US" sz="3600" dirty="0"/>
+          </a:p>
+        </p:txBody>
+      </p:sp>
+      <p:sp>
+        <p:nvSpPr>
+          <p:cNvPr id="5" name="Text 2"/>
+          <p:cNvSpPr/>
+          <p:nvPr/>
+        </p:nvSpPr>
+        <p:spPr>
+          <a:xfrm>
+            <a:off x="5349240" y="1783080"/>
+            <a:ext cx="6522415" cy="4663440"/>
+          </a:xfrm>
+          <a:prstGeom prst="rect">
+            <a:avLst/>
+          </a:prstGeom>
+          <a:noFill/>
+          <a:ln/>
+        </p:spPr>
+        <p:txBody>
+          <a:bodyPr wrap="square" lIns="0" tIns="0" rIns="0" bIns="0" rtlCol="0" anchor="t"/>
+          <a:lstStyle/>
+          <a:p>
+            <a:pPr algn="l" indent="0" marL="0">
+              <a:spcAft>
+                <a:spcPts val="800"/>
+              </a:spcAft>
+              <a:buNone/>
+            </a:pPr>
+            <a:r>
+              <a:rPr lang="en-US" sz="4000" dirty="0">
+                <a:solidFill>
+                  <a:srgbClr val="111111"/>
+                </a:solidFill>
+                <a:latin typeface="Times New Roman" pitchFamily="34" charset="0"/>
+                <a:ea typeface="Times New Roman" pitchFamily="34" charset="-122"/>
+                <a:cs typeface="Times New Roman" pitchFamily="34" charset="-120"/>
+              </a:rPr>
+              <a:t>Monitoring, hazard maps and zoning, education and evacuation plans, engineering works (any two).</a:t>
+            </a:r>
+            <a:endParaRPr lang="en-US" sz="4000" dirty="0"/>
+          </a:p>
+        </p:txBody>
+      </p:sp>
+      <p:sp>
+        <p:nvSpPr>
+          <p:cNvPr id="25" name="Slide Number Placeholder 0"/>
+          <p:cNvSpPr>
+            <a:spLocks noGrp="1"/>
+          </p:cNvSpPr>
+          <p:nvPr>
+            <p:ph type="sldNum" sz="quarter" idx="4294967295"/>
+          </p:nvPr>
+        </p:nvSpPr>
+        <p:spPr>
+          <a:xfrm>
+            <a:off x="27432" y="91440"/>
+            <a:ext cx="585216" cy="475488"/>
+          </a:xfrm>
+          <a:prstGeom prst="rect">
+            <a:avLst/>
+          </a:prstGeom>
+          <a:extLst>
+            <a:ext uri="{C572A759-6A51-4108-AA02-DFA0A04FC94B}">
+              <ma14:wrappingTextBoxFlag xmlns:ma14="http://schemas.microsoft.com/office/mac/drawingml/2011/main" val="0"/>
+            </a:ext>
+          </a:extLst>
+        </p:spPr>
+        <p:txBody>
+          <a:bodyPr/>
+          <a:lstStyle>
+            <a:lvl1pPr>
+              <a:defRPr sz="2000">
+                <a:solidFill>
+                  <a:srgbClr val="FFFFFF"/>
+                </a:solidFill>
+                <a:latin typeface="Calibri"/>
+                <a:ea typeface="Calibri"/>
+                <a:cs typeface="Calibri"/>
+              </a:defRPr>
+            </a:lvl1pPr>
+          </a:lstStyle>
+          <a:p>
+            <a:pPr algn="ctr"/>
+            <a:fld id="{F7021451-1387-4CA6-816F-3879F97B5CBC}" type="slidenum">
+              <a:rPr b="1" lang="en-US"/>
+              <a:t>52</a:t>
+            </a:fld>
+            <a:endParaRPr lang="en-US"/>
+          </a:p>
+        </p:txBody>
+      </p:sp>
+    </p:spTree>
+  </p:cSld>
+  <p:clrMapOvr>
+    <a:masterClrMapping/>
+  </p:clrMapOvr>
+</p:sld>
+</file>
+
+<file path=ppt/slides/slide53.xml><?xml version="1.0" encoding="utf-8"?>
+<p:sld xmlns:a="http://schemas.openxmlformats.org/drawingml/2006/main" xmlns:r="http://schemas.openxmlformats.org/officeDocument/2006/relationships" xmlns:p="http://schemas.openxmlformats.org/presentationml/2006/main">
+  <p:cSld name="Slide 53">
+    <p:spTree>
+      <p:nvGrpSpPr>
+        <p:cNvPr id="1" name=""/>
+        <p:cNvGrpSpPr/>
+        <p:nvPr/>
+      </p:nvGrpSpPr>
+      <p:grpSpPr>
+        <a:xfrm>
+          <a:off x="0" y="0"/>
+          <a:ext cx="0" cy="0"/>
+          <a:chOff x="0" y="0"/>
+          <a:chExt cx="0" cy="0"/>
+        </a:xfrm>
+      </p:grpSpPr>
+      <p:sp>
+        <p:nvSpPr>
+          <p:cNvPr id="2" name="Text 0"/>
+          <p:cNvSpPr/>
+          <p:nvPr/>
+        </p:nvSpPr>
+        <p:spPr>
+          <a:xfrm>
+            <a:off x="457200" y="713232"/>
+            <a:ext cx="11368735" cy="274320"/>
+          </a:xfrm>
+          <a:prstGeom prst="rect">
+            <a:avLst/>
+          </a:prstGeom>
+          <a:noFill/>
+          <a:ln/>
+        </p:spPr>
+        <p:txBody>
+          <a:bodyPr wrap="square" lIns="0" tIns="0" rIns="0" bIns="0" rtlCol="0" anchor="ctr"/>
+          <a:lstStyle/>
+          <a:p>
+            <a:pPr algn="r" indent="0" marL="0">
+              <a:buNone/>
+            </a:pPr>
+            <a:r>
+              <a:rPr lang="en-US" sz="1400" b="1" dirty="0">
+                <a:solidFill>
+                  <a:srgbClr val="1C3F6E"/>
+                </a:solidFill>
+                <a:latin typeface="Calibri" pitchFamily="34" charset="0"/>
+                <a:ea typeface="Calibri" pitchFamily="34" charset="-122"/>
+                <a:cs typeface="Calibri" pitchFamily="34" charset="-120"/>
+              </a:rPr>
+              <a:t>REMEDIATION</a:t>
+            </a:r>
+            <a:endParaRPr lang="en-US" sz="1400" dirty="0"/>
+          </a:p>
+        </p:txBody>
+      </p:sp>
+      <p:pic>
+        <p:nvPicPr>
+          <p:cNvPr id="3" name="Image 0" descr="/home/claude/f4/img/minesec_sheet.png">    </p:cNvPr>
+          <p:cNvPicPr>
+            <a:picLocks noChangeAspect="1"/>
+          </p:cNvPicPr>
+          <p:nvPr/>
+        </p:nvPicPr>
+        <p:blipFill>
+          <a:blip r:embed="rId1"/>
+          <a:stretch>
+            <a:fillRect/>
+          </a:stretch>
+        </p:blipFill>
+        <p:spPr>
+          <a:xfrm>
+            <a:off x="0" y="658368"/>
+            <a:ext cx="2468880" cy="5833872"/>
+          </a:xfrm>
+          <a:prstGeom prst="rect">
+            <a:avLst/>
+          </a:prstGeom>
+        </p:spPr>
+      </p:pic>
+      <p:sp>
+        <p:nvSpPr>
+          <p:cNvPr id="4" name="Text 1"/>
+          <p:cNvSpPr/>
+          <p:nvPr/>
+        </p:nvSpPr>
+        <p:spPr>
+          <a:xfrm>
+            <a:off x="2697480" y="1005840"/>
+            <a:ext cx="9174175" cy="731520"/>
+          </a:xfrm>
+          <a:prstGeom prst="rect">
+            <a:avLst/>
+          </a:prstGeom>
+          <a:noFill/>
+          <a:ln/>
+        </p:spPr>
+        <p:txBody>
+          <a:bodyPr wrap="square" lIns="0" tIns="0" rIns="0" bIns="0" rtlCol="0" anchor="ctr">
+            <a:normAutofit/>
+          </a:bodyPr>
+          <a:lstStyle/>
+          <a:p>
+            <a:pPr algn="ctr" indent="0" marL="0">
+              <a:buNone/>
+            </a:pPr>
+            <a:r>
+              <a:rPr lang="en-US" sz="3600" b="1" dirty="0">
+                <a:solidFill>
+                  <a:srgbClr val="990011"/>
+                </a:solidFill>
+                <a:latin typeface="Times New Roman" pitchFamily="34" charset="0"/>
+                <a:ea typeface="Times New Roman" pitchFamily="34" charset="-122"/>
+                <a:cs typeface="Times New Roman" pitchFamily="34" charset="-120"/>
+              </a:rPr>
+              <a:t>Remediation</a:t>
+            </a:r>
+            <a:endParaRPr lang="en-US" sz="3600" dirty="0"/>
+          </a:p>
+        </p:txBody>
+      </p:sp>
+      <p:sp>
+        <p:nvSpPr>
+          <p:cNvPr id="5" name="Text 2"/>
+          <p:cNvSpPr/>
+          <p:nvPr/>
+        </p:nvSpPr>
+        <p:spPr>
+          <a:xfrm>
+            <a:off x="2697480" y="1783080"/>
+            <a:ext cx="9174175" cy="4663440"/>
+          </a:xfrm>
+          <a:prstGeom prst="rect">
+            <a:avLst/>
+          </a:prstGeom>
+          <a:noFill/>
+          <a:ln/>
+        </p:spPr>
+        <p:txBody>
+          <a:bodyPr wrap="square" lIns="0" tIns="0" rIns="0" bIns="0" rtlCol="0" anchor="t"/>
+          <a:lstStyle/>
+          <a:p>
+            <a:pPr algn="l" indent="0" marL="0">
+              <a:spcAft>
+                <a:spcPts val="800"/>
+              </a:spcAft>
+              <a:buNone/>
+            </a:pPr>
+            <a:r>
+              <a:rPr lang="en-US" sz="4000" b="1" dirty="0">
+                <a:solidFill>
+                  <a:srgbClr val="111111"/>
+                </a:solidFill>
+                <a:latin typeface="Times New Roman" pitchFamily="34" charset="0"/>
+                <a:ea typeface="Times New Roman" pitchFamily="34" charset="-122"/>
+                <a:cs typeface="Times New Roman" pitchFamily="34" charset="-120"/>
+              </a:rPr>
+              <a:t>Fill in the blanks:</a:t>
+            </a:r>
+            <a:endParaRPr lang="en-US" sz="4000" dirty="0"/>
+          </a:p>
+          <a:p>
+            <a:pPr algn="l" marL="342900" indent="-342900">
+              <a:spcAft>
+                <a:spcPts val="800"/>
+              </a:spcAft>
+              <a:buSzPct val="100000"/>
+              <a:buFont typeface="+mj-lt"/>
+              <a:buAutoNum type="arabicPeriod" startAt="1"/>
+            </a:pPr>
+            <a:r>
+              <a:rPr lang="en-US" sz="4000" dirty="0">
+                <a:solidFill>
+                  <a:srgbClr val="111111"/>
+                </a:solidFill>
+                <a:latin typeface="Times New Roman" pitchFamily="34" charset="0"/>
+                <a:ea typeface="Times New Roman" pitchFamily="34" charset="-122"/>
+                <a:cs typeface="Times New Roman" pitchFamily="34" charset="-120"/>
+              </a:rPr>
+              <a:t>Volcanic soils are called ______.</a:t>
+            </a:r>
+            <a:endParaRPr lang="en-US" sz="4000" dirty="0"/>
+          </a:p>
+          <a:p>
+            <a:pPr algn="l" marL="342900" indent="-342900">
+              <a:spcAft>
+                <a:spcPts val="800"/>
+              </a:spcAft>
+              <a:buSzPct val="100000"/>
+              <a:buFont typeface="+mj-lt"/>
+              <a:buAutoNum type="arabicPeriod" startAt="1"/>
+            </a:pPr>
+            <a:r>
+              <a:rPr lang="en-US" sz="4000" dirty="0">
+                <a:solidFill>
+                  <a:srgbClr val="111111"/>
+                </a:solidFill>
+                <a:latin typeface="Times New Roman" pitchFamily="34" charset="0"/>
+                <a:ea typeface="Times New Roman" pitchFamily="34" charset="-122"/>
+                <a:cs typeface="Times New Roman" pitchFamily="34" charset="-120"/>
+              </a:rPr>
+              <a:t>The deadliest volcanic hazard is the ______ flow.</a:t>
+            </a:r>
+            <a:endParaRPr lang="en-US" sz="4000" dirty="0"/>
+          </a:p>
+          <a:p>
+            <a:pPr algn="l" marL="342900" indent="-342900">
+              <a:spcAft>
+                <a:spcPts val="800"/>
+              </a:spcAft>
+              <a:buSzPct val="100000"/>
+              <a:buFont typeface="+mj-lt"/>
+              <a:buAutoNum type="arabicPeriod" startAt="1"/>
+            </a:pPr>
+            <a:r>
+              <a:rPr lang="en-US" sz="4000" dirty="0">
+                <a:solidFill>
+                  <a:srgbClr val="111111"/>
+                </a:solidFill>
+                <a:latin typeface="Times New Roman" pitchFamily="34" charset="0"/>
+                <a:ea typeface="Times New Roman" pitchFamily="34" charset="-122"/>
+                <a:cs typeface="Times New Roman" pitchFamily="34" charset="-120"/>
+              </a:rPr>
+              <a:t>Lake Nyos released ______ in 1986.</a:t>
+            </a:r>
+            <a:endParaRPr lang="en-US" sz="4000" dirty="0"/>
+          </a:p>
+        </p:txBody>
+      </p:sp>
+      <p:sp>
+        <p:nvSpPr>
+          <p:cNvPr id="25" name="Slide Number Placeholder 0"/>
+          <p:cNvSpPr>
+            <a:spLocks noGrp="1"/>
+          </p:cNvSpPr>
+          <p:nvPr>
+            <p:ph type="sldNum" sz="quarter" idx="4294967295"/>
+          </p:nvPr>
+        </p:nvSpPr>
+        <p:spPr>
+          <a:xfrm>
+            <a:off x="27432" y="91440"/>
+            <a:ext cx="585216" cy="475488"/>
+          </a:xfrm>
+          <a:prstGeom prst="rect">
+            <a:avLst/>
+          </a:prstGeom>
+          <a:extLst>
+            <a:ext uri="{C572A759-6A51-4108-AA02-DFA0A04FC94B}">
+              <ma14:wrappingTextBoxFlag xmlns:ma14="http://schemas.microsoft.com/office/mac/drawingml/2011/main" val="0"/>
+            </a:ext>
+          </a:extLst>
+        </p:spPr>
+        <p:txBody>
+          <a:bodyPr/>
+          <a:lstStyle>
+            <a:lvl1pPr>
+              <a:defRPr sz="2000">
+                <a:solidFill>
+                  <a:srgbClr val="FFFFFF"/>
+                </a:solidFill>
+                <a:latin typeface="Calibri"/>
+                <a:ea typeface="Calibri"/>
+                <a:cs typeface="Calibri"/>
+              </a:defRPr>
+            </a:lvl1pPr>
+          </a:lstStyle>
+          <a:p>
+            <a:pPr algn="ctr"/>
+            <a:fld id="{F7021451-1387-4CA6-816F-3879F97B5CBC}" type="slidenum">
+              <a:rPr b="1" lang="en-US"/>
+              <a:t>53</a:t>
+            </a:fld>
+            <a:endParaRPr lang="en-US"/>
+          </a:p>
+        </p:txBody>
+      </p:sp>
+    </p:spTree>
+  </p:cSld>
+  <p:clrMapOvr>
+    <a:masterClrMapping/>
+  </p:clrMapOvr>
+</p:sld>
+</file>
+
+<file path=ppt/slides/slide54.xml><?xml version="1.0" encoding="utf-8"?>
+<p:sld xmlns:a="http://schemas.openxmlformats.org/drawingml/2006/main" xmlns:r="http://schemas.openxmlformats.org/officeDocument/2006/relationships" xmlns:p="http://schemas.openxmlformats.org/presentationml/2006/main">
+  <p:cSld name="Slide 54">
+    <p:spTree>
+      <p:nvGrpSpPr>
+        <p:cNvPr id="1" name=""/>
+        <p:cNvGrpSpPr/>
+        <p:nvPr/>
+      </p:nvGrpSpPr>
+      <p:grpSpPr>
+        <a:xfrm>
+          <a:off x="0" y="0"/>
+          <a:ext cx="0" cy="0"/>
+          <a:chOff x="0" y="0"/>
+          <a:chExt cx="0" cy="0"/>
+        </a:xfrm>
+      </p:grpSpPr>
+      <p:sp>
+        <p:nvSpPr>
+          <p:cNvPr id="2" name="Text 0"/>
+          <p:cNvSpPr/>
+          <p:nvPr/>
+        </p:nvSpPr>
+        <p:spPr>
+          <a:xfrm>
+            <a:off x="457200" y="713232"/>
+            <a:ext cx="11368735" cy="274320"/>
+          </a:xfrm>
+          <a:prstGeom prst="rect">
+            <a:avLst/>
+          </a:prstGeom>
+          <a:noFill/>
+          <a:ln/>
+        </p:spPr>
+        <p:txBody>
+          <a:bodyPr wrap="square" lIns="0" tIns="0" rIns="0" bIns="0" rtlCol="0" anchor="ctr"/>
+          <a:lstStyle/>
+          <a:p>
+            <a:pPr algn="r" indent="0" marL="0">
+              <a:buNone/>
+            </a:pPr>
+            <a:r>
+              <a:rPr lang="en-US" sz="1400" b="1" dirty="0">
+                <a:solidFill>
+                  <a:srgbClr val="1C3F6E"/>
+                </a:solidFill>
+                <a:latin typeface="Calibri" pitchFamily="34" charset="0"/>
+                <a:ea typeface="Calibri" pitchFamily="34" charset="-122"/>
+                <a:cs typeface="Calibri" pitchFamily="34" charset="-120"/>
+              </a:rPr>
+              <a:t>HOMEWORK</a:t>
+            </a:r>
+            <a:endParaRPr lang="en-US" sz="1400" dirty="0"/>
+          </a:p>
+        </p:txBody>
+      </p:sp>
+      <p:pic>
+        <p:nvPicPr>
+          <p:cNvPr id="3" name="Image 0" descr="/home/claude/f4/img/minesec_sheet.png">    </p:cNvPr>
+          <p:cNvPicPr>
+            <a:picLocks noChangeAspect="1"/>
+          </p:cNvPicPr>
+          <p:nvPr/>
+        </p:nvPicPr>
+        <p:blipFill>
+          <a:blip r:embed="rId1"/>
+          <a:stretch>
+            <a:fillRect/>
+          </a:stretch>
+        </p:blipFill>
+        <p:spPr>
+          <a:xfrm>
+            <a:off x="0" y="658368"/>
+            <a:ext cx="5120640" cy="5833872"/>
+          </a:xfrm>
+          <a:prstGeom prst="rect">
+            <a:avLst/>
+          </a:prstGeom>
+        </p:spPr>
+      </p:pic>
+      <p:sp>
+        <p:nvSpPr>
+          <p:cNvPr id="4" name="Text 1"/>
+          <p:cNvSpPr/>
+          <p:nvPr/>
+        </p:nvSpPr>
+        <p:spPr>
+          <a:xfrm>
+            <a:off x="5349240" y="1005840"/>
+            <a:ext cx="6522415" cy="731520"/>
+          </a:xfrm>
+          <a:prstGeom prst="rect">
+            <a:avLst/>
+          </a:prstGeom>
+          <a:noFill/>
+          <a:ln/>
+        </p:spPr>
+        <p:txBody>
+          <a:bodyPr wrap="square" lIns="0" tIns="0" rIns="0" bIns="0" rtlCol="0" anchor="ctr">
+            <a:normAutofit/>
+          </a:bodyPr>
+          <a:lstStyle/>
+          <a:p>
+            <a:pPr algn="ctr" indent="0" marL="0">
+              <a:buNone/>
+            </a:pPr>
+            <a:r>
+              <a:rPr lang="en-US" sz="3600" b="1" dirty="0">
+                <a:solidFill>
+                  <a:srgbClr val="990011"/>
+                </a:solidFill>
+                <a:latin typeface="Times New Roman" pitchFamily="34" charset="0"/>
+                <a:ea typeface="Times New Roman" pitchFamily="34" charset="-122"/>
+                <a:cs typeface="Times New Roman" pitchFamily="34" charset="-120"/>
+              </a:rPr>
+              <a:t>Homework</a:t>
+            </a:r>
+            <a:endParaRPr lang="en-US" sz="3600" dirty="0"/>
+          </a:p>
+        </p:txBody>
+      </p:sp>
+      <p:sp>
+        <p:nvSpPr>
+          <p:cNvPr id="5" name="Text 2"/>
+          <p:cNvSpPr/>
+          <p:nvPr/>
+        </p:nvSpPr>
+        <p:spPr>
+          <a:xfrm>
+            <a:off x="5349240" y="1783080"/>
+            <a:ext cx="6522415" cy="4663440"/>
+          </a:xfrm>
+          <a:prstGeom prst="rect">
+            <a:avLst/>
+          </a:prstGeom>
+          <a:noFill/>
+          <a:ln/>
+        </p:spPr>
+        <p:txBody>
+          <a:bodyPr wrap="square" lIns="0" tIns="0" rIns="0" bIns="0" rtlCol="0" anchor="t"/>
+          <a:lstStyle/>
+          <a:p>
+            <a:pPr algn="l" indent="0" marL="0">
+              <a:spcAft>
+                <a:spcPts val="800"/>
+              </a:spcAft>
+              <a:buNone/>
+            </a:pPr>
+            <a:r>
+              <a:rPr lang="en-US" sz="4000" dirty="0">
+                <a:solidFill>
+                  <a:srgbClr val="111111"/>
+                </a:solidFill>
+                <a:latin typeface="Times New Roman" pitchFamily="34" charset="0"/>
+                <a:ea typeface="Times New Roman" pitchFamily="34" charset="-122"/>
+                <a:cs typeface="Times New Roman" pitchFamily="34" charset="-120"/>
+              </a:rPr>
+              <a:t>Define the epicentre of an earthquake.</a:t>
+            </a:r>
+            <a:endParaRPr lang="en-US" sz="4000" dirty="0"/>
+          </a:p>
+        </p:txBody>
+      </p:sp>
+      <p:sp>
+        <p:nvSpPr>
+          <p:cNvPr id="25" name="Slide Number Placeholder 0"/>
+          <p:cNvSpPr>
+            <a:spLocks noGrp="1"/>
+          </p:cNvSpPr>
+          <p:nvPr>
+            <p:ph type="sldNum" sz="quarter" idx="4294967295"/>
+          </p:nvPr>
+        </p:nvSpPr>
+        <p:spPr>
+          <a:xfrm>
+            <a:off x="27432" y="91440"/>
+            <a:ext cx="585216" cy="475488"/>
+          </a:xfrm>
+          <a:prstGeom prst="rect">
+            <a:avLst/>
+          </a:prstGeom>
+          <a:extLst>
+            <a:ext uri="{C572A759-6A51-4108-AA02-DFA0A04FC94B}">
+              <ma14:wrappingTextBoxFlag xmlns:ma14="http://schemas.microsoft.com/office/mac/drawingml/2011/main" val="0"/>
+            </a:ext>
+          </a:extLst>
+        </p:spPr>
+        <p:txBody>
+          <a:bodyPr/>
+          <a:lstStyle>
+            <a:lvl1pPr>
+              <a:defRPr sz="2000">
+                <a:solidFill>
+                  <a:srgbClr val="FFFFFF"/>
+                </a:solidFill>
+                <a:latin typeface="Calibri"/>
+                <a:ea typeface="Calibri"/>
+                <a:cs typeface="Calibri"/>
+              </a:defRPr>
+            </a:lvl1pPr>
+          </a:lstStyle>
+          <a:p>
+            <a:pPr algn="ctr"/>
+            <a:fld id="{F7021451-1387-4CA6-816F-3879F97B5CBC}" type="slidenum">
+              <a:rPr b="1" lang="en-US"/>
+              <a:t>54</a:t>
+            </a:fld>
+            <a:endParaRPr lang="en-US"/>
+          </a:p>
+        </p:txBody>
+      </p:sp>
+    </p:spTree>
+  </p:cSld>
+  <p:clrMapOvr>
+    <a:masterClrMapping/>
+  </p:clrMapOvr>
+</p:sld>
+</file>
+
+<file path=ppt/slides/slide55.xml><?xml version="1.0" encoding="utf-8"?>
+<p:sld xmlns:a="http://schemas.openxmlformats.org/drawingml/2006/main" xmlns:r="http://schemas.openxmlformats.org/officeDocument/2006/relationships" xmlns:p="http://schemas.openxmlformats.org/presentationml/2006/main">
+  <p:cSld name="Slide 55">
+    <p:spTree>
+      <p:nvGrpSpPr>
+        <p:cNvPr id="1" name=""/>
+        <p:cNvGrpSpPr/>
+        <p:nvPr/>
+      </p:nvGrpSpPr>
+      <p:grpSpPr>
+        <a:xfrm>
+          <a:off x="0" y="0"/>
+          <a:ext cx="0" cy="0"/>
+          <a:chOff x="0" y="0"/>
+          <a:chExt cx="0" cy="0"/>
+        </a:xfrm>
+      </p:grpSpPr>
+      <p:sp>
+        <p:nvSpPr>
+          <p:cNvPr id="2" name="Text 0"/>
+          <p:cNvSpPr/>
+          <p:nvPr/>
+        </p:nvSpPr>
+        <p:spPr>
+          <a:xfrm>
+            <a:off x="457200" y="713232"/>
+            <a:ext cx="11368735" cy="274320"/>
+          </a:xfrm>
+          <a:prstGeom prst="rect">
+            <a:avLst/>
+          </a:prstGeom>
+          <a:noFill/>
+          <a:ln/>
+        </p:spPr>
+        <p:txBody>
+          <a:bodyPr wrap="square" lIns="0" tIns="0" rIns="0" bIns="0" rtlCol="0" anchor="ctr"/>
+          <a:lstStyle/>
+          <a:p>
+            <a:pPr algn="r" indent="0" marL="0">
+              <a:buNone/>
+            </a:pPr>
+            <a:r>
+              <a:rPr lang="en-US" sz="1400" b="1" dirty="0">
+                <a:solidFill>
+                  <a:srgbClr val="1C3F6E"/>
+                </a:solidFill>
+                <a:latin typeface="Calibri" pitchFamily="34" charset="0"/>
+                <a:ea typeface="Calibri" pitchFamily="34" charset="-122"/>
+                <a:cs typeface="Calibri" pitchFamily="34" charset="-120"/>
+              </a:rPr>
+              <a:t>NEXT LESSON</a:t>
+            </a:r>
+            <a:endParaRPr lang="en-US" sz="1400" dirty="0"/>
+          </a:p>
+        </p:txBody>
+      </p:sp>
+      <p:pic>
+        <p:nvPicPr>
+          <p:cNvPr id="3" name="Image 0" descr="/home/claude/f4/img/minesec_sheet.png">    </p:cNvPr>
+          <p:cNvPicPr>
+            <a:picLocks noChangeAspect="1"/>
+          </p:cNvPicPr>
+          <p:nvPr/>
+        </p:nvPicPr>
+        <p:blipFill>
+          <a:blip r:embed="rId1"/>
+          <a:stretch>
+            <a:fillRect/>
+          </a:stretch>
+        </p:blipFill>
+        <p:spPr>
+          <a:xfrm>
+            <a:off x="0" y="658368"/>
+            <a:ext cx="5120640" cy="5833872"/>
+          </a:xfrm>
+          <a:prstGeom prst="rect">
+            <a:avLst/>
+          </a:prstGeom>
+        </p:spPr>
+      </p:pic>
+      <p:sp>
+        <p:nvSpPr>
+          <p:cNvPr id="4" name="Text 1"/>
+          <p:cNvSpPr/>
+          <p:nvPr/>
+        </p:nvSpPr>
+        <p:spPr>
+          <a:xfrm>
+            <a:off x="5349240" y="1005840"/>
+            <a:ext cx="6522415" cy="731520"/>
+          </a:xfrm>
+          <a:prstGeom prst="rect">
+            <a:avLst/>
+          </a:prstGeom>
+          <a:noFill/>
+          <a:ln/>
+        </p:spPr>
+        <p:txBody>
+          <a:bodyPr wrap="square" lIns="0" tIns="0" rIns="0" bIns="0" rtlCol="0" anchor="ctr">
+            <a:normAutofit/>
+          </a:bodyPr>
+          <a:lstStyle/>
+          <a:p>
+            <a:pPr algn="ctr" indent="0" marL="0">
+              <a:buNone/>
+            </a:pPr>
+            <a:r>
+              <a:rPr lang="en-US" sz="3600" b="1" dirty="0">
+                <a:solidFill>
+                  <a:srgbClr val="990011"/>
+                </a:solidFill>
+                <a:latin typeface="Times New Roman" pitchFamily="34" charset="0"/>
+                <a:ea typeface="Times New Roman" pitchFamily="34" charset="-122"/>
+                <a:cs typeface="Times New Roman" pitchFamily="34" charset="-120"/>
+              </a:rPr>
+              <a:t>Next Lesson</a:t>
+            </a:r>
+            <a:endParaRPr lang="en-US" sz="3600" dirty="0"/>
+          </a:p>
+        </p:txBody>
+      </p:sp>
+      <p:sp>
+        <p:nvSpPr>
+          <p:cNvPr id="5" name="Text 2"/>
+          <p:cNvSpPr/>
+          <p:nvPr/>
+        </p:nvSpPr>
+        <p:spPr>
+          <a:xfrm>
+            <a:off x="5349240" y="1783080"/>
+            <a:ext cx="6522415" cy="4663440"/>
+          </a:xfrm>
+          <a:prstGeom prst="rect">
+            <a:avLst/>
+          </a:prstGeom>
+          <a:noFill/>
+          <a:ln/>
+        </p:spPr>
+        <p:txBody>
+          <a:bodyPr wrap="square" lIns="0" tIns="0" rIns="0" bIns="0" rtlCol="0" anchor="ctr"/>
+          <a:lstStyle/>
+          <a:p>
+            <a:pPr algn="ctr" indent="0" marL="0">
+              <a:spcAft>
+                <a:spcPts val="800"/>
+              </a:spcAft>
+              <a:buNone/>
+            </a:pPr>
+            <a:r>
+              <a:rPr lang="en-US" sz="4000" b="1" dirty="0">
+                <a:solidFill>
+                  <a:srgbClr val="111111"/>
+                </a:solidFill>
+                <a:latin typeface="Times New Roman" pitchFamily="34" charset="0"/>
+                <a:ea typeface="Times New Roman" pitchFamily="34" charset="-122"/>
+                <a:cs typeface="Times New Roman" pitchFamily="34" charset="-120"/>
+              </a:rPr>
+              <a:t>Our next lesson will be on:</a:t>
+            </a:r>
+            <a:endParaRPr lang="en-US" sz="4000" dirty="0"/>
+          </a:p>
+          <a:p>
+            <a:pPr algn="ctr" indent="0" marL="0">
+              <a:spcAft>
+                <a:spcPts val="800"/>
+              </a:spcAft>
+              <a:buNone/>
+            </a:pPr>
+            <a:r>
+              <a:rPr lang="en-US" sz="4000" b="1" dirty="0">
+                <a:solidFill>
+                  <a:srgbClr val="990011"/>
+                </a:solidFill>
+                <a:latin typeface="Times New Roman" pitchFamily="34" charset="0"/>
+                <a:ea typeface="Times New Roman" pitchFamily="34" charset="-122"/>
+                <a:cs typeface="Times New Roman" pitchFamily="34" charset="-120"/>
+              </a:rPr>
+              <a:t>Lesson 8: Earthquakes and Man</a:t>
+            </a:r>
+            <a:endParaRPr lang="en-US" sz="4000" dirty="0"/>
+          </a:p>
+        </p:txBody>
+      </p:sp>
+      <p:sp>
+        <p:nvSpPr>
+          <p:cNvPr id="25" name="Slide Number Placeholder 0"/>
+          <p:cNvSpPr>
+            <a:spLocks noGrp="1"/>
+          </p:cNvSpPr>
+          <p:nvPr>
+            <p:ph type="sldNum" sz="quarter" idx="4294967295"/>
+          </p:nvPr>
+        </p:nvSpPr>
+        <p:spPr>
+          <a:xfrm>
+            <a:off x="27432" y="91440"/>
+            <a:ext cx="585216" cy="475488"/>
+          </a:xfrm>
+          <a:prstGeom prst="rect">
+            <a:avLst/>
+          </a:prstGeom>
+          <a:extLst>
+            <a:ext uri="{C572A759-6A51-4108-AA02-DFA0A04FC94B}">
+              <ma14:wrappingTextBoxFlag xmlns:ma14="http://schemas.microsoft.com/office/mac/drawingml/2011/main" val="0"/>
+            </a:ext>
+          </a:extLst>
+        </p:spPr>
+        <p:txBody>
+          <a:bodyPr/>
+          <a:lstStyle>
+            <a:lvl1pPr>
+              <a:defRPr sz="2000">
+                <a:solidFill>
+                  <a:srgbClr val="FFFFFF"/>
+                </a:solidFill>
+                <a:latin typeface="Calibri"/>
+                <a:ea typeface="Calibri"/>
+                <a:cs typeface="Calibri"/>
+              </a:defRPr>
+            </a:lvl1pPr>
+          </a:lstStyle>
+          <a:p>
+            <a:pPr algn="ctr"/>
+            <a:fld id="{F7021451-1387-4CA6-816F-3879F97B5CBC}" type="slidenum">
+              <a:rPr b="1" lang="en-US"/>
+              <a:t>55</a:t>
+            </a:fld>
+            <a:endParaRPr lang="en-US"/>
+          </a:p>
+        </p:txBody>
+      </p:sp>
+    </p:spTree>
+  </p:cSld>
+  <p:clrMapOvr>
+    <a:masterClrMapping/>
+  </p:clrMapOvr>
+</p:sld>
+</file>
+
+<file path=ppt/slides/slide56.xml><?xml version="1.0" encoding="utf-8"?>
+<p:sld xmlns:a="http://schemas.openxmlformats.org/drawingml/2006/main" xmlns:r="http://schemas.openxmlformats.org/officeDocument/2006/relationships" xmlns:p="http://schemas.openxmlformats.org/presentationml/2006/main">
+  <p:cSld name="Slide 56">
+    <p:spTree>
+      <p:nvGrpSpPr>
+        <p:cNvPr id="1" name=""/>
+        <p:cNvGrpSpPr/>
+        <p:nvPr/>
+      </p:nvGrpSpPr>
+      <p:grpSpPr>
+        <a:xfrm>
+          <a:off x="0" y="0"/>
+          <a:ext cx="0" cy="0"/>
+          <a:chOff x="0" y="0"/>
+          <a:chExt cx="0" cy="0"/>
+        </a:xfrm>
+      </p:grpSpPr>
+      <p:sp>
+        <p:nvSpPr>
+          <p:cNvPr id="2" name="Text 0"/>
+          <p:cNvSpPr/>
+          <p:nvPr/>
+        </p:nvSpPr>
+        <p:spPr>
+          <a:xfrm>
+            <a:off x="457200" y="713232"/>
+            <a:ext cx="11368735" cy="274320"/>
+          </a:xfrm>
+          <a:prstGeom prst="rect">
+            <a:avLst/>
+          </a:prstGeom>
+          <a:noFill/>
+          <a:ln/>
+        </p:spPr>
+        <p:txBody>
+          <a:bodyPr wrap="square" lIns="0" tIns="0" rIns="0" bIns="0" rtlCol="0" anchor="ctr"/>
+          <a:lstStyle/>
+          <a:p>
+            <a:pPr algn="r" indent="0" marL="0">
+              <a:buNone/>
+            </a:pPr>
+            <a:r>
+              <a:rPr lang="en-US" sz="1400" b="1" dirty="0">
+                <a:solidFill>
+                  <a:srgbClr val="1C3F6E"/>
+                </a:solidFill>
+                <a:latin typeface="Calibri" pitchFamily="34" charset="0"/>
+                <a:ea typeface="Calibri" pitchFamily="34" charset="-122"/>
+                <a:cs typeface="Calibri" pitchFamily="34" charset="-120"/>
+              </a:rPr>
+              <a:t>BILINGUAL GAME</a:t>
+            </a:r>
+            <a:endParaRPr lang="en-US" sz="1400" dirty="0"/>
+          </a:p>
+        </p:txBody>
+      </p:sp>
+      <p:sp>
+        <p:nvSpPr>
+          <p:cNvPr id="3" name="Text 1"/>
+          <p:cNvSpPr/>
+          <p:nvPr/>
+        </p:nvSpPr>
+        <p:spPr>
+          <a:xfrm>
+            <a:off x="457200" y="1005840"/>
+            <a:ext cx="11277295" cy="731520"/>
+          </a:xfrm>
+          <a:prstGeom prst="rect">
+            <a:avLst/>
+          </a:prstGeom>
+          <a:noFill/>
+          <a:ln/>
+        </p:spPr>
+        <p:txBody>
+          <a:bodyPr wrap="square" lIns="0" tIns="0" rIns="0" bIns="0" rtlCol="0" anchor="ctr"/>
+          <a:lstStyle/>
+          <a:p>
+            <a:pPr algn="ctr" indent="0" marL="0">
+              <a:buNone/>
+            </a:pPr>
+            <a:r>
+              <a:rPr lang="en-US" sz="3600" b="1" dirty="0">
+                <a:solidFill>
+                  <a:srgbClr val="990011"/>
+                </a:solidFill>
+                <a:latin typeface="Times New Roman" pitchFamily="34" charset="0"/>
+                <a:ea typeface="Times New Roman" pitchFamily="34" charset="-122"/>
+                <a:cs typeface="Times New Roman" pitchFamily="34" charset="-120"/>
+              </a:rPr>
               <a:t>Bilingual Game (Jeu Bilingue)</a:t>
             </a:r>
             <a:endParaRPr lang="en-US" sz="3600" dirty="0"/>
@@ -18449,7 +20245,7 @@
       </p:sp>
       <p:graphicFrame>
         <p:nvGraphicFramePr>
-          <p:cNvPr id="53" name="Table 0"/>
+          <p:cNvPr id="57" name="Table 0"/>
           <p:cNvGraphicFramePr>
             <a:graphicFrameLocks noGrp="1"/>
           </p:cNvGraphicFramePr>
@@ -18697,7 +20493,7 @@
                           <a:ea typeface="Calibri" pitchFamily="34" charset="-122"/>
                           <a:cs typeface="Calibri" pitchFamily="34" charset="-120"/>
                         </a:rPr>
-                        <a:t>L'aléa / le risque</a:t>
+                        <a:t>Le risque / l'aléa</a:t>
                       </a:r>
                       <a:endParaRPr lang="en-US" sz="2200" dirty="0">
                         <a:latin typeface="Calibri" charset="0"/>
@@ -18905,7 +20701,7 @@
                           <a:ea typeface="Calibri" pitchFamily="34" charset="-122"/>
                           <a:cs typeface="Calibri" pitchFamily="34" charset="-120"/>
                         </a:rPr>
-                        <a:t>Mitigation</a:t>
+                        <a:t>Fertile soil</a:t>
                       </a:r>
                       <a:endParaRPr lang="en-US" sz="2200" dirty="0">
                         <a:latin typeface="Calibri" charset="0"/>
@@ -18973,7 +20769,7 @@
                           <a:ea typeface="Calibri" pitchFamily="34" charset="-122"/>
                           <a:cs typeface="Calibri" pitchFamily="34" charset="-120"/>
                         </a:rPr>
-                        <a:t>L'atténuation</a:t>
+                        <a:t>Le sol fertile</a:t>
                       </a:r>
                       <a:endParaRPr lang="en-US" sz="2200" dirty="0">
                         <a:latin typeface="Calibri" charset="0"/>
@@ -19043,7 +20839,7 @@
                           <a:ea typeface="Calibri" pitchFamily="34" charset="-122"/>
                           <a:cs typeface="Calibri" pitchFamily="34" charset="-120"/>
                         </a:rPr>
-                        <a:t>Evacuation</a:t>
+                        <a:t>Mitigation</a:t>
                       </a:r>
                       <a:endParaRPr lang="en-US" sz="2200" dirty="0">
                         <a:latin typeface="Calibri" charset="0"/>
@@ -19111,7 +20907,7 @@
                           <a:ea typeface="Calibri" pitchFamily="34" charset="-122"/>
                           <a:cs typeface="Calibri" pitchFamily="34" charset="-120"/>
                         </a:rPr>
-                        <a:t>L'évacuation</a:t>
+                        <a:t>L'atténuation</a:t>
                       </a:r>
                       <a:endParaRPr lang="en-US" sz="2200" dirty="0">
                         <a:latin typeface="Calibri" charset="0"/>
@@ -19181,7 +20977,7 @@
                           <a:ea typeface="Calibri" pitchFamily="34" charset="-122"/>
                           <a:cs typeface="Calibri" pitchFamily="34" charset="-120"/>
                         </a:rPr>
-                        <a:t>Monitoring</a:t>
+                        <a:t>Evacuation</a:t>
                       </a:r>
                       <a:endParaRPr lang="en-US" sz="2200" dirty="0">
                         <a:latin typeface="Calibri" charset="0"/>
@@ -19249,7 +21045,7 @@
                           <a:ea typeface="Calibri" pitchFamily="34" charset="-122"/>
                           <a:cs typeface="Calibri" pitchFamily="34" charset="-120"/>
                         </a:rPr>
-                        <a:t>La surveillance</a:t>
+                        <a:t>L'évacuation</a:t>
                       </a:r>
                       <a:endParaRPr lang="en-US" sz="2200" dirty="0">
                         <a:latin typeface="Calibri" charset="0"/>
@@ -19319,7 +21115,7 @@
                           <a:ea typeface="Calibri" pitchFamily="34" charset="-122"/>
                           <a:cs typeface="Calibri" pitchFamily="34" charset="-120"/>
                         </a:rPr>
-                        <a:t>Fertile soil</a:t>
+                        <a:t>Geothermal energy</a:t>
                       </a:r>
                       <a:endParaRPr lang="en-US" sz="2200" dirty="0">
                         <a:latin typeface="Calibri" charset="0"/>
@@ -19387,7 +21183,7 @@
                           <a:ea typeface="Calibri" pitchFamily="34" charset="-122"/>
                           <a:cs typeface="Calibri" pitchFamily="34" charset="-120"/>
                         </a:rPr>
-                        <a:t>Le sol fertile</a:t>
+                        <a:t>L'énergie géothermique</a:t>
                       </a:r>
                       <a:endParaRPr lang="en-US" sz="2200" dirty="0">
                         <a:latin typeface="Calibri" charset="0"/>
@@ -19485,7 +21281,7 @@
             <a:pPr algn="ctr"/>
             <a:fld id="{F7021451-1387-4CA6-816F-3879F97B5CBC}" type="slidenum">
               <a:rPr b="1" lang="en-US"/>
-              <a:t>52</a:t>
+              <a:t>56</a:t>
             </a:fld>
             <a:endParaRPr lang="en-US"/>
           </a:p>
@@ -19499,9 +21295,9 @@
 </p:sld>
 </file>
 
-<file path=ppt/slides/slide53.xml><?xml version="1.0" encoding="utf-8"?>
+<file path=ppt/slides/slide57.xml><?xml version="1.0" encoding="utf-8"?>
 <p:sld xmlns:a="http://schemas.openxmlformats.org/drawingml/2006/main" xmlns:r="http://schemas.openxmlformats.org/officeDocument/2006/relationships" xmlns:p="http://schemas.openxmlformats.org/presentationml/2006/main">
-  <p:cSld name="Slide 53">
+  <p:cSld name="Slide 57">
     <p:spTree>
       <p:nvGrpSpPr>
         <p:cNvPr id="1" name=""/>
@@ -19596,7 +21392,7 @@
       </p:sp>
       <p:graphicFrame>
         <p:nvGraphicFramePr>
-          <p:cNvPr id="54" name="Table 0"/>
+          <p:cNvPr id="58" name="Table 0"/>
           <p:cNvGraphicFramePr>
             <a:graphicFrameLocks noGrp="1"/>
           </p:cNvGraphicFramePr>
@@ -19982,7 +21778,7 @@
                           <a:ea typeface="Calibri" pitchFamily="34" charset="-122"/>
                           <a:cs typeface="Calibri" pitchFamily="34" charset="-120"/>
                         </a:rPr>
-                        <a:t>Explain the importance of volcanoes as a resource. Describe volcanic hazards. Propose adaptation and mitigation strategies.</a:t>
+                        <a:t>Explain the resources provided by volcanoes. Explain the hazards of volcanoes. Describe the Lake Nyos disaster. Describe adaptation and mitigation strategies.</a:t>
                       </a:r>
                       <a:endParaRPr lang="en-US" sz="1600" dirty="0">
                         <a:latin typeface="Calibri" charset="0"/>
@@ -20120,7 +21916,7 @@
                           <a:ea typeface="Calibri" pitchFamily="34" charset="-122"/>
                           <a:cs typeface="Calibri" pitchFamily="34" charset="-120"/>
                         </a:rPr>
-                        <a:t>Learners are able to weigh the benefits and dangers of volcanoes and propose safety measures.</a:t>
+                        <a:t>Learners are able to explain why people live near volcanoes and propose measures to reduce volcanic risks in Cameroon.</a:t>
                       </a:r>
                       <a:endParaRPr lang="en-US" sz="1600" dirty="0">
                         <a:latin typeface="Calibri" charset="0"/>
@@ -20218,7 +22014,7 @@
             <a:pPr algn="ctr"/>
             <a:fld id="{F7021451-1387-4CA6-816F-3879F97B5CBC}" type="slidenum">
               <a:rPr b="1" lang="en-US"/>
-              <a:t>53</a:t>
+              <a:t>57</a:t>
             </a:fld>
             <a:endParaRPr lang="en-US"/>
           </a:p>
@@ -20232,9 +22028,9 @@
 </p:sld>
 </file>
 
-<file path=ppt/slides/slide54.xml><?xml version="1.0" encoding="utf-8"?>
+<file path=ppt/slides/slide58.xml><?xml version="1.0" encoding="utf-8"?>
 <p:sld xmlns:a="http://schemas.openxmlformats.org/drawingml/2006/main" xmlns:r="http://schemas.openxmlformats.org/officeDocument/2006/relationships" xmlns:p="http://schemas.openxmlformats.org/presentationml/2006/main">
-  <p:cSld name="Slide 54">
+  <p:cSld name="Slide 58">
     <p:spTree>
       <p:nvGrpSpPr>
         <p:cNvPr id="1" name=""/>
@@ -20329,7 +22125,7 @@
       </p:sp>
       <p:graphicFrame>
         <p:nvGraphicFramePr>
-          <p:cNvPr id="55" name="Table 0"/>
+          <p:cNvPr id="59" name="Table 0"/>
           <p:cNvGraphicFramePr>
             <a:graphicFrameLocks noGrp="1"/>
           </p:cNvGraphicFramePr>
@@ -20439,7 +22235,7 @@
                           <a:ea typeface="Calibri" pitchFamily="34" charset="-122"/>
                           <a:cs typeface="Calibri" pitchFamily="34" charset="-120"/>
                         </a:rPr>
-                        <a:t>DEFINITIONS; Volcanoes as a Resource; Volcanoes as a Hazard; Adaptation and Mitigation Strategies.</a:t>
+                        <a:t>DEFINITIONS; Volcanoes as a Resource; Volcanoes as a Hazard; Adaptation and Mitigation.</a:t>
                       </a:r>
                       <a:endParaRPr lang="en-US" sz="1600" dirty="0">
                         <a:latin typeface="Calibri" charset="0"/>
@@ -20715,7 +22511,7 @@
                           <a:ea typeface="Calibri" pitchFamily="34" charset="-122"/>
                           <a:cs typeface="Calibri" pitchFamily="34" charset="-120"/>
                         </a:rPr>
-                        <a:t>Find out if an earthquake has ever been felt in your region. Ask an elder.</a:t>
+                        <a:t>Define the epicentre of an earthquake.</a:t>
                       </a:r>
                       <a:endParaRPr lang="en-US" sz="1600" dirty="0">
                         <a:latin typeface="Calibri" charset="0"/>
@@ -21089,7 +22885,7 @@
             <a:pPr algn="ctr"/>
             <a:fld id="{F7021451-1387-4CA6-816F-3879F97B5CBC}" type="slidenum">
               <a:rPr b="1" lang="en-US"/>
-              <a:t>54</a:t>
+              <a:t>58</a:t>
             </a:fld>
             <a:endParaRPr lang="en-US"/>
           </a:p>
@@ -21103,9 +22899,9 @@
 </p:sld>
 </file>
 
-<file path=ppt/slides/slide55.xml><?xml version="1.0" encoding="utf-8"?>
+<file path=ppt/slides/slide59.xml><?xml version="1.0" encoding="utf-8"?>
 <p:sld xmlns:a="http://schemas.openxmlformats.org/drawingml/2006/main" xmlns:r="http://schemas.openxmlformats.org/officeDocument/2006/relationships" xmlns:p="http://schemas.openxmlformats.org/presentationml/2006/main">
-  <p:cSld name="Slide 55">
+  <p:cSld name="Slide 59">
     <p:spTree>
       <p:nvGrpSpPr>
         <p:cNvPr id="1" name=""/>
@@ -21282,7 +23078,7 @@
                 <a:ea typeface="Calibri" pitchFamily="34" charset="-122"/>
                 <a:cs typeface="Calibri" pitchFamily="34" charset="-120"/>
               </a:rPr>
-              <a:t>Without the projector (Activity 1): mention the CDC plantations.</a:t>
+              <a:t>Without the projector (Activity 1): name crops of the South-West.</a:t>
             </a:r>
             <a:endParaRPr lang="en-US" sz="2000" dirty="0"/>
           </a:p>
@@ -21303,7 +23099,7 @@
                 <a:ea typeface="Calibri" pitchFamily="34" charset="-122"/>
                 <a:cs typeface="Calibri" pitchFamily="34" charset="-120"/>
               </a:rPr>
-              <a:t>Without the projector (Activity 2): compare with steam from a boiling pot.</a:t>
+              <a:t>Without the projector (Activity 2): describe a kettle producing steam.</a:t>
             </a:r>
             <a:endParaRPr lang="en-US" sz="2000" dirty="0"/>
           </a:p>
@@ -21324,7 +23120,7 @@
                 <a:ea typeface="Calibri" pitchFamily="34" charset="-122"/>
                 <a:cs typeface="Calibri" pitchFamily="34" charset="-120"/>
               </a:rPr>
-              <a:t>Without the projector (Activity 3): describe the 1999 lava flow near Bakingili.</a:t>
+              <a:t>Without the projector (Activity 3): list volcanic hazards.</a:t>
             </a:r>
             <a:endParaRPr lang="en-US" sz="2000" dirty="0"/>
           </a:p>
@@ -21345,7 +23141,7 @@
                 <a:ea typeface="Calibri" pitchFamily="34" charset="-122"/>
                 <a:cs typeface="Calibri" pitchFamily="34" charset="-120"/>
               </a:rPr>
-              <a:t>Without the projector (Activity 4): tell the story of Lake Nyos.</a:t>
+              <a:t>Without the projector (Activity 4): locate Nyos in the North-West.</a:t>
             </a:r>
             <a:endParaRPr lang="en-US" sz="2000" dirty="0"/>
           </a:p>
@@ -21366,7 +23162,7 @@
                 <a:ea typeface="Calibri" pitchFamily="34" charset="-122"/>
                 <a:cs typeface="Calibri" pitchFamily="34" charset="-120"/>
               </a:rPr>
-              <a:t>Without the projector (Activity 5): list warning signs of an eruption.</a:t>
+              <a:t>Without the projector (Activity 5): describe an evacuation plan.</a:t>
             </a:r>
             <a:endParaRPr lang="en-US" sz="2000" dirty="0"/>
           </a:p>
@@ -21414,353 +23210,7 @@
             <a:pPr algn="ctr"/>
             <a:fld id="{F7021451-1387-4CA6-816F-3879F97B5CBC}" type="slidenum">
               <a:rPr b="1" lang="en-US"/>
-              <a:t>55</a:t>
-            </a:fld>
-            <a:endParaRPr lang="en-US"/>
-          </a:p>
-        </p:txBody>
-      </p:sp>
-    </p:spTree>
-  </p:cSld>
-  <p:clrMapOvr>
-    <a:masterClrMapping/>
-  </p:clrMapOvr>
-</p:sld>
-</file>
-
-<file path=ppt/slides/slide56.xml><?xml version="1.0" encoding="utf-8"?>
-<p:sld xmlns:a="http://schemas.openxmlformats.org/drawingml/2006/main" xmlns:r="http://schemas.openxmlformats.org/officeDocument/2006/relationships" xmlns:p="http://schemas.openxmlformats.org/presentationml/2006/main">
-  <p:cSld name="Slide 56">
-    <p:spTree>
-      <p:nvGrpSpPr>
-        <p:cNvPr id="1" name=""/>
-        <p:cNvGrpSpPr/>
-        <p:nvPr/>
-      </p:nvGrpSpPr>
-      <p:grpSpPr>
-        <a:xfrm>
-          <a:off x="0" y="0"/>
-          <a:ext cx="0" cy="0"/>
-          <a:chOff x="0" y="0"/>
-          <a:chExt cx="0" cy="0"/>
-        </a:xfrm>
-      </p:grpSpPr>
-      <p:sp>
-        <p:nvSpPr>
-          <p:cNvPr id="2" name="Text 0"/>
-          <p:cNvSpPr/>
-          <p:nvPr/>
-        </p:nvSpPr>
-        <p:spPr>
-          <a:xfrm>
-            <a:off x="457200" y="713232"/>
-            <a:ext cx="11368735" cy="274320"/>
-          </a:xfrm>
-          <a:prstGeom prst="rect">
-            <a:avLst/>
-          </a:prstGeom>
-          <a:noFill/>
-          <a:ln/>
-        </p:spPr>
-        <p:txBody>
-          <a:bodyPr wrap="square" lIns="0" tIns="0" rIns="0" bIns="0" rtlCol="0" anchor="ctr"/>
-          <a:lstStyle/>
-          <a:p>
-            <a:pPr algn="r" indent="0" marL="0">
-              <a:buNone/>
-            </a:pPr>
-            <a:r>
-              <a:rPr lang="en-US" sz="1400" b="1" dirty="0">
-                <a:solidFill>
-                  <a:srgbClr val="1C3F6E"/>
-                </a:solidFill>
-                <a:latin typeface="Calibri" pitchFamily="34" charset="0"/>
-                <a:ea typeface="Calibri" pitchFamily="34" charset="-122"/>
-                <a:cs typeface="Calibri" pitchFamily="34" charset="-120"/>
-              </a:rPr>
-              <a:t>REFERENCES</a:t>
-            </a:r>
-            <a:endParaRPr lang="en-US" sz="1400" dirty="0"/>
-          </a:p>
-        </p:txBody>
-      </p:sp>
-      <p:pic>
-        <p:nvPicPr>
-          <p:cNvPr id="3" name="Image 0" descr="/home/claude/f4/img/minesec_sheet.png">    </p:cNvPr>
-          <p:cNvPicPr>
-            <a:picLocks noChangeAspect="1"/>
-          </p:cNvPicPr>
-          <p:nvPr/>
-        </p:nvPicPr>
-        <p:blipFill>
-          <a:blip r:embed="rId1"/>
-          <a:stretch>
-            <a:fillRect/>
-          </a:stretch>
-        </p:blipFill>
-        <p:spPr>
-          <a:xfrm>
-            <a:off x="0" y="658368"/>
-            <a:ext cx="2468880" cy="5833872"/>
-          </a:xfrm>
-          <a:prstGeom prst="rect">
-            <a:avLst/>
-          </a:prstGeom>
-        </p:spPr>
-      </p:pic>
-      <p:sp>
-        <p:nvSpPr>
-          <p:cNvPr id="4" name="Text 1"/>
-          <p:cNvSpPr/>
-          <p:nvPr/>
-        </p:nvSpPr>
-        <p:spPr>
-          <a:xfrm>
-            <a:off x="2697480" y="1005840"/>
-            <a:ext cx="9174175" cy="731520"/>
-          </a:xfrm>
-          <a:prstGeom prst="rect">
-            <a:avLst/>
-          </a:prstGeom>
-          <a:noFill/>
-          <a:ln/>
-        </p:spPr>
-        <p:txBody>
-          <a:bodyPr wrap="square" lIns="0" tIns="0" rIns="0" bIns="0" rtlCol="0" anchor="ctr">
-            <a:normAutofit/>
-          </a:bodyPr>
-          <a:lstStyle/>
-          <a:p>
-            <a:pPr algn="ctr" indent="0" marL="0">
-              <a:buNone/>
-            </a:pPr>
-            <a:r>
-              <a:rPr lang="en-US" sz="3600" b="1" dirty="0">
-                <a:solidFill>
-                  <a:srgbClr val="990011"/>
-                </a:solidFill>
-                <a:latin typeface="Times New Roman" pitchFamily="34" charset="0"/>
-                <a:ea typeface="Times New Roman" pitchFamily="34" charset="-122"/>
-                <a:cs typeface="Times New Roman" pitchFamily="34" charset="-120"/>
-              </a:rPr>
-              <a:t>References</a:t>
-            </a:r>
-            <a:endParaRPr lang="en-US" sz="3600" dirty="0"/>
-          </a:p>
-        </p:txBody>
-      </p:sp>
-      <p:sp>
-        <p:nvSpPr>
-          <p:cNvPr id="5" name="Text 2"/>
-          <p:cNvSpPr/>
-          <p:nvPr/>
-        </p:nvSpPr>
-        <p:spPr>
-          <a:xfrm>
-            <a:off x="2697480" y="1783080"/>
-            <a:ext cx="9174175" cy="4663440"/>
-          </a:xfrm>
-          <a:prstGeom prst="rect">
-            <a:avLst/>
-          </a:prstGeom>
-          <a:noFill/>
-          <a:ln/>
-        </p:spPr>
-        <p:txBody>
-          <a:bodyPr wrap="square" lIns="0" tIns="0" rIns="0" bIns="0" rtlCol="0" anchor="t"/>
-          <a:lstStyle/>
-          <a:p>
-            <a:pPr algn="l" marL="342900" indent="-342900">
-              <a:spcAft>
-                <a:spcPts val="800"/>
-              </a:spcAft>
-              <a:buSzPct val="100000"/>
-              <a:buChar char="•"/>
-            </a:pPr>
-            <a:r>
-              <a:rPr lang="en-US" sz="1800" dirty="0">
-                <a:solidFill>
-                  <a:srgbClr val="111111"/>
-                </a:solidFill>
-                <a:latin typeface="Calibri" pitchFamily="34" charset="0"/>
-                <a:ea typeface="Calibri" pitchFamily="34" charset="-122"/>
-                <a:cs typeface="Calibri" pitchFamily="34" charset="-120"/>
-              </a:rPr>
-              <a:t>National Geography Syllabus, MINESEC/IGE/IP-SS, 2019 — Module 2 (Geomorphology).</a:t>
-            </a:r>
-            <a:endParaRPr lang="en-US" sz="1800" dirty="0"/>
-          </a:p>
-          <a:p>
-            <a:pPr algn="l" marL="342900" indent="-342900">
-              <a:spcAft>
-                <a:spcPts val="800"/>
-              </a:spcAft>
-              <a:buSzPct val="100000"/>
-              <a:buChar char="•"/>
-            </a:pPr>
-            <a:r>
-              <a:rPr lang="en-US" sz="1800" dirty="0">
-                <a:solidFill>
-                  <a:srgbClr val="111111"/>
-                </a:solidFill>
-                <a:latin typeface="Calibri" pitchFamily="34" charset="0"/>
-                <a:ea typeface="Calibri" pitchFamily="34" charset="-122"/>
-                <a:cs typeface="Calibri" pitchFamily="34" charset="-120"/>
-              </a:rPr>
-              <a:t>Photo, Activity 1: “20131110-DSC_4372” by jbdodane, CC BY-NC 2.0, via Flickr (https://www.flickr.com/photos/27998473@N02/11288779044)</a:t>
-            </a:r>
-            <a:endParaRPr lang="en-US" sz="1800" dirty="0"/>
-          </a:p>
-          <a:p>
-            <a:pPr algn="l" marL="342900" indent="-342900">
-              <a:spcAft>
-                <a:spcPts val="800"/>
-              </a:spcAft>
-              <a:buSzPct val="100000"/>
-              <a:buChar char="•"/>
-            </a:pPr>
-            <a:r>
-              <a:rPr lang="en-US" sz="1800" dirty="0">
-                <a:solidFill>
-                  <a:srgbClr val="111111"/>
-                </a:solidFill>
-                <a:latin typeface="Calibri" pitchFamily="34" charset="0"/>
-                <a:ea typeface="Calibri" pitchFamily="34" charset="-122"/>
-                <a:cs typeface="Calibri" pitchFamily="34" charset="-120"/>
-              </a:rPr>
-              <a:t>Photo, Activity 2: “Global Geothermal Alliance Stakeholder Meeting and Site Tour, 15-16 Ju” by International Renewable Energy Agency (IRENA), CC BY-NC-SA 2.0, via Flickr (https://www.flickr.com/photos/127932406@N06/18856399410)</a:t>
-            </a:r>
-            <a:endParaRPr lang="en-US" sz="1800" dirty="0"/>
-          </a:p>
-          <a:p>
-            <a:pPr algn="l" marL="342900" indent="-342900">
-              <a:spcAft>
-                <a:spcPts val="800"/>
-              </a:spcAft>
-              <a:buSzPct val="100000"/>
-              <a:buChar char="•"/>
-            </a:pPr>
-            <a:r>
-              <a:rPr lang="en-US" sz="1800" dirty="0">
-                <a:solidFill>
-                  <a:srgbClr val="111111"/>
-                </a:solidFill>
-                <a:latin typeface="Calibri" pitchFamily="34" charset="0"/>
-                <a:ea typeface="Calibri" pitchFamily="34" charset="-122"/>
-                <a:cs typeface="Calibri" pitchFamily="34" charset="-120"/>
-              </a:rPr>
-              <a:t>Photo, Activity 3: “Lava flow over road” by J. N. Stuart, CC BY-NC-ND 2.0, via Flickr (https://www.flickr.com/photos/21786539@N03/3387263273)</a:t>
-            </a:r>
-            <a:endParaRPr lang="en-US" sz="1800" dirty="0"/>
-          </a:p>
-          <a:p>
-            <a:pPr algn="l" marL="342900" indent="-342900">
-              <a:spcAft>
-                <a:spcPts val="800"/>
-              </a:spcAft>
-              <a:buSzPct val="100000"/>
-              <a:buChar char="•"/>
-            </a:pPr>
-            <a:r>
-              <a:rPr lang="en-US" sz="1800" dirty="0">
-                <a:solidFill>
-                  <a:srgbClr val="111111"/>
-                </a:solidFill>
-                <a:latin typeface="Calibri" pitchFamily="34" charset="0"/>
-                <a:ea typeface="Calibri" pitchFamily="34" charset="-122"/>
-                <a:cs typeface="Calibri" pitchFamily="34" charset="-120"/>
-              </a:rPr>
-              <a:t>Photo, Activity 4: “Lake Nyos, Cameroon” by jbdodane, CC BY-NC 2.0, via Flickr (https://www.flickr.com/photos/27998473@N02/11584073056)</a:t>
-            </a:r>
-            <a:endParaRPr lang="en-US" sz="1800" dirty="0"/>
-          </a:p>
-          <a:p>
-            <a:pPr algn="l" marL="342900" indent="-342900">
-              <a:spcAft>
-                <a:spcPts val="800"/>
-              </a:spcAft>
-              <a:buSzPct val="100000"/>
-              <a:buChar char="•"/>
-            </a:pPr>
-            <a:r>
-              <a:rPr lang="en-US" sz="1800" dirty="0">
-                <a:solidFill>
-                  <a:srgbClr val="111111"/>
-                </a:solidFill>
-                <a:latin typeface="Calibri" pitchFamily="34" charset="0"/>
-                <a:ea typeface="Calibri" pitchFamily="34" charset="-122"/>
-                <a:cs typeface="Calibri" pitchFamily="34" charset="-120"/>
-              </a:rPr>
-              <a:t>Photo, Activity 5: “Hawaiian Volcano Observatory, Hawaiʻi Volcanoes National Park, Hawaii” by Ken Lund, CC BY-SA 2.0, via Flickr (https://www.flickr.com/photos/75683070@N00/4528702285)</a:t>
-            </a:r>
-            <a:endParaRPr lang="en-US" sz="1800" dirty="0"/>
-          </a:p>
-          <a:p>
-            <a:pPr algn="l" marL="342900" indent="-342900">
-              <a:spcAft>
-                <a:spcPts val="800"/>
-              </a:spcAft>
-              <a:buSzPct val="100000"/>
-              <a:buChar char="•"/>
-            </a:pPr>
-            <a:r>
-              <a:rPr lang="en-US" sz="1800" dirty="0">
-                <a:solidFill>
-                  <a:srgbClr val="111111"/>
-                </a:solidFill>
-                <a:latin typeface="Calibri" pitchFamily="34" charset="0"/>
-                <a:ea typeface="Calibri" pitchFamily="34" charset="-122"/>
-                <a:cs typeface="Calibri" pitchFamily="34" charset="-120"/>
-              </a:rPr>
-              <a:t>Diagrams and animations: drawn for this lesson (Geography Department).</a:t>
-            </a:r>
-            <a:endParaRPr lang="en-US" sz="1800" dirty="0"/>
-          </a:p>
-        </p:txBody>
-      </p:sp>
-      <p:sp>
-        <p:nvSpPr>
-          <p:cNvPr id="25" name="Slide Number Placeholder 0"/>
-          <p:cNvSpPr>
-            <a:spLocks noGrp="1"/>
-          </p:cNvSpPr>
-          <p:nvPr>
-            <p:ph type="sldNum" sz="quarter" idx="4294967295"/>
-          </p:nvPr>
-        </p:nvSpPr>
-        <p:spPr>
-          <a:xfrm>
-            <a:off x="27432" y="91440"/>
-            <a:ext cx="585216" cy="475488"/>
-          </a:xfrm>
-          <a:prstGeom prst="rect">
-            <a:avLst/>
-          </a:prstGeom>
-          <a:extLst>
-            <a:ext uri="{C572A759-6A51-4108-AA02-DFA0A04FC94B}">
-              <ma14:wrappingTextBoxFlag xmlns:ma14="http://schemas.microsoft.com/office/mac/drawingml/2011/main" val="0"/>
-            </a:ext>
-          </a:extLst>
-        </p:spPr>
-        <p:txBody>
-          <a:bodyPr/>
-          <a:lstStyle>
-            <a:lvl1pPr>
-              <a:defRPr sz="2000">
-                <a:solidFill>
-                  <a:srgbClr val="FFFFFF"/>
-                </a:solidFill>
-                <a:latin typeface="Calibri"/>
-                <a:ea typeface="Calibri"/>
-                <a:cs typeface="Calibri"/>
-              </a:defRPr>
-            </a:lvl1pPr>
-          </a:lstStyle>
-          <a:p>
-            <a:pPr algn="ctr"/>
-            <a:fld id="{F7021451-1387-4CA6-816F-3879F97B5CBC}" type="slidenum">
-              <a:rPr b="1" lang="en-US"/>
-              <a:t>56</a:t>
+              <a:t>59</a:t>
             </a:fld>
             <a:endParaRPr lang="en-US"/>
           </a:p>
@@ -22105,6 +23555,593 @@
 </p:sld>
 </file>
 
+<file path=ppt/slides/slide60.xml><?xml version="1.0" encoding="utf-8"?>
+<p:sld xmlns:a="http://schemas.openxmlformats.org/drawingml/2006/main" xmlns:r="http://schemas.openxmlformats.org/officeDocument/2006/relationships" xmlns:p="http://schemas.openxmlformats.org/presentationml/2006/main">
+  <p:cSld name="Slide 60">
+    <p:spTree>
+      <p:nvGrpSpPr>
+        <p:cNvPr id="1" name=""/>
+        <p:cNvGrpSpPr/>
+        <p:nvPr/>
+      </p:nvGrpSpPr>
+      <p:grpSpPr>
+        <a:xfrm>
+          <a:off x="0" y="0"/>
+          <a:ext cx="0" cy="0"/>
+          <a:chOff x="0" y="0"/>
+          <a:chExt cx="0" cy="0"/>
+        </a:xfrm>
+      </p:grpSpPr>
+      <p:sp>
+        <p:nvSpPr>
+          <p:cNvPr id="2" name="Text 0"/>
+          <p:cNvSpPr/>
+          <p:nvPr/>
+        </p:nvSpPr>
+        <p:spPr>
+          <a:xfrm>
+            <a:off x="457200" y="713232"/>
+            <a:ext cx="11368735" cy="274320"/>
+          </a:xfrm>
+          <a:prstGeom prst="rect">
+            <a:avLst/>
+          </a:prstGeom>
+          <a:noFill/>
+          <a:ln/>
+        </p:spPr>
+        <p:txBody>
+          <a:bodyPr wrap="square" lIns="0" tIns="0" rIns="0" bIns="0" rtlCol="0" anchor="ctr"/>
+          <a:lstStyle/>
+          <a:p>
+            <a:pPr algn="r" indent="0" marL="0">
+              <a:buNone/>
+            </a:pPr>
+            <a:r>
+              <a:rPr lang="en-US" sz="1400" b="1" dirty="0">
+                <a:solidFill>
+                  <a:srgbClr val="1C3F6E"/>
+                </a:solidFill>
+                <a:latin typeface="Calibri" pitchFamily="34" charset="0"/>
+                <a:ea typeface="Calibri" pitchFamily="34" charset="-122"/>
+                <a:cs typeface="Calibri" pitchFamily="34" charset="-120"/>
+              </a:rPr>
+              <a:t>REFERENCES</a:t>
+            </a:r>
+            <a:endParaRPr lang="en-US" sz="1400" dirty="0"/>
+          </a:p>
+        </p:txBody>
+      </p:sp>
+      <p:pic>
+        <p:nvPicPr>
+          <p:cNvPr id="3" name="Image 0" descr="/home/claude/f4/img/minesec_sheet.png">    </p:cNvPr>
+          <p:cNvPicPr>
+            <a:picLocks noChangeAspect="1"/>
+          </p:cNvPicPr>
+          <p:nvPr/>
+        </p:nvPicPr>
+        <p:blipFill>
+          <a:blip r:embed="rId1"/>
+          <a:stretch>
+            <a:fillRect/>
+          </a:stretch>
+        </p:blipFill>
+        <p:spPr>
+          <a:xfrm>
+            <a:off x="0" y="658368"/>
+            <a:ext cx="1463040" cy="5833872"/>
+          </a:xfrm>
+          <a:prstGeom prst="rect">
+            <a:avLst/>
+          </a:prstGeom>
+        </p:spPr>
+      </p:pic>
+      <p:sp>
+        <p:nvSpPr>
+          <p:cNvPr id="4" name="Text 1"/>
+          <p:cNvSpPr/>
+          <p:nvPr/>
+        </p:nvSpPr>
+        <p:spPr>
+          <a:xfrm>
+            <a:off x="1691640" y="1005840"/>
+            <a:ext cx="10180015" cy="731520"/>
+          </a:xfrm>
+          <a:prstGeom prst="rect">
+            <a:avLst/>
+          </a:prstGeom>
+          <a:noFill/>
+          <a:ln/>
+        </p:spPr>
+        <p:txBody>
+          <a:bodyPr wrap="square" lIns="0" tIns="0" rIns="0" bIns="0" rtlCol="0" anchor="ctr">
+            <a:normAutofit/>
+          </a:bodyPr>
+          <a:lstStyle/>
+          <a:p>
+            <a:pPr algn="ctr" indent="0" marL="0">
+              <a:buNone/>
+            </a:pPr>
+            <a:r>
+              <a:rPr lang="en-US" sz="3600" b="1" dirty="0">
+                <a:solidFill>
+                  <a:srgbClr val="990011"/>
+                </a:solidFill>
+                <a:latin typeface="Times New Roman" pitchFamily="34" charset="0"/>
+                <a:ea typeface="Times New Roman" pitchFamily="34" charset="-122"/>
+                <a:cs typeface="Times New Roman" pitchFamily="34" charset="-120"/>
+              </a:rPr>
+              <a:t>References</a:t>
+            </a:r>
+            <a:endParaRPr lang="en-US" sz="3600" dirty="0"/>
+          </a:p>
+        </p:txBody>
+      </p:sp>
+      <p:sp>
+        <p:nvSpPr>
+          <p:cNvPr id="5" name="Text 2"/>
+          <p:cNvSpPr/>
+          <p:nvPr/>
+        </p:nvSpPr>
+        <p:spPr>
+          <a:xfrm>
+            <a:off x="1691640" y="1783080"/>
+            <a:ext cx="10180015" cy="4663440"/>
+          </a:xfrm>
+          <a:prstGeom prst="rect">
+            <a:avLst/>
+          </a:prstGeom>
+          <a:noFill/>
+          <a:ln/>
+        </p:spPr>
+        <p:txBody>
+          <a:bodyPr wrap="square" lIns="0" tIns="0" rIns="0" bIns="0" rtlCol="0" anchor="t"/>
+          <a:lstStyle/>
+          <a:p>
+            <a:pPr algn="l" marL="342900" indent="-342900">
+              <a:spcAft>
+                <a:spcPts val="800"/>
+              </a:spcAft>
+              <a:buSzPct val="100000"/>
+              <a:buChar char="•"/>
+            </a:pPr>
+            <a:r>
+              <a:rPr lang="en-US" sz="1800" dirty="0">
+                <a:solidFill>
+                  <a:srgbClr val="111111"/>
+                </a:solidFill>
+                <a:latin typeface="Calibri" pitchFamily="34" charset="0"/>
+                <a:ea typeface="Calibri" pitchFamily="34" charset="-122"/>
+                <a:cs typeface="Calibri" pitchFamily="34" charset="-120"/>
+              </a:rPr>
+              <a:t>Geography Syllabus for Sixth Forms (Lower and Upper Sixth), MINESEC, 2019 — Module 2 (Geomorphology).</a:t>
+            </a:r>
+            <a:endParaRPr lang="en-US" sz="1800" dirty="0"/>
+          </a:p>
+          <a:p>
+            <a:pPr algn="l" marL="342900" indent="-342900">
+              <a:spcAft>
+                <a:spcPts val="800"/>
+              </a:spcAft>
+              <a:buSzPct val="100000"/>
+              <a:buChar char="•"/>
+            </a:pPr>
+            <a:r>
+              <a:rPr lang="en-US" sz="1800" dirty="0">
+                <a:solidFill>
+                  <a:srgbClr val="111111"/>
+                </a:solidFill>
+                <a:latin typeface="Calibri" pitchFamily="34" charset="0"/>
+                <a:ea typeface="Calibri" pitchFamily="34" charset="-122"/>
+                <a:cs typeface="Calibri" pitchFamily="34" charset="-120"/>
+              </a:rPr>
+              <a:t>Teacher's course notes: Mr KAMDEM E., Geomorphology (LSA), GBHS Garoua, 2026.</a:t>
+            </a:r>
+            <a:endParaRPr lang="en-US" sz="1800" dirty="0"/>
+          </a:p>
+          <a:p>
+            <a:pPr algn="l" marL="342900" indent="-342900">
+              <a:spcAft>
+                <a:spcPts val="800"/>
+              </a:spcAft>
+              <a:buSzPct val="100000"/>
+              <a:buChar char="•"/>
+            </a:pPr>
+            <a:r>
+              <a:rPr lang="en-US" sz="1800" dirty="0">
+                <a:solidFill>
+                  <a:srgbClr val="111111"/>
+                </a:solidFill>
+                <a:latin typeface="Calibri" pitchFamily="34" charset="0"/>
+                <a:ea typeface="Calibri" pitchFamily="34" charset="-122"/>
+                <a:cs typeface="Calibri" pitchFamily="34" charset="-120"/>
+              </a:rPr>
+              <a:t>Photo, Activity 1: “Banana Plantation” by AfricaTravelAssociation, CC BY 2.0, via Flickr (https://www.flickr.com/photos/65134942@N06/8164706151)</a:t>
+            </a:r>
+            <a:endParaRPr lang="en-US" sz="1800" dirty="0"/>
+          </a:p>
+          <a:p>
+            <a:pPr algn="l" marL="342900" indent="-342900">
+              <a:spcAft>
+                <a:spcPts val="800"/>
+              </a:spcAft>
+              <a:buSzPct val="100000"/>
+              <a:buChar char="•"/>
+            </a:pPr>
+            <a:r>
+              <a:rPr lang="en-US" sz="1800" dirty="0">
+                <a:solidFill>
+                  <a:srgbClr val="111111"/>
+                </a:solidFill>
+                <a:latin typeface="Calibri" pitchFamily="34" charset="0"/>
+                <a:ea typeface="Calibri" pitchFamily="34" charset="-122"/>
+                <a:cs typeface="Calibri" pitchFamily="34" charset="-120"/>
+              </a:rPr>
+              <a:t>Photo, Activity 2: “Global Geothermal Alliance Stakeholder Meeting and Site Tour, 15-16 Ju” by International Renewable Energy Agency (IRENA), CC BY-NC-SA 2.0, via Flickr (https://www.flickr.com/photos/127932406@N06/18856399410)</a:t>
+            </a:r>
+            <a:endParaRPr lang="en-US" sz="1800" dirty="0"/>
+          </a:p>
+          <a:p>
+            <a:pPr algn="l" marL="342900" indent="-342900">
+              <a:spcAft>
+                <a:spcPts val="800"/>
+              </a:spcAft>
+              <a:buSzPct val="100000"/>
+              <a:buChar char="•"/>
+            </a:pPr>
+            <a:r>
+              <a:rPr lang="en-US" sz="1800" dirty="0">
+                <a:solidFill>
+                  <a:srgbClr val="111111"/>
+                </a:solidFill>
+                <a:latin typeface="Calibri" pitchFamily="34" charset="0"/>
+                <a:ea typeface="Calibri" pitchFamily="34" charset="-122"/>
+                <a:cs typeface="Calibri" pitchFamily="34" charset="-120"/>
+              </a:rPr>
+              <a:t>Photo, Activity 3: “Lava flow over road” by J. N. Stuart, CC BY-NC-ND 2.0, via Flickr (https://www.flickr.com/photos/21786539@N03/3387263273)</a:t>
+            </a:r>
+            <a:endParaRPr lang="en-US" sz="1800" dirty="0"/>
+          </a:p>
+          <a:p>
+            <a:pPr algn="l" marL="342900" indent="-342900">
+              <a:spcAft>
+                <a:spcPts val="800"/>
+              </a:spcAft>
+              <a:buSzPct val="100000"/>
+              <a:buChar char="•"/>
+            </a:pPr>
+            <a:r>
+              <a:rPr lang="en-US" sz="1800" dirty="0">
+                <a:solidFill>
+                  <a:srgbClr val="111111"/>
+                </a:solidFill>
+                <a:latin typeface="Calibri" pitchFamily="34" charset="0"/>
+                <a:ea typeface="Calibri" pitchFamily="34" charset="-122"/>
+                <a:cs typeface="Calibri" pitchFamily="34" charset="-120"/>
+              </a:rPr>
+              <a:t>Photo, Activity 4: “Lake Nyos, Cameroon” by jbdodane, CC BY-NC 2.0, via Flickr (https://www.flickr.com/photos/27998473@N02/11584073056)</a:t>
+            </a:r>
+            <a:endParaRPr lang="en-US" sz="1800" dirty="0"/>
+          </a:p>
+          <a:p>
+            <a:pPr algn="l" marL="342900" indent="-342900">
+              <a:spcAft>
+                <a:spcPts val="800"/>
+              </a:spcAft>
+              <a:buSzPct val="100000"/>
+              <a:buChar char="•"/>
+            </a:pPr>
+            <a:r>
+              <a:rPr lang="en-US" sz="1800" dirty="0">
+                <a:solidFill>
+                  <a:srgbClr val="111111"/>
+                </a:solidFill>
+                <a:latin typeface="Calibri" pitchFamily="34" charset="0"/>
+                <a:ea typeface="Calibri" pitchFamily="34" charset="-122"/>
+                <a:cs typeface="Calibri" pitchFamily="34" charset="-120"/>
+              </a:rPr>
+              <a:t>Photo, Activity 5: “Hawaiian Volcano Observatory, Hawaiʻi Volcanoes National Park, Hawaii” by Ken Lund, CC BY-SA 2.0, via Flickr (https://www.flickr.com/photos/75683070@N00/4528702285)</a:t>
+            </a:r>
+            <a:endParaRPr lang="en-US" sz="1800" dirty="0"/>
+          </a:p>
+        </p:txBody>
+      </p:sp>
+      <p:sp>
+        <p:nvSpPr>
+          <p:cNvPr id="25" name="Slide Number Placeholder 0"/>
+          <p:cNvSpPr>
+            <a:spLocks noGrp="1"/>
+          </p:cNvSpPr>
+          <p:nvPr>
+            <p:ph type="sldNum" sz="quarter" idx="4294967295"/>
+          </p:nvPr>
+        </p:nvSpPr>
+        <p:spPr>
+          <a:xfrm>
+            <a:off x="27432" y="91440"/>
+            <a:ext cx="585216" cy="475488"/>
+          </a:xfrm>
+          <a:prstGeom prst="rect">
+            <a:avLst/>
+          </a:prstGeom>
+          <a:extLst>
+            <a:ext uri="{C572A759-6A51-4108-AA02-DFA0A04FC94B}">
+              <ma14:wrappingTextBoxFlag xmlns:ma14="http://schemas.microsoft.com/office/mac/drawingml/2011/main" val="0"/>
+            </a:ext>
+          </a:extLst>
+        </p:spPr>
+        <p:txBody>
+          <a:bodyPr/>
+          <a:lstStyle>
+            <a:lvl1pPr>
+              <a:defRPr sz="2000">
+                <a:solidFill>
+                  <a:srgbClr val="FFFFFF"/>
+                </a:solidFill>
+                <a:latin typeface="Calibri"/>
+                <a:ea typeface="Calibri"/>
+                <a:cs typeface="Calibri"/>
+              </a:defRPr>
+            </a:lvl1pPr>
+          </a:lstStyle>
+          <a:p>
+            <a:pPr algn="ctr"/>
+            <a:fld id="{F7021451-1387-4CA6-816F-3879F97B5CBC}" type="slidenum">
+              <a:rPr b="1" lang="en-US"/>
+              <a:t>60</a:t>
+            </a:fld>
+            <a:endParaRPr lang="en-US"/>
+          </a:p>
+        </p:txBody>
+      </p:sp>
+    </p:spTree>
+  </p:cSld>
+  <p:clrMapOvr>
+    <a:masterClrMapping/>
+  </p:clrMapOvr>
+</p:sld>
+</file>
+
+<file path=ppt/slides/slide61.xml><?xml version="1.0" encoding="utf-8"?>
+<p:sld xmlns:a="http://schemas.openxmlformats.org/drawingml/2006/main" xmlns:r="http://schemas.openxmlformats.org/officeDocument/2006/relationships" xmlns:p="http://schemas.openxmlformats.org/presentationml/2006/main">
+  <p:cSld name="Slide 61">
+    <p:spTree>
+      <p:nvGrpSpPr>
+        <p:cNvPr id="1" name=""/>
+        <p:cNvGrpSpPr/>
+        <p:nvPr/>
+      </p:nvGrpSpPr>
+      <p:grpSpPr>
+        <a:xfrm>
+          <a:off x="0" y="0"/>
+          <a:ext cx="0" cy="0"/>
+          <a:chOff x="0" y="0"/>
+          <a:chExt cx="0" cy="0"/>
+        </a:xfrm>
+      </p:grpSpPr>
+      <p:sp>
+        <p:nvSpPr>
+          <p:cNvPr id="2" name="Text 0"/>
+          <p:cNvSpPr/>
+          <p:nvPr/>
+        </p:nvSpPr>
+        <p:spPr>
+          <a:xfrm>
+            <a:off x="457200" y="713232"/>
+            <a:ext cx="11368735" cy="274320"/>
+          </a:xfrm>
+          <a:prstGeom prst="rect">
+            <a:avLst/>
+          </a:prstGeom>
+          <a:noFill/>
+          <a:ln/>
+        </p:spPr>
+        <p:txBody>
+          <a:bodyPr wrap="square" lIns="0" tIns="0" rIns="0" bIns="0" rtlCol="0" anchor="ctr"/>
+          <a:lstStyle/>
+          <a:p>
+            <a:pPr algn="r" indent="0" marL="0">
+              <a:buNone/>
+            </a:pPr>
+            <a:r>
+              <a:rPr lang="en-US" sz="1400" b="1" dirty="0">
+                <a:solidFill>
+                  <a:srgbClr val="1C3F6E"/>
+                </a:solidFill>
+                <a:latin typeface="Calibri" pitchFamily="34" charset="0"/>
+                <a:ea typeface="Calibri" pitchFamily="34" charset="-122"/>
+                <a:cs typeface="Calibri" pitchFamily="34" charset="-120"/>
+              </a:rPr>
+              <a:t>REFERENCES</a:t>
+            </a:r>
+            <a:endParaRPr lang="en-US" sz="1400" dirty="0"/>
+          </a:p>
+        </p:txBody>
+      </p:sp>
+      <p:pic>
+        <p:nvPicPr>
+          <p:cNvPr id="3" name="Image 0" descr="/home/claude/f4/img/minesec_sheet.png">    </p:cNvPr>
+          <p:cNvPicPr>
+            <a:picLocks noChangeAspect="1"/>
+          </p:cNvPicPr>
+          <p:nvPr/>
+        </p:nvPicPr>
+        <p:blipFill>
+          <a:blip r:embed="rId1"/>
+          <a:stretch>
+            <a:fillRect/>
+          </a:stretch>
+        </p:blipFill>
+        <p:spPr>
+          <a:xfrm>
+            <a:off x="0" y="658368"/>
+            <a:ext cx="5120640" cy="5833872"/>
+          </a:xfrm>
+          <a:prstGeom prst="rect">
+            <a:avLst/>
+          </a:prstGeom>
+        </p:spPr>
+      </p:pic>
+      <p:sp>
+        <p:nvSpPr>
+          <p:cNvPr id="4" name="Text 1"/>
+          <p:cNvSpPr/>
+          <p:nvPr/>
+        </p:nvSpPr>
+        <p:spPr>
+          <a:xfrm>
+            <a:off x="5349240" y="1005840"/>
+            <a:ext cx="6522415" cy="731520"/>
+          </a:xfrm>
+          <a:prstGeom prst="rect">
+            <a:avLst/>
+          </a:prstGeom>
+          <a:noFill/>
+          <a:ln/>
+        </p:spPr>
+        <p:txBody>
+          <a:bodyPr wrap="square" lIns="0" tIns="0" rIns="0" bIns="0" rtlCol="0" anchor="ctr">
+            <a:normAutofit/>
+          </a:bodyPr>
+          <a:lstStyle/>
+          <a:p>
+            <a:pPr algn="ctr" indent="0" marL="0">
+              <a:buNone/>
+            </a:pPr>
+            <a:r>
+              <a:rPr lang="en-US" sz="3600" b="1" dirty="0">
+                <a:solidFill>
+                  <a:srgbClr val="990011"/>
+                </a:solidFill>
+                <a:latin typeface="Times New Roman" pitchFamily="34" charset="0"/>
+                <a:ea typeface="Times New Roman" pitchFamily="34" charset="-122"/>
+                <a:cs typeface="Times New Roman" pitchFamily="34" charset="-120"/>
+              </a:rPr>
+              <a:t>References (continued)</a:t>
+            </a:r>
+            <a:endParaRPr lang="en-US" sz="3600" dirty="0"/>
+          </a:p>
+        </p:txBody>
+      </p:sp>
+      <p:sp>
+        <p:nvSpPr>
+          <p:cNvPr id="5" name="Text 2"/>
+          <p:cNvSpPr/>
+          <p:nvPr/>
+        </p:nvSpPr>
+        <p:spPr>
+          <a:xfrm>
+            <a:off x="5349240" y="1783080"/>
+            <a:ext cx="6522415" cy="4663440"/>
+          </a:xfrm>
+          <a:prstGeom prst="rect">
+            <a:avLst/>
+          </a:prstGeom>
+          <a:noFill/>
+          <a:ln/>
+        </p:spPr>
+        <p:txBody>
+          <a:bodyPr wrap="square" lIns="0" tIns="0" rIns="0" bIns="0" rtlCol="0" anchor="t"/>
+          <a:lstStyle/>
+          <a:p>
+            <a:pPr algn="l" marL="342900" indent="-342900">
+              <a:spcAft>
+                <a:spcPts val="800"/>
+              </a:spcAft>
+              <a:buSzPct val="100000"/>
+              <a:buChar char="•"/>
+            </a:pPr>
+            <a:r>
+              <a:rPr lang="en-US" sz="1800" dirty="0">
+                <a:solidFill>
+                  <a:srgbClr val="111111"/>
+                </a:solidFill>
+                <a:latin typeface="Calibri" pitchFamily="34" charset="0"/>
+                <a:ea typeface="Calibri" pitchFamily="34" charset="-122"/>
+                <a:cs typeface="Calibri" pitchFamily="34" charset="-120"/>
+              </a:rPr>
+              <a:t>Photo, board summary (Lahars): “Lahar (mudflow) remnants from Mount Ruapehu” by Wade Tregaskis, CC BY-NC 2.0, via Flickr (https://www.flickr.com/photos/7725552@N06/502073245)</a:t>
+            </a:r>
+            <a:endParaRPr lang="en-US" sz="1800" dirty="0"/>
+          </a:p>
+          <a:p>
+            <a:pPr algn="l" marL="342900" indent="-342900">
+              <a:spcAft>
+                <a:spcPts val="800"/>
+              </a:spcAft>
+              <a:buSzPct val="100000"/>
+              <a:buChar char="•"/>
+            </a:pPr>
+            <a:r>
+              <a:rPr lang="en-US" sz="1800" dirty="0">
+                <a:solidFill>
+                  <a:srgbClr val="111111"/>
+                </a:solidFill>
+                <a:latin typeface="Calibri" pitchFamily="34" charset="0"/>
+                <a:ea typeface="Calibri" pitchFamily="34" charset="-122"/>
+                <a:cs typeface="Calibri" pitchFamily="34" charset="-120"/>
+              </a:rPr>
+              <a:t>Diagrams and animations: drawn for this lesson (Geography Department).</a:t>
+            </a:r>
+            <a:endParaRPr lang="en-US" sz="1800" dirty="0"/>
+          </a:p>
+        </p:txBody>
+      </p:sp>
+      <p:sp>
+        <p:nvSpPr>
+          <p:cNvPr id="25" name="Slide Number Placeholder 0"/>
+          <p:cNvSpPr>
+            <a:spLocks noGrp="1"/>
+          </p:cNvSpPr>
+          <p:nvPr>
+            <p:ph type="sldNum" sz="quarter" idx="4294967295"/>
+          </p:nvPr>
+        </p:nvSpPr>
+        <p:spPr>
+          <a:xfrm>
+            <a:off x="27432" y="91440"/>
+            <a:ext cx="585216" cy="475488"/>
+          </a:xfrm>
+          <a:prstGeom prst="rect">
+            <a:avLst/>
+          </a:prstGeom>
+          <a:extLst>
+            <a:ext uri="{C572A759-6A51-4108-AA02-DFA0A04FC94B}">
+              <ma14:wrappingTextBoxFlag xmlns:ma14="http://schemas.microsoft.com/office/mac/drawingml/2011/main" val="0"/>
+            </a:ext>
+          </a:extLst>
+        </p:spPr>
+        <p:txBody>
+          <a:bodyPr/>
+          <a:lstStyle>
+            <a:lvl1pPr>
+              <a:defRPr sz="2000">
+                <a:solidFill>
+                  <a:srgbClr val="FFFFFF"/>
+                </a:solidFill>
+                <a:latin typeface="Calibri"/>
+                <a:ea typeface="Calibri"/>
+                <a:cs typeface="Calibri"/>
+              </a:defRPr>
+            </a:lvl1pPr>
+          </a:lstStyle>
+          <a:p>
+            <a:pPr algn="ctr"/>
+            <a:fld id="{F7021451-1387-4CA6-816F-3879F97B5CBC}" type="slidenum">
+              <a:rPr b="1" lang="en-US"/>
+              <a:t>61</a:t>
+            </a:fld>
+            <a:endParaRPr lang="en-US"/>
+          </a:p>
+        </p:txBody>
+      </p:sp>
+    </p:spTree>
+  </p:cSld>
+  <p:clrMapOvr>
+    <a:masterClrMapping/>
+  </p:clrMapOvr>
+</p:sld>
+</file>
+
 <file path=ppt/slides/slide7.xml><?xml version="1.0" encoding="utf-8"?>
 <p:sld xmlns:a="http://schemas.openxmlformats.org/drawingml/2006/main" xmlns:r="http://schemas.openxmlformats.org/officeDocument/2006/relationships" xmlns:p="http://schemas.openxmlformats.org/presentationml/2006/main">
   <p:cSld name="Slide 7">
@@ -22178,7 +24215,7 @@
         <p:spPr>
           <a:xfrm>
             <a:off x="0" y="658368"/>
-            <a:ext cx="5120640" cy="5833872"/>
+            <a:ext cx="2468880" cy="5833872"/>
           </a:xfrm>
           <a:prstGeom prst="rect">
             <a:avLst/>
@@ -22193,8 +24230,8 @@
         </p:nvSpPr>
         <p:spPr>
           <a:xfrm>
-            <a:off x="5349240" y="1005840"/>
-            <a:ext cx="6522415" cy="731520"/>
+            <a:off x="2697480" y="1005840"/>
+            <a:ext cx="9174175" cy="731520"/>
           </a:xfrm>
           <a:prstGeom prst="rect">
             <a:avLst/>
@@ -22234,8 +24271,8 @@
         </p:nvSpPr>
         <p:spPr>
           <a:xfrm>
-            <a:off x="5349240" y="1783080"/>
-            <a:ext cx="6522415" cy="4663440"/>
+            <a:off x="2697480" y="1783080"/>
+            <a:ext cx="9174175" cy="4663440"/>
           </a:xfrm>
           <a:prstGeom prst="rect">
             <a:avLst/>
@@ -22284,7 +24321,7 @@
                 <a:ea typeface="Times New Roman" pitchFamily="34" charset="-122"/>
                 <a:cs typeface="Times New Roman" pitchFamily="34" charset="-120"/>
               </a:rPr>
-              <a:t>Explain the importance of volcanoes as a resource.</a:t>
+              <a:t>Explain the resources provided by volcanoes.</a:t>
             </a:r>
             <a:endParaRPr lang="en-US" sz="4000" dirty="0"/>
           </a:p>
@@ -22306,7 +24343,29 @@
                 <a:ea typeface="Times New Roman" pitchFamily="34" charset="-122"/>
                 <a:cs typeface="Times New Roman" pitchFamily="34" charset="-120"/>
               </a:rPr>
-              <a:t>Describe volcanic hazards.</a:t>
+              <a:t>Explain the hazards of volcanoes.</a:t>
+            </a:r>
+            <a:endParaRPr lang="en-US" sz="4000" dirty="0"/>
+          </a:p>
+          <a:p>
+            <a:pPr algn="l" marL="342900" indent="-342900">
+              <a:spcAft>
+                <a:spcPts val="800"/>
+              </a:spcAft>
+              <a:buSzPct val="100000"/>
+              <a:buFont typeface="+mj-lt"/>
+              <a:buAutoNum type="arabicPeriod" startAt="1"/>
+            </a:pPr>
+            <a:r>
+              <a:rPr lang="en-US" sz="4000" dirty="0">
+                <a:solidFill>
+                  <a:srgbClr val="111111"/>
+                </a:solidFill>
+                <a:latin typeface="Times New Roman" pitchFamily="34" charset="0"/>
+                <a:ea typeface="Times New Roman" pitchFamily="34" charset="-122"/>
+                <a:cs typeface="Times New Roman" pitchFamily="34" charset="-120"/>
+              </a:rPr>
+              <a:t>Describe the Lake Nyos disaster.</a:t>
             </a:r>
             <a:endParaRPr lang="en-US" sz="4000" dirty="0"/>
           </a:p>
@@ -22527,7 +24586,7 @@
                 <a:ea typeface="Times New Roman" pitchFamily="34" charset="-122"/>
                 <a:cs typeface="Times New Roman" pitchFamily="34" charset="-120"/>
               </a:rPr>
-              <a:t>Propose adaptation and mitigation strategies.</a:t>
+              <a:t>Describe adaptation and mitigation strategies.</a:t>
             </a:r>
             <a:endParaRPr lang="en-US" sz="4000" dirty="0"/>
           </a:p>
@@ -22747,7 +24806,7 @@
                 <a:ea typeface="Times New Roman" pitchFamily="34" charset="-122"/>
                 <a:cs typeface="Times New Roman" pitchFamily="34" charset="-120"/>
               </a:rPr>
-              <a:t>Volcanoes give lava, ash and gases.</a:t>
+              <a:t>Mount Cameroon is an active composite cone.</a:t>
             </a:r>
             <a:endParaRPr lang="en-US" sz="4000" dirty="0"/>
           </a:p>
@@ -22768,7 +24827,28 @@
                 <a:ea typeface="Times New Roman" pitchFamily="34" charset="-122"/>
                 <a:cs typeface="Times New Roman" pitchFamily="34" charset="-120"/>
               </a:rPr>
-              <a:t>Mount Cameroon is active.</a:t>
+              <a:t>Lake Nyos is a crater lake.</a:t>
+            </a:r>
+            <a:endParaRPr lang="en-US" sz="4000" dirty="0"/>
+          </a:p>
+          <a:p>
+            <a:pPr algn="l" marL="342900" indent="-342900">
+              <a:spcAft>
+                <a:spcPts val="800"/>
+              </a:spcAft>
+              <a:buSzPct val="100000"/>
+              <a:buChar char="•"/>
+            </a:pPr>
+            <a:r>
+              <a:rPr lang="en-US" sz="4000" dirty="0">
+                <a:solidFill>
+                  <a:srgbClr val="111111"/>
+                </a:solidFill>
+                <a:latin typeface="Times New Roman" pitchFamily="34" charset="0"/>
+                <a:ea typeface="Times New Roman" pitchFamily="34" charset="-122"/>
+                <a:cs typeface="Times New Roman" pitchFamily="34" charset="-120"/>
+              </a:rPr>
+              <a:t>Eruptions release lava, pyroclasts and gases.</a:t>
             </a:r>
             <a:endParaRPr lang="en-US" sz="4000" dirty="0"/>
           </a:p>

--- a/lecons/LSA/Geomorphology/09_LSA_GEOMO_L07_Volcanoes_and_Man.pptx
+++ b/lecons/LSA/Geomorphology/09_LSA_GEOMO_L07_Volcanoes_and_Man.pptx
@@ -66,9 +66,10 @@
     <p:sldId id="314" r:id="rId60"/>
     <p:sldId id="315" r:id="rId61"/>
     <p:sldId id="316" r:id="rId62"/>
+    <p:sldId id="317" r:id="rId63"/>
   </p:sldIdLst>
   <p:notesMasterIdLst>
-    <p:notesMasterId r:id="rId63"/>
+    <p:notesMasterId r:id="rId64"/>
   </p:notesMasterIdLst>
   <p:sldSz cx="12192000" cy="6858000"/>
   <p:notesSz cx="6858000" cy="12192000"/>
@@ -3202,7 +3203,7 @@
           <a:p>
             <a:r>
               <a:rPr lang="en-US" dirty="0"/>
-              <a:t>We continue with the definitions. On this slide we have Mitigation. Write each point on a new line, with the key term first, and explain it in your own words when we revise.</a:t>
+              <a:t>We continue with the definitions. On this slide we have Adaptation and Mitigation. Write each point on a new line, with the key term first, and explain it in your own words when we revise.</a:t>
             </a:r>
             <a:endParaRPr lang="en-US" dirty="0"/>
           </a:p>
@@ -3290,7 +3291,7 @@
           <a:p>
             <a:r>
               <a:rPr lang="en-US" dirty="0"/>
-              <a:t>Let us copy Volcanoes as a Resource. Volcanoes provide the following resources. Copy the point on Fertile soils on the left, then draw the diagram on the right: a banana plantation. Give it a title and label it clearly.</a:t>
+              <a:t>Let us copy Volcanoes as a Resource. Volcanoes are important to man in the following ways. Copy the point on Fertile soils on the left, then draw the diagram on the right: a banana plantation. Give it a title and label it clearly.</a:t>
             </a:r>
             <a:endParaRPr lang="en-US" dirty="0"/>
           </a:p>
@@ -3378,7 +3379,7 @@
           <a:p>
             <a:r>
               <a:rPr lang="en-US" dirty="0"/>
-              <a:t>We continue with Volcanoes as a Resource. On this slide we have Tourism. Write each point on a new line, with the key term first, and explain it in your own words when we revise.</a:t>
+              <a:t>We continue with Volcanoes as a Resource. Copy the point on Tourism: write the key term first, then its explanation.</a:t>
             </a:r>
             <a:endParaRPr lang="en-US" dirty="0"/>
           </a:p>
@@ -3642,7 +3643,7 @@
           <a:p>
             <a:r>
               <a:rPr lang="en-US" dirty="0"/>
-              <a:t>We continue with Volcanoes as a Resource. On this slide we have Building materials and Minerals. Write each point on a new line, with the key term first, and explain it in your own words when we revise.</a:t>
+              <a:t>We continue with Volcanoes as a Resource. Copy the point on Building materials and minerals: write the key term first, then its explanation.</a:t>
             </a:r>
             <a:endParaRPr lang="en-US" dirty="0"/>
           </a:p>
@@ -3818,7 +3819,7 @@
           <a:p>
             <a:r>
               <a:rPr lang="en-US" dirty="0"/>
-              <a:t>We continue with Volcanoes as a Hazard. On this slide we have Ash fall and Pyroclastic flows. Write each point on a new line, with the key term first, and explain it in your own words when we revise.</a:t>
+              <a:t>We continue with Volcanoes as a Hazard. Copy the point on Ash falls and pyroclastic flows: write the key term first, then its explanation.</a:t>
             </a:r>
             <a:endParaRPr lang="en-US" dirty="0"/>
           </a:p>
@@ -4082,7 +4083,7 @@
           <a:p>
             <a:r>
               <a:rPr lang="en-US" dirty="0"/>
-              <a:t>Let us copy Adaptation and Mitigation. People reduce volcanic risks with the following strategies. Copy the point on Monitoring on the left, then draw the diagram on the right: monitoring a volcano. Give it a title and label it clearly.</a:t>
+              <a:t>Let us copy Adaptation and Mitigation Strategies. People reduce volcanic risks with the following strategies. Copy the point on Monitoring and warning on the left, then draw the diagram on the right: monitoring a volcano. Give it a title and label it clearly.</a:t>
             </a:r>
             <a:endParaRPr lang="en-US" dirty="0"/>
           </a:p>
@@ -4170,7 +4171,7 @@
           <a:p>
             <a:r>
               <a:rPr lang="en-US" dirty="0"/>
-              <a:t>We continue with Adaptation and Mitigation. On this slide we have Hazard mapping and zoning and Education and evacuation. Write each point on a new line, with the key term first, and explain it in your own words when we revise.</a:t>
+              <a:t>We continue with Adaptation and Mitigation Strategies. Copy the point on Hazard mapping and land-use planning: write the key term first, then its explanation.</a:t>
             </a:r>
             <a:endParaRPr lang="en-US" dirty="0"/>
           </a:p>
@@ -4258,7 +4259,7 @@
           <a:p>
             <a:r>
               <a:rPr lang="en-US" dirty="0"/>
-              <a:t>Copy the point on Engineering on the left, then draw the diagram on the right: volcanoes and man. Give it a title and label it clearly.</a:t>
+              <a:t>We continue with Adaptation and Mitigation Strategies. Copy the point on Education and evacuation plans: write the key term first, then its explanation.</a:t>
             </a:r>
             <a:endParaRPr lang="en-US" dirty="0"/>
           </a:p>
@@ -4346,7 +4347,7 @@
           <a:p>
             <a:r>
               <a:rPr lang="en-US" dirty="0"/>
-              <a:t>Now let us check what you have understood. Question 1: Explain why a volcano is both a resource and a hazard. Answer in your exercise book.</a:t>
+              <a:t>Copy the point on Engineering measures on the left, then draw the diagram on the right: volcanoes and man. Give it a title and label it clearly.</a:t>
             </a:r>
             <a:endParaRPr lang="en-US" dirty="0"/>
           </a:p>
@@ -4522,7 +4523,7 @@
           <a:p>
             <a:r>
               <a:rPr lang="en-US" dirty="0"/>
-              <a:t>The expected answer is: it gives fertile soils, energy and tourism, but its eruptions and gases destroy property and kill people. If you got it right, well done.</a:t>
+              <a:t>Now let us check what you have understood. Question 1: Explain why a volcano is both a resource and a hazard. Answer in your exercise book.</a:t>
             </a:r>
             <a:endParaRPr lang="en-US" dirty="0"/>
           </a:p>
@@ -4610,7 +4611,7 @@
           <a:p>
             <a:r>
               <a:rPr lang="en-US" dirty="0"/>
-              <a:t>Now let us check what you have understood. Question 2: Give two measures to reduce volcanic risks. Answer in your exercise book.</a:t>
+              <a:t>The expected answer is: it gives fertile soils, energy and tourism, but its eruptions and gases destroy property and kill people. If you got it right, well done.</a:t>
             </a:r>
             <a:endParaRPr lang="en-US" dirty="0"/>
           </a:p>
@@ -4698,7 +4699,7 @@
           <a:p>
             <a:r>
               <a:rPr lang="en-US" dirty="0"/>
-              <a:t>The expected answer is: monitoring, hazard maps and zoning, education and evacuation plans, engineering works (any two). If you got it right, well done.</a:t>
+              <a:t>Now let us check what you have understood. Question 2: Give two measures to reduce volcanic risks. Answer in your exercise book.</a:t>
             </a:r>
             <a:endParaRPr lang="en-US" dirty="0"/>
           </a:p>
@@ -4786,7 +4787,7 @@
           <a:p>
             <a:r>
               <a:rPr lang="en-US" dirty="0"/>
-              <a:t>For those who need more practice, fill in the blanks in your exercise book. The answers are: number 1, andosols; number 2, pyroclastic; number 3, carbon dioxide.</a:t>
+              <a:t>The expected answer is: monitoring, hazard maps and zoning, education and evacuation plans, engineering works (any two). If you got it right, well done.</a:t>
             </a:r>
             <a:endParaRPr lang="en-US" dirty="0"/>
           </a:p>
@@ -4874,7 +4875,7 @@
           <a:p>
             <a:r>
               <a:rPr lang="en-US" dirty="0"/>
-              <a:t>For your homework: Define the epicentre of an earthquake. We shall correct it at the beginning of our next lesson.</a:t>
+              <a:t>For those who need more practice, fill in the blanks in your exercise book. The answers are: number 1, andosols; number 2, pyroclastic; number 3, carbon dioxide.</a:t>
             </a:r>
             <a:endParaRPr lang="en-US" dirty="0"/>
           </a:p>
@@ -4962,7 +4963,7 @@
           <a:p>
             <a:r>
               <a:rPr lang="en-US" dirty="0"/>
-              <a:t>Our next lesson will be on Lesson 8: Earthquakes and Man. Thank you for your attention, and see you next time.</a:t>
+              <a:t>For your homework: Define the epicentre of an earthquake. We shall correct it at the beginning of our next lesson.</a:t>
             </a:r>
             <a:endParaRPr lang="en-US" dirty="0"/>
           </a:p>
@@ -5050,7 +5051,7 @@
           <a:p>
             <a:r>
               <a:rPr lang="en-US" dirty="0"/>
-              <a:t>Let us play the bilingual game. I say a word in English, and you give me the French word. Then we do the reverse.</a:t>
+              <a:t>Our next lesson will be on Lesson 8: Earthquakes and Man. Thank you for your attention, and see you next time.</a:t>
             </a:r>
             <a:endParaRPr lang="en-US" dirty="0"/>
           </a:p>
@@ -5138,7 +5139,7 @@
           <a:p>
             <a:r>
               <a:rPr lang="en-US" dirty="0"/>
-              <a:t>I record this information in the official logbook of the class after the lesson.</a:t>
+              <a:t>Let us play the bilingual game. I say a word in English, and you give me the French word. Then we do the reverse.</a:t>
             </a:r>
             <a:endParaRPr lang="en-US" dirty="0"/>
           </a:p>
@@ -5226,7 +5227,7 @@
           <a:p>
             <a:r>
               <a:rPr lang="en-US" dirty="0"/>
-              <a:t>I complete the second page of the logbook: the matter taught, the evaluation, the homework and the attendance.</a:t>
+              <a:t>I record this information in the official logbook of the class after the lesson.</a:t>
             </a:r>
             <a:endParaRPr lang="en-US" dirty="0"/>
           </a:p>
@@ -5314,7 +5315,7 @@
           <a:p>
             <a:r>
               <a:rPr lang="en-US" dirty="0"/>
-              <a:t>This slide is for me, the teacher: it gives the timing of the lesson and what to do if the projector is not available.</a:t>
+              <a:t>I complete the second page of the logbook: the matter taught, the evaluation, the homework and the attendance.</a:t>
             </a:r>
             <a:endParaRPr lang="en-US" dirty="0"/>
           </a:p>
@@ -5490,7 +5491,7 @@
           <a:p>
             <a:r>
               <a:rPr lang="en-US" dirty="0"/>
-              <a:t>Take your time to copy this part; we will continue together.</a:t>
+              <a:t>This slide is for me, the teacher: it gives the timing of the lesson and what to do if the projector is not available.</a:t>
             </a:r>
             <a:endParaRPr lang="en-US" dirty="0"/>
           </a:p>
@@ -5578,7 +5579,7 @@
           <a:p>
             <a:r>
               <a:rPr lang="en-US" dirty="0"/>
-              <a:t>These are the references and picture credits used to prepare this lesson.</a:t>
+              <a:t>Take your time to copy this part; we will continue together.</a:t>
             </a:r>
             <a:endParaRPr lang="en-US" dirty="0"/>
           </a:p>
@@ -5602,6 +5603,94 @@
             <a:fld id="{F7021451-1387-4CA6-816F-3879F97B5CBC}" type="slidenum">
               <a:rPr lang="en-US"/>
               <a:t>61</a:t>
+            </a:fld>
+            <a:endParaRPr lang="en-US"/>
+          </a:p>
+        </p:txBody>
+      </p:sp>
+    </p:spTree>
+    <p:extLst>
+      <p:ext uri="{BB962C8B-B14F-4D97-AF65-F5344CB8AC3E}">
+        <p14:creationId xmlns:p14="http://schemas.microsoft.com/office/powerpoint/2010/main" val="1024086991"/>
+      </p:ext>
+    </p:extLst>
+  </p:cSld>
+  <p:clrMapOvr>
+    <a:masterClrMapping/>
+  </p:clrMapOvr>
+</p:notes>
+</file>
+
+<file path=ppt/notesSlides/notesSlide62.xml><?xml version="1.0" encoding="utf-8"?>
+<p:notes xmlns:a="http://schemas.openxmlformats.org/drawingml/2006/main" xmlns:r="http://schemas.openxmlformats.org/officeDocument/2006/relationships" xmlns:p="http://schemas.openxmlformats.org/presentationml/2006/main">
+  <p:cSld>
+    <p:spTree>
+      <p:nvGrpSpPr>
+        <p:cNvPr id="1" name=""/>
+        <p:cNvGrpSpPr/>
+        <p:nvPr/>
+      </p:nvGrpSpPr>
+      <p:grpSpPr>
+        <a:xfrm>
+          <a:off x="0" y="0"/>
+          <a:ext cx="0" cy="0"/>
+          <a:chOff x="0" y="0"/>
+          <a:chExt cx="0" cy="0"/>
+        </a:xfrm>
+      </p:grpSpPr>
+      <p:sp>
+        <p:nvSpPr>
+          <p:cNvPr id="2" name="Slide Image Placeholder 1"/>
+          <p:cNvSpPr>
+            <a:spLocks noGrp="1" noRot="1" noChangeAspect="1"/>
+          </p:cNvSpPr>
+          <p:nvPr>
+            <p:ph type="sldImg"/>
+          </p:nvPr>
+        </p:nvSpPr>
+        <p:spPr/>
+      </p:sp>
+      <p:sp>
+        <p:nvSpPr>
+          <p:cNvPr id="3" name="Notes Placeholder 2"/>
+          <p:cNvSpPr>
+            <a:spLocks noGrp="1"/>
+          </p:cNvSpPr>
+          <p:nvPr>
+            <p:ph type="body" idx="1"/>
+          </p:nvPr>
+        </p:nvSpPr>
+        <p:spPr/>
+        <p:txBody>
+          <a:bodyPr/>
+          <a:lstStyle/>
+          <a:p>
+            <a:r>
+              <a:rPr lang="en-US" dirty="0"/>
+              <a:t>These are the references and picture credits used to prepare this lesson.</a:t>
+            </a:r>
+            <a:endParaRPr lang="en-US" dirty="0"/>
+          </a:p>
+        </p:txBody>
+      </p:sp>
+      <p:sp>
+        <p:nvSpPr>
+          <p:cNvPr id="4" name="Slide Number Placeholder 3"/>
+          <p:cNvSpPr>
+            <a:spLocks noGrp="1"/>
+          </p:cNvSpPr>
+          <p:nvPr>
+            <p:ph type="sldNum" sz="quarter" idx="10"/>
+          </p:nvPr>
+        </p:nvSpPr>
+        <p:spPr/>
+        <p:txBody>
+          <a:bodyPr/>
+          <a:lstStyle/>
+          <a:p>
+            <a:fld id="{F7021451-1387-4CA6-816F-3879F97B5CBC}" type="slidenum">
+              <a:rPr lang="en-US"/>
+              <a:t>62</a:t>
             </a:fld>
             <a:endParaRPr lang="en-US"/>
           </a:p>
@@ -14952,6 +15041,43 @@
                 <a:ea typeface="Times New Roman" pitchFamily="34" charset="-122"/>
                 <a:cs typeface="Times New Roman" pitchFamily="34" charset="-120"/>
               </a:rPr>
+              <a:t>Adaptation: </a:t>
+            </a:r>
+            <a:pPr algn="l" indent="0" marL="0">
+              <a:spcAft>
+                <a:spcPts val="800"/>
+              </a:spcAft>
+              <a:buNone/>
+            </a:pPr>
+            <a:r>
+              <a:rPr lang="en-US" sz="4000" dirty="0">
+                <a:solidFill>
+                  <a:srgbClr val="111111"/>
+                </a:solidFill>
+                <a:latin typeface="Times New Roman" pitchFamily="34" charset="0"/>
+                <a:ea typeface="Times New Roman" pitchFamily="34" charset="-122"/>
+                <a:cs typeface="Times New Roman" pitchFamily="34" charset="-120"/>
+              </a:rPr>
+              <a:t>It is the adjustment of people's way of life to live with a hazard.</a:t>
+            </a:r>
+            <a:endParaRPr lang="en-US" sz="4000" dirty="0"/>
+          </a:p>
+          <a:p>
+            <a:pPr algn="l" indent="0" marL="0">
+              <a:spcAft>
+                <a:spcPts val="800"/>
+              </a:spcAft>
+              <a:buNone/>
+            </a:pPr>
+            <a:r>
+              <a:rPr lang="en-US" sz="4000" b="1" dirty="0">
+                <a:solidFill>
+                  <a:srgbClr val="111111"/>
+                </a:solidFill>
+                <a:latin typeface="Times New Roman" pitchFamily="34" charset="0"/>
+                <a:ea typeface="Times New Roman" pitchFamily="34" charset="-122"/>
+                <a:cs typeface="Times New Roman" pitchFamily="34" charset="-120"/>
+              </a:rPr>
               <a:t>Mitigation: </a:t>
             </a:r>
             <a:pPr algn="l" indent="0" marL="0">
@@ -15137,7 +15263,7 @@
         <p:spPr>
           <a:xfrm>
             <a:off x="365760" y="1783080"/>
-            <a:ext cx="4846320" cy="4617720"/>
+            <a:ext cx="6035040" cy="4617720"/>
           </a:xfrm>
           <a:prstGeom prst="rect">
             <a:avLst/>
@@ -15156,7 +15282,7 @@
               <a:buNone/>
             </a:pPr>
             <a:r>
-              <a:rPr lang="en-US" sz="3600" i="1" dirty="0">
+              <a:rPr lang="en-US" sz="2800" i="1" dirty="0">
                 <a:solidFill>
                   <a:srgbClr val="111111"/>
                 </a:solidFill>
@@ -15164,9 +15290,9 @@
                 <a:ea typeface="Times New Roman" pitchFamily="34" charset="-122"/>
                 <a:cs typeface="Times New Roman" pitchFamily="34" charset="-120"/>
               </a:rPr>
-              <a:t>Volcanoes provide the following resources:</a:t>
-            </a:r>
-            <a:endParaRPr lang="en-US" sz="3600" dirty="0"/>
+              <a:t>Volcanoes are important to man in the following ways:</a:t>
+            </a:r>
+            <a:endParaRPr lang="en-US" sz="2800" dirty="0"/>
           </a:p>
           <a:p>
             <a:pPr algn="l" indent="0" marL="0">
@@ -15176,7 +15302,7 @@
               <a:buNone/>
             </a:pPr>
             <a:r>
-              <a:rPr lang="en-US" sz="3600" b="1" dirty="0">
+              <a:rPr lang="en-US" sz="2800" b="1" dirty="0">
                 <a:solidFill>
                   <a:srgbClr val="111111"/>
                 </a:solidFill>
@@ -15193,7 +15319,7 @@
               <a:buNone/>
             </a:pPr>
             <a:r>
-              <a:rPr lang="en-US" sz="3600" dirty="0">
+              <a:rPr lang="en-US" sz="2800" dirty="0">
                 <a:solidFill>
                   <a:srgbClr val="111111"/>
                 </a:solidFill>
@@ -15201,9 +15327,9 @@
                 <a:ea typeface="Times New Roman" pitchFamily="34" charset="-122"/>
                 <a:cs typeface="Times New Roman" pitchFamily="34" charset="-120"/>
               </a:rPr>
-              <a:t>Ash and lava weather into rich andosols, as on the CDC plantations of bananas, rubber, tea and palm oil on Mount Cameroon.</a:t>
-            </a:r>
-            <a:endParaRPr lang="en-US" sz="3600" dirty="0"/>
+              <a:t>Volcanic ash and lava weather into deep, rich soils called andosols. On the slopes of Mount Cameroon, they support the CDC plantations of bananas, rubber, tea and oil palm, and in the Western Highlands dense farming of coffee and food crops.</a:t>
+            </a:r>
+            <a:endParaRPr lang="en-US" sz="2800" dirty="0"/>
           </a:p>
         </p:txBody>
       </p:sp>
@@ -15223,8 +15349,8 @@
         </p:blipFill>
         <p:spPr>
           <a:xfrm>
-            <a:off x="5349240" y="2071212"/>
-            <a:ext cx="6659575" cy="3693983"/>
+            <a:off x="6537960" y="2400897"/>
+            <a:ext cx="5470855" cy="3034615"/>
           </a:xfrm>
           <a:prstGeom prst="rect">
             <a:avLst/>
@@ -15239,8 +15365,8 @@
         </p:nvSpPr>
         <p:spPr>
           <a:xfrm>
-            <a:off x="5349240" y="6089904"/>
-            <a:ext cx="6659575" cy="347472"/>
+            <a:off x="6537960" y="6089904"/>
+            <a:ext cx="5470855" cy="347472"/>
           </a:xfrm>
           <a:prstGeom prst="rect">
             <a:avLst/>
@@ -15399,7 +15525,7 @@
         <p:spPr>
           <a:xfrm>
             <a:off x="0" y="658368"/>
-            <a:ext cx="5120640" cy="5833872"/>
+            <a:ext cx="3840480" cy="5833872"/>
           </a:xfrm>
           <a:prstGeom prst="rect">
             <a:avLst/>
@@ -15414,8 +15540,8 @@
         </p:nvSpPr>
         <p:spPr>
           <a:xfrm>
-            <a:off x="5349240" y="1005840"/>
-            <a:ext cx="6522415" cy="731520"/>
+            <a:off x="4069080" y="1005840"/>
+            <a:ext cx="7802575" cy="731520"/>
           </a:xfrm>
           <a:prstGeom prst="rect">
             <a:avLst/>
@@ -15455,8 +15581,8 @@
         </p:nvSpPr>
         <p:spPr>
           <a:xfrm>
-            <a:off x="5349240" y="1783080"/>
-            <a:ext cx="6522415" cy="4663440"/>
+            <a:off x="4069080" y="1783080"/>
+            <a:ext cx="7802575" cy="4663440"/>
           </a:xfrm>
           <a:prstGeom prst="rect">
             <a:avLst/>
@@ -15500,7 +15626,7 @@
                 <a:ea typeface="Times New Roman" pitchFamily="34" charset="-122"/>
                 <a:cs typeface="Times New Roman" pitchFamily="34" charset="-120"/>
               </a:rPr>
-              <a:t>Volcanoes attract visitors, like the Mount Cameroon Race of Hope and the crater lakes.</a:t>
+              <a:t>Volcanoes and crater lakes attract visitors, which creates jobs and income. The Mount Cameroon Race of Hope and the crater lakes of the Western Highlands are examples.</a:t>
             </a:r>
             <a:endParaRPr lang="en-US" sz="4000" dirty="0"/>
           </a:p>
@@ -15907,7 +16033,7 @@
         <p:spPr>
           <a:xfrm>
             <a:off x="365760" y="1783080"/>
-            <a:ext cx="4846320" cy="4617720"/>
+            <a:ext cx="6035040" cy="4617720"/>
           </a:xfrm>
           <a:prstGeom prst="rect">
             <a:avLst/>
@@ -15951,7 +16077,7 @@
                 <a:ea typeface="Times New Roman" pitchFamily="34" charset="-122"/>
                 <a:cs typeface="Times New Roman" pitchFamily="34" charset="-120"/>
               </a:rPr>
-              <a:t>Underground heat produces steam and electricity, as in Iceland and Kenya.</a:t>
+              <a:t>Underground heat turns water into steam, which drives turbines to produce electricity and heats houses. Iceland and Kenya produce a large part of their electricity in this way.</a:t>
             </a:r>
             <a:endParaRPr lang="en-US" sz="3600" dirty="0"/>
           </a:p>
@@ -15973,8 +16099,8 @@
         </p:blipFill>
         <p:spPr>
           <a:xfrm>
-            <a:off x="5477905" y="1783080"/>
-            <a:ext cx="6402246" cy="4270248"/>
+            <a:off x="6537960" y="2093695"/>
+            <a:ext cx="5470855" cy="3649018"/>
           </a:xfrm>
           <a:prstGeom prst="rect">
             <a:avLst/>
@@ -15989,8 +16115,8 @@
         </p:nvSpPr>
         <p:spPr>
           <a:xfrm>
-            <a:off x="5349240" y="6089904"/>
-            <a:ext cx="6659575" cy="347472"/>
+            <a:off x="6537960" y="6089904"/>
+            <a:ext cx="5470855" cy="347472"/>
           </a:xfrm>
           <a:prstGeom prst="rect">
             <a:avLst/>
@@ -16149,7 +16275,7 @@
         <p:spPr>
           <a:xfrm>
             <a:off x="0" y="658368"/>
-            <a:ext cx="5120640" cy="5833872"/>
+            <a:ext cx="3840480" cy="5833872"/>
           </a:xfrm>
           <a:prstGeom prst="rect">
             <a:avLst/>
@@ -16164,8 +16290,8 @@
         </p:nvSpPr>
         <p:spPr>
           <a:xfrm>
-            <a:off x="5349240" y="1005840"/>
-            <a:ext cx="6522415" cy="731520"/>
+            <a:off x="4069080" y="1005840"/>
+            <a:ext cx="7802575" cy="731520"/>
           </a:xfrm>
           <a:prstGeom prst="rect">
             <a:avLst/>
@@ -16205,8 +16331,8 @@
         </p:nvSpPr>
         <p:spPr>
           <a:xfrm>
-            <a:off x="5349240" y="1783080"/>
-            <a:ext cx="6522415" cy="4663440"/>
+            <a:off x="4069080" y="1783080"/>
+            <a:ext cx="7802575" cy="4663440"/>
           </a:xfrm>
           <a:prstGeom prst="rect">
             <a:avLst/>
@@ -16233,7 +16359,7 @@
                 <a:ea typeface="Times New Roman" pitchFamily="34" charset="-122"/>
                 <a:cs typeface="Times New Roman" pitchFamily="34" charset="-120"/>
               </a:rPr>
-              <a:t>Building materials: </a:t>
+              <a:t>Building materials and minerals: </a:t>
             </a:r>
             <a:pPr algn="l" indent="0" marL="0">
               <a:spcAft>
@@ -16250,44 +16376,7 @@
                 <a:ea typeface="Times New Roman" pitchFamily="34" charset="-122"/>
                 <a:cs typeface="Times New Roman" pitchFamily="34" charset="-120"/>
               </a:rPr>
-              <a:t>Basalt and scoria are quarried for roads and houses.</a:t>
-            </a:r>
-            <a:endParaRPr lang="en-US" sz="4000" dirty="0"/>
-          </a:p>
-          <a:p>
-            <a:pPr algn="l" indent="0" marL="0">
-              <a:spcAft>
-                <a:spcPts val="800"/>
-              </a:spcAft>
-              <a:buNone/>
-            </a:pPr>
-            <a:r>
-              <a:rPr lang="en-US" sz="4000" b="1" dirty="0">
-                <a:solidFill>
-                  <a:srgbClr val="111111"/>
-                </a:solidFill>
-                <a:latin typeface="Times New Roman" pitchFamily="34" charset="0"/>
-                <a:ea typeface="Times New Roman" pitchFamily="34" charset="-122"/>
-                <a:cs typeface="Times New Roman" pitchFamily="34" charset="-120"/>
-              </a:rPr>
-              <a:t>Minerals: </a:t>
-            </a:r>
-            <a:pPr algn="l" indent="0" marL="0">
-              <a:spcAft>
-                <a:spcPts val="800"/>
-              </a:spcAft>
-              <a:buNone/>
-            </a:pPr>
-            <a:r>
-              <a:rPr lang="en-US" sz="4000" dirty="0">
-                <a:solidFill>
-                  <a:srgbClr val="111111"/>
-                </a:solidFill>
-                <a:latin typeface="Times New Roman" pitchFamily="34" charset="0"/>
-                <a:ea typeface="Times New Roman" pitchFamily="34" charset="-122"/>
-                <a:cs typeface="Times New Roman" pitchFamily="34" charset="-120"/>
-              </a:rPr>
-              <a:t>Sulphur, diamonds and copper are found in volcanic areas.</a:t>
+              <a:t>Basalt and pozzolana are quarried for roads, houses and cement. Volcanic areas also contain valuable minerals such as sulphur, copper and diamonds.</a:t>
             </a:r>
             <a:endParaRPr lang="en-US" sz="4000" dirty="0"/>
           </a:p>
@@ -16455,7 +16544,7 @@
         <p:spPr>
           <a:xfrm>
             <a:off x="365760" y="1783080"/>
-            <a:ext cx="4846320" cy="4617720"/>
+            <a:ext cx="6035040" cy="4617720"/>
           </a:xfrm>
           <a:prstGeom prst="rect">
             <a:avLst/>
@@ -16519,7 +16608,7 @@
                 <a:ea typeface="Times New Roman" pitchFamily="34" charset="-122"/>
                 <a:cs typeface="Times New Roman" pitchFamily="34" charset="-120"/>
               </a:rPr>
-              <a:t>Rivers of molten rock destroy houses, roads and farms, as in the 1999 eruption of Mount Cameroon, though people can usually escape.</a:t>
+              <a:t>Rivers of molten rock destroy houses, roads and farms in their path, as during the 1999 eruption of Mount Cameroon, which cut the road near Bakingili. They usually move slowly, so people can escape.</a:t>
             </a:r>
             <a:endParaRPr lang="en-US" sz="3200" dirty="0"/>
           </a:p>
@@ -16541,8 +16630,8 @@
         </p:blipFill>
         <p:spPr>
           <a:xfrm>
-            <a:off x="5349240" y="2071212"/>
-            <a:ext cx="6659575" cy="3693983"/>
+            <a:off x="6537960" y="2400897"/>
+            <a:ext cx="5470855" cy="3034615"/>
           </a:xfrm>
           <a:prstGeom prst="rect">
             <a:avLst/>
@@ -16557,8 +16646,8 @@
         </p:nvSpPr>
         <p:spPr>
           <a:xfrm>
-            <a:off x="5349240" y="6089904"/>
-            <a:ext cx="6659575" cy="347472"/>
+            <a:off x="6537960" y="6089904"/>
+            <a:ext cx="5470855" cy="347472"/>
           </a:xfrm>
           <a:prstGeom prst="rect">
             <a:avLst/>
@@ -16717,7 +16806,7 @@
         <p:spPr>
           <a:xfrm>
             <a:off x="0" y="658368"/>
-            <a:ext cx="3840480" cy="5833872"/>
+            <a:ext cx="2468880" cy="5833872"/>
           </a:xfrm>
           <a:prstGeom prst="rect">
             <a:avLst/>
@@ -16732,8 +16821,8 @@
         </p:nvSpPr>
         <p:spPr>
           <a:xfrm>
-            <a:off x="4069080" y="1005840"/>
-            <a:ext cx="7802575" cy="731520"/>
+            <a:off x="2697480" y="1005840"/>
+            <a:ext cx="9174175" cy="731520"/>
           </a:xfrm>
           <a:prstGeom prst="rect">
             <a:avLst/>
@@ -16773,8 +16862,8 @@
         </p:nvSpPr>
         <p:spPr>
           <a:xfrm>
-            <a:off x="4069080" y="1783080"/>
-            <a:ext cx="7802575" cy="4663440"/>
+            <a:off x="2697480" y="1783080"/>
+            <a:ext cx="9174175" cy="4663440"/>
           </a:xfrm>
           <a:prstGeom prst="rect">
             <a:avLst/>
@@ -16801,7 +16890,7 @@
                 <a:ea typeface="Times New Roman" pitchFamily="34" charset="-122"/>
                 <a:cs typeface="Times New Roman" pitchFamily="34" charset="-120"/>
               </a:rPr>
-              <a:t>Ash fall: </a:t>
+              <a:t>Ash falls and pyroclastic flows: </a:t>
             </a:r>
             <a:pPr algn="l" indent="0" marL="0">
               <a:spcAft>
@@ -16818,44 +16907,7 @@
                 <a:ea typeface="Times New Roman" pitchFamily="34" charset="-122"/>
                 <a:cs typeface="Times New Roman" pitchFamily="34" charset="-120"/>
               </a:rPr>
-              <a:t>Ash collapses roofs, ruins crops and damages engines and aircraft.</a:t>
-            </a:r>
-            <a:endParaRPr lang="en-US" sz="4000" dirty="0"/>
-          </a:p>
-          <a:p>
-            <a:pPr algn="l" indent="0" marL="0">
-              <a:spcAft>
-                <a:spcPts val="800"/>
-              </a:spcAft>
-              <a:buNone/>
-            </a:pPr>
-            <a:r>
-              <a:rPr lang="en-US" sz="4000" b="1" dirty="0">
-                <a:solidFill>
-                  <a:srgbClr val="111111"/>
-                </a:solidFill>
-                <a:latin typeface="Times New Roman" pitchFamily="34" charset="0"/>
-                <a:ea typeface="Times New Roman" pitchFamily="34" charset="-122"/>
-                <a:cs typeface="Times New Roman" pitchFamily="34" charset="-120"/>
-              </a:rPr>
-              <a:t>Pyroclastic flows: </a:t>
-            </a:r>
-            <a:pPr algn="l" indent="0" marL="0">
-              <a:spcAft>
-                <a:spcPts val="800"/>
-              </a:spcAft>
-              <a:buNone/>
-            </a:pPr>
-            <a:r>
-              <a:rPr lang="en-US" sz="4000" dirty="0">
-                <a:solidFill>
-                  <a:srgbClr val="111111"/>
-                </a:solidFill>
-                <a:latin typeface="Times New Roman" pitchFamily="34" charset="0"/>
-                <a:ea typeface="Times New Roman" pitchFamily="34" charset="-122"/>
-                <a:cs typeface="Times New Roman" pitchFamily="34" charset="-120"/>
-              </a:rPr>
-              <a:t>Clouds of hot ash, rock and gas (over 500 °C, over 100 km/h) destroy everything; they are the deadliest hazard.</a:t>
+              <a:t>Heavy ash collapses roofs, ruins crops and damages engines and aircraft. Pyroclastic flows, clouds of hot ash, rock and gas moving at over 100 km/h, destroy everything and are the deadliest hazard.</a:t>
             </a:r>
             <a:endParaRPr lang="en-US" sz="4000" dirty="0"/>
           </a:p>
@@ -17023,7 +17075,7 @@
         <p:spPr>
           <a:xfrm>
             <a:off x="365760" y="1783080"/>
-            <a:ext cx="4846320" cy="4617720"/>
+            <a:ext cx="6035040" cy="4617720"/>
           </a:xfrm>
           <a:prstGeom prst="rect">
             <a:avLst/>
@@ -17067,7 +17119,7 @@
                 <a:ea typeface="Times New Roman" pitchFamily="34" charset="-122"/>
                 <a:cs typeface="Times New Roman" pitchFamily="34" charset="-120"/>
               </a:rPr>
-              <a:t>Ash mixed with rain or melted snow forms fast mudflows in valleys.</a:t>
+              <a:t>Ash mixed with heavy rain or melted snow forms fast mudflows that rush down valleys. In 1985, a lahar from Nevado del Ruiz in Colombia buried the town of Armero and killed about 23,000 people.</a:t>
             </a:r>
             <a:endParaRPr lang="en-US" sz="3600" dirty="0"/>
           </a:p>
@@ -17089,8 +17141,8 @@
         </p:blipFill>
         <p:spPr>
           <a:xfrm>
-            <a:off x="5349240" y="2071212"/>
-            <a:ext cx="6659575" cy="3693983"/>
+            <a:off x="6537960" y="2400897"/>
+            <a:ext cx="5470855" cy="3034615"/>
           </a:xfrm>
           <a:prstGeom prst="rect">
             <a:avLst/>
@@ -17105,8 +17157,8 @@
         </p:nvSpPr>
         <p:spPr>
           <a:xfrm>
-            <a:off x="5349240" y="6089904"/>
-            <a:ext cx="6659575" cy="347472"/>
+            <a:off x="6537960" y="6089904"/>
+            <a:ext cx="5470855" cy="347472"/>
           </a:xfrm>
           <a:prstGeom prst="rect">
             <a:avLst/>
@@ -17298,7 +17350,7 @@
         <p:spPr>
           <a:xfrm>
             <a:off x="365760" y="1783080"/>
-            <a:ext cx="4846320" cy="4617720"/>
+            <a:ext cx="6035040" cy="4617720"/>
           </a:xfrm>
           <a:prstGeom prst="rect">
             <a:avLst/>
@@ -17342,7 +17394,7 @@
                 <a:ea typeface="Times New Roman" pitchFamily="34" charset="-122"/>
                 <a:cs typeface="Times New Roman" pitchFamily="34" charset="-120"/>
               </a:rPr>
-              <a:t>In 1986, Lake Nyos suddenly released carbon dioxide that killed about 1,700 people and thousands of cattle.</a:t>
+              <a:t>Volcanic gases can suffocate people and animals. In 1986, Lake Nyos suddenly released a cloud of carbon dioxide that killed about 1,700 people and thousands of cattle.</a:t>
             </a:r>
             <a:endParaRPr lang="en-US" sz="3600" dirty="0"/>
           </a:p>
@@ -17364,8 +17416,8 @@
         </p:blipFill>
         <p:spPr>
           <a:xfrm>
-            <a:off x="5349240" y="2071212"/>
-            <a:ext cx="6659575" cy="3693983"/>
+            <a:off x="6537960" y="2400897"/>
+            <a:ext cx="5470855" cy="3034615"/>
           </a:xfrm>
           <a:prstGeom prst="rect">
             <a:avLst/>
@@ -17380,8 +17432,8 @@
         </p:nvSpPr>
         <p:spPr>
           <a:xfrm>
-            <a:off x="5349240" y="6089904"/>
-            <a:ext cx="6659575" cy="347472"/>
+            <a:off x="6537960" y="6089904"/>
+            <a:ext cx="5470855" cy="347472"/>
           </a:xfrm>
           <a:prstGeom prst="rect">
             <a:avLst/>
@@ -17558,7 +17610,7 @@
                 <a:ea typeface="Times New Roman" pitchFamily="34" charset="-122"/>
                 <a:cs typeface="Times New Roman" pitchFamily="34" charset="-120"/>
               </a:rPr>
-              <a:t>3. Adaptation and Mitigation</a:t>
+              <a:t>3. Adaptation and Mitigation Strategies</a:t>
             </a:r>
             <a:endParaRPr lang="en-US" sz="3600" dirty="0"/>
           </a:p>
@@ -17573,7 +17625,7 @@
         <p:spPr>
           <a:xfrm>
             <a:off x="365760" y="1783080"/>
-            <a:ext cx="4846320" cy="4617720"/>
+            <a:ext cx="6035040" cy="4617720"/>
           </a:xfrm>
           <a:prstGeom prst="rect">
             <a:avLst/>
@@ -17592,7 +17644,7 @@
               <a:buNone/>
             </a:pPr>
             <a:r>
-              <a:rPr lang="en-US" sz="3200" i="1" dirty="0">
+              <a:rPr lang="en-US" sz="2800" i="1" dirty="0">
                 <a:solidFill>
                   <a:srgbClr val="111111"/>
                 </a:solidFill>
@@ -17602,7 +17654,7 @@
               </a:rPr>
               <a:t>People reduce volcanic risks with the following strategies:</a:t>
             </a:r>
-            <a:endParaRPr lang="en-US" sz="3200" dirty="0"/>
+            <a:endParaRPr lang="en-US" sz="2800" dirty="0"/>
           </a:p>
           <a:p>
             <a:pPr algn="l" indent="0" marL="0">
@@ -17612,7 +17664,7 @@
               <a:buNone/>
             </a:pPr>
             <a:r>
-              <a:rPr lang="en-US" sz="3200" b="1" dirty="0">
+              <a:rPr lang="en-US" sz="2800" b="1" dirty="0">
                 <a:solidFill>
                   <a:srgbClr val="111111"/>
                 </a:solidFill>
@@ -17620,7 +17672,7 @@
                 <a:ea typeface="Times New Roman" pitchFamily="34" charset="-122"/>
                 <a:cs typeface="Times New Roman" pitchFamily="34" charset="-120"/>
               </a:rPr>
-              <a:t>Monitoring: </a:t>
+              <a:t>Monitoring and warning: </a:t>
             </a:r>
             <a:pPr algn="l" indent="0" marL="0">
               <a:spcAft>
@@ -17629,7 +17681,7 @@
               <a:buNone/>
             </a:pPr>
             <a:r>
-              <a:rPr lang="en-US" sz="3200" dirty="0">
+              <a:rPr lang="en-US" sz="2800" dirty="0">
                 <a:solidFill>
                   <a:srgbClr val="111111"/>
                 </a:solidFill>
@@ -17637,9 +17689,9 @@
                 <a:ea typeface="Times New Roman" pitchFamily="34" charset="-122"/>
                 <a:cs typeface="Times New Roman" pitchFamily="34" charset="-120"/>
               </a:rPr>
-              <a:t>Seismometers detect small earthquakes, gas sensors measure emissions and GPS detects swelling of the volcano.</a:t>
-            </a:r>
-            <a:endParaRPr lang="en-US" sz="3200" dirty="0"/>
+              <a:t>Seismometers detect the small earthquakes caused by rising magma, sensors measure gases and satellites detect the swelling of the volcano. When an eruption is likely, warnings allow people to leave in time.</a:t>
+            </a:r>
+            <a:endParaRPr lang="en-US" sz="2800" dirty="0"/>
           </a:p>
         </p:txBody>
       </p:sp>
@@ -17659,8 +17711,8 @@
         </p:blipFill>
         <p:spPr>
           <a:xfrm>
-            <a:off x="5349240" y="2071212"/>
-            <a:ext cx="6659575" cy="3693983"/>
+            <a:off x="6537960" y="2400897"/>
+            <a:ext cx="5470855" cy="3034615"/>
           </a:xfrm>
           <a:prstGeom prst="rect">
             <a:avLst/>
@@ -17675,8 +17727,8 @@
         </p:nvSpPr>
         <p:spPr>
           <a:xfrm>
-            <a:off x="5349240" y="6089904"/>
-            <a:ext cx="6659575" cy="347472"/>
+            <a:off x="6537960" y="6089904"/>
+            <a:ext cx="5470855" cy="347472"/>
           </a:xfrm>
           <a:prstGeom prst="rect">
             <a:avLst/>
@@ -17877,7 +17929,7 @@
                 <a:ea typeface="Times New Roman" pitchFamily="34" charset="-122"/>
                 <a:cs typeface="Times New Roman" pitchFamily="34" charset="-120"/>
               </a:rPr>
-              <a:t>3. Adaptation and Mitigation</a:t>
+              <a:t>3. Adaptation and Mitigation Strategies</a:t>
             </a:r>
             <a:endParaRPr lang="en-US" sz="3600" dirty="0"/>
           </a:p>
@@ -17919,7 +17971,7 @@
                 <a:ea typeface="Times New Roman" pitchFamily="34" charset="-122"/>
                 <a:cs typeface="Times New Roman" pitchFamily="34" charset="-120"/>
               </a:rPr>
-              <a:t>Hazard mapping and zoning: </a:t>
+              <a:t>Hazard mapping and land-use planning: </a:t>
             </a:r>
             <a:pPr algn="l" indent="0" marL="0">
               <a:spcAft>
@@ -17936,44 +17988,7 @@
                 <a:ea typeface="Times New Roman" pitchFamily="34" charset="-122"/>
                 <a:cs typeface="Times New Roman" pitchFamily="34" charset="-120"/>
               </a:rPr>
-              <a:t>Maps show danger zones where houses, schools and hospitals should not be built.</a:t>
-            </a:r>
-            <a:endParaRPr lang="en-US" sz="4000" dirty="0"/>
-          </a:p>
-          <a:p>
-            <a:pPr algn="l" indent="0" marL="0">
-              <a:spcAft>
-                <a:spcPts val="800"/>
-              </a:spcAft>
-              <a:buNone/>
-            </a:pPr>
-            <a:r>
-              <a:rPr lang="en-US" sz="4000" b="1" dirty="0">
-                <a:solidFill>
-                  <a:srgbClr val="111111"/>
-                </a:solidFill>
-                <a:latin typeface="Times New Roman" pitchFamily="34" charset="0"/>
-                <a:ea typeface="Times New Roman" pitchFamily="34" charset="-122"/>
-                <a:cs typeface="Times New Roman" pitchFamily="34" charset="-120"/>
-              </a:rPr>
-              <a:t>Education and evacuation: </a:t>
-            </a:r>
-            <a:pPr algn="l" indent="0" marL="0">
-              <a:spcAft>
-                <a:spcPts val="800"/>
-              </a:spcAft>
-              <a:buNone/>
-            </a:pPr>
-            <a:r>
-              <a:rPr lang="en-US" sz="4000" dirty="0">
-                <a:solidFill>
-                  <a:srgbClr val="111111"/>
-                </a:solidFill>
-                <a:latin typeface="Times New Roman" pitchFamily="34" charset="0"/>
-                <a:ea typeface="Times New Roman" pitchFamily="34" charset="-122"/>
-                <a:cs typeface="Times New Roman" pitchFamily="34" charset="-120"/>
-              </a:rPr>
-              <a:t>People learn what to do, and evacuation routes and shelters are prepared.</a:t>
+              <a:t>Maps show the zones threatened by lava, ash, lahars and gases. Houses, schools and hospitals are then built outside the most dangerous zones.</a:t>
             </a:r>
             <a:endParaRPr lang="en-US" sz="4000" dirty="0"/>
           </a:p>
@@ -18091,109 +18106,9 @@
           </a:p>
         </p:txBody>
       </p:sp>
-      <p:sp>
-        <p:nvSpPr>
-          <p:cNvPr id="3" name="Text 1"/>
-          <p:cNvSpPr/>
-          <p:nvPr/>
-        </p:nvSpPr>
-        <p:spPr>
-          <a:xfrm>
-            <a:off x="365760" y="1005840"/>
-            <a:ext cx="11460175" cy="731520"/>
-          </a:xfrm>
-          <a:prstGeom prst="rect">
-            <a:avLst/>
-          </a:prstGeom>
-          <a:noFill/>
-          <a:ln/>
-        </p:spPr>
-        <p:txBody>
-          <a:bodyPr wrap="square" lIns="0" tIns="0" rIns="0" bIns="0" rtlCol="0" anchor="ctr">
-            <a:normAutofit/>
-          </a:bodyPr>
-          <a:lstStyle/>
-          <a:p>
-            <a:pPr algn="ctr" indent="0" marL="0">
-              <a:buNone/>
-            </a:pPr>
-            <a:r>
-              <a:rPr lang="en-US" sz="3600" b="1" dirty="0">
-                <a:solidFill>
-                  <a:srgbClr val="990011"/>
-                </a:solidFill>
-                <a:latin typeface="Times New Roman" pitchFamily="34" charset="0"/>
-                <a:ea typeface="Times New Roman" pitchFamily="34" charset="-122"/>
-                <a:cs typeface="Times New Roman" pitchFamily="34" charset="-120"/>
-              </a:rPr>
-              <a:t>3. Adaptation and Mitigation</a:t>
-            </a:r>
-            <a:endParaRPr lang="en-US" sz="3600" dirty="0"/>
-          </a:p>
-        </p:txBody>
-      </p:sp>
-      <p:sp>
-        <p:nvSpPr>
-          <p:cNvPr id="4" name="Text 2"/>
-          <p:cNvSpPr/>
-          <p:nvPr/>
-        </p:nvSpPr>
-        <p:spPr>
-          <a:xfrm>
-            <a:off x="365760" y="1783080"/>
-            <a:ext cx="4846320" cy="4617720"/>
-          </a:xfrm>
-          <a:prstGeom prst="rect">
-            <a:avLst/>
-          </a:prstGeom>
-          <a:noFill/>
-          <a:ln/>
-        </p:spPr>
-        <p:txBody>
-          <a:bodyPr wrap="square" lIns="0" tIns="0" rIns="0" bIns="0" rtlCol="0" anchor="t"/>
-          <a:lstStyle/>
-          <a:p>
-            <a:pPr algn="l" indent="0" marL="0">
-              <a:spcAft>
-                <a:spcPts val="800"/>
-              </a:spcAft>
-              <a:buNone/>
-            </a:pPr>
-            <a:r>
-              <a:rPr lang="en-US" sz="3600" b="1" dirty="0">
-                <a:solidFill>
-                  <a:srgbClr val="111111"/>
-                </a:solidFill>
-                <a:latin typeface="Times New Roman" pitchFamily="34" charset="0"/>
-                <a:ea typeface="Times New Roman" pitchFamily="34" charset="-122"/>
-                <a:cs typeface="Times New Roman" pitchFamily="34" charset="-120"/>
-              </a:rPr>
-              <a:t>Engineering: </a:t>
-            </a:r>
-            <a:pPr algn="l" indent="0" marL="0">
-              <a:spcAft>
-                <a:spcPts val="800"/>
-              </a:spcAft>
-              <a:buNone/>
-            </a:pPr>
-            <a:r>
-              <a:rPr lang="en-US" sz="3600" dirty="0">
-                <a:solidFill>
-                  <a:srgbClr val="111111"/>
-                </a:solidFill>
-                <a:latin typeface="Times New Roman" pitchFamily="34" charset="0"/>
-                <a:ea typeface="Times New Roman" pitchFamily="34" charset="-122"/>
-                <a:cs typeface="Times New Roman" pitchFamily="34" charset="-120"/>
-              </a:rPr>
-              <a:t>Strong steep roofs resist ash, barriers divert lava, and pipes now degas Lake Nyos.</a:t>
-            </a:r>
-            <a:endParaRPr lang="en-US" sz="3600" dirty="0"/>
-          </a:p>
-        </p:txBody>
-      </p:sp>
       <p:pic>
         <p:nvPicPr>
-          <p:cNvPr id="5" name="Image 0" descr="/home/claude/f4/img/v2/geo2_volc_man.png">    </p:cNvPr>
+          <p:cNvPr id="3" name="Image 0" descr="/home/claude/f4/img/minesec_sheet.png">    </p:cNvPr>
           <p:cNvPicPr>
             <a:picLocks noChangeAspect="1"/>
           </p:cNvPicPr>
@@ -18207,8 +18122,8 @@
         </p:blipFill>
         <p:spPr>
           <a:xfrm>
-            <a:off x="5349240" y="2617506"/>
-            <a:ext cx="6659575" cy="2601397"/>
+            <a:off x="0" y="658368"/>
+            <a:ext cx="5120640" cy="5833872"/>
           </a:xfrm>
           <a:prstGeom prst="rect">
             <a:avLst/>
@@ -18217,14 +18132,14 @@
       </p:pic>
       <p:sp>
         <p:nvSpPr>
-          <p:cNvPr id="6" name="Text 3"/>
+          <p:cNvPr id="4" name="Text 1"/>
           <p:cNvSpPr/>
           <p:nvPr/>
         </p:nvSpPr>
         <p:spPr>
           <a:xfrm>
-            <a:off x="5349240" y="6089904"/>
-            <a:ext cx="6659575" cy="347472"/>
+            <a:off x="5349240" y="1005840"/>
+            <a:ext cx="6522415" cy="731520"/>
           </a:xfrm>
           <a:prstGeom prst="rect">
             <a:avLst/>
@@ -18233,24 +18148,85 @@
           <a:ln/>
         </p:spPr>
         <p:txBody>
-          <a:bodyPr wrap="square" lIns="0" tIns="0" rIns="0" bIns="0" rtlCol="0" anchor="ctr"/>
+          <a:bodyPr wrap="square" lIns="0" tIns="0" rIns="0" bIns="0" rtlCol="0" anchor="ctr">
+            <a:normAutofit/>
+          </a:bodyPr>
           <a:lstStyle/>
           <a:p>
             <a:pPr algn="ctr" indent="0" marL="0">
               <a:buNone/>
             </a:pPr>
             <a:r>
-              <a:rPr lang="en-US" sz="1600" i="1" dirty="0">
-                <a:solidFill>
-                  <a:srgbClr val="555555"/>
+              <a:rPr lang="en-US" sz="3600" b="1" dirty="0">
+                <a:solidFill>
+                  <a:srgbClr val="990011"/>
                 </a:solidFill>
                 <a:latin typeface="Times New Roman" pitchFamily="34" charset="0"/>
                 <a:ea typeface="Times New Roman" pitchFamily="34" charset="-122"/>
                 <a:cs typeface="Times New Roman" pitchFamily="34" charset="-120"/>
               </a:rPr>
-              <a:t>Illustration: volcanoes and man</a:t>
-            </a:r>
-            <a:endParaRPr lang="en-US" sz="1600" dirty="0"/>
+              <a:t>3. Adaptation and Mitigation Strategies</a:t>
+            </a:r>
+            <a:endParaRPr lang="en-US" sz="3600" dirty="0"/>
+          </a:p>
+        </p:txBody>
+      </p:sp>
+      <p:sp>
+        <p:nvSpPr>
+          <p:cNvPr id="5" name="Text 2"/>
+          <p:cNvSpPr/>
+          <p:nvPr/>
+        </p:nvSpPr>
+        <p:spPr>
+          <a:xfrm>
+            <a:off x="5349240" y="1783080"/>
+            <a:ext cx="6522415" cy="4663440"/>
+          </a:xfrm>
+          <a:prstGeom prst="rect">
+            <a:avLst/>
+          </a:prstGeom>
+          <a:noFill/>
+          <a:ln/>
+        </p:spPr>
+        <p:txBody>
+          <a:bodyPr wrap="square" lIns="0" tIns="0" rIns="0" bIns="0" rtlCol="0" anchor="t"/>
+          <a:lstStyle/>
+          <a:p>
+            <a:pPr algn="l" indent="0" marL="0">
+              <a:spcAft>
+                <a:spcPts val="800"/>
+              </a:spcAft>
+              <a:buNone/>
+            </a:pPr>
+            <a:r>
+              <a:rPr lang="en-US" sz="4000" b="1" dirty="0">
+                <a:solidFill>
+                  <a:srgbClr val="111111"/>
+                </a:solidFill>
+                <a:latin typeface="Times New Roman" pitchFamily="34" charset="0"/>
+                <a:ea typeface="Times New Roman" pitchFamily="34" charset="-122"/>
+                <a:cs typeface="Times New Roman" pitchFamily="34" charset="-120"/>
+              </a:rPr>
+              <a:t>Education and evacuation plans: </a:t>
+            </a:r>
+            <a:pPr algn="l" indent="0" marL="0">
+              <a:spcAft>
+                <a:spcPts val="800"/>
+              </a:spcAft>
+              <a:buNone/>
+            </a:pPr>
+            <a:r>
+              <a:rPr lang="en-US" sz="4000" dirty="0">
+                <a:solidFill>
+                  <a:srgbClr val="111111"/>
+                </a:solidFill>
+                <a:latin typeface="Times New Roman" pitchFamily="34" charset="0"/>
+                <a:ea typeface="Times New Roman" pitchFamily="34" charset="-122"/>
+                <a:cs typeface="Times New Roman" pitchFamily="34" charset="-120"/>
+              </a:rPr>
+              <a:t>People learn the warning signs and what to do during an eruption. Evacuation routes and shelters are prepared in advance.</a:t>
+            </a:r>
+            <a:endParaRPr lang="en-US" sz="4000" dirty="0"/>
           </a:p>
         </p:txBody>
       </p:sp>
@@ -18360,15 +18336,115 @@
                 <a:ea typeface="Calibri" pitchFamily="34" charset="-122"/>
                 <a:cs typeface="Calibri" pitchFamily="34" charset="-120"/>
               </a:rPr>
-              <a:t>FORMATIVE EVALUATION</a:t>
+              <a:t>BOARD SUMMARY</a:t>
             </a:r>
             <a:endParaRPr lang="en-US" sz="1400" dirty="0"/>
+          </a:p>
+        </p:txBody>
+      </p:sp>
+      <p:sp>
+        <p:nvSpPr>
+          <p:cNvPr id="3" name="Text 1"/>
+          <p:cNvSpPr/>
+          <p:nvPr/>
+        </p:nvSpPr>
+        <p:spPr>
+          <a:xfrm>
+            <a:off x="365760" y="1005840"/>
+            <a:ext cx="11460175" cy="731520"/>
+          </a:xfrm>
+          <a:prstGeom prst="rect">
+            <a:avLst/>
+          </a:prstGeom>
+          <a:noFill/>
+          <a:ln/>
+        </p:spPr>
+        <p:txBody>
+          <a:bodyPr wrap="square" lIns="0" tIns="0" rIns="0" bIns="0" rtlCol="0" anchor="ctr">
+            <a:normAutofit/>
+          </a:bodyPr>
+          <a:lstStyle/>
+          <a:p>
+            <a:pPr algn="ctr" indent="0" marL="0">
+              <a:buNone/>
+            </a:pPr>
+            <a:r>
+              <a:rPr lang="en-US" sz="3600" b="1" dirty="0">
+                <a:solidFill>
+                  <a:srgbClr val="990011"/>
+                </a:solidFill>
+                <a:latin typeface="Times New Roman" pitchFamily="34" charset="0"/>
+                <a:ea typeface="Times New Roman" pitchFamily="34" charset="-122"/>
+                <a:cs typeface="Times New Roman" pitchFamily="34" charset="-120"/>
+              </a:rPr>
+              <a:t>3. Adaptation and Mitigation Strategies</a:t>
+            </a:r>
+            <a:endParaRPr lang="en-US" sz="3600" dirty="0"/>
+          </a:p>
+        </p:txBody>
+      </p:sp>
+      <p:sp>
+        <p:nvSpPr>
+          <p:cNvPr id="4" name="Text 2"/>
+          <p:cNvSpPr/>
+          <p:nvPr/>
+        </p:nvSpPr>
+        <p:spPr>
+          <a:xfrm>
+            <a:off x="365760" y="1783080"/>
+            <a:ext cx="6035040" cy="4617720"/>
+          </a:xfrm>
+          <a:prstGeom prst="rect">
+            <a:avLst/>
+          </a:prstGeom>
+          <a:noFill/>
+          <a:ln/>
+        </p:spPr>
+        <p:txBody>
+          <a:bodyPr wrap="square" lIns="0" tIns="0" rIns="0" bIns="0" rtlCol="0" anchor="t"/>
+          <a:lstStyle/>
+          <a:p>
+            <a:pPr algn="l" indent="0" marL="0">
+              <a:spcAft>
+                <a:spcPts val="800"/>
+              </a:spcAft>
+              <a:buNone/>
+            </a:pPr>
+            <a:r>
+              <a:rPr lang="en-US" sz="3400" b="1" dirty="0">
+                <a:solidFill>
+                  <a:srgbClr val="111111"/>
+                </a:solidFill>
+                <a:latin typeface="Times New Roman" pitchFamily="34" charset="0"/>
+                <a:ea typeface="Times New Roman" pitchFamily="34" charset="-122"/>
+                <a:cs typeface="Times New Roman" pitchFamily="34" charset="-120"/>
+              </a:rPr>
+              <a:t>Engineering measures: </a:t>
+            </a:r>
+            <a:pPr algn="l" indent="0" marL="0">
+              <a:spcAft>
+                <a:spcPts val="800"/>
+              </a:spcAft>
+              <a:buNone/>
+            </a:pPr>
+            <a:r>
+              <a:rPr lang="en-US" sz="3400" dirty="0">
+                <a:solidFill>
+                  <a:srgbClr val="111111"/>
+                </a:solidFill>
+                <a:latin typeface="Times New Roman" pitchFamily="34" charset="0"/>
+                <a:ea typeface="Times New Roman" pitchFamily="34" charset="-122"/>
+                <a:cs typeface="Times New Roman" pitchFamily="34" charset="-120"/>
+              </a:rPr>
+              <a:t>Strong, steep roofs resist the weight of ash, and barriers or channels divert lava and lahars. At Lake Nyos, pipes have been installed since 2001 to release the gas slowly and prevent another disaster.</a:t>
+            </a:r>
+            <a:endParaRPr lang="en-US" sz="3400" dirty="0"/>
           </a:p>
         </p:txBody>
       </p:sp>
       <p:pic>
         <p:nvPicPr>
-          <p:cNvPr id="3" name="Image 0" descr="/home/claude/f4/img/minesec_sheet.png">    </p:cNvPr>
+          <p:cNvPr id="5" name="Image 0" descr="/home/claude/f4/img/v2/geo2_volc_man.png">    </p:cNvPr>
           <p:cNvPicPr>
             <a:picLocks noChangeAspect="1"/>
           </p:cNvPicPr>
@@ -18382,8 +18458,8 @@
         </p:blipFill>
         <p:spPr>
           <a:xfrm>
-            <a:off x="0" y="658368"/>
-            <a:ext cx="5120640" cy="5833872"/>
+            <a:off x="6537960" y="2849678"/>
+            <a:ext cx="5470855" cy="2137053"/>
           </a:xfrm>
           <a:prstGeom prst="rect">
             <a:avLst/>
@@ -18392,14 +18468,14 @@
       </p:pic>
       <p:sp>
         <p:nvSpPr>
-          <p:cNvPr id="4" name="Text 1"/>
+          <p:cNvPr id="6" name="Text 3"/>
           <p:cNvSpPr/>
           <p:nvPr/>
         </p:nvSpPr>
         <p:spPr>
           <a:xfrm>
-            <a:off x="5349240" y="1005840"/>
-            <a:ext cx="6522415" cy="731520"/>
+            <a:off x="6537960" y="6089904"/>
+            <a:ext cx="5470855" cy="347472"/>
           </a:xfrm>
           <a:prstGeom prst="rect">
             <a:avLst/>
@@ -18408,68 +18484,24 @@
           <a:ln/>
         </p:spPr>
         <p:txBody>
-          <a:bodyPr wrap="square" lIns="0" tIns="0" rIns="0" bIns="0" rtlCol="0" anchor="ctr">
-            <a:normAutofit/>
-          </a:bodyPr>
+          <a:bodyPr wrap="square" lIns="0" tIns="0" rIns="0" bIns="0" rtlCol="0" anchor="ctr"/>
           <a:lstStyle/>
           <a:p>
             <a:pPr algn="ctr" indent="0" marL="0">
               <a:buNone/>
             </a:pPr>
             <a:r>
-              <a:rPr lang="en-US" sz="3600" b="1" dirty="0">
-                <a:solidFill>
-                  <a:srgbClr val="990011"/>
+              <a:rPr lang="en-US" sz="1600" i="1" dirty="0">
+                <a:solidFill>
+                  <a:srgbClr val="555555"/>
                 </a:solidFill>
                 <a:latin typeface="Times New Roman" pitchFamily="34" charset="0"/>
                 <a:ea typeface="Times New Roman" pitchFamily="34" charset="-122"/>
                 <a:cs typeface="Times New Roman" pitchFamily="34" charset="-120"/>
               </a:rPr>
-              <a:t>Evaluation 1</a:t>
-            </a:r>
-            <a:endParaRPr lang="en-US" sz="3600" dirty="0"/>
-          </a:p>
-        </p:txBody>
-      </p:sp>
-      <p:sp>
-        <p:nvSpPr>
-          <p:cNvPr id="5" name="Text 2"/>
-          <p:cNvSpPr/>
-          <p:nvPr/>
-        </p:nvSpPr>
-        <p:spPr>
-          <a:xfrm>
-            <a:off x="5349240" y="1783080"/>
-            <a:ext cx="6522415" cy="4663440"/>
-          </a:xfrm>
-          <a:prstGeom prst="rect">
-            <a:avLst/>
-          </a:prstGeom>
-          <a:noFill/>
-          <a:ln/>
-        </p:spPr>
-        <p:txBody>
-          <a:bodyPr wrap="square" lIns="0" tIns="0" rIns="0" bIns="0" rtlCol="0" anchor="t"/>
-          <a:lstStyle/>
-          <a:p>
-            <a:pPr algn="l" indent="0" marL="0">
-              <a:spcAft>
-                <a:spcPts val="800"/>
-              </a:spcAft>
-              <a:buNone/>
-            </a:pPr>
-            <a:r>
-              <a:rPr lang="en-US" sz="4000" dirty="0">
-                <a:solidFill>
-                  <a:srgbClr val="111111"/>
-                </a:solidFill>
-                <a:latin typeface="Times New Roman" pitchFamily="34" charset="0"/>
-                <a:ea typeface="Times New Roman" pitchFamily="34" charset="-122"/>
-                <a:cs typeface="Times New Roman" pitchFamily="34" charset="-120"/>
-              </a:rPr>
-              <a:t>Explain why a volcano is both a resource and a hazard.</a:t>
-            </a:r>
-            <a:endParaRPr lang="en-US" sz="4000" dirty="0"/>
+              <a:t>Illustration: volcanoes and man</a:t>
+            </a:r>
+            <a:endParaRPr lang="en-US" sz="1600" dirty="0"/>
           </a:p>
         </p:txBody>
       </p:sp>
@@ -18863,7 +18895,7 @@
                 <a:ea typeface="Times New Roman" pitchFamily="34" charset="-122"/>
                 <a:cs typeface="Times New Roman" pitchFamily="34" charset="-120"/>
               </a:rPr>
-              <a:t>Expected Answer</a:t>
+              <a:t>Evaluation 1</a:t>
             </a:r>
             <a:endParaRPr lang="en-US" sz="3600" dirty="0"/>
           </a:p>
@@ -18905,7 +18937,7 @@
                 <a:ea typeface="Times New Roman" pitchFamily="34" charset="-122"/>
                 <a:cs typeface="Times New Roman" pitchFamily="34" charset="-120"/>
               </a:rPr>
-              <a:t>It gives fertile soils, energy and tourism, but its eruptions and gases destroy property and kill people.</a:t>
+              <a:t>Explain why a volcano is both a resource and a hazard.</a:t>
             </a:r>
             <a:endParaRPr lang="en-US" sz="4000" dirty="0"/>
           </a:p>
@@ -19082,7 +19114,7 @@
                 <a:ea typeface="Times New Roman" pitchFamily="34" charset="-122"/>
                 <a:cs typeface="Times New Roman" pitchFamily="34" charset="-120"/>
               </a:rPr>
-              <a:t>Evaluation 2</a:t>
+              <a:t>Expected Answer</a:t>
             </a:r>
             <a:endParaRPr lang="en-US" sz="3600" dirty="0"/>
           </a:p>
@@ -19124,7 +19156,7 @@
                 <a:ea typeface="Times New Roman" pitchFamily="34" charset="-122"/>
                 <a:cs typeface="Times New Roman" pitchFamily="34" charset="-120"/>
               </a:rPr>
-              <a:t>Give two measures to reduce volcanic risks.</a:t>
+              <a:t>It gives fertile soils, energy and tourism, but its eruptions and gases destroy property and kill people.</a:t>
             </a:r>
             <a:endParaRPr lang="en-US" sz="4000" dirty="0"/>
           </a:p>
@@ -19301,7 +19333,7 @@
                 <a:ea typeface="Times New Roman" pitchFamily="34" charset="-122"/>
                 <a:cs typeface="Times New Roman" pitchFamily="34" charset="-120"/>
               </a:rPr>
-              <a:t>Expected Answer</a:t>
+              <a:t>Evaluation 2</a:t>
             </a:r>
             <a:endParaRPr lang="en-US" sz="3600" dirty="0"/>
           </a:p>
@@ -19343,7 +19375,7 @@
                 <a:ea typeface="Times New Roman" pitchFamily="34" charset="-122"/>
                 <a:cs typeface="Times New Roman" pitchFamily="34" charset="-120"/>
               </a:rPr>
-              <a:t>Monitoring, hazard maps and zoning, education and evacuation plans, engineering works (any two).</a:t>
+              <a:t>Give two measures to reduce volcanic risks.</a:t>
             </a:r>
             <a:endParaRPr lang="en-US" sz="4000" dirty="0"/>
           </a:p>
@@ -19455,7 +19487,7 @@
                 <a:ea typeface="Calibri" pitchFamily="34" charset="-122"/>
                 <a:cs typeface="Calibri" pitchFamily="34" charset="-120"/>
               </a:rPr>
-              <a:t>REMEDIATION</a:t>
+              <a:t>FORMATIVE EVALUATION</a:t>
             </a:r>
             <a:endParaRPr lang="en-US" sz="1400" dirty="0"/>
           </a:p>
@@ -19478,7 +19510,7 @@
         <p:spPr>
           <a:xfrm>
             <a:off x="0" y="658368"/>
-            <a:ext cx="2468880" cy="5833872"/>
+            <a:ext cx="5120640" cy="5833872"/>
           </a:xfrm>
           <a:prstGeom prst="rect">
             <a:avLst/>
@@ -19493,8 +19525,8 @@
         </p:nvSpPr>
         <p:spPr>
           <a:xfrm>
-            <a:off x="2697480" y="1005840"/>
-            <a:ext cx="9174175" cy="731520"/>
+            <a:off x="5349240" y="1005840"/>
+            <a:ext cx="6522415" cy="731520"/>
           </a:xfrm>
           <a:prstGeom prst="rect">
             <a:avLst/>
@@ -19520,7 +19552,7 @@
                 <a:ea typeface="Times New Roman" pitchFamily="34" charset="-122"/>
                 <a:cs typeface="Times New Roman" pitchFamily="34" charset="-120"/>
               </a:rPr>
-              <a:t>Remediation</a:t>
+              <a:t>Expected Answer</a:t>
             </a:r>
             <a:endParaRPr lang="en-US" sz="3600" dirty="0"/>
           </a:p>
@@ -19534,8 +19566,8 @@
         </p:nvSpPr>
         <p:spPr>
           <a:xfrm>
-            <a:off x="2697480" y="1783080"/>
-            <a:ext cx="9174175" cy="4663440"/>
+            <a:off x="5349240" y="1783080"/>
+            <a:ext cx="6522415" cy="4663440"/>
           </a:xfrm>
           <a:prstGeom prst="rect">
             <a:avLst/>
@@ -19554,7 +19586,7 @@
               <a:buNone/>
             </a:pPr>
             <a:r>
-              <a:rPr lang="en-US" sz="4000" b="1" dirty="0">
+              <a:rPr lang="en-US" sz="4000" dirty="0">
                 <a:solidFill>
                   <a:srgbClr val="111111"/>
                 </a:solidFill>
@@ -19562,73 +19594,7 @@
                 <a:ea typeface="Times New Roman" pitchFamily="34" charset="-122"/>
                 <a:cs typeface="Times New Roman" pitchFamily="34" charset="-120"/>
               </a:rPr>
-              <a:t>Fill in the blanks:</a:t>
-            </a:r>
-            <a:endParaRPr lang="en-US" sz="4000" dirty="0"/>
-          </a:p>
-          <a:p>
-            <a:pPr algn="l" marL="342900" indent="-342900">
-              <a:spcAft>
-                <a:spcPts val="800"/>
-              </a:spcAft>
-              <a:buSzPct val="100000"/>
-              <a:buFont typeface="+mj-lt"/>
-              <a:buAutoNum type="arabicPeriod" startAt="1"/>
-            </a:pPr>
-            <a:r>
-              <a:rPr lang="en-US" sz="4000" dirty="0">
-                <a:solidFill>
-                  <a:srgbClr val="111111"/>
-                </a:solidFill>
-                <a:latin typeface="Times New Roman" pitchFamily="34" charset="0"/>
-                <a:ea typeface="Times New Roman" pitchFamily="34" charset="-122"/>
-                <a:cs typeface="Times New Roman" pitchFamily="34" charset="-120"/>
-              </a:rPr>
-              <a:t>Volcanic soils are called ______.</a:t>
-            </a:r>
-            <a:endParaRPr lang="en-US" sz="4000" dirty="0"/>
-          </a:p>
-          <a:p>
-            <a:pPr algn="l" marL="342900" indent="-342900">
-              <a:spcAft>
-                <a:spcPts val="800"/>
-              </a:spcAft>
-              <a:buSzPct val="100000"/>
-              <a:buFont typeface="+mj-lt"/>
-              <a:buAutoNum type="arabicPeriod" startAt="1"/>
-            </a:pPr>
-            <a:r>
-              <a:rPr lang="en-US" sz="4000" dirty="0">
-                <a:solidFill>
-                  <a:srgbClr val="111111"/>
-                </a:solidFill>
-                <a:latin typeface="Times New Roman" pitchFamily="34" charset="0"/>
-                <a:ea typeface="Times New Roman" pitchFamily="34" charset="-122"/>
-                <a:cs typeface="Times New Roman" pitchFamily="34" charset="-120"/>
-              </a:rPr>
-              <a:t>The deadliest volcanic hazard is the ______ flow.</a:t>
-            </a:r>
-            <a:endParaRPr lang="en-US" sz="4000" dirty="0"/>
-          </a:p>
-          <a:p>
-            <a:pPr algn="l" marL="342900" indent="-342900">
-              <a:spcAft>
-                <a:spcPts val="800"/>
-              </a:spcAft>
-              <a:buSzPct val="100000"/>
-              <a:buFont typeface="+mj-lt"/>
-              <a:buAutoNum type="arabicPeriod" startAt="1"/>
-            </a:pPr>
-            <a:r>
-              <a:rPr lang="en-US" sz="4000" dirty="0">
-                <a:solidFill>
-                  <a:srgbClr val="111111"/>
-                </a:solidFill>
-                <a:latin typeface="Times New Roman" pitchFamily="34" charset="0"/>
-                <a:ea typeface="Times New Roman" pitchFamily="34" charset="-122"/>
-                <a:cs typeface="Times New Roman" pitchFamily="34" charset="-120"/>
-              </a:rPr>
-              <a:t>Lake Nyos released ______ in 1986.</a:t>
+              <a:t>Monitoring, hazard maps and zoning, education and evacuation plans, engineering works (any two).</a:t>
             </a:r>
             <a:endParaRPr lang="en-US" sz="4000" dirty="0"/>
           </a:p>
@@ -19740,7 +19706,7 @@
                 <a:ea typeface="Calibri" pitchFamily="34" charset="-122"/>
                 <a:cs typeface="Calibri" pitchFamily="34" charset="-120"/>
               </a:rPr>
-              <a:t>HOMEWORK</a:t>
+              <a:t>REMEDIATION</a:t>
             </a:r>
             <a:endParaRPr lang="en-US" sz="1400" dirty="0"/>
           </a:p>
@@ -19763,7 +19729,7 @@
         <p:spPr>
           <a:xfrm>
             <a:off x="0" y="658368"/>
-            <a:ext cx="5120640" cy="5833872"/>
+            <a:ext cx="2468880" cy="5833872"/>
           </a:xfrm>
           <a:prstGeom prst="rect">
             <a:avLst/>
@@ -19778,8 +19744,8 @@
         </p:nvSpPr>
         <p:spPr>
           <a:xfrm>
-            <a:off x="5349240" y="1005840"/>
-            <a:ext cx="6522415" cy="731520"/>
+            <a:off x="2697480" y="1005840"/>
+            <a:ext cx="9174175" cy="731520"/>
           </a:xfrm>
           <a:prstGeom prst="rect">
             <a:avLst/>
@@ -19805,7 +19771,7 @@
                 <a:ea typeface="Times New Roman" pitchFamily="34" charset="-122"/>
                 <a:cs typeface="Times New Roman" pitchFamily="34" charset="-120"/>
               </a:rPr>
-              <a:t>Homework</a:t>
+              <a:t>Remediation</a:t>
             </a:r>
             <a:endParaRPr lang="en-US" sz="3600" dirty="0"/>
           </a:p>
@@ -19819,8 +19785,8 @@
         </p:nvSpPr>
         <p:spPr>
           <a:xfrm>
-            <a:off x="5349240" y="1783080"/>
-            <a:ext cx="6522415" cy="4663440"/>
+            <a:off x="2697480" y="1783080"/>
+            <a:ext cx="9174175" cy="4663440"/>
           </a:xfrm>
           <a:prstGeom prst="rect">
             <a:avLst/>
@@ -19839,7 +19805,7 @@
               <a:buNone/>
             </a:pPr>
             <a:r>
-              <a:rPr lang="en-US" sz="4000" dirty="0">
+              <a:rPr lang="en-US" sz="4000" b="1" dirty="0">
                 <a:solidFill>
                   <a:srgbClr val="111111"/>
                 </a:solidFill>
@@ -19847,7 +19813,73 @@
                 <a:ea typeface="Times New Roman" pitchFamily="34" charset="-122"/>
                 <a:cs typeface="Times New Roman" pitchFamily="34" charset="-120"/>
               </a:rPr>
-              <a:t>Define the epicentre of an earthquake.</a:t>
+              <a:t>Fill in the blanks:</a:t>
+            </a:r>
+            <a:endParaRPr lang="en-US" sz="4000" dirty="0"/>
+          </a:p>
+          <a:p>
+            <a:pPr algn="l" marL="342900" indent="-342900">
+              <a:spcAft>
+                <a:spcPts val="800"/>
+              </a:spcAft>
+              <a:buSzPct val="100000"/>
+              <a:buFont typeface="+mj-lt"/>
+              <a:buAutoNum type="arabicPeriod" startAt="1"/>
+            </a:pPr>
+            <a:r>
+              <a:rPr lang="en-US" sz="4000" dirty="0">
+                <a:solidFill>
+                  <a:srgbClr val="111111"/>
+                </a:solidFill>
+                <a:latin typeface="Times New Roman" pitchFamily="34" charset="0"/>
+                <a:ea typeface="Times New Roman" pitchFamily="34" charset="-122"/>
+                <a:cs typeface="Times New Roman" pitchFamily="34" charset="-120"/>
+              </a:rPr>
+              <a:t>Volcanic soils are called ______.</a:t>
+            </a:r>
+            <a:endParaRPr lang="en-US" sz="4000" dirty="0"/>
+          </a:p>
+          <a:p>
+            <a:pPr algn="l" marL="342900" indent="-342900">
+              <a:spcAft>
+                <a:spcPts val="800"/>
+              </a:spcAft>
+              <a:buSzPct val="100000"/>
+              <a:buFont typeface="+mj-lt"/>
+              <a:buAutoNum type="arabicPeriod" startAt="1"/>
+            </a:pPr>
+            <a:r>
+              <a:rPr lang="en-US" sz="4000" dirty="0">
+                <a:solidFill>
+                  <a:srgbClr val="111111"/>
+                </a:solidFill>
+                <a:latin typeface="Times New Roman" pitchFamily="34" charset="0"/>
+                <a:ea typeface="Times New Roman" pitchFamily="34" charset="-122"/>
+                <a:cs typeface="Times New Roman" pitchFamily="34" charset="-120"/>
+              </a:rPr>
+              <a:t>The deadliest volcanic hazard is the ______ flow.</a:t>
+            </a:r>
+            <a:endParaRPr lang="en-US" sz="4000" dirty="0"/>
+          </a:p>
+          <a:p>
+            <a:pPr algn="l" marL="342900" indent="-342900">
+              <a:spcAft>
+                <a:spcPts val="800"/>
+              </a:spcAft>
+              <a:buSzPct val="100000"/>
+              <a:buFont typeface="+mj-lt"/>
+              <a:buAutoNum type="arabicPeriod" startAt="1"/>
+            </a:pPr>
+            <a:r>
+              <a:rPr lang="en-US" sz="4000" dirty="0">
+                <a:solidFill>
+                  <a:srgbClr val="111111"/>
+                </a:solidFill>
+                <a:latin typeface="Times New Roman" pitchFamily="34" charset="0"/>
+                <a:ea typeface="Times New Roman" pitchFamily="34" charset="-122"/>
+                <a:cs typeface="Times New Roman" pitchFamily="34" charset="-120"/>
+              </a:rPr>
+              <a:t>Lake Nyos released ______ in 1986.</a:t>
             </a:r>
             <a:endParaRPr lang="en-US" sz="4000" dirty="0"/>
           </a:p>
@@ -19959,7 +19991,7 @@
                 <a:ea typeface="Calibri" pitchFamily="34" charset="-122"/>
                 <a:cs typeface="Calibri" pitchFamily="34" charset="-120"/>
               </a:rPr>
-              <a:t>NEXT LESSON</a:t>
+              <a:t>HOMEWORK</a:t>
             </a:r>
             <a:endParaRPr lang="en-US" sz="1400" dirty="0"/>
           </a:p>
@@ -20024,7 +20056,7 @@
                 <a:ea typeface="Times New Roman" pitchFamily="34" charset="-122"/>
                 <a:cs typeface="Times New Roman" pitchFamily="34" charset="-120"/>
               </a:rPr>
-              <a:t>Next Lesson</a:t>
+              <a:t>Homework</a:t>
             </a:r>
             <a:endParaRPr lang="en-US" sz="3600" dirty="0"/>
           </a:p>
@@ -20048,17 +20080,17 @@
           <a:ln/>
         </p:spPr>
         <p:txBody>
-          <a:bodyPr wrap="square" lIns="0" tIns="0" rIns="0" bIns="0" rtlCol="0" anchor="ctr"/>
-          <a:lstStyle/>
-          <a:p>
-            <a:pPr algn="ctr" indent="0" marL="0">
+          <a:bodyPr wrap="square" lIns="0" tIns="0" rIns="0" bIns="0" rtlCol="0" anchor="t"/>
+          <a:lstStyle/>
+          <a:p>
+            <a:pPr algn="l" indent="0" marL="0">
               <a:spcAft>
                 <a:spcPts val="800"/>
               </a:spcAft>
               <a:buNone/>
             </a:pPr>
             <a:r>
-              <a:rPr lang="en-US" sz="4000" b="1" dirty="0">
+              <a:rPr lang="en-US" sz="4000" dirty="0">
                 <a:solidFill>
                   <a:srgbClr val="111111"/>
                 </a:solidFill>
@@ -20066,27 +20098,7 @@
                 <a:ea typeface="Times New Roman" pitchFamily="34" charset="-122"/>
                 <a:cs typeface="Times New Roman" pitchFamily="34" charset="-120"/>
               </a:rPr>
-              <a:t>Our next lesson will be on:</a:t>
-            </a:r>
-            <a:endParaRPr lang="en-US" sz="4000" dirty="0"/>
-          </a:p>
-          <a:p>
-            <a:pPr algn="ctr" indent="0" marL="0">
-              <a:spcAft>
-                <a:spcPts val="800"/>
-              </a:spcAft>
-              <a:buNone/>
-            </a:pPr>
-            <a:r>
-              <a:rPr lang="en-US" sz="4000" b="1" dirty="0">
-                <a:solidFill>
-                  <a:srgbClr val="990011"/>
-                </a:solidFill>
-                <a:latin typeface="Times New Roman" pitchFamily="34" charset="0"/>
-                <a:ea typeface="Times New Roman" pitchFamily="34" charset="-122"/>
-                <a:cs typeface="Times New Roman" pitchFamily="34" charset="-120"/>
-              </a:rPr>
-              <a:t>Lesson 8: Earthquakes and Man</a:t>
+              <a:t>Define the epicentre of an earthquake.</a:t>
             </a:r>
             <a:endParaRPr lang="en-US" sz="4000" dirty="0"/>
           </a:p>
@@ -20198,6 +20210,245 @@
                 <a:ea typeface="Calibri" pitchFamily="34" charset="-122"/>
                 <a:cs typeface="Calibri" pitchFamily="34" charset="-120"/>
               </a:rPr>
+              <a:t>NEXT LESSON</a:t>
+            </a:r>
+            <a:endParaRPr lang="en-US" sz="1400" dirty="0"/>
+          </a:p>
+        </p:txBody>
+      </p:sp>
+      <p:pic>
+        <p:nvPicPr>
+          <p:cNvPr id="3" name="Image 0" descr="/home/claude/f4/img/minesec_sheet.png">    </p:cNvPr>
+          <p:cNvPicPr>
+            <a:picLocks noChangeAspect="1"/>
+          </p:cNvPicPr>
+          <p:nvPr/>
+        </p:nvPicPr>
+        <p:blipFill>
+          <a:blip r:embed="rId1"/>
+          <a:stretch>
+            <a:fillRect/>
+          </a:stretch>
+        </p:blipFill>
+        <p:spPr>
+          <a:xfrm>
+            <a:off x="0" y="658368"/>
+            <a:ext cx="5120640" cy="5833872"/>
+          </a:xfrm>
+          <a:prstGeom prst="rect">
+            <a:avLst/>
+          </a:prstGeom>
+        </p:spPr>
+      </p:pic>
+      <p:sp>
+        <p:nvSpPr>
+          <p:cNvPr id="4" name="Text 1"/>
+          <p:cNvSpPr/>
+          <p:nvPr/>
+        </p:nvSpPr>
+        <p:spPr>
+          <a:xfrm>
+            <a:off x="5349240" y="1005840"/>
+            <a:ext cx="6522415" cy="731520"/>
+          </a:xfrm>
+          <a:prstGeom prst="rect">
+            <a:avLst/>
+          </a:prstGeom>
+          <a:noFill/>
+          <a:ln/>
+        </p:spPr>
+        <p:txBody>
+          <a:bodyPr wrap="square" lIns="0" tIns="0" rIns="0" bIns="0" rtlCol="0" anchor="ctr">
+            <a:normAutofit/>
+          </a:bodyPr>
+          <a:lstStyle/>
+          <a:p>
+            <a:pPr algn="ctr" indent="0" marL="0">
+              <a:buNone/>
+            </a:pPr>
+            <a:r>
+              <a:rPr lang="en-US" sz="3600" b="1" dirty="0">
+                <a:solidFill>
+                  <a:srgbClr val="990011"/>
+                </a:solidFill>
+                <a:latin typeface="Times New Roman" pitchFamily="34" charset="0"/>
+                <a:ea typeface="Times New Roman" pitchFamily="34" charset="-122"/>
+                <a:cs typeface="Times New Roman" pitchFamily="34" charset="-120"/>
+              </a:rPr>
+              <a:t>Next Lesson</a:t>
+            </a:r>
+            <a:endParaRPr lang="en-US" sz="3600" dirty="0"/>
+          </a:p>
+        </p:txBody>
+      </p:sp>
+      <p:sp>
+        <p:nvSpPr>
+          <p:cNvPr id="5" name="Text 2"/>
+          <p:cNvSpPr/>
+          <p:nvPr/>
+        </p:nvSpPr>
+        <p:spPr>
+          <a:xfrm>
+            <a:off x="5349240" y="1783080"/>
+            <a:ext cx="6522415" cy="4663440"/>
+          </a:xfrm>
+          <a:prstGeom prst="rect">
+            <a:avLst/>
+          </a:prstGeom>
+          <a:noFill/>
+          <a:ln/>
+        </p:spPr>
+        <p:txBody>
+          <a:bodyPr wrap="square" lIns="0" tIns="0" rIns="0" bIns="0" rtlCol="0" anchor="ctr"/>
+          <a:lstStyle/>
+          <a:p>
+            <a:pPr algn="ctr" indent="0" marL="0">
+              <a:spcAft>
+                <a:spcPts val="800"/>
+              </a:spcAft>
+              <a:buNone/>
+            </a:pPr>
+            <a:r>
+              <a:rPr lang="en-US" sz="4000" b="1" dirty="0">
+                <a:solidFill>
+                  <a:srgbClr val="111111"/>
+                </a:solidFill>
+                <a:latin typeface="Times New Roman" pitchFamily="34" charset="0"/>
+                <a:ea typeface="Times New Roman" pitchFamily="34" charset="-122"/>
+                <a:cs typeface="Times New Roman" pitchFamily="34" charset="-120"/>
+              </a:rPr>
+              <a:t>Our next lesson will be on:</a:t>
+            </a:r>
+            <a:endParaRPr lang="en-US" sz="4000" dirty="0"/>
+          </a:p>
+          <a:p>
+            <a:pPr algn="ctr" indent="0" marL="0">
+              <a:spcAft>
+                <a:spcPts val="800"/>
+              </a:spcAft>
+              <a:buNone/>
+            </a:pPr>
+            <a:r>
+              <a:rPr lang="en-US" sz="4000" b="1" dirty="0">
+                <a:solidFill>
+                  <a:srgbClr val="990011"/>
+                </a:solidFill>
+                <a:latin typeface="Times New Roman" pitchFamily="34" charset="0"/>
+                <a:ea typeface="Times New Roman" pitchFamily="34" charset="-122"/>
+                <a:cs typeface="Times New Roman" pitchFamily="34" charset="-120"/>
+              </a:rPr>
+              <a:t>Lesson 8: Earthquakes and Man</a:t>
+            </a:r>
+            <a:endParaRPr lang="en-US" sz="4000" dirty="0"/>
+          </a:p>
+        </p:txBody>
+      </p:sp>
+      <p:sp>
+        <p:nvSpPr>
+          <p:cNvPr id="25" name="Slide Number Placeholder 0"/>
+          <p:cNvSpPr>
+            <a:spLocks noGrp="1"/>
+          </p:cNvSpPr>
+          <p:nvPr>
+            <p:ph type="sldNum" sz="quarter" idx="4294967295"/>
+          </p:nvPr>
+        </p:nvSpPr>
+        <p:spPr>
+          <a:xfrm>
+            <a:off x="27432" y="91440"/>
+            <a:ext cx="585216" cy="475488"/>
+          </a:xfrm>
+          <a:prstGeom prst="rect">
+            <a:avLst/>
+          </a:prstGeom>
+          <a:extLst>
+            <a:ext uri="{C572A759-6A51-4108-AA02-DFA0A04FC94B}">
+              <ma14:wrappingTextBoxFlag xmlns:ma14="http://schemas.microsoft.com/office/mac/drawingml/2011/main" val="0"/>
+            </a:ext>
+          </a:extLst>
+        </p:spPr>
+        <p:txBody>
+          <a:bodyPr/>
+          <a:lstStyle>
+            <a:lvl1pPr>
+              <a:defRPr sz="2000">
+                <a:solidFill>
+                  <a:srgbClr val="FFFFFF"/>
+                </a:solidFill>
+                <a:latin typeface="Calibri"/>
+                <a:ea typeface="Calibri"/>
+                <a:cs typeface="Calibri"/>
+              </a:defRPr>
+            </a:lvl1pPr>
+          </a:lstStyle>
+          <a:p>
+            <a:pPr algn="ctr"/>
+            <a:fld id="{F7021451-1387-4CA6-816F-3879F97B5CBC}" type="slidenum">
+              <a:rPr b="1" lang="en-US"/>
+              <a:t>56</a:t>
+            </a:fld>
+            <a:endParaRPr lang="en-US"/>
+          </a:p>
+        </p:txBody>
+      </p:sp>
+    </p:spTree>
+  </p:cSld>
+  <p:clrMapOvr>
+    <a:masterClrMapping/>
+  </p:clrMapOvr>
+</p:sld>
+</file>
+
+<file path=ppt/slides/slide57.xml><?xml version="1.0" encoding="utf-8"?>
+<p:sld xmlns:a="http://schemas.openxmlformats.org/drawingml/2006/main" xmlns:r="http://schemas.openxmlformats.org/officeDocument/2006/relationships" xmlns:p="http://schemas.openxmlformats.org/presentationml/2006/main">
+  <p:cSld name="Slide 57">
+    <p:spTree>
+      <p:nvGrpSpPr>
+        <p:cNvPr id="1" name=""/>
+        <p:cNvGrpSpPr/>
+        <p:nvPr/>
+      </p:nvGrpSpPr>
+      <p:grpSpPr>
+        <a:xfrm>
+          <a:off x="0" y="0"/>
+          <a:ext cx="0" cy="0"/>
+          <a:chOff x="0" y="0"/>
+          <a:chExt cx="0" cy="0"/>
+        </a:xfrm>
+      </p:grpSpPr>
+      <p:sp>
+        <p:nvSpPr>
+          <p:cNvPr id="2" name="Text 0"/>
+          <p:cNvSpPr/>
+          <p:nvPr/>
+        </p:nvSpPr>
+        <p:spPr>
+          <a:xfrm>
+            <a:off x="457200" y="713232"/>
+            <a:ext cx="11368735" cy="274320"/>
+          </a:xfrm>
+          <a:prstGeom prst="rect">
+            <a:avLst/>
+          </a:prstGeom>
+          <a:noFill/>
+          <a:ln/>
+        </p:spPr>
+        <p:txBody>
+          <a:bodyPr wrap="square" lIns="0" tIns="0" rIns="0" bIns="0" rtlCol="0" anchor="ctr"/>
+          <a:lstStyle/>
+          <a:p>
+            <a:pPr algn="r" indent="0" marL="0">
+              <a:buNone/>
+            </a:pPr>
+            <a:r>
+              <a:rPr lang="en-US" sz="1400" b="1" dirty="0">
+                <a:solidFill>
+                  <a:srgbClr val="1C3F6E"/>
+                </a:solidFill>
+                <a:latin typeface="Calibri" pitchFamily="34" charset="0"/>
+                <a:ea typeface="Calibri" pitchFamily="34" charset="-122"/>
+                <a:cs typeface="Calibri" pitchFamily="34" charset="-120"/>
+              </a:rPr>
               <a:t>BILINGUAL GAME</a:t>
             </a:r>
             <a:endParaRPr lang="en-US" sz="1400" dirty="0"/>
@@ -20245,7 +20496,7 @@
       </p:sp>
       <p:graphicFrame>
         <p:nvGraphicFramePr>
-          <p:cNvPr id="57" name="Table 0"/>
+          <p:cNvPr id="58" name="Table 0"/>
           <p:cNvGraphicFramePr>
             <a:graphicFrameLocks noGrp="1"/>
           </p:cNvGraphicFramePr>
@@ -21281,7 +21532,7 @@
             <a:pPr algn="ctr"/>
             <a:fld id="{F7021451-1387-4CA6-816F-3879F97B5CBC}" type="slidenum">
               <a:rPr b="1" lang="en-US"/>
-              <a:t>56</a:t>
+              <a:t>57</a:t>
             </a:fld>
             <a:endParaRPr lang="en-US"/>
           </a:p>
@@ -21295,9 +21546,9 @@
 </p:sld>
 </file>
 
-<file path=ppt/slides/slide57.xml><?xml version="1.0" encoding="utf-8"?>
+<file path=ppt/slides/slide58.xml><?xml version="1.0" encoding="utf-8"?>
 <p:sld xmlns:a="http://schemas.openxmlformats.org/drawingml/2006/main" xmlns:r="http://schemas.openxmlformats.org/officeDocument/2006/relationships" xmlns:p="http://schemas.openxmlformats.org/presentationml/2006/main">
-  <p:cSld name="Slide 57">
+  <p:cSld name="Slide 58">
     <p:spTree>
       <p:nvGrpSpPr>
         <p:cNvPr id="1" name=""/>
@@ -21392,7 +21643,7 @@
       </p:sp>
       <p:graphicFrame>
         <p:nvGraphicFramePr>
-          <p:cNvPr id="58" name="Table 0"/>
+          <p:cNvPr id="59" name="Table 0"/>
           <p:cNvGraphicFramePr>
             <a:graphicFrameLocks noGrp="1"/>
           </p:cNvGraphicFramePr>
@@ -22014,7 +22265,7 @@
             <a:pPr algn="ctr"/>
             <a:fld id="{F7021451-1387-4CA6-816F-3879F97B5CBC}" type="slidenum">
               <a:rPr b="1" lang="en-US"/>
-              <a:t>57</a:t>
+              <a:t>58</a:t>
             </a:fld>
             <a:endParaRPr lang="en-US"/>
           </a:p>
@@ -22028,9 +22279,9 @@
 </p:sld>
 </file>
 
-<file path=ppt/slides/slide58.xml><?xml version="1.0" encoding="utf-8"?>
+<file path=ppt/slides/slide59.xml><?xml version="1.0" encoding="utf-8"?>
 <p:sld xmlns:a="http://schemas.openxmlformats.org/drawingml/2006/main" xmlns:r="http://schemas.openxmlformats.org/officeDocument/2006/relationships" xmlns:p="http://schemas.openxmlformats.org/presentationml/2006/main">
-  <p:cSld name="Slide 58">
+  <p:cSld name="Slide 59">
     <p:spTree>
       <p:nvGrpSpPr>
         <p:cNvPr id="1" name=""/>
@@ -22125,7 +22376,7 @@
       </p:sp>
       <p:graphicFrame>
         <p:nvGraphicFramePr>
-          <p:cNvPr id="59" name="Table 0"/>
+          <p:cNvPr id="60" name="Table 0"/>
           <p:cNvGraphicFramePr>
             <a:graphicFrameLocks noGrp="1"/>
           </p:cNvGraphicFramePr>
@@ -22235,7 +22486,7 @@
                           <a:ea typeface="Calibri" pitchFamily="34" charset="-122"/>
                           <a:cs typeface="Calibri" pitchFamily="34" charset="-120"/>
                         </a:rPr>
-                        <a:t>DEFINITIONS; Volcanoes as a Resource; Volcanoes as a Hazard; Adaptation and Mitigation.</a:t>
+                        <a:t>DEFINITIONS; Volcanoes as a Resource; Volcanoes as a Hazard; Adaptation and Mitigation Strategies.</a:t>
                       </a:r>
                       <a:endParaRPr lang="en-US" sz="1600" dirty="0">
                         <a:latin typeface="Calibri" charset="0"/>
@@ -22885,331 +23136,6 @@
             <a:pPr algn="ctr"/>
             <a:fld id="{F7021451-1387-4CA6-816F-3879F97B5CBC}" type="slidenum">
               <a:rPr b="1" lang="en-US"/>
-              <a:t>58</a:t>
-            </a:fld>
-            <a:endParaRPr lang="en-US"/>
-          </a:p>
-        </p:txBody>
-      </p:sp>
-    </p:spTree>
-  </p:cSld>
-  <p:clrMapOvr>
-    <a:masterClrMapping/>
-  </p:clrMapOvr>
-</p:sld>
-</file>
-
-<file path=ppt/slides/slide59.xml><?xml version="1.0" encoding="utf-8"?>
-<p:sld xmlns:a="http://schemas.openxmlformats.org/drawingml/2006/main" xmlns:r="http://schemas.openxmlformats.org/officeDocument/2006/relationships" xmlns:p="http://schemas.openxmlformats.org/presentationml/2006/main">
-  <p:cSld name="Slide 59">
-    <p:spTree>
-      <p:nvGrpSpPr>
-        <p:cNvPr id="1" name=""/>
-        <p:cNvGrpSpPr/>
-        <p:nvPr/>
-      </p:nvGrpSpPr>
-      <p:grpSpPr>
-        <a:xfrm>
-          <a:off x="0" y="0"/>
-          <a:ext cx="0" cy="0"/>
-          <a:chOff x="0" y="0"/>
-          <a:chExt cx="0" cy="0"/>
-        </a:xfrm>
-      </p:grpSpPr>
-      <p:sp>
-        <p:nvSpPr>
-          <p:cNvPr id="2" name="Text 0"/>
-          <p:cNvSpPr/>
-          <p:nvPr/>
-        </p:nvSpPr>
-        <p:spPr>
-          <a:xfrm>
-            <a:off x="457200" y="713232"/>
-            <a:ext cx="11368735" cy="274320"/>
-          </a:xfrm>
-          <a:prstGeom prst="rect">
-            <a:avLst/>
-          </a:prstGeom>
-          <a:noFill/>
-          <a:ln/>
-        </p:spPr>
-        <p:txBody>
-          <a:bodyPr wrap="square" lIns="0" tIns="0" rIns="0" bIns="0" rtlCol="0" anchor="ctr"/>
-          <a:lstStyle/>
-          <a:p>
-            <a:pPr algn="r" indent="0" marL="0">
-              <a:buNone/>
-            </a:pPr>
-            <a:r>
-              <a:rPr lang="en-US" sz="1400" b="1" dirty="0">
-                <a:solidFill>
-                  <a:srgbClr val="1C3F6E"/>
-                </a:solidFill>
-                <a:latin typeface="Calibri" pitchFamily="34" charset="0"/>
-                <a:ea typeface="Calibri" pitchFamily="34" charset="-122"/>
-                <a:cs typeface="Calibri" pitchFamily="34" charset="-120"/>
-              </a:rPr>
-              <a:t>TEACHER'S NOTE</a:t>
-            </a:r>
-            <a:endParaRPr lang="en-US" sz="1400" dirty="0"/>
-          </a:p>
-        </p:txBody>
-      </p:sp>
-      <p:pic>
-        <p:nvPicPr>
-          <p:cNvPr id="3" name="Image 0" descr="/home/claude/f4/img/minesec_sheet.png">    </p:cNvPr>
-          <p:cNvPicPr>
-            <a:picLocks noChangeAspect="1"/>
-          </p:cNvPicPr>
-          <p:nvPr/>
-        </p:nvPicPr>
-        <p:blipFill>
-          <a:blip r:embed="rId1"/>
-          <a:stretch>
-            <a:fillRect/>
-          </a:stretch>
-        </p:blipFill>
-        <p:spPr>
-          <a:xfrm>
-            <a:off x="0" y="658368"/>
-            <a:ext cx="3840480" cy="5833872"/>
-          </a:xfrm>
-          <a:prstGeom prst="rect">
-            <a:avLst/>
-          </a:prstGeom>
-        </p:spPr>
-      </p:pic>
-      <p:sp>
-        <p:nvSpPr>
-          <p:cNvPr id="4" name="Text 1"/>
-          <p:cNvSpPr/>
-          <p:nvPr/>
-        </p:nvSpPr>
-        <p:spPr>
-          <a:xfrm>
-            <a:off x="4069080" y="1005840"/>
-            <a:ext cx="7802575" cy="731520"/>
-          </a:xfrm>
-          <a:prstGeom prst="rect">
-            <a:avLst/>
-          </a:prstGeom>
-          <a:noFill/>
-          <a:ln/>
-        </p:spPr>
-        <p:txBody>
-          <a:bodyPr wrap="square" lIns="0" tIns="0" rIns="0" bIns="0" rtlCol="0" anchor="ctr">
-            <a:normAutofit/>
-          </a:bodyPr>
-          <a:lstStyle/>
-          <a:p>
-            <a:pPr algn="ctr" indent="0" marL="0">
-              <a:buNone/>
-            </a:pPr>
-            <a:r>
-              <a:rPr lang="en-US" sz="3600" b="1" dirty="0">
-                <a:solidFill>
-                  <a:srgbClr val="990011"/>
-                </a:solidFill>
-                <a:latin typeface="Times New Roman" pitchFamily="34" charset="0"/>
-                <a:ea typeface="Times New Roman" pitchFamily="34" charset="-122"/>
-                <a:cs typeface="Times New Roman" pitchFamily="34" charset="-120"/>
-              </a:rPr>
-              <a:t>Teacher's Note</a:t>
-            </a:r>
-            <a:endParaRPr lang="en-US" sz="3600" dirty="0"/>
-          </a:p>
-        </p:txBody>
-      </p:sp>
-      <p:sp>
-        <p:nvSpPr>
-          <p:cNvPr id="5" name="Text 2"/>
-          <p:cNvSpPr/>
-          <p:nvPr/>
-        </p:nvSpPr>
-        <p:spPr>
-          <a:xfrm>
-            <a:off x="4069080" y="1783080"/>
-            <a:ext cx="7802575" cy="4663440"/>
-          </a:xfrm>
-          <a:prstGeom prst="rect">
-            <a:avLst/>
-          </a:prstGeom>
-          <a:noFill/>
-          <a:ln/>
-        </p:spPr>
-        <p:txBody>
-          <a:bodyPr wrap="square" lIns="0" tIns="0" rIns="0" bIns="0" rtlCol="0" anchor="t"/>
-          <a:lstStyle/>
-          <a:p>
-            <a:pPr algn="l" marL="342900" indent="-342900">
-              <a:spcAft>
-                <a:spcPts val="800"/>
-              </a:spcAft>
-              <a:buSzPct val="100000"/>
-              <a:buChar char="•"/>
-            </a:pPr>
-            <a:r>
-              <a:rPr lang="en-US" sz="2000" dirty="0">
-                <a:solidFill>
-                  <a:srgbClr val="111111"/>
-                </a:solidFill>
-                <a:latin typeface="Calibri" pitchFamily="34" charset="0"/>
-                <a:ea typeface="Calibri" pitchFamily="34" charset="-122"/>
-                <a:cs typeface="Calibri" pitchFamily="34" charset="-120"/>
-              </a:rPr>
-              <a:t>Timing: Homework correction, plan, objectives 8 min | Recall, situation, action 10 min | 5 activities 30 min | Board summary (copying) 30 min | Evaluation, remediation 10 min | Homework, next lesson 5 min | Logbook 7 min</a:t>
-            </a:r>
-            <a:endParaRPr lang="en-US" sz="2000" dirty="0"/>
-          </a:p>
-          <a:p>
-            <a:pPr algn="l" marL="342900" indent="-342900">
-              <a:spcAft>
-                <a:spcPts val="800"/>
-              </a:spcAft>
-              <a:buSzPct val="100000"/>
-              <a:buChar char="•"/>
-            </a:pPr>
-            <a:r>
-              <a:rPr lang="en-US" sz="2000" dirty="0">
-                <a:solidFill>
-                  <a:srgbClr val="111111"/>
-                </a:solidFill>
-                <a:latin typeface="Calibri" pitchFamily="34" charset="0"/>
-                <a:ea typeface="Calibri" pitchFamily="34" charset="-122"/>
-                <a:cs typeface="Calibri" pitchFamily="34" charset="-120"/>
-              </a:rPr>
-              <a:t>Without the projector (Activity 1): name crops of the South-West.</a:t>
-            </a:r>
-            <a:endParaRPr lang="en-US" sz="2000" dirty="0"/>
-          </a:p>
-          <a:p>
-            <a:pPr algn="l" marL="342900" indent="-342900">
-              <a:spcAft>
-                <a:spcPts val="800"/>
-              </a:spcAft>
-              <a:buSzPct val="100000"/>
-              <a:buChar char="•"/>
-            </a:pPr>
-            <a:r>
-              <a:rPr lang="en-US" sz="2000" dirty="0">
-                <a:solidFill>
-                  <a:srgbClr val="111111"/>
-                </a:solidFill>
-                <a:latin typeface="Calibri" pitchFamily="34" charset="0"/>
-                <a:ea typeface="Calibri" pitchFamily="34" charset="-122"/>
-                <a:cs typeface="Calibri" pitchFamily="34" charset="-120"/>
-              </a:rPr>
-              <a:t>Without the projector (Activity 2): describe a kettle producing steam.</a:t>
-            </a:r>
-            <a:endParaRPr lang="en-US" sz="2000" dirty="0"/>
-          </a:p>
-          <a:p>
-            <a:pPr algn="l" marL="342900" indent="-342900">
-              <a:spcAft>
-                <a:spcPts val="800"/>
-              </a:spcAft>
-              <a:buSzPct val="100000"/>
-              <a:buChar char="•"/>
-            </a:pPr>
-            <a:r>
-              <a:rPr lang="en-US" sz="2000" dirty="0">
-                <a:solidFill>
-                  <a:srgbClr val="111111"/>
-                </a:solidFill>
-                <a:latin typeface="Calibri" pitchFamily="34" charset="0"/>
-                <a:ea typeface="Calibri" pitchFamily="34" charset="-122"/>
-                <a:cs typeface="Calibri" pitchFamily="34" charset="-120"/>
-              </a:rPr>
-              <a:t>Without the projector (Activity 3): list volcanic hazards.</a:t>
-            </a:r>
-            <a:endParaRPr lang="en-US" sz="2000" dirty="0"/>
-          </a:p>
-          <a:p>
-            <a:pPr algn="l" marL="342900" indent="-342900">
-              <a:spcAft>
-                <a:spcPts val="800"/>
-              </a:spcAft>
-              <a:buSzPct val="100000"/>
-              <a:buChar char="•"/>
-            </a:pPr>
-            <a:r>
-              <a:rPr lang="en-US" sz="2000" dirty="0">
-                <a:solidFill>
-                  <a:srgbClr val="111111"/>
-                </a:solidFill>
-                <a:latin typeface="Calibri" pitchFamily="34" charset="0"/>
-                <a:ea typeface="Calibri" pitchFamily="34" charset="-122"/>
-                <a:cs typeface="Calibri" pitchFamily="34" charset="-120"/>
-              </a:rPr>
-              <a:t>Without the projector (Activity 4): locate Nyos in the North-West.</a:t>
-            </a:r>
-            <a:endParaRPr lang="en-US" sz="2000" dirty="0"/>
-          </a:p>
-          <a:p>
-            <a:pPr algn="l" marL="342900" indent="-342900">
-              <a:spcAft>
-                <a:spcPts val="800"/>
-              </a:spcAft>
-              <a:buSzPct val="100000"/>
-              <a:buChar char="•"/>
-            </a:pPr>
-            <a:r>
-              <a:rPr lang="en-US" sz="2000" dirty="0">
-                <a:solidFill>
-                  <a:srgbClr val="111111"/>
-                </a:solidFill>
-                <a:latin typeface="Calibri" pitchFamily="34" charset="0"/>
-                <a:ea typeface="Calibri" pitchFamily="34" charset="-122"/>
-                <a:cs typeface="Calibri" pitchFamily="34" charset="-120"/>
-              </a:rPr>
-              <a:t>Without the projector (Activity 5): describe an evacuation plan.</a:t>
-            </a:r>
-            <a:endParaRPr lang="en-US" sz="2000" dirty="0"/>
-          </a:p>
-        </p:txBody>
-      </p:sp>
-      <p:sp>
-        <p:nvSpPr>
-          <p:cNvPr id="25" name="Slide Number Placeholder 0"/>
-          <p:cNvSpPr>
-            <a:spLocks noGrp="1"/>
-          </p:cNvSpPr>
-          <p:nvPr>
-            <p:ph type="sldNum" sz="quarter" idx="4294967295"/>
-          </p:nvPr>
-        </p:nvSpPr>
-        <p:spPr>
-          <a:xfrm>
-            <a:off x="27432" y="91440"/>
-            <a:ext cx="585216" cy="475488"/>
-          </a:xfrm>
-          <a:prstGeom prst="rect">
-            <a:avLst/>
-          </a:prstGeom>
-          <a:extLst>
-            <a:ext uri="{C572A759-6A51-4108-AA02-DFA0A04FC94B}">
-              <ma14:wrappingTextBoxFlag xmlns:ma14="http://schemas.microsoft.com/office/mac/drawingml/2011/main" val="0"/>
-            </a:ext>
-          </a:extLst>
-        </p:spPr>
-        <p:txBody>
-          <a:bodyPr/>
-          <a:lstStyle>
-            <a:lvl1pPr>
-              <a:defRPr sz="2000">
-                <a:solidFill>
-                  <a:srgbClr val="FFFFFF"/>
-                </a:solidFill>
-                <a:latin typeface="Calibri"/>
-                <a:ea typeface="Calibri"/>
-                <a:cs typeface="Calibri"/>
-              </a:defRPr>
-            </a:lvl1pPr>
-          </a:lstStyle>
-          <a:p>
-            <a:pPr algn="ctr"/>
-            <a:fld id="{F7021451-1387-4CA6-816F-3879F97B5CBC}" type="slidenum">
-              <a:rPr b="1" lang="en-US"/>
               <a:t>59</a:t>
             </a:fld>
             <a:endParaRPr lang="en-US"/>
@@ -23605,7 +23531,7 @@
                 <a:ea typeface="Calibri" pitchFamily="34" charset="-122"/>
                 <a:cs typeface="Calibri" pitchFamily="34" charset="-120"/>
               </a:rPr>
-              <a:t>REFERENCES</a:t>
+              <a:t>TEACHER'S NOTE</a:t>
             </a:r>
             <a:endParaRPr lang="en-US" sz="1400" dirty="0"/>
           </a:p>
@@ -23628,7 +23554,7 @@
         <p:spPr>
           <a:xfrm>
             <a:off x="0" y="658368"/>
-            <a:ext cx="1463040" cy="5833872"/>
+            <a:ext cx="3840480" cy="5833872"/>
           </a:xfrm>
           <a:prstGeom prst="rect">
             <a:avLst/>
@@ -23643,8 +23569,8 @@
         </p:nvSpPr>
         <p:spPr>
           <a:xfrm>
-            <a:off x="1691640" y="1005840"/>
-            <a:ext cx="10180015" cy="731520"/>
+            <a:off x="4069080" y="1005840"/>
+            <a:ext cx="7802575" cy="731520"/>
           </a:xfrm>
           <a:prstGeom prst="rect">
             <a:avLst/>
@@ -23670,7 +23596,7 @@
                 <a:ea typeface="Times New Roman" pitchFamily="34" charset="-122"/>
                 <a:cs typeface="Times New Roman" pitchFamily="34" charset="-120"/>
               </a:rPr>
-              <a:t>References</a:t>
+              <a:t>Teacher's Note</a:t>
             </a:r>
             <a:endParaRPr lang="en-US" sz="3600" dirty="0"/>
           </a:p>
@@ -23684,8 +23610,8 @@
         </p:nvSpPr>
         <p:spPr>
           <a:xfrm>
-            <a:off x="1691640" y="1783080"/>
-            <a:ext cx="10180015" cy="4663440"/>
+            <a:off x="4069080" y="1783080"/>
+            <a:ext cx="7802575" cy="4663440"/>
           </a:xfrm>
           <a:prstGeom prst="rect">
             <a:avLst/>
@@ -23705,7 +23631,7 @@
               <a:buChar char="•"/>
             </a:pPr>
             <a:r>
-              <a:rPr lang="en-US" sz="1800" dirty="0">
+              <a:rPr lang="en-US" sz="2000" dirty="0">
                 <a:solidFill>
                   <a:srgbClr val="111111"/>
                 </a:solidFill>
@@ -23713,9 +23639,9 @@
                 <a:ea typeface="Calibri" pitchFamily="34" charset="-122"/>
                 <a:cs typeface="Calibri" pitchFamily="34" charset="-120"/>
               </a:rPr>
-              <a:t>Geography Syllabus for Sixth Forms (Lower and Upper Sixth), MINESEC, 2019 — Module 2 (Geomorphology).</a:t>
-            </a:r>
-            <a:endParaRPr lang="en-US" sz="1800" dirty="0"/>
+              <a:t>Timing: Homework correction, plan, objectives 8 min | Recall, situation, action 10 min | 5 activities 30 min | Board summary (copying) 30 min | Evaluation, remediation 10 min | Homework, next lesson 5 min | Logbook 7 min</a:t>
+            </a:r>
+            <a:endParaRPr lang="en-US" sz="2000" dirty="0"/>
           </a:p>
           <a:p>
             <a:pPr algn="l" marL="342900" indent="-342900">
@@ -23726,7 +23652,7 @@
               <a:buChar char="•"/>
             </a:pPr>
             <a:r>
-              <a:rPr lang="en-US" sz="1800" dirty="0">
+              <a:rPr lang="en-US" sz="2000" dirty="0">
                 <a:solidFill>
                   <a:srgbClr val="111111"/>
                 </a:solidFill>
@@ -23734,9 +23660,9 @@
                 <a:ea typeface="Calibri" pitchFamily="34" charset="-122"/>
                 <a:cs typeface="Calibri" pitchFamily="34" charset="-120"/>
               </a:rPr>
-              <a:t>Teacher's course notes: Mr KAMDEM E., Geomorphology (LSA), GBHS Garoua, 2026.</a:t>
-            </a:r>
-            <a:endParaRPr lang="en-US" sz="1800" dirty="0"/>
+              <a:t>Without the projector (Activity 1): name crops of the South-West.</a:t>
+            </a:r>
+            <a:endParaRPr lang="en-US" sz="2000" dirty="0"/>
           </a:p>
           <a:p>
             <a:pPr algn="l" marL="342900" indent="-342900">
@@ -23747,7 +23673,7 @@
               <a:buChar char="•"/>
             </a:pPr>
             <a:r>
-              <a:rPr lang="en-US" sz="1800" dirty="0">
+              <a:rPr lang="en-US" sz="2000" dirty="0">
                 <a:solidFill>
                   <a:srgbClr val="111111"/>
                 </a:solidFill>
@@ -23755,9 +23681,9 @@
                 <a:ea typeface="Calibri" pitchFamily="34" charset="-122"/>
                 <a:cs typeface="Calibri" pitchFamily="34" charset="-120"/>
               </a:rPr>
-              <a:t>Photo, Activity 1: “Banana Plantation” by AfricaTravelAssociation, CC BY 2.0, via Flickr (https://www.flickr.com/photos/65134942@N06/8164706151)</a:t>
-            </a:r>
-            <a:endParaRPr lang="en-US" sz="1800" dirty="0"/>
+              <a:t>Without the projector (Activity 2): describe a kettle producing steam.</a:t>
+            </a:r>
+            <a:endParaRPr lang="en-US" sz="2000" dirty="0"/>
           </a:p>
           <a:p>
             <a:pPr algn="l" marL="342900" indent="-342900">
@@ -23768,7 +23694,7 @@
               <a:buChar char="•"/>
             </a:pPr>
             <a:r>
-              <a:rPr lang="en-US" sz="1800" dirty="0">
+              <a:rPr lang="en-US" sz="2000" dirty="0">
                 <a:solidFill>
                   <a:srgbClr val="111111"/>
                 </a:solidFill>
@@ -23776,9 +23702,9 @@
                 <a:ea typeface="Calibri" pitchFamily="34" charset="-122"/>
                 <a:cs typeface="Calibri" pitchFamily="34" charset="-120"/>
               </a:rPr>
-              <a:t>Photo, Activity 2: “Global Geothermal Alliance Stakeholder Meeting and Site Tour, 15-16 Ju” by International Renewable Energy Agency (IRENA), CC BY-NC-SA 2.0, via Flickr (https://www.flickr.com/photos/127932406@N06/18856399410)</a:t>
-            </a:r>
-            <a:endParaRPr lang="en-US" sz="1800" dirty="0"/>
+              <a:t>Without the projector (Activity 3): list volcanic hazards.</a:t>
+            </a:r>
+            <a:endParaRPr lang="en-US" sz="2000" dirty="0"/>
           </a:p>
           <a:p>
             <a:pPr algn="l" marL="342900" indent="-342900">
@@ -23789,7 +23715,7 @@
               <a:buChar char="•"/>
             </a:pPr>
             <a:r>
-              <a:rPr lang="en-US" sz="1800" dirty="0">
+              <a:rPr lang="en-US" sz="2000" dirty="0">
                 <a:solidFill>
                   <a:srgbClr val="111111"/>
                 </a:solidFill>
@@ -23797,9 +23723,9 @@
                 <a:ea typeface="Calibri" pitchFamily="34" charset="-122"/>
                 <a:cs typeface="Calibri" pitchFamily="34" charset="-120"/>
               </a:rPr>
-              <a:t>Photo, Activity 3: “Lava flow over road” by J. N. Stuart, CC BY-NC-ND 2.0, via Flickr (https://www.flickr.com/photos/21786539@N03/3387263273)</a:t>
-            </a:r>
-            <a:endParaRPr lang="en-US" sz="1800" dirty="0"/>
+              <a:t>Without the projector (Activity 4): locate Nyos in the North-West.</a:t>
+            </a:r>
+            <a:endParaRPr lang="en-US" sz="2000" dirty="0"/>
           </a:p>
           <a:p>
             <a:pPr algn="l" marL="342900" indent="-342900">
@@ -23810,7 +23736,7 @@
               <a:buChar char="•"/>
             </a:pPr>
             <a:r>
-              <a:rPr lang="en-US" sz="1800" dirty="0">
+              <a:rPr lang="en-US" sz="2000" dirty="0">
                 <a:solidFill>
                   <a:srgbClr val="111111"/>
                 </a:solidFill>
@@ -23818,30 +23744,9 @@
                 <a:ea typeface="Calibri" pitchFamily="34" charset="-122"/>
                 <a:cs typeface="Calibri" pitchFamily="34" charset="-120"/>
               </a:rPr>
-              <a:t>Photo, Activity 4: “Lake Nyos, Cameroon” by jbdodane, CC BY-NC 2.0, via Flickr (https://www.flickr.com/photos/27998473@N02/11584073056)</a:t>
-            </a:r>
-            <a:endParaRPr lang="en-US" sz="1800" dirty="0"/>
-          </a:p>
-          <a:p>
-            <a:pPr algn="l" marL="342900" indent="-342900">
-              <a:spcAft>
-                <a:spcPts val="800"/>
-              </a:spcAft>
-              <a:buSzPct val="100000"/>
-              <a:buChar char="•"/>
-            </a:pPr>
-            <a:r>
-              <a:rPr lang="en-US" sz="1800" dirty="0">
-                <a:solidFill>
-                  <a:srgbClr val="111111"/>
-                </a:solidFill>
-                <a:latin typeface="Calibri" pitchFamily="34" charset="0"/>
-                <a:ea typeface="Calibri" pitchFamily="34" charset="-122"/>
-                <a:cs typeface="Calibri" pitchFamily="34" charset="-120"/>
-              </a:rPr>
-              <a:t>Photo, Activity 5: “Hawaiian Volcano Observatory, Hawaiʻi Volcanoes National Park, Hawaii” by Ken Lund, CC BY-SA 2.0, via Flickr (https://www.flickr.com/photos/75683070@N00/4528702285)</a:t>
-            </a:r>
-            <a:endParaRPr lang="en-US" sz="1800" dirty="0"/>
+              <a:t>Without the projector (Activity 5): describe an evacuation plan.</a:t>
+            </a:r>
+            <a:endParaRPr lang="en-US" sz="2000" dirty="0"/>
           </a:p>
         </p:txBody>
       </p:sp>
@@ -23974,7 +23879,7 @@
         <p:spPr>
           <a:xfrm>
             <a:off x="0" y="658368"/>
-            <a:ext cx="5120640" cy="5833872"/>
+            <a:ext cx="1463040" cy="5833872"/>
           </a:xfrm>
           <a:prstGeom prst="rect">
             <a:avLst/>
@@ -23989,8 +23894,8 @@
         </p:nvSpPr>
         <p:spPr>
           <a:xfrm>
-            <a:off x="5349240" y="1005840"/>
-            <a:ext cx="6522415" cy="731520"/>
+            <a:off x="1691640" y="1005840"/>
+            <a:ext cx="10180015" cy="731520"/>
           </a:xfrm>
           <a:prstGeom prst="rect">
             <a:avLst/>
@@ -24016,7 +23921,7 @@
                 <a:ea typeface="Times New Roman" pitchFamily="34" charset="-122"/>
                 <a:cs typeface="Times New Roman" pitchFamily="34" charset="-120"/>
               </a:rPr>
-              <a:t>References (continued)</a:t>
+              <a:t>References</a:t>
             </a:r>
             <a:endParaRPr lang="en-US" sz="3600" dirty="0"/>
           </a:p>
@@ -24030,8 +23935,8 @@
         </p:nvSpPr>
         <p:spPr>
           <a:xfrm>
-            <a:off x="5349240" y="1783080"/>
-            <a:ext cx="6522415" cy="4663440"/>
+            <a:off x="1691640" y="1783080"/>
+            <a:ext cx="10180015" cy="4663440"/>
           </a:xfrm>
           <a:prstGeom prst="rect">
             <a:avLst/>
@@ -24059,7 +23964,7 @@
                 <a:ea typeface="Calibri" pitchFamily="34" charset="-122"/>
                 <a:cs typeface="Calibri" pitchFamily="34" charset="-120"/>
               </a:rPr>
-              <a:t>Photo, board summary (Lahars): “Lahar (mudflow) remnants from Mount Ruapehu” by Wade Tregaskis, CC BY-NC 2.0, via Flickr (https://www.flickr.com/photos/7725552@N06/502073245)</a:t>
+              <a:t>Geography Syllabus for Sixth Forms (Lower and Upper Sixth), MINESEC, 2019 — Module 2 (Geomorphology).</a:t>
             </a:r>
             <a:endParaRPr lang="en-US" sz="1800" dirty="0"/>
           </a:p>
@@ -24080,7 +23985,112 @@
                 <a:ea typeface="Calibri" pitchFamily="34" charset="-122"/>
                 <a:cs typeface="Calibri" pitchFamily="34" charset="-120"/>
               </a:rPr>
-              <a:t>Diagrams and animations: drawn for this lesson (Geography Department).</a:t>
+              <a:t>Teacher's course notes: Mr KAMDEM E., Geomorphology (LSA), GBHS Garoua, 2026.</a:t>
+            </a:r>
+            <a:endParaRPr lang="en-US" sz="1800" dirty="0"/>
+          </a:p>
+          <a:p>
+            <a:pPr algn="l" marL="342900" indent="-342900">
+              <a:spcAft>
+                <a:spcPts val="800"/>
+              </a:spcAft>
+              <a:buSzPct val="100000"/>
+              <a:buChar char="•"/>
+            </a:pPr>
+            <a:r>
+              <a:rPr lang="en-US" sz="1800" dirty="0">
+                <a:solidFill>
+                  <a:srgbClr val="111111"/>
+                </a:solidFill>
+                <a:latin typeface="Calibri" pitchFamily="34" charset="0"/>
+                <a:ea typeface="Calibri" pitchFamily="34" charset="-122"/>
+                <a:cs typeface="Calibri" pitchFamily="34" charset="-120"/>
+              </a:rPr>
+              <a:t>Photo, Activity 1: “Banana Plantation” by AfricaTravelAssociation, CC BY 2.0, via Flickr (https://www.flickr.com/photos/65134942@N06/8164706151)</a:t>
+            </a:r>
+            <a:endParaRPr lang="en-US" sz="1800" dirty="0"/>
+          </a:p>
+          <a:p>
+            <a:pPr algn="l" marL="342900" indent="-342900">
+              <a:spcAft>
+                <a:spcPts val="800"/>
+              </a:spcAft>
+              <a:buSzPct val="100000"/>
+              <a:buChar char="•"/>
+            </a:pPr>
+            <a:r>
+              <a:rPr lang="en-US" sz="1800" dirty="0">
+                <a:solidFill>
+                  <a:srgbClr val="111111"/>
+                </a:solidFill>
+                <a:latin typeface="Calibri" pitchFamily="34" charset="0"/>
+                <a:ea typeface="Calibri" pitchFamily="34" charset="-122"/>
+                <a:cs typeface="Calibri" pitchFamily="34" charset="-120"/>
+              </a:rPr>
+              <a:t>Photo, Activity 2: “Global Geothermal Alliance Stakeholder Meeting and Site Tour, 15-16 Ju” by International Renewable Energy Agency (IRENA), CC BY-NC-SA 2.0, via Flickr (https://www.flickr.com/photos/127932406@N06/18856399410)</a:t>
+            </a:r>
+            <a:endParaRPr lang="en-US" sz="1800" dirty="0"/>
+          </a:p>
+          <a:p>
+            <a:pPr algn="l" marL="342900" indent="-342900">
+              <a:spcAft>
+                <a:spcPts val="800"/>
+              </a:spcAft>
+              <a:buSzPct val="100000"/>
+              <a:buChar char="•"/>
+            </a:pPr>
+            <a:r>
+              <a:rPr lang="en-US" sz="1800" dirty="0">
+                <a:solidFill>
+                  <a:srgbClr val="111111"/>
+                </a:solidFill>
+                <a:latin typeface="Calibri" pitchFamily="34" charset="0"/>
+                <a:ea typeface="Calibri" pitchFamily="34" charset="-122"/>
+                <a:cs typeface="Calibri" pitchFamily="34" charset="-120"/>
+              </a:rPr>
+              <a:t>Photo, Activity 3: “Lava flow over road” by J. N. Stuart, CC BY-NC-ND 2.0, via Flickr (https://www.flickr.com/photos/21786539@N03/3387263273)</a:t>
+            </a:r>
+            <a:endParaRPr lang="en-US" sz="1800" dirty="0"/>
+          </a:p>
+          <a:p>
+            <a:pPr algn="l" marL="342900" indent="-342900">
+              <a:spcAft>
+                <a:spcPts val="800"/>
+              </a:spcAft>
+              <a:buSzPct val="100000"/>
+              <a:buChar char="•"/>
+            </a:pPr>
+            <a:r>
+              <a:rPr lang="en-US" sz="1800" dirty="0">
+                <a:solidFill>
+                  <a:srgbClr val="111111"/>
+                </a:solidFill>
+                <a:latin typeface="Calibri" pitchFamily="34" charset="0"/>
+                <a:ea typeface="Calibri" pitchFamily="34" charset="-122"/>
+                <a:cs typeface="Calibri" pitchFamily="34" charset="-120"/>
+              </a:rPr>
+              <a:t>Photo, Activity 4: “Lake Nyos, Cameroon” by jbdodane, CC BY-NC 2.0, via Flickr (https://www.flickr.com/photos/27998473@N02/11584073056)</a:t>
+            </a:r>
+            <a:endParaRPr lang="en-US" sz="1800" dirty="0"/>
+          </a:p>
+          <a:p>
+            <a:pPr algn="l" marL="342900" indent="-342900">
+              <a:spcAft>
+                <a:spcPts val="800"/>
+              </a:spcAft>
+              <a:buSzPct val="100000"/>
+              <a:buChar char="•"/>
+            </a:pPr>
+            <a:r>
+              <a:rPr lang="en-US" sz="1800" dirty="0">
+                <a:solidFill>
+                  <a:srgbClr val="111111"/>
+                </a:solidFill>
+                <a:latin typeface="Calibri" pitchFamily="34" charset="0"/>
+                <a:ea typeface="Calibri" pitchFamily="34" charset="-122"/>
+                <a:cs typeface="Calibri" pitchFamily="34" charset="-120"/>
+              </a:rPr>
+              <a:t>Photo, Activity 5: “Hawaiian Volcano Observatory, Hawaiʻi Volcanoes National Park, Hawaii” by Ken Lund, CC BY-SA 2.0, via Flickr (https://www.flickr.com/photos/75683070@N00/4528702285)</a:t>
             </a:r>
             <a:endParaRPr lang="en-US" sz="1800" dirty="0"/>
           </a:p>
@@ -24129,6 +24139,247 @@
             <a:fld id="{F7021451-1387-4CA6-816F-3879F97B5CBC}" type="slidenum">
               <a:rPr b="1" lang="en-US"/>
               <a:t>61</a:t>
+            </a:fld>
+            <a:endParaRPr lang="en-US"/>
+          </a:p>
+        </p:txBody>
+      </p:sp>
+    </p:spTree>
+  </p:cSld>
+  <p:clrMapOvr>
+    <a:masterClrMapping/>
+  </p:clrMapOvr>
+</p:sld>
+</file>
+
+<file path=ppt/slides/slide62.xml><?xml version="1.0" encoding="utf-8"?>
+<p:sld xmlns:a="http://schemas.openxmlformats.org/drawingml/2006/main" xmlns:r="http://schemas.openxmlformats.org/officeDocument/2006/relationships" xmlns:p="http://schemas.openxmlformats.org/presentationml/2006/main">
+  <p:cSld name="Slide 62">
+    <p:spTree>
+      <p:nvGrpSpPr>
+        <p:cNvPr id="1" name=""/>
+        <p:cNvGrpSpPr/>
+        <p:nvPr/>
+      </p:nvGrpSpPr>
+      <p:grpSpPr>
+        <a:xfrm>
+          <a:off x="0" y="0"/>
+          <a:ext cx="0" cy="0"/>
+          <a:chOff x="0" y="0"/>
+          <a:chExt cx="0" cy="0"/>
+        </a:xfrm>
+      </p:grpSpPr>
+      <p:sp>
+        <p:nvSpPr>
+          <p:cNvPr id="2" name="Text 0"/>
+          <p:cNvSpPr/>
+          <p:nvPr/>
+        </p:nvSpPr>
+        <p:spPr>
+          <a:xfrm>
+            <a:off x="457200" y="713232"/>
+            <a:ext cx="11368735" cy="274320"/>
+          </a:xfrm>
+          <a:prstGeom prst="rect">
+            <a:avLst/>
+          </a:prstGeom>
+          <a:noFill/>
+          <a:ln/>
+        </p:spPr>
+        <p:txBody>
+          <a:bodyPr wrap="square" lIns="0" tIns="0" rIns="0" bIns="0" rtlCol="0" anchor="ctr"/>
+          <a:lstStyle/>
+          <a:p>
+            <a:pPr algn="r" indent="0" marL="0">
+              <a:buNone/>
+            </a:pPr>
+            <a:r>
+              <a:rPr lang="en-US" sz="1400" b="1" dirty="0">
+                <a:solidFill>
+                  <a:srgbClr val="1C3F6E"/>
+                </a:solidFill>
+                <a:latin typeface="Calibri" pitchFamily="34" charset="0"/>
+                <a:ea typeface="Calibri" pitchFamily="34" charset="-122"/>
+                <a:cs typeface="Calibri" pitchFamily="34" charset="-120"/>
+              </a:rPr>
+              <a:t>REFERENCES</a:t>
+            </a:r>
+            <a:endParaRPr lang="en-US" sz="1400" dirty="0"/>
+          </a:p>
+        </p:txBody>
+      </p:sp>
+      <p:pic>
+        <p:nvPicPr>
+          <p:cNvPr id="3" name="Image 0" descr="/home/claude/f4/img/minesec_sheet.png">    </p:cNvPr>
+          <p:cNvPicPr>
+            <a:picLocks noChangeAspect="1"/>
+          </p:cNvPicPr>
+          <p:nvPr/>
+        </p:nvPicPr>
+        <p:blipFill>
+          <a:blip r:embed="rId1"/>
+          <a:stretch>
+            <a:fillRect/>
+          </a:stretch>
+        </p:blipFill>
+        <p:spPr>
+          <a:xfrm>
+            <a:off x="0" y="658368"/>
+            <a:ext cx="5120640" cy="5833872"/>
+          </a:xfrm>
+          <a:prstGeom prst="rect">
+            <a:avLst/>
+          </a:prstGeom>
+        </p:spPr>
+      </p:pic>
+      <p:sp>
+        <p:nvSpPr>
+          <p:cNvPr id="4" name="Text 1"/>
+          <p:cNvSpPr/>
+          <p:nvPr/>
+        </p:nvSpPr>
+        <p:spPr>
+          <a:xfrm>
+            <a:off x="5349240" y="1005840"/>
+            <a:ext cx="6522415" cy="731520"/>
+          </a:xfrm>
+          <a:prstGeom prst="rect">
+            <a:avLst/>
+          </a:prstGeom>
+          <a:noFill/>
+          <a:ln/>
+        </p:spPr>
+        <p:txBody>
+          <a:bodyPr wrap="square" lIns="0" tIns="0" rIns="0" bIns="0" rtlCol="0" anchor="ctr">
+            <a:normAutofit/>
+          </a:bodyPr>
+          <a:lstStyle/>
+          <a:p>
+            <a:pPr algn="ctr" indent="0" marL="0">
+              <a:buNone/>
+            </a:pPr>
+            <a:r>
+              <a:rPr lang="en-US" sz="3600" b="1" dirty="0">
+                <a:solidFill>
+                  <a:srgbClr val="990011"/>
+                </a:solidFill>
+                <a:latin typeface="Times New Roman" pitchFamily="34" charset="0"/>
+                <a:ea typeface="Times New Roman" pitchFamily="34" charset="-122"/>
+                <a:cs typeface="Times New Roman" pitchFamily="34" charset="-120"/>
+              </a:rPr>
+              <a:t>References (continued)</a:t>
+            </a:r>
+            <a:endParaRPr lang="en-US" sz="3600" dirty="0"/>
+          </a:p>
+        </p:txBody>
+      </p:sp>
+      <p:sp>
+        <p:nvSpPr>
+          <p:cNvPr id="5" name="Text 2"/>
+          <p:cNvSpPr/>
+          <p:nvPr/>
+        </p:nvSpPr>
+        <p:spPr>
+          <a:xfrm>
+            <a:off x="5349240" y="1783080"/>
+            <a:ext cx="6522415" cy="4663440"/>
+          </a:xfrm>
+          <a:prstGeom prst="rect">
+            <a:avLst/>
+          </a:prstGeom>
+          <a:noFill/>
+          <a:ln/>
+        </p:spPr>
+        <p:txBody>
+          <a:bodyPr wrap="square" lIns="0" tIns="0" rIns="0" bIns="0" rtlCol="0" anchor="t"/>
+          <a:lstStyle/>
+          <a:p>
+            <a:pPr algn="l" marL="342900" indent="-342900">
+              <a:spcAft>
+                <a:spcPts val="800"/>
+              </a:spcAft>
+              <a:buSzPct val="100000"/>
+              <a:buChar char="•"/>
+            </a:pPr>
+            <a:r>
+              <a:rPr lang="en-US" sz="1800" dirty="0">
+                <a:solidFill>
+                  <a:srgbClr val="111111"/>
+                </a:solidFill>
+                <a:latin typeface="Calibri" pitchFamily="34" charset="0"/>
+                <a:ea typeface="Calibri" pitchFamily="34" charset="-122"/>
+                <a:cs typeface="Calibri" pitchFamily="34" charset="-120"/>
+              </a:rPr>
+              <a:t>Photo, board summary (Lahars): “Lahar (mudflow) remnants from Mount Ruapehu” by Wade Tregaskis, CC BY-NC 2.0, via Flickr (https://www.flickr.com/photos/7725552@N06/502073245)</a:t>
+            </a:r>
+            <a:endParaRPr lang="en-US" sz="1800" dirty="0"/>
+          </a:p>
+          <a:p>
+            <a:pPr algn="l" marL="342900" indent="-342900">
+              <a:spcAft>
+                <a:spcPts val="800"/>
+              </a:spcAft>
+              <a:buSzPct val="100000"/>
+              <a:buChar char="•"/>
+            </a:pPr>
+            <a:r>
+              <a:rPr lang="en-US" sz="1800" dirty="0">
+                <a:solidFill>
+                  <a:srgbClr val="111111"/>
+                </a:solidFill>
+                <a:latin typeface="Calibri" pitchFamily="34" charset="0"/>
+                <a:ea typeface="Calibri" pitchFamily="34" charset="-122"/>
+                <a:cs typeface="Calibri" pitchFamily="34" charset="-120"/>
+              </a:rPr>
+              <a:t>Diagrams and animations: drawn for this lesson (Geography Department).</a:t>
+            </a:r>
+            <a:endParaRPr lang="en-US" sz="1800" dirty="0"/>
+          </a:p>
+        </p:txBody>
+      </p:sp>
+      <p:sp>
+        <p:nvSpPr>
+          <p:cNvPr id="25" name="Slide Number Placeholder 0"/>
+          <p:cNvSpPr>
+            <a:spLocks noGrp="1"/>
+          </p:cNvSpPr>
+          <p:nvPr>
+            <p:ph type="sldNum" sz="quarter" idx="4294967295"/>
+          </p:nvPr>
+        </p:nvSpPr>
+        <p:spPr>
+          <a:xfrm>
+            <a:off x="27432" y="91440"/>
+            <a:ext cx="585216" cy="475488"/>
+          </a:xfrm>
+          <a:prstGeom prst="rect">
+            <a:avLst/>
+          </a:prstGeom>
+          <a:extLst>
+            <a:ext uri="{C572A759-6A51-4108-AA02-DFA0A04FC94B}">
+              <ma14:wrappingTextBoxFlag xmlns:ma14="http://schemas.microsoft.com/office/mac/drawingml/2011/main" val="0"/>
+            </a:ext>
+          </a:extLst>
+        </p:spPr>
+        <p:txBody>
+          <a:bodyPr/>
+          <a:lstStyle>
+            <a:lvl1pPr>
+              <a:defRPr sz="2000">
+                <a:solidFill>
+                  <a:srgbClr val="FFFFFF"/>
+                </a:solidFill>
+                <a:latin typeface="Calibri"/>
+                <a:ea typeface="Calibri"/>
+                <a:cs typeface="Calibri"/>
+              </a:defRPr>
+            </a:lvl1pPr>
+          </a:lstStyle>
+          <a:p>
+            <a:pPr algn="ctr"/>
+            <a:fld id="{F7021451-1387-4CA6-816F-3879F97B5CBC}" type="slidenum">
+              <a:rPr b="1" lang="en-US"/>
+              <a:t>62</a:t>
             </a:fld>
             <a:endParaRPr lang="en-US"/>
           </a:p>
